--- a/slides/PowerFX embedding session.pptx
+++ b/slides/PowerFX embedding session.pptx
@@ -5,30 +5,31 @@
     <p:sldMasterId id="2147483648" r:id="rId1"/>
   </p:sldMasterIdLst>
   <p:notesMasterIdLst>
-    <p:notesMasterId r:id="rId23"/>
+    <p:notesMasterId r:id="rId24"/>
   </p:notesMasterIdLst>
   <p:sldIdLst>
-    <p:sldId id="256" r:id="rId2"/>
+    <p:sldId id="278" r:id="rId2"/>
     <p:sldId id="272" r:id="rId3"/>
-    <p:sldId id="257" r:id="rId4"/>
-    <p:sldId id="271" r:id="rId5"/>
-    <p:sldId id="258" r:id="rId6"/>
-    <p:sldId id="273" r:id="rId7"/>
-    <p:sldId id="267" r:id="rId8"/>
-    <p:sldId id="268" r:id="rId9"/>
-    <p:sldId id="265" r:id="rId10"/>
-    <p:sldId id="274" r:id="rId11"/>
-    <p:sldId id="260" r:id="rId12"/>
-    <p:sldId id="259" r:id="rId13"/>
-    <p:sldId id="261" r:id="rId14"/>
-    <p:sldId id="262" r:id="rId15"/>
-    <p:sldId id="269" r:id="rId16"/>
-    <p:sldId id="263" r:id="rId17"/>
-    <p:sldId id="270" r:id="rId18"/>
-    <p:sldId id="276" r:id="rId19"/>
-    <p:sldId id="264" r:id="rId20"/>
-    <p:sldId id="266" r:id="rId21"/>
-    <p:sldId id="277" r:id="rId22"/>
+    <p:sldId id="256" r:id="rId4"/>
+    <p:sldId id="257" r:id="rId5"/>
+    <p:sldId id="271" r:id="rId6"/>
+    <p:sldId id="258" r:id="rId7"/>
+    <p:sldId id="273" r:id="rId8"/>
+    <p:sldId id="267" r:id="rId9"/>
+    <p:sldId id="268" r:id="rId10"/>
+    <p:sldId id="265" r:id="rId11"/>
+    <p:sldId id="274" r:id="rId12"/>
+    <p:sldId id="260" r:id="rId13"/>
+    <p:sldId id="259" r:id="rId14"/>
+    <p:sldId id="261" r:id="rId15"/>
+    <p:sldId id="262" r:id="rId16"/>
+    <p:sldId id="269" r:id="rId17"/>
+    <p:sldId id="263" r:id="rId18"/>
+    <p:sldId id="270" r:id="rId19"/>
+    <p:sldId id="276" r:id="rId20"/>
+    <p:sldId id="264" r:id="rId21"/>
+    <p:sldId id="266" r:id="rId22"/>
+    <p:sldId id="277" r:id="rId23"/>
   </p:sldIdLst>
   <p:sldSz cx="12192000" cy="6858000"/>
   <p:notesSz cx="6858000" cy="9144000"/>
@@ -141,7 +142,7 @@
 <file path=ppt/revisionInfo.xml><?xml version="1.0" encoding="utf-8"?>
 <p1510:revInfo xmlns:a="http://schemas.openxmlformats.org/drawingml/2006/main" xmlns:r="http://schemas.openxmlformats.org/officeDocument/2006/relationships" xmlns:p1510="http://schemas.microsoft.com/office/powerpoint/2015/10/main">
   <p1510:revLst>
-    <p1510:client id="{39122C61-325C-4458-AFCB-0CB4C4D07DCE}" v="7" dt="2026-04-07T15:48:18.377"/>
+    <p1510:client id="{39122C61-325C-4458-AFCB-0CB4C4D07DCE}" v="8" dt="2026-04-10T21:03:22.737"/>
   </p1510:revLst>
 </p1510:revInfo>
 </file>
@@ -250,11 +251,26 @@
   </pc:docChgLst>
   <pc:docChgLst>
     <pc:chgData name="Juan Pablo Tarquino" userId="619fa53a89ad4d51" providerId="LiveId" clId="{7EB37E31-EF5E-4BCC-BF63-A19A62539991}"/>
-    <pc:docChg chg="undo custSel addSld delSld modSld">
-      <pc:chgData name="Juan Pablo Tarquino" userId="619fa53a89ad4d51" providerId="LiveId" clId="{7EB37E31-EF5E-4BCC-BF63-A19A62539991}" dt="2026-04-07T19:44:00.173" v="479" actId="403"/>
+    <pc:docChg chg="undo custSel addSld delSld modSld sldOrd">
+      <pc:chgData name="Juan Pablo Tarquino" userId="619fa53a89ad4d51" providerId="LiveId" clId="{7EB37E31-EF5E-4BCC-BF63-A19A62539991}" dt="2026-04-10T21:04:34.423" v="506" actId="1076"/>
       <pc:docMkLst>
         <pc:docMk/>
       </pc:docMkLst>
+      <pc:sldChg chg="addSp modSp mod ord">
+        <pc:chgData name="Juan Pablo Tarquino" userId="619fa53a89ad4d51" providerId="LiveId" clId="{7EB37E31-EF5E-4BCC-BF63-A19A62539991}" dt="2026-04-10T21:03:13.670" v="485"/>
+        <pc:sldMkLst>
+          <pc:docMk/>
+          <pc:sldMk cId="3411481011" sldId="256"/>
+        </pc:sldMkLst>
+        <pc:picChg chg="add mod">
+          <ac:chgData name="Juan Pablo Tarquino" userId="619fa53a89ad4d51" providerId="LiveId" clId="{7EB37E31-EF5E-4BCC-BF63-A19A62539991}" dt="2026-04-10T21:02:40.874" v="481"/>
+          <ac:picMkLst>
+            <pc:docMk/>
+            <pc:sldMk cId="3411481011" sldId="256"/>
+            <ac:picMk id="5" creationId="{D18BEF6B-12D5-86DC-65B0-0992A8BB507F}"/>
+          </ac:picMkLst>
+        </pc:picChg>
+      </pc:sldChg>
       <pc:sldChg chg="modSp mod">
         <pc:chgData name="Juan Pablo Tarquino" userId="619fa53a89ad4d51" providerId="LiveId" clId="{7EB37E31-EF5E-4BCC-BF63-A19A62539991}" dt="2026-04-07T15:43:31.049" v="319" actId="20577"/>
         <pc:sldMkLst>
@@ -292,34 +308,26 @@
           </ac:spMkLst>
         </pc:spChg>
       </pc:sldChg>
-      <pc:sldChg chg="addSp delSp add mod setBg delDesignElem">
-        <pc:chgData name="Juan Pablo Tarquino" userId="619fa53a89ad4d51" providerId="LiveId" clId="{7EB37E31-EF5E-4BCC-BF63-A19A62539991}" dt="2026-04-07T15:48:12.824" v="342" actId="22"/>
+      <pc:sldChg chg="addSp delSp modSp add mod setBg delDesignElem">
+        <pc:chgData name="Juan Pablo Tarquino" userId="619fa53a89ad4d51" providerId="LiveId" clId="{7EB37E31-EF5E-4BCC-BF63-A19A62539991}" dt="2026-04-10T21:04:34.423" v="506" actId="1076"/>
         <pc:sldMkLst>
           <pc:docMk/>
           <pc:sldMk cId="462932405" sldId="266"/>
         </pc:sldMkLst>
-        <pc:spChg chg="del">
-          <ac:chgData name="Juan Pablo Tarquino" userId="619fa53a89ad4d51" providerId="LiveId" clId="{7EB37E31-EF5E-4BCC-BF63-A19A62539991}" dt="2026-04-07T15:47:50.841" v="339"/>
+        <pc:spChg chg="mod">
+          <ac:chgData name="Juan Pablo Tarquino" userId="619fa53a89ad4d51" providerId="LiveId" clId="{7EB37E31-EF5E-4BCC-BF63-A19A62539991}" dt="2026-04-10T21:04:01.228" v="501" actId="5793"/>
           <ac:spMkLst>
             <pc:docMk/>
             <pc:sldMk cId="462932405" sldId="266"/>
-            <ac:spMk id="8" creationId="{100EDD19-6802-4EC3-95CE-CFFAB042CFD6}"/>
+            <ac:spMk id="3" creationId="{33A1B896-9F0D-736F-E7D8-94F4BE6C1423}"/>
           </ac:spMkLst>
         </pc:spChg>
-        <pc:spChg chg="del">
-          <ac:chgData name="Juan Pablo Tarquino" userId="619fa53a89ad4d51" providerId="LiveId" clId="{7EB37E31-EF5E-4BCC-BF63-A19A62539991}" dt="2026-04-07T15:47:50.841" v="339"/>
-          <ac:spMkLst>
-            <pc:docMk/>
-            <pc:sldMk cId="462932405" sldId="266"/>
-            <ac:spMk id="10" creationId="{DB17E863-922E-4C26-BD64-E8FD41D28661}"/>
-          </ac:spMkLst>
-        </pc:spChg>
-        <pc:picChg chg="add del">
-          <ac:chgData name="Juan Pablo Tarquino" userId="619fa53a89ad4d51" providerId="LiveId" clId="{7EB37E31-EF5E-4BCC-BF63-A19A62539991}" dt="2026-04-07T15:48:12.824" v="342" actId="22"/>
+        <pc:picChg chg="add mod">
+          <ac:chgData name="Juan Pablo Tarquino" userId="619fa53a89ad4d51" providerId="LiveId" clId="{7EB37E31-EF5E-4BCC-BF63-A19A62539991}" dt="2026-04-10T21:04:34.423" v="506" actId="1076"/>
           <ac:picMkLst>
             <pc:docMk/>
             <pc:sldMk cId="462932405" sldId="266"/>
-            <ac:picMk id="5" creationId="{DFC29EDF-65E3-180D-E909-159469441DE9}"/>
+            <ac:picMk id="5" creationId="{D2ADC734-DAC4-1697-38F8-97E3F531D423}"/>
           </ac:picMkLst>
         </pc:picChg>
       </pc:sldChg>
@@ -381,36 +389,35 @@
           <pc:docMk/>
           <pc:sldMk cId="3052380813" sldId="277"/>
         </pc:sldMkLst>
-        <pc:spChg chg="del">
-          <ac:chgData name="Juan Pablo Tarquino" userId="619fa53a89ad4d51" providerId="LiveId" clId="{7EB37E31-EF5E-4BCC-BF63-A19A62539991}" dt="2026-04-07T15:48:18.377" v="344"/>
-          <ac:spMkLst>
-            <pc:docMk/>
-            <pc:sldMk cId="3052380813" sldId="277"/>
-            <ac:spMk id="7" creationId="{32D45EE4-C4F0-4F72-B1C6-39F596D138A9}"/>
-          </ac:spMkLst>
-        </pc:spChg>
-        <pc:spChg chg="del">
-          <ac:chgData name="Juan Pablo Tarquino" userId="619fa53a89ad4d51" providerId="LiveId" clId="{7EB37E31-EF5E-4BCC-BF63-A19A62539991}" dt="2026-04-07T15:48:18.377" v="344"/>
-          <ac:spMkLst>
-            <pc:docMk/>
-            <pc:sldMk cId="3052380813" sldId="277"/>
-            <ac:spMk id="9" creationId="{8C459BAD-4279-4A9D-B0C5-662C5F5ED21F}"/>
-          </ac:spMkLst>
-        </pc:spChg>
-        <pc:spChg chg="del">
-          <ac:chgData name="Juan Pablo Tarquino" userId="619fa53a89ad4d51" providerId="LiveId" clId="{7EB37E31-EF5E-4BCC-BF63-A19A62539991}" dt="2026-04-07T15:48:18.377" v="344"/>
-          <ac:spMkLst>
-            <pc:docMk/>
-            <pc:sldMk cId="3052380813" sldId="277"/>
-            <ac:spMk id="11" creationId="{0953BC39-9D68-40BE-BF3C-5C4EB782AF94}"/>
-          </ac:spMkLst>
-        </pc:spChg>
         <pc:picChg chg="add mod">
           <ac:chgData name="Juan Pablo Tarquino" userId="619fa53a89ad4d51" providerId="LiveId" clId="{7EB37E31-EF5E-4BCC-BF63-A19A62539991}" dt="2026-04-07T15:48:27.158" v="347" actId="14100"/>
           <ac:picMkLst>
             <pc:docMk/>
             <pc:sldMk cId="3052380813" sldId="277"/>
             <ac:picMk id="4" creationId="{EDF94011-DA43-88DA-9A42-4EF12162BD6D}"/>
+          </ac:picMkLst>
+        </pc:picChg>
+      </pc:sldChg>
+      <pc:sldChg chg="addSp delSp modSp add mod">
+        <pc:chgData name="Juan Pablo Tarquino" userId="619fa53a89ad4d51" providerId="LiveId" clId="{7EB37E31-EF5E-4BCC-BF63-A19A62539991}" dt="2026-04-10T21:03:36.846" v="489" actId="14100"/>
+        <pc:sldMkLst>
+          <pc:docMk/>
+          <pc:sldMk cId="2558385719" sldId="278"/>
+        </pc:sldMkLst>
+        <pc:picChg chg="add mod">
+          <ac:chgData name="Juan Pablo Tarquino" userId="619fa53a89ad4d51" providerId="LiveId" clId="{7EB37E31-EF5E-4BCC-BF63-A19A62539991}" dt="2026-04-10T21:03:36.846" v="489" actId="14100"/>
+          <ac:picMkLst>
+            <pc:docMk/>
+            <pc:sldMk cId="2558385719" sldId="278"/>
+            <ac:picMk id="4" creationId="{B229868C-0DCF-F23B-B5B6-F16402163C62}"/>
+          </ac:picMkLst>
+        </pc:picChg>
+        <pc:picChg chg="del">
+          <ac:chgData name="Juan Pablo Tarquino" userId="619fa53a89ad4d51" providerId="LiveId" clId="{7EB37E31-EF5E-4BCC-BF63-A19A62539991}" dt="2026-04-10T21:02:50.938" v="483" actId="478"/>
+          <ac:picMkLst>
+            <pc:docMk/>
+            <pc:sldMk cId="2558385719" sldId="278"/>
+            <ac:picMk id="5" creationId="{D35BD234-D6E7-4703-3DB1-F604681E72EB}"/>
           </ac:picMkLst>
         </pc:picChg>
       </pc:sldChg>
@@ -3368,7 +3375,7 @@
           <a:p>
             <a:fld id="{23F0FD94-F7CE-4D08-B49E-5E530976B685}" type="datetimeFigureOut">
               <a:rPr lang="en-US" smtClean="0"/>
-              <a:t>4/7/2026</a:t>
+              <a:t>4/10/2026</a:t>
             </a:fld>
             <a:endParaRPr lang="en-US"/>
           </a:p>
@@ -3640,6 +3647,114 @@
   <p:cSld>
     <p:spTree>
       <p:nvGrpSpPr>
+        <p:cNvPr id="1" name="">
+          <a:extLst>
+            <a:ext uri="{FF2B5EF4-FFF2-40B4-BE49-F238E27FC236}">
+              <a16:creationId xmlns:a16="http://schemas.microsoft.com/office/drawing/2014/main" id="{BF85A21C-48BE-647A-6724-CF19E55D9E1F}"/>
+            </a:ext>
+          </a:extLst>
+        </p:cNvPr>
+        <p:cNvGrpSpPr/>
+        <p:nvPr/>
+      </p:nvGrpSpPr>
+      <p:grpSpPr>
+        <a:xfrm>
+          <a:off x="0" y="0"/>
+          <a:ext cx="0" cy="0"/>
+          <a:chOff x="0" y="0"/>
+          <a:chExt cx="0" cy="0"/>
+        </a:xfrm>
+      </p:grpSpPr>
+      <p:sp>
+        <p:nvSpPr>
+          <p:cNvPr id="2" name="Slide Image Placeholder 1">
+            <a:extLst>
+              <a:ext uri="{FF2B5EF4-FFF2-40B4-BE49-F238E27FC236}">
+                <a16:creationId xmlns:a16="http://schemas.microsoft.com/office/drawing/2014/main" id="{3E689F19-C34D-5B34-45EA-69AB84F24E5E}"/>
+              </a:ext>
+            </a:extLst>
+          </p:cNvPr>
+          <p:cNvSpPr>
+            <a:spLocks noGrp="1" noRot="1" noChangeAspect="1"/>
+          </p:cNvSpPr>
+          <p:nvPr>
+            <p:ph type="sldImg"/>
+          </p:nvPr>
+        </p:nvSpPr>
+        <p:spPr/>
+      </p:sp>
+      <p:sp>
+        <p:nvSpPr>
+          <p:cNvPr id="3" name="Notes Placeholder 2">
+            <a:extLst>
+              <a:ext uri="{FF2B5EF4-FFF2-40B4-BE49-F238E27FC236}">
+                <a16:creationId xmlns:a16="http://schemas.microsoft.com/office/drawing/2014/main" id="{AC937B05-16DF-8DF9-651F-C57639F505D4}"/>
+              </a:ext>
+            </a:extLst>
+          </p:cNvPr>
+          <p:cNvSpPr>
+            <a:spLocks noGrp="1"/>
+          </p:cNvSpPr>
+          <p:nvPr>
+            <p:ph type="body" idx="1"/>
+          </p:nvPr>
+        </p:nvSpPr>
+        <p:spPr/>
+        <p:txBody>
+          <a:bodyPr/>
+          <a:lstStyle/>
+          <a:p>
+            <a:endParaRPr lang="en-US"/>
+          </a:p>
+        </p:txBody>
+      </p:sp>
+      <p:sp>
+        <p:nvSpPr>
+          <p:cNvPr id="4" name="Slide Number Placeholder 3">
+            <a:extLst>
+              <a:ext uri="{FF2B5EF4-FFF2-40B4-BE49-F238E27FC236}">
+                <a16:creationId xmlns:a16="http://schemas.microsoft.com/office/drawing/2014/main" id="{E9F185AD-6AF8-016A-0B66-CA3E3BFF51C0}"/>
+              </a:ext>
+            </a:extLst>
+          </p:cNvPr>
+          <p:cNvSpPr>
+            <a:spLocks noGrp="1"/>
+          </p:cNvSpPr>
+          <p:nvPr>
+            <p:ph type="sldNum" sz="quarter" idx="5"/>
+          </p:nvPr>
+        </p:nvSpPr>
+        <p:spPr/>
+        <p:txBody>
+          <a:bodyPr/>
+          <a:lstStyle/>
+          <a:p>
+            <a:fld id="{A3FADD39-AB8A-4278-99D9-40CD8D745BA1}" type="slidenum">
+              <a:rPr lang="en-US" smtClean="0"/>
+              <a:t>1</a:t>
+            </a:fld>
+            <a:endParaRPr lang="en-US"/>
+          </a:p>
+        </p:txBody>
+      </p:sp>
+    </p:spTree>
+    <p:extLst>
+      <p:ext uri="{BB962C8B-B14F-4D97-AF65-F5344CB8AC3E}">
+        <p14:creationId xmlns:p14="http://schemas.microsoft.com/office/powerpoint/2010/main" val="2875057464"/>
+      </p:ext>
+    </p:extLst>
+  </p:cSld>
+  <p:clrMapOvr>
+    <a:masterClrMapping/>
+  </p:clrMapOvr>
+</p:notes>
+</file>
+
+<file path=ppt/notesSlides/notesSlide10.xml><?xml version="1.0" encoding="utf-8"?>
+<p:notes xmlns:a="http://schemas.openxmlformats.org/drawingml/2006/main" xmlns:r="http://schemas.openxmlformats.org/officeDocument/2006/relationships" xmlns:p="http://schemas.openxmlformats.org/presentationml/2006/main">
+  <p:cSld>
+    <p:spTree>
+      <p:nvGrpSpPr>
         <p:cNvPr id="1" name=""/>
         <p:cNvGrpSpPr/>
         <p:nvPr/>
@@ -3679,7 +3794,58 @@
           <a:bodyPr/>
           <a:lstStyle/>
           <a:p>
-            <a:endParaRPr lang="en-US"/>
+            <a:r>
+              <a:rPr lang="en-US" dirty="0"/>
+              <a:t>According to Microsoft “</a:t>
+            </a:r>
+            <a:r>
+              <a:rPr lang="en-US" sz="1200" b="0" i="0" kern="1200" dirty="0">
+                <a:solidFill>
+                  <a:schemeClr val="tx1"/>
+                </a:solidFill>
+                <a:effectLst/>
+                <a:latin typeface="+mn-lt"/>
+                <a:ea typeface="+mn-ea"/>
+                <a:cs typeface="+mn-cs"/>
+              </a:rPr>
+              <a:t>It's a general-purpose, strong-typed, declarative, and functional programming language.” (</a:t>
+            </a:r>
+            <a:r>
+              <a:rPr lang="en-US" dirty="0">
+                <a:hlinkClick r:id="rId3"/>
+              </a:rPr>
+              <a:t>Microsoft Power </a:t>
+            </a:r>
+            <a:r>
+              <a:rPr lang="en-US" dirty="0" err="1">
+                <a:hlinkClick r:id="rId3"/>
+              </a:rPr>
+              <a:t>Fx</a:t>
+            </a:r>
+            <a:r>
+              <a:rPr lang="en-US" dirty="0">
+                <a:hlinkClick r:id="rId3"/>
+              </a:rPr>
+              <a:t> overview - Power Platform | Microsoft Learn</a:t>
+            </a:r>
+            <a:r>
+              <a:rPr lang="en-US" dirty="0"/>
+              <a:t>)</a:t>
+            </a:r>
+          </a:p>
+          <a:p>
+            <a:r>
+              <a:rPr lang="en-US" dirty="0"/>
+              <a:t>One of the design goals is to have people think of </a:t>
+            </a:r>
+            <a:r>
+              <a:rPr lang="en-US" dirty="0" err="1"/>
+              <a:t>PowerFX</a:t>
+            </a:r>
+            <a:r>
+              <a:rPr lang="en-US" dirty="0"/>
+              <a:t> as spreadsheets (https://learn.microsoft.com/en-us/power-platform/power-fx/overview#think-spreadsheet )</a:t>
+            </a:r>
           </a:p>
         </p:txBody>
       </p:sp>
@@ -3700,7 +3866,7 @@
           <a:p>
             <a:fld id="{A3FADD39-AB8A-4278-99D9-40CD8D745BA1}" type="slidenum">
               <a:rPr lang="en-US" smtClean="0"/>
-              <a:t>1</a:t>
+              <a:t>10</a:t>
             </a:fld>
             <a:endParaRPr lang="en-US"/>
           </a:p>
@@ -3709,7 +3875,7 @@
     </p:spTree>
     <p:extLst>
       <p:ext uri="{BB962C8B-B14F-4D97-AF65-F5344CB8AC3E}">
-        <p14:creationId xmlns:p14="http://schemas.microsoft.com/office/powerpoint/2010/main" val="2919710667"/>
+        <p14:creationId xmlns:p14="http://schemas.microsoft.com/office/powerpoint/2010/main" val="3461771002"/>
       </p:ext>
     </p:extLst>
   </p:cSld>
@@ -3719,7 +3885,7 @@
 </p:notes>
 </file>
 
-<file path=ppt/notesSlides/notesSlide10.xml><?xml version="1.0" encoding="utf-8"?>
+<file path=ppt/notesSlides/notesSlide11.xml><?xml version="1.0" encoding="utf-8"?>
 <p:notes xmlns:a="http://schemas.openxmlformats.org/drawingml/2006/main" xmlns:r="http://schemas.openxmlformats.org/officeDocument/2006/relationships" xmlns:p="http://schemas.openxmlformats.org/presentationml/2006/main">
   <p:cSld>
     <p:spTree>
@@ -3861,7 +4027,7 @@
           <a:p>
             <a:fld id="{A3FADD39-AB8A-4278-99D9-40CD8D745BA1}" type="slidenum">
               <a:rPr lang="en-US" smtClean="0"/>
-              <a:t>10</a:t>
+              <a:t>11</a:t>
             </a:fld>
             <a:endParaRPr lang="en-US"/>
           </a:p>
@@ -3871,180 +4037,6 @@
     <p:extLst>
       <p:ext uri="{BB962C8B-B14F-4D97-AF65-F5344CB8AC3E}">
         <p14:creationId xmlns:p14="http://schemas.microsoft.com/office/powerpoint/2010/main" val="2983418390"/>
-      </p:ext>
-    </p:extLst>
-  </p:cSld>
-  <p:clrMapOvr>
-    <a:masterClrMapping/>
-  </p:clrMapOvr>
-</p:notes>
-</file>
-
-<file path=ppt/notesSlides/notesSlide11.xml><?xml version="1.0" encoding="utf-8"?>
-<p:notes xmlns:a="http://schemas.openxmlformats.org/drawingml/2006/main" xmlns:r="http://schemas.openxmlformats.org/officeDocument/2006/relationships" xmlns:p="http://schemas.openxmlformats.org/presentationml/2006/main">
-  <p:cSld>
-    <p:spTree>
-      <p:nvGrpSpPr>
-        <p:cNvPr id="1" name=""/>
-        <p:cNvGrpSpPr/>
-        <p:nvPr/>
-      </p:nvGrpSpPr>
-      <p:grpSpPr>
-        <a:xfrm>
-          <a:off x="0" y="0"/>
-          <a:ext cx="0" cy="0"/>
-          <a:chOff x="0" y="0"/>
-          <a:chExt cx="0" cy="0"/>
-        </a:xfrm>
-      </p:grpSpPr>
-      <p:sp>
-        <p:nvSpPr>
-          <p:cNvPr id="2" name="Slide Image Placeholder 1"/>
-          <p:cNvSpPr>
-            <a:spLocks noGrp="1" noRot="1" noChangeAspect="1"/>
-          </p:cNvSpPr>
-          <p:nvPr>
-            <p:ph type="sldImg"/>
-          </p:nvPr>
-        </p:nvSpPr>
-        <p:spPr/>
-      </p:sp>
-      <p:sp>
-        <p:nvSpPr>
-          <p:cNvPr id="3" name="Notes Placeholder 2"/>
-          <p:cNvSpPr>
-            <a:spLocks noGrp="1"/>
-          </p:cNvSpPr>
-          <p:nvPr>
-            <p:ph type="body" idx="1"/>
-          </p:nvPr>
-        </p:nvSpPr>
-        <p:spPr/>
-        <p:txBody>
-          <a:bodyPr/>
-          <a:lstStyle/>
-          <a:p>
-            <a:r>
-              <a:rPr lang="en-US" dirty="0"/>
-              <a:t>Now let’s talk about how this can be combined with .NET. Let’s first talk about “why”. As mentioned before, </a:t>
-            </a:r>
-            <a:r>
-              <a:rPr lang="en-US" dirty="0" err="1"/>
-              <a:t>PowerFx</a:t>
-            </a:r>
-            <a:r>
-              <a:rPr lang="en-US" dirty="0"/>
-              <a:t> has a </a:t>
-            </a:r>
-            <a:r>
-              <a:rPr lang="en-US" dirty="0" err="1"/>
-              <a:t>popuatr</a:t>
-            </a:r>
-            <a:r>
-              <a:rPr lang="en-US" dirty="0"/>
-              <a:t> </a:t>
-            </a:r>
-            <a:r>
-              <a:rPr lang="en-US" dirty="0" err="1"/>
-              <a:t>sytbnax</a:t>
-            </a:r>
-            <a:r>
-              <a:rPr lang="en-US" dirty="0"/>
-              <a:t> with other </a:t>
-            </a:r>
-            <a:r>
-              <a:rPr lang="en-US" dirty="0" err="1"/>
-              <a:t>Microsfot</a:t>
-            </a:r>
-            <a:r>
-              <a:rPr lang="en-US" dirty="0"/>
-              <a:t> Products out there using it. So the amount of existing knowledge out there makes existing answers available to those who use it. </a:t>
-            </a:r>
-          </a:p>
-          <a:p>
-            <a:endParaRPr lang="en-US" dirty="0"/>
-          </a:p>
-          <a:p>
-            <a:r>
-              <a:rPr lang="en-US" dirty="0"/>
-              <a:t>Adding it to </a:t>
-            </a:r>
-            <a:r>
-              <a:rPr lang="en-US" dirty="0" err="1"/>
-              <a:t>.net</a:t>
-            </a:r>
-            <a:r>
-              <a:rPr lang="en-US" dirty="0"/>
-              <a:t> will allow you to add logic without potentially having to recompile or redeploy your app because it is an interpreter engine. Although, in real world enterprise scenarios you would still want those </a:t>
-            </a:r>
-            <a:r>
-              <a:rPr lang="en-US" dirty="0" err="1"/>
-              <a:t>PowerFx</a:t>
-            </a:r>
-            <a:r>
-              <a:rPr lang="en-US" dirty="0"/>
-              <a:t> pieces to go through some sort of lower to upper environment </a:t>
-            </a:r>
-            <a:r>
-              <a:rPr lang="en-US" dirty="0" err="1"/>
-              <a:t>lifexyle</a:t>
-            </a:r>
-            <a:r>
-              <a:rPr lang="en-US" dirty="0"/>
-              <a:t>, although the </a:t>
-            </a:r>
-            <a:r>
-              <a:rPr lang="en-US" dirty="0" err="1"/>
-              <a:t>lifecyle</a:t>
-            </a:r>
-            <a:r>
-              <a:rPr lang="en-US" dirty="0"/>
-              <a:t> would be faster and not require a full re-deployment.</a:t>
-            </a:r>
-          </a:p>
-          <a:p>
-            <a:endParaRPr lang="en-US" dirty="0"/>
-          </a:p>
-          <a:p>
-            <a:r>
-              <a:rPr lang="en-US" dirty="0"/>
-              <a:t>The syntax of the language looks familiar to the business side if the business side is familiar </a:t>
-            </a:r>
-            <a:r>
-              <a:rPr lang="en-US"/>
-              <a:t>with Excel.</a:t>
-            </a:r>
-            <a:endParaRPr lang="en-US" dirty="0"/>
-          </a:p>
-        </p:txBody>
-      </p:sp>
-      <p:sp>
-        <p:nvSpPr>
-          <p:cNvPr id="4" name="Slide Number Placeholder 3"/>
-          <p:cNvSpPr>
-            <a:spLocks noGrp="1"/>
-          </p:cNvSpPr>
-          <p:nvPr>
-            <p:ph type="sldNum" sz="quarter" idx="5"/>
-          </p:nvPr>
-        </p:nvSpPr>
-        <p:spPr/>
-        <p:txBody>
-          <a:bodyPr/>
-          <a:lstStyle/>
-          <a:p>
-            <a:fld id="{A3FADD39-AB8A-4278-99D9-40CD8D745BA1}" type="slidenum">
-              <a:rPr lang="en-US" smtClean="0"/>
-              <a:t>12</a:t>
-            </a:fld>
-            <a:endParaRPr lang="en-US"/>
-          </a:p>
-        </p:txBody>
-      </p:sp>
-    </p:spTree>
-    <p:extLst>
-      <p:ext uri="{BB962C8B-B14F-4D97-AF65-F5344CB8AC3E}">
-        <p14:creationId xmlns:p14="http://schemas.microsoft.com/office/powerpoint/2010/main" val="3640277052"/>
       </p:ext>
     </p:extLst>
   </p:cSld>
@@ -4099,77 +4091,96 @@
           <a:lstStyle/>
           <a:p>
             <a:r>
-              <a:rPr lang="en-US" dirty="0">
-                <a:latin typeface="Calibri"/>
-                <a:ea typeface="Calibri"/>
-                <a:cs typeface="Calibri"/>
-              </a:rPr>
-              <a:t>Microsoft provides an open-source repo with the .NET </a:t>
-            </a:r>
-            <a:r>
-              <a:rPr lang="en-US" dirty="0" err="1">
-                <a:latin typeface="Calibri"/>
-                <a:ea typeface="Calibri"/>
-                <a:cs typeface="Calibri"/>
-              </a:rPr>
-              <a:t>PowerFX</a:t>
-            </a:r>
-            <a:r>
-              <a:rPr lang="en-US" dirty="0">
-                <a:latin typeface="Calibri"/>
-                <a:ea typeface="Calibri"/>
-                <a:cs typeface="Calibri"/>
-              </a:rPr>
-              <a:t> interpreter. There is also another repo with examples. Going back to our </a:t>
-            </a:r>
-            <a:r>
-              <a:rPr lang="en-US" dirty="0" err="1">
-                <a:latin typeface="Calibri"/>
-                <a:ea typeface="Calibri"/>
-                <a:cs typeface="Calibri"/>
-              </a:rPr>
-              <a:t>pretent</a:t>
-            </a:r>
-            <a:r>
-              <a:rPr lang="en-US" dirty="0">
-                <a:latin typeface="Calibri"/>
-                <a:ea typeface="Calibri"/>
-                <a:cs typeface="Calibri"/>
-              </a:rPr>
-              <a:t> story, Alexandria and her team looked for quick start guide or some other minimal tutorial in the sites but could not find any. What they had to do was to look a that examples and learn from the sample repo how to setup and use </a:t>
-            </a:r>
-            <a:r>
-              <a:rPr lang="en-US" dirty="0" err="1">
-                <a:latin typeface="Calibri"/>
-                <a:ea typeface="Calibri"/>
-                <a:cs typeface="Calibri"/>
-              </a:rPr>
-              <a:t>PowerFX</a:t>
-            </a:r>
-            <a:r>
-              <a:rPr lang="en-US" dirty="0">
-                <a:latin typeface="Calibri"/>
-                <a:ea typeface="Calibri"/>
-                <a:cs typeface="Calibri"/>
-              </a:rPr>
-              <a:t> in .NET. The 3rd link here is a minimal console app with a few methods showcasing the most minimal way of using the Interpreter in </a:t>
-            </a:r>
-            <a:r>
-              <a:rPr lang="en-US" dirty="0" err="1">
-                <a:latin typeface="Calibri"/>
-                <a:ea typeface="Calibri"/>
-                <a:cs typeface="Calibri"/>
-              </a:rPr>
+              <a:rPr lang="en-US" dirty="0"/>
+              <a:t>Now let’s talk about how this can be combined with .NET. Let’s first talk about “why”. As mentioned before, </a:t>
+            </a:r>
+            <a:r>
+              <a:rPr lang="en-US" dirty="0" err="1"/>
+              <a:t>PowerFx</a:t>
+            </a:r>
+            <a:r>
+              <a:rPr lang="en-US" dirty="0"/>
+              <a:t> has a </a:t>
+            </a:r>
+            <a:r>
+              <a:rPr lang="en-US" dirty="0" err="1"/>
+              <a:t>popuatr</a:t>
+            </a:r>
+            <a:r>
+              <a:rPr lang="en-US" dirty="0"/>
+              <a:t> </a:t>
+            </a:r>
+            <a:r>
+              <a:rPr lang="en-US" dirty="0" err="1"/>
+              <a:t>sytbnax</a:t>
+            </a:r>
+            <a:r>
+              <a:rPr lang="en-US" dirty="0"/>
+              <a:t> with other </a:t>
+            </a:r>
+            <a:r>
+              <a:rPr lang="en-US" dirty="0" err="1"/>
+              <a:t>Microsfot</a:t>
+            </a:r>
+            <a:r>
+              <a:rPr lang="en-US" dirty="0"/>
+              <a:t> Products out there using it. So the amount of existing knowledge out there makes existing answers available to those who use it. </a:t>
+            </a:r>
+          </a:p>
+          <a:p>
+            <a:endParaRPr lang="en-US" dirty="0"/>
+          </a:p>
+          <a:p>
+            <a:r>
+              <a:rPr lang="en-US" dirty="0"/>
+              <a:t>Adding it to </a:t>
+            </a:r>
+            <a:r>
+              <a:rPr lang="en-US" dirty="0" err="1"/>
               <a:t>.net</a:t>
             </a:r>
             <a:r>
-              <a:rPr lang="en-US" dirty="0">
-                <a:latin typeface="Calibri"/>
-                <a:ea typeface="Calibri"/>
-                <a:cs typeface="Calibri"/>
-              </a:rPr>
-              <a:t>.</a:t>
-            </a:r>
+              <a:rPr lang="en-US" dirty="0"/>
+              <a:t> will allow you to add logic without potentially having to recompile or redeploy your app because it is an interpreter engine. Although, in real world enterprise scenarios you would still want those </a:t>
+            </a:r>
+            <a:r>
+              <a:rPr lang="en-US" dirty="0" err="1"/>
+              <a:t>PowerFx</a:t>
+            </a:r>
+            <a:r>
+              <a:rPr lang="en-US" dirty="0"/>
+              <a:t> pieces to go through some sort of lower to upper environment </a:t>
+            </a:r>
+            <a:r>
+              <a:rPr lang="en-US" dirty="0" err="1"/>
+              <a:t>lifexyle</a:t>
+            </a:r>
+            <a:r>
+              <a:rPr lang="en-US" dirty="0"/>
+              <a:t>, although the </a:t>
+            </a:r>
+            <a:r>
+              <a:rPr lang="en-US" dirty="0" err="1"/>
+              <a:t>lifecyle</a:t>
+            </a:r>
+            <a:r>
+              <a:rPr lang="en-US" dirty="0"/>
+              <a:t> would be faster and not require a full re-deployment.</a:t>
+            </a:r>
+          </a:p>
+          <a:p>
+            <a:endParaRPr lang="en-US" dirty="0"/>
+          </a:p>
+          <a:p>
+            <a:r>
+              <a:rPr lang="en-US" dirty="0"/>
+              <a:t>The syntax of the language looks familiar to the business side if the business side is familiar </a:t>
+            </a:r>
+            <a:r>
+              <a:rPr lang="en-US"/>
+              <a:t>with Excel.</a:t>
+            </a:r>
+            <a:endParaRPr lang="en-US" dirty="0"/>
           </a:p>
         </p:txBody>
       </p:sp>
@@ -4190,7 +4201,7 @@
           <a:p>
             <a:fld id="{A3FADD39-AB8A-4278-99D9-40CD8D745BA1}" type="slidenum">
               <a:rPr lang="en-US" smtClean="0"/>
-              <a:t>14</a:t>
+              <a:t>13</a:t>
             </a:fld>
             <a:endParaRPr lang="en-US"/>
           </a:p>
@@ -4199,7 +4210,7 @@
     </p:spTree>
     <p:extLst>
       <p:ext uri="{BB962C8B-B14F-4D97-AF65-F5344CB8AC3E}">
-        <p14:creationId xmlns:p14="http://schemas.microsoft.com/office/powerpoint/2010/main" val="1178829649"/>
+        <p14:creationId xmlns:p14="http://schemas.microsoft.com/office/powerpoint/2010/main" val="3640277052"/>
       </p:ext>
     </p:extLst>
   </p:cSld>
@@ -4259,7 +4270,7 @@
                 <a:ea typeface="Calibri"/>
                 <a:cs typeface="Calibri"/>
               </a:rPr>
-              <a:t>The first step is to add a reference to the </a:t>
+              <a:t>Microsoft provides an open-source repo with the .NET </a:t>
             </a:r>
             <a:r>
               <a:rPr lang="en-US" dirty="0" err="1">
@@ -4267,7 +4278,7 @@
                 <a:ea typeface="Calibri"/>
                 <a:cs typeface="Calibri"/>
               </a:rPr>
-              <a:t>nuget</a:t>
+              <a:t>PowerFX</a:t>
             </a:r>
             <a:r>
               <a:rPr lang="en-US" dirty="0">
@@ -4275,17 +4286,39 @@
                 <a:ea typeface="Calibri"/>
                 <a:cs typeface="Calibri"/>
               </a:rPr>
-              <a:t> package in your project.</a:t>
-            </a:r>
-          </a:p>
-          <a:p>
+              <a:t> interpreter. There is also another repo with examples. Going back to our </a:t>
+            </a:r>
+            <a:r>
+              <a:rPr lang="en-US" dirty="0" err="1">
+                <a:latin typeface="Calibri"/>
+                <a:ea typeface="Calibri"/>
+                <a:cs typeface="Calibri"/>
+              </a:rPr>
+              <a:t>pretent</a:t>
+            </a:r>
             <a:r>
               <a:rPr lang="en-US" dirty="0">
                 <a:latin typeface="Calibri"/>
                 <a:ea typeface="Calibri"/>
                 <a:cs typeface="Calibri"/>
               </a:rPr>
-              <a:t>Then, you can create an engine object of type Engine. You can pass options to it, and we will see later that this step allows us to expose </a:t>
+              <a:t> story, Alexandria and her team looked for quick start guide or some other minimal tutorial in the sites but could not find any. What they had to do was to look a that examples and learn from the sample repo how to setup and use </a:t>
+            </a:r>
+            <a:r>
+              <a:rPr lang="en-US" dirty="0" err="1">
+                <a:latin typeface="Calibri"/>
+                <a:ea typeface="Calibri"/>
+                <a:cs typeface="Calibri"/>
+              </a:rPr>
+              <a:t>PowerFX</a:t>
+            </a:r>
+            <a:r>
+              <a:rPr lang="en-US" dirty="0">
+                <a:latin typeface="Calibri"/>
+                <a:ea typeface="Calibri"/>
+                <a:cs typeface="Calibri"/>
+              </a:rPr>
+              <a:t> in .NET. The 3rd link here is a minimal console app with a few methods showcasing the most minimal way of using the Interpreter in </a:t>
             </a:r>
             <a:r>
               <a:rPr lang="en-US" dirty="0" err="1">
@@ -4301,426 +4334,8 @@
                 <a:ea typeface="Calibri"/>
                 <a:cs typeface="Calibri"/>
               </a:rPr>
-              <a:t> methods to the interpreter, but for now you can see that it requires no params.</a:t>
-            </a:r>
-          </a:p>
-          <a:p>
-            <a:endParaRPr lang="en-US" dirty="0">
-              <a:latin typeface="Calibri"/>
-              <a:ea typeface="Calibri"/>
-              <a:cs typeface="Calibri"/>
-            </a:endParaRPr>
-          </a:p>
-          <a:p>
-            <a:r>
-              <a:rPr lang="en-US" dirty="0">
-                <a:latin typeface="Calibri"/>
-                <a:ea typeface="Calibri"/>
-                <a:cs typeface="Calibri"/>
-              </a:rPr>
-              <a:t>The next step is to define the variables and formulas. </a:t>
-            </a:r>
-          </a:p>
-          <a:p>
-            <a:endParaRPr lang="en-US" dirty="0">
-              <a:latin typeface="Calibri"/>
-              <a:ea typeface="Calibri"/>
-              <a:cs typeface="Calibri"/>
-            </a:endParaRPr>
-          </a:p>
-          <a:p>
-            <a:r>
-              <a:rPr lang="en-US" dirty="0">
-                <a:latin typeface="Calibri"/>
-                <a:ea typeface="Calibri"/>
-                <a:cs typeface="Calibri"/>
-              </a:rPr>
-              <a:t>Variables are like variables in other languages, where the </a:t>
-            </a:r>
-            <a:r>
-              <a:rPr lang="en-US" dirty="0" err="1">
-                <a:latin typeface="Calibri"/>
-                <a:ea typeface="Calibri"/>
-                <a:cs typeface="Calibri"/>
-              </a:rPr>
-              <a:t>vriable</a:t>
-            </a:r>
-            <a:r>
-              <a:rPr lang="en-US" dirty="0">
-                <a:latin typeface="Calibri"/>
-                <a:ea typeface="Calibri"/>
-                <a:cs typeface="Calibri"/>
-              </a:rPr>
-              <a:t> has a type and the value of the variable can change through the lifetime of the interpreter engine. As you can see here, we define a variable and we are able to change its value later on. The type of the variable needs to be defined and the type of the type is </a:t>
-            </a:r>
-            <a:r>
-              <a:rPr lang="en-US" dirty="0" err="1">
-                <a:latin typeface="Calibri"/>
-                <a:ea typeface="Calibri"/>
-                <a:cs typeface="Calibri"/>
-              </a:rPr>
-              <a:t>PowerFX</a:t>
-            </a:r>
-            <a:r>
-              <a:rPr lang="en-US" dirty="0">
-                <a:latin typeface="Calibri"/>
-                <a:ea typeface="Calibri"/>
-                <a:cs typeface="Calibri"/>
-              </a:rPr>
-              <a:t> type.</a:t>
-            </a:r>
-          </a:p>
-          <a:p>
-            <a:endParaRPr lang="en-US" dirty="0">
-              <a:latin typeface="Calibri"/>
-              <a:ea typeface="Calibri"/>
-              <a:cs typeface="Calibri"/>
-            </a:endParaRPr>
-          </a:p>
-          <a:p>
-            <a:r>
-              <a:rPr lang="en-US" dirty="0">
-                <a:latin typeface="Calibri"/>
-                <a:ea typeface="Calibri"/>
-                <a:cs typeface="Calibri"/>
-              </a:rPr>
-              <a:t>Formulas are basically named expressions. For each formula you give a name and then the valid </a:t>
-            </a:r>
-            <a:r>
-              <a:rPr lang="en-US" dirty="0" err="1">
-                <a:latin typeface="Calibri"/>
-                <a:ea typeface="Calibri"/>
-                <a:cs typeface="Calibri"/>
-              </a:rPr>
-              <a:t>PowerFX</a:t>
-            </a:r>
-            <a:r>
-              <a:rPr lang="en-US" dirty="0">
-                <a:latin typeface="Calibri"/>
-                <a:ea typeface="Calibri"/>
-                <a:cs typeface="Calibri"/>
-              </a:rPr>
-              <a:t> expression that represents the formula. The string is a regular </a:t>
-            </a:r>
-            <a:r>
-              <a:rPr lang="en-US" dirty="0" err="1">
-                <a:latin typeface="Calibri"/>
-                <a:ea typeface="Calibri"/>
-                <a:cs typeface="Calibri"/>
-              </a:rPr>
-              <a:t>.net</a:t>
-            </a:r>
-            <a:r>
-              <a:rPr lang="en-US" dirty="0">
-                <a:latin typeface="Calibri"/>
-                <a:ea typeface="Calibri"/>
-                <a:cs typeface="Calibri"/>
-              </a:rPr>
-              <a:t> string, but the contents of the string need to have a correct </a:t>
-            </a:r>
-            <a:r>
-              <a:rPr lang="en-US" dirty="0" err="1">
-                <a:latin typeface="Calibri"/>
-                <a:ea typeface="Calibri"/>
-                <a:cs typeface="Calibri"/>
-              </a:rPr>
-              <a:t>PowerFx</a:t>
-            </a:r>
-            <a:r>
-              <a:rPr lang="en-US" dirty="0">
-                <a:latin typeface="Calibri"/>
-                <a:ea typeface="Calibri"/>
-                <a:cs typeface="Calibri"/>
-              </a:rPr>
-              <a:t> syntax. Valid syntax includes defining records, tables, </a:t>
-            </a:r>
-            <a:r>
-              <a:rPr lang="en-US" dirty="0" err="1">
-                <a:latin typeface="Calibri"/>
-                <a:ea typeface="Calibri"/>
-                <a:cs typeface="Calibri"/>
-              </a:rPr>
-              <a:t>PowerFx</a:t>
-            </a:r>
-            <a:r>
-              <a:rPr lang="en-US" dirty="0">
-                <a:latin typeface="Calibri"/>
-                <a:ea typeface="Calibri"/>
-                <a:cs typeface="Calibri"/>
-              </a:rPr>
-              <a:t> collection functions, etc. Notice there is no compile time check for the syntax and there is no error when you define a formula with a wrong syntax. At the time of calling "</a:t>
-            </a:r>
-            <a:r>
-              <a:rPr lang="en-US" dirty="0" err="1">
-                <a:latin typeface="Calibri"/>
-                <a:ea typeface="Calibri"/>
-                <a:cs typeface="Calibri"/>
-              </a:rPr>
-              <a:t>SetFormula</a:t>
-            </a:r>
-            <a:r>
-              <a:rPr lang="en-US" dirty="0">
-                <a:latin typeface="Calibri"/>
-                <a:ea typeface="Calibri"/>
-                <a:cs typeface="Calibri"/>
-              </a:rPr>
-              <a:t>", syntax is verified. Invalid expressions will throw an error (show example). Please note what PowerApps could support might not necessarily be what the .NET </a:t>
-            </a:r>
-            <a:r>
-              <a:rPr lang="en-US" dirty="0" err="1">
-                <a:latin typeface="Calibri"/>
-                <a:ea typeface="Calibri"/>
-                <a:cs typeface="Calibri"/>
-              </a:rPr>
-              <a:t>inptreter</a:t>
-            </a:r>
-            <a:r>
-              <a:rPr lang="en-US" dirty="0">
-                <a:latin typeface="Calibri"/>
-                <a:ea typeface="Calibri"/>
-                <a:cs typeface="Calibri"/>
-              </a:rPr>
-              <a:t> can support. Microsoft is building a formal definition document in their repo here, but it is a work in progress as they are taking the PowerApps docs and generalizing them.</a:t>
-            </a:r>
-          </a:p>
-          <a:p>
-            <a:endParaRPr lang="en-US" dirty="0">
-              <a:latin typeface="Calibri"/>
-              <a:ea typeface="Calibri"/>
-              <a:cs typeface="Calibri"/>
-            </a:endParaRPr>
-          </a:p>
-          <a:p>
-            <a:r>
-              <a:rPr lang="en-US" dirty="0">
-                <a:latin typeface="Calibri"/>
-                <a:ea typeface="Calibri"/>
-                <a:cs typeface="Calibri"/>
-              </a:rPr>
-              <a:t>Once you have the formulas defined, in order to evaluate them and get their value into the </a:t>
-            </a:r>
-            <a:r>
-              <a:rPr lang="en-US" dirty="0" err="1">
-                <a:latin typeface="Calibri"/>
-                <a:ea typeface="Calibri"/>
-                <a:cs typeface="Calibri"/>
-              </a:rPr>
-              <a:t>.net</a:t>
-            </a:r>
-            <a:r>
-              <a:rPr lang="en-US" dirty="0">
-                <a:latin typeface="Calibri"/>
-                <a:ea typeface="Calibri"/>
-                <a:cs typeface="Calibri"/>
-              </a:rPr>
-              <a:t> world, you need to call one of the evaluate methods in the engine. Notice there is a version for async, we will talk about that later. You can also call "</a:t>
-            </a:r>
-            <a:r>
-              <a:rPr lang="en-US" dirty="0" err="1">
-                <a:latin typeface="Calibri"/>
-                <a:ea typeface="Calibri"/>
-                <a:cs typeface="Calibri"/>
-              </a:rPr>
-              <a:t>GetFormulaValue</a:t>
-            </a:r>
-            <a:r>
-              <a:rPr lang="en-US" dirty="0">
-                <a:latin typeface="Calibri"/>
-                <a:ea typeface="Calibri"/>
-                <a:cs typeface="Calibri"/>
-              </a:rPr>
-              <a:t>“. The value returned by the Evaluate methods are a special </a:t>
-            </a:r>
-            <a:r>
-              <a:rPr lang="en-US" dirty="0" err="1">
-                <a:latin typeface="Calibri"/>
-                <a:ea typeface="Calibri"/>
-                <a:cs typeface="Calibri"/>
-              </a:rPr>
-              <a:t>PowerFX</a:t>
-            </a:r>
-            <a:r>
-              <a:rPr lang="en-US" dirty="0">
-                <a:latin typeface="Calibri"/>
-                <a:ea typeface="Calibri"/>
-                <a:cs typeface="Calibri"/>
-              </a:rPr>
-              <a:t> value. You can interrogate this value to find out what </a:t>
-            </a:r>
-            <a:r>
-              <a:rPr lang="en-US" dirty="0" err="1">
-                <a:latin typeface="Calibri"/>
-                <a:ea typeface="Calibri"/>
-                <a:cs typeface="Calibri"/>
-              </a:rPr>
-              <a:t>PowerFX</a:t>
-            </a:r>
-            <a:r>
-              <a:rPr lang="en-US" dirty="0">
-                <a:latin typeface="Calibri"/>
-                <a:ea typeface="Calibri"/>
-                <a:cs typeface="Calibri"/>
-              </a:rPr>
-              <a:t> </a:t>
-            </a:r>
-            <a:r>
-              <a:rPr lang="en-US" dirty="0" err="1">
-                <a:latin typeface="Calibri"/>
-                <a:ea typeface="Calibri"/>
-                <a:cs typeface="Calibri"/>
-              </a:rPr>
-              <a:t>tyupe</a:t>
-            </a:r>
-            <a:r>
-              <a:rPr lang="en-US" dirty="0">
-                <a:latin typeface="Calibri"/>
-                <a:ea typeface="Calibri"/>
-                <a:cs typeface="Calibri"/>
-              </a:rPr>
-              <a:t> it is. You can also convert it to a generic .NET object type and do something like “</a:t>
-            </a:r>
-            <a:r>
-              <a:rPr lang="en-US" dirty="0" err="1">
-                <a:latin typeface="Calibri"/>
-                <a:ea typeface="Calibri"/>
-                <a:cs typeface="Calibri"/>
-              </a:rPr>
-              <a:t>ToString</a:t>
-            </a:r>
-            <a:r>
-              <a:rPr lang="en-US" dirty="0">
-                <a:latin typeface="Calibri"/>
-                <a:ea typeface="Calibri"/>
-                <a:cs typeface="Calibri"/>
-              </a:rPr>
-              <a:t>()” to get its textual </a:t>
-            </a:r>
-            <a:r>
-              <a:rPr lang="en-US" dirty="0" err="1">
-                <a:latin typeface="Calibri"/>
-                <a:ea typeface="Calibri"/>
-                <a:cs typeface="Calibri"/>
-              </a:rPr>
-              <a:t>representaion</a:t>
-            </a:r>
-            <a:r>
-              <a:rPr lang="en-US" dirty="0">
-                <a:latin typeface="Calibri"/>
-                <a:ea typeface="Calibri"/>
-                <a:cs typeface="Calibri"/>
-              </a:rPr>
-              <a:t>. You can use </a:t>
-            </a:r>
-            <a:r>
-              <a:rPr lang="en-US" dirty="0" err="1">
-                <a:latin typeface="Calibri"/>
-                <a:ea typeface="Calibri"/>
-                <a:cs typeface="Calibri"/>
-              </a:rPr>
-              <a:t>c#</a:t>
-            </a:r>
-            <a:r>
-              <a:rPr lang="en-US" dirty="0">
-                <a:latin typeface="Calibri"/>
-                <a:ea typeface="Calibri"/>
-                <a:cs typeface="Calibri"/>
-              </a:rPr>
-              <a:t> pattern matching to get the </a:t>
-            </a:r>
-            <a:r>
-              <a:rPr lang="en-US" dirty="0" err="1">
-                <a:latin typeface="Calibri"/>
-                <a:ea typeface="Calibri"/>
-                <a:cs typeface="Calibri"/>
-              </a:rPr>
-              <a:t>PowerFX</a:t>
-            </a:r>
-            <a:r>
-              <a:rPr lang="en-US" dirty="0">
-                <a:latin typeface="Calibri"/>
-                <a:ea typeface="Calibri"/>
-                <a:cs typeface="Calibri"/>
-              </a:rPr>
-              <a:t> type of the result object from the evaluation.</a:t>
-            </a:r>
-            <a:endParaRPr lang="en-US" dirty="0"/>
-          </a:p>
-          <a:p>
-            <a:endParaRPr lang="en-US" dirty="0">
-              <a:latin typeface="Calibri"/>
-              <a:ea typeface="Calibri"/>
-              <a:cs typeface="Calibri"/>
-            </a:endParaRPr>
-          </a:p>
-          <a:p>
-            <a:r>
-              <a:rPr lang="en-US" dirty="0">
-                <a:latin typeface="Calibri"/>
-                <a:ea typeface="Calibri"/>
-                <a:cs typeface="Calibri"/>
-              </a:rPr>
-              <a:t>I wish I could tell you that the engine does no execute the formulas until evaluation, but as we will see when we </a:t>
-            </a:r>
-            <a:r>
-              <a:rPr lang="en-US" dirty="0" err="1">
-                <a:latin typeface="Calibri"/>
-                <a:ea typeface="Calibri"/>
-                <a:cs typeface="Calibri"/>
-              </a:rPr>
-              <a:t>defne</a:t>
-            </a:r>
-            <a:r>
-              <a:rPr lang="en-US" dirty="0">
-                <a:latin typeface="Calibri"/>
-                <a:ea typeface="Calibri"/>
-                <a:cs typeface="Calibri"/>
-              </a:rPr>
-              <a:t> our own methods, there is some sort of execution during the </a:t>
-            </a:r>
-            <a:r>
-              <a:rPr lang="en-US" dirty="0" err="1">
-                <a:latin typeface="Calibri"/>
-                <a:ea typeface="Calibri"/>
-                <a:cs typeface="Calibri"/>
-              </a:rPr>
-              <a:t>setForumal</a:t>
-            </a:r>
-            <a:r>
-              <a:rPr lang="en-US" dirty="0">
-                <a:latin typeface="Calibri"/>
-                <a:ea typeface="Calibri"/>
-                <a:cs typeface="Calibri"/>
-              </a:rPr>
-              <a:t> method.</a:t>
-            </a:r>
-          </a:p>
-          <a:p>
-            <a:endParaRPr lang="en-US" dirty="0">
-              <a:latin typeface="Calibri"/>
-              <a:ea typeface="Calibri"/>
-              <a:cs typeface="Calibri"/>
-            </a:endParaRPr>
-          </a:p>
-          <a:p>
-            <a:endParaRPr lang="en-US" dirty="0">
-              <a:latin typeface="Calibri"/>
-              <a:ea typeface="Calibri"/>
-              <a:cs typeface="Calibri"/>
-            </a:endParaRPr>
-          </a:p>
-          <a:p>
-            <a:endParaRPr lang="en-US" dirty="0">
-              <a:latin typeface="Calibri"/>
-              <a:ea typeface="Calibri"/>
-              <a:cs typeface="Calibri"/>
-            </a:endParaRPr>
-          </a:p>
-          <a:p>
-            <a:endParaRPr lang="en-US" dirty="0">
-              <a:latin typeface="Calibri"/>
-              <a:ea typeface="Calibri"/>
-              <a:cs typeface="Calibri"/>
-            </a:endParaRPr>
+              <a:t>.</a:t>
+            </a:r>
           </a:p>
         </p:txBody>
       </p:sp>
@@ -4750,7 +4365,7 @@
     </p:spTree>
     <p:extLst>
       <p:ext uri="{BB962C8B-B14F-4D97-AF65-F5344CB8AC3E}">
-        <p14:creationId xmlns:p14="http://schemas.microsoft.com/office/powerpoint/2010/main" val="2025954793"/>
+        <p14:creationId xmlns:p14="http://schemas.microsoft.com/office/powerpoint/2010/main" val="1178829649"/>
       </p:ext>
     </p:extLst>
   </p:cSld>
@@ -4805,1591 +4420,473 @@
           <a:lstStyle/>
           <a:p>
             <a:r>
-              <a:rPr lang="en-US" dirty="0"/>
-              <a:t>Let’s pretend the BU of </a:t>
-            </a:r>
-            <a:r>
-              <a:rPr lang="en-US" dirty="0" err="1"/>
-              <a:t>Pizzas’R”Us</a:t>
-            </a:r>
-            <a:r>
-              <a:rPr lang="en-US" dirty="0"/>
-              <a:t> comes back to Alexandria and say: “ this is really awesome that we can write the business rules in </a:t>
-            </a:r>
-            <a:r>
-              <a:rPr lang="en-US" dirty="0" err="1"/>
-              <a:t>powerfx</a:t>
-            </a:r>
-            <a:r>
-              <a:rPr lang="en-US" dirty="0"/>
-              <a:t>, but we would like to do things that the </a:t>
-            </a:r>
-            <a:r>
-              <a:rPr lang="en-US" dirty="0" err="1"/>
-              <a:t>PowerFX</a:t>
-            </a:r>
-            <a:r>
-              <a:rPr lang="en-US" dirty="0"/>
-              <a:t> version you gave us cannot do Business days math”. Alexandria then jumps into research mode to see if there is a way to extend the Interpreter with custom </a:t>
-            </a:r>
-            <a:r>
-              <a:rPr lang="en-US" dirty="0" err="1"/>
-              <a:t>PowerFX</a:t>
-            </a:r>
-            <a:r>
-              <a:rPr lang="en-US" dirty="0"/>
-              <a:t> functions implemented in </a:t>
-            </a:r>
-            <a:r>
-              <a:rPr lang="en-US" dirty="0" err="1"/>
-              <a:t>.net</a:t>
-            </a:r>
-            <a:r>
-              <a:rPr lang="en-US" dirty="0"/>
-              <a:t>. With the help of co-pilot, Her </a:t>
-            </a:r>
-            <a:r>
-              <a:rPr lang="en-US" dirty="0" err="1"/>
-              <a:t>reasearch</a:t>
-            </a:r>
-            <a:r>
-              <a:rPr lang="en-US" dirty="0"/>
-              <a:t> of the repo takes her to the some samples in the official repo. Using those examples, she figures out the following:</a:t>
-            </a:r>
-          </a:p>
-          <a:p>
-            <a:endParaRPr lang="en-US" dirty="0"/>
-          </a:p>
-          <a:p>
-            <a:r>
-              <a:rPr lang="en-US" dirty="0"/>
-              <a:t>To create a custom function for the interpreter, we must:</a:t>
-            </a:r>
-          </a:p>
-          <a:p>
-            <a:endParaRPr lang="en-US" dirty="0"/>
-          </a:p>
-          <a:p>
-            <a:pPr marL="228600" indent="-228600">
-              <a:buAutoNum type="arabicPeriod"/>
-            </a:pPr>
-            <a:r>
-              <a:rPr lang="en-US" dirty="0"/>
-              <a:t>Create a new class that derives from </a:t>
-            </a:r>
-            <a:r>
-              <a:rPr lang="en-US" dirty="0" err="1"/>
-              <a:t>ReflectionFunction</a:t>
-            </a:r>
-            <a:endParaRPr lang="en-US" dirty="0"/>
-          </a:p>
-          <a:p>
-            <a:pPr marL="228600" indent="-228600">
-              <a:buAutoNum type="arabicPeriod"/>
-            </a:pPr>
-            <a:r>
-              <a:rPr lang="en-US" dirty="0"/>
-              <a:t>Need to pass to the base constructor: name of the function, return type, types of parameters.</a:t>
-            </a:r>
-          </a:p>
-          <a:p>
-            <a:pPr marL="685800" lvl="1" indent="-228600">
-              <a:buAutoNum type="arabicPeriod"/>
-            </a:pPr>
-            <a:r>
-              <a:rPr lang="en-US" dirty="0"/>
-              <a:t>In this particular example, for our business days add function, we pass the name, the return type of date, and we pass an array with 2 elements specifying that our first parameter is of type date, and the second parameter is a number.</a:t>
-            </a:r>
-          </a:p>
-          <a:p>
-            <a:pPr marL="228600" lvl="0" indent="-228600">
-              <a:buAutoNum type="arabicPeriod"/>
-            </a:pPr>
-            <a:r>
-              <a:rPr lang="en-US" dirty="0"/>
-              <a:t>Need to implement the “Execute” method. Notice this is not an override method. The engine will look it up by magic name. The method must return the </a:t>
-            </a:r>
-            <a:r>
-              <a:rPr lang="en-US" dirty="0" err="1"/>
-              <a:t>generica</a:t>
-            </a:r>
-            <a:r>
-              <a:rPr lang="en-US" dirty="0"/>
-              <a:t> </a:t>
-            </a:r>
-            <a:r>
-              <a:rPr lang="en-US" dirty="0" err="1"/>
-              <a:t>FormulaValue</a:t>
-            </a:r>
-            <a:r>
-              <a:rPr lang="en-US" dirty="0"/>
-              <a:t> type. The parameters must be the parameters your functions takes, in this case our starting date and the number of days to add.</a:t>
-            </a:r>
-          </a:p>
-          <a:p>
-            <a:pPr marL="228600" lvl="0" indent="-228600">
-              <a:buAutoNum type="arabicPeriod"/>
-            </a:pPr>
-            <a:r>
-              <a:rPr lang="en-US" dirty="0"/>
-              <a:t>Within the method we can convert the parameters to </a:t>
-            </a:r>
-            <a:r>
-              <a:rPr lang="en-US" dirty="0" err="1"/>
-              <a:t>.net</a:t>
-            </a:r>
-            <a:r>
-              <a:rPr lang="en-US" dirty="0"/>
-              <a:t> values using “.Value”. In the body you can then do whatever you need to do in the </a:t>
-            </a:r>
-            <a:r>
-              <a:rPr lang="en-US" dirty="0" err="1"/>
-              <a:t>.net</a:t>
-            </a:r>
-            <a:r>
-              <a:rPr lang="en-US" dirty="0"/>
-              <a:t> world to come up with the return value, in this case, we are writing normal </a:t>
-            </a:r>
-            <a:r>
-              <a:rPr lang="en-US" dirty="0" err="1"/>
-              <a:t>.net</a:t>
-            </a:r>
-            <a:r>
-              <a:rPr lang="en-US" dirty="0"/>
-              <a:t> code to add business days to a date using a popular </a:t>
-            </a:r>
-            <a:r>
-              <a:rPr lang="en-US" dirty="0" err="1"/>
+              <a:rPr lang="en-US" dirty="0">
+                <a:latin typeface="Calibri"/>
+                <a:ea typeface="Calibri"/>
+                <a:cs typeface="Calibri"/>
+              </a:rPr>
+              <a:t>The first step is to add a reference to the </a:t>
+            </a:r>
+            <a:r>
+              <a:rPr lang="en-US" dirty="0" err="1">
+                <a:latin typeface="Calibri"/>
+                <a:ea typeface="Calibri"/>
+                <a:cs typeface="Calibri"/>
+              </a:rPr>
               <a:t>nuget</a:t>
             </a:r>
             <a:r>
-              <a:rPr lang="en-US" dirty="0"/>
-              <a:t> library for holidays.</a:t>
-            </a:r>
-          </a:p>
-          <a:p>
-            <a:pPr marL="228600" marR="0" lvl="0" indent="-228600" algn="l" defTabSz="914400" rtl="0" eaLnBrk="1" fontAlgn="auto" latinLnBrk="0" hangingPunct="1">
-              <a:lnSpc>
-                <a:spcPct val="100000"/>
-              </a:lnSpc>
-              <a:spcBef>
-                <a:spcPts val="0"/>
-              </a:spcBef>
-              <a:spcAft>
-                <a:spcPts val="0"/>
-              </a:spcAft>
-              <a:buClrTx/>
-              <a:buSzTx/>
-              <a:buFontTx/>
-              <a:buAutoNum type="arabicPeriod"/>
-              <a:tabLst/>
-              <a:defRPr/>
-            </a:pPr>
-            <a:r>
-              <a:rPr lang="en-US" dirty="0"/>
-              <a:t>To return the value, use </a:t>
-            </a:r>
-            <a:r>
-              <a:rPr lang="en-US" sz="1200" b="0" kern="1200" dirty="0" err="1">
-                <a:solidFill>
-                  <a:schemeClr val="tx1"/>
-                </a:solidFill>
-                <a:effectLst/>
-                <a:latin typeface="+mn-lt"/>
-                <a:ea typeface="+mn-ea"/>
-                <a:cs typeface="+mn-cs"/>
+              <a:rPr lang="en-US" dirty="0">
+                <a:latin typeface="Calibri"/>
+                <a:ea typeface="Calibri"/>
+                <a:cs typeface="Calibri"/>
               </a:rPr>
-              <a:t>FormulaValue.New</a:t>
-            </a:r>
-            <a:r>
-              <a:rPr lang="en-US" sz="1200" b="0" kern="1200" dirty="0">
-                <a:solidFill>
-                  <a:schemeClr val="tx1"/>
-                </a:solidFill>
-                <a:effectLst/>
-                <a:latin typeface="+mn-lt"/>
-                <a:ea typeface="+mn-ea"/>
-                <a:cs typeface="+mn-cs"/>
+              <a:t> package in your project.</a:t>
+            </a:r>
+          </a:p>
+          <a:p>
+            <a:r>
+              <a:rPr lang="en-US" dirty="0">
+                <a:latin typeface="Calibri"/>
+                <a:ea typeface="Calibri"/>
+                <a:cs typeface="Calibri"/>
               </a:rPr>
-              <a:t> to convert the </a:t>
-            </a:r>
-            <a:r>
-              <a:rPr lang="en-US" sz="1200" b="0" kern="1200" dirty="0" err="1">
-                <a:solidFill>
-                  <a:schemeClr val="tx1"/>
-                </a:solidFill>
-                <a:effectLst/>
-                <a:latin typeface="+mn-lt"/>
-                <a:ea typeface="+mn-ea"/>
-                <a:cs typeface="+mn-cs"/>
+              <a:t>Then, you can create an engine object of type Engine. You can pass options to it, and we will see later that this step allows us to expose </a:t>
+            </a:r>
+            <a:r>
+              <a:rPr lang="en-US" dirty="0" err="1">
+                <a:latin typeface="Calibri"/>
+                <a:ea typeface="Calibri"/>
+                <a:cs typeface="Calibri"/>
               </a:rPr>
               <a:t>.net</a:t>
             </a:r>
             <a:r>
-              <a:rPr lang="en-US" sz="1200" b="0" kern="1200" dirty="0">
-                <a:solidFill>
-                  <a:schemeClr val="tx1"/>
-                </a:solidFill>
-                <a:effectLst/>
-                <a:latin typeface="+mn-lt"/>
-                <a:ea typeface="+mn-ea"/>
-                <a:cs typeface="+mn-cs"/>
+              <a:rPr lang="en-US" dirty="0">
+                <a:latin typeface="Calibri"/>
+                <a:ea typeface="Calibri"/>
+                <a:cs typeface="Calibri"/>
               </a:rPr>
-              <a:t> value to an object the Interpreter can use.</a:t>
-            </a:r>
-          </a:p>
-          <a:p>
-            <a:pPr marL="228600" marR="0" lvl="0" indent="-228600" algn="l" defTabSz="914400" rtl="0" eaLnBrk="1" fontAlgn="auto" latinLnBrk="0" hangingPunct="1">
-              <a:lnSpc>
-                <a:spcPct val="100000"/>
-              </a:lnSpc>
-              <a:spcBef>
-                <a:spcPts val="0"/>
-              </a:spcBef>
-              <a:spcAft>
-                <a:spcPts val="0"/>
-              </a:spcAft>
-              <a:buClrTx/>
-              <a:buSzTx/>
-              <a:buFontTx/>
-              <a:buAutoNum type="arabicPeriod"/>
-              <a:tabLst/>
-              <a:defRPr/>
-            </a:pPr>
-            <a:r>
-              <a:rPr lang="en-US" sz="1200" b="0" kern="1200" dirty="0">
-                <a:solidFill>
-                  <a:schemeClr val="tx1"/>
-                </a:solidFill>
-                <a:effectLst/>
-                <a:latin typeface="+mn-lt"/>
-                <a:ea typeface="+mn-ea"/>
-                <a:cs typeface="+mn-cs"/>
+              <a:t> methods to the interpreter, but for now you can see that it requires no params.</a:t>
+            </a:r>
+          </a:p>
+          <a:p>
+            <a:endParaRPr lang="en-US" dirty="0">
+              <a:latin typeface="Calibri"/>
+              <a:ea typeface="Calibri"/>
+              <a:cs typeface="Calibri"/>
+            </a:endParaRPr>
+          </a:p>
+          <a:p>
+            <a:r>
+              <a:rPr lang="en-US" dirty="0">
+                <a:latin typeface="Calibri"/>
+                <a:ea typeface="Calibri"/>
+                <a:cs typeface="Calibri"/>
               </a:rPr>
-              <a:t>We must tell the interpreter engine about the function by registering the function using </a:t>
-            </a:r>
-            <a:r>
-              <a:rPr lang="en-US" sz="1200" b="0" kern="1200" dirty="0" err="1">
-                <a:solidFill>
-                  <a:schemeClr val="tx1"/>
-                </a:solidFill>
-                <a:effectLst/>
-                <a:latin typeface="+mn-lt"/>
-                <a:ea typeface="+mn-ea"/>
-                <a:cs typeface="+mn-cs"/>
+              <a:t>The next step is to define the variables and formulas. </a:t>
+            </a:r>
+          </a:p>
+          <a:p>
+            <a:endParaRPr lang="en-US" dirty="0">
+              <a:latin typeface="Calibri"/>
+              <a:ea typeface="Calibri"/>
+              <a:cs typeface="Calibri"/>
+            </a:endParaRPr>
+          </a:p>
+          <a:p>
+            <a:r>
+              <a:rPr lang="en-US" dirty="0">
+                <a:latin typeface="Calibri"/>
+                <a:ea typeface="Calibri"/>
+                <a:cs typeface="Calibri"/>
               </a:rPr>
-              <a:t>AddFunction</a:t>
-            </a:r>
-            <a:r>
-              <a:rPr lang="en-US" sz="1200" b="0" kern="1200" dirty="0">
-                <a:solidFill>
-                  <a:schemeClr val="tx1"/>
-                </a:solidFill>
-                <a:effectLst/>
-                <a:latin typeface="+mn-lt"/>
-                <a:ea typeface="+mn-ea"/>
-                <a:cs typeface="+mn-cs"/>
+              <a:t>Variables are like variables in other languages, where the </a:t>
+            </a:r>
+            <a:r>
+              <a:rPr lang="en-US" dirty="0" err="1">
+                <a:latin typeface="Calibri"/>
+                <a:ea typeface="Calibri"/>
+                <a:cs typeface="Calibri"/>
               </a:rPr>
-              <a:t> and passing an instance of the custom class.</a:t>
-            </a:r>
-          </a:p>
-          <a:p>
-            <a:pPr marL="228600" marR="0" lvl="0" indent="-228600" algn="l" defTabSz="914400" rtl="0" eaLnBrk="1" fontAlgn="auto" latinLnBrk="0" hangingPunct="1">
-              <a:lnSpc>
-                <a:spcPct val="100000"/>
-              </a:lnSpc>
-              <a:spcBef>
-                <a:spcPts val="0"/>
-              </a:spcBef>
-              <a:spcAft>
-                <a:spcPts val="0"/>
-              </a:spcAft>
-              <a:buClrTx/>
-              <a:buSzTx/>
-              <a:buFontTx/>
-              <a:buAutoNum type="arabicPeriod"/>
-              <a:tabLst/>
-              <a:defRPr/>
-            </a:pPr>
-            <a:r>
-              <a:rPr lang="en-US" sz="1200" b="0" kern="1200" dirty="0">
-                <a:solidFill>
-                  <a:schemeClr val="tx1"/>
-                </a:solidFill>
-                <a:effectLst/>
-                <a:latin typeface="+mn-lt"/>
-                <a:ea typeface="+mn-ea"/>
-                <a:cs typeface="+mn-cs"/>
+              <a:t>vriable</a:t>
+            </a:r>
+            <a:r>
+              <a:rPr lang="en-US" dirty="0">
+                <a:latin typeface="Calibri"/>
+                <a:ea typeface="Calibri"/>
+                <a:cs typeface="Calibri"/>
               </a:rPr>
-              <a:t>Then we can call that function as if it were a regular </a:t>
-            </a:r>
-            <a:r>
-              <a:rPr lang="en-US" sz="1200" b="0" kern="1200" dirty="0" err="1">
-                <a:solidFill>
-                  <a:schemeClr val="tx1"/>
-                </a:solidFill>
-                <a:effectLst/>
-                <a:latin typeface="+mn-lt"/>
-                <a:ea typeface="+mn-ea"/>
-                <a:cs typeface="+mn-cs"/>
+              <a:t> has a type and the value of the variable can change through the lifetime of the interpreter engine. As you can see here, we define a variable and we are able to change its value later on. The type of the variable needs to be defined and the type of the type is </a:t>
+            </a:r>
+            <a:r>
+              <a:rPr lang="en-US" dirty="0" err="1">
+                <a:latin typeface="Calibri"/>
+                <a:ea typeface="Calibri"/>
+                <a:cs typeface="Calibri"/>
               </a:rPr>
               <a:t>PowerFX</a:t>
             </a:r>
             <a:r>
-              <a:rPr lang="en-US" sz="1200" b="0" kern="1200" dirty="0">
-                <a:solidFill>
-                  <a:schemeClr val="tx1"/>
-                </a:solidFill>
-                <a:effectLst/>
-                <a:latin typeface="+mn-lt"/>
-                <a:ea typeface="+mn-ea"/>
-                <a:cs typeface="+mn-cs"/>
+              <a:rPr lang="en-US" dirty="0">
+                <a:latin typeface="Calibri"/>
+                <a:ea typeface="Calibri"/>
+                <a:cs typeface="Calibri"/>
               </a:rPr>
-              <a:t> function.</a:t>
-            </a:r>
-          </a:p>
-          <a:p>
-            <a:pPr marL="228600" marR="0" lvl="0" indent="-228600" algn="l" defTabSz="914400" rtl="0" eaLnBrk="1" fontAlgn="auto" latinLnBrk="0" hangingPunct="1">
-              <a:lnSpc>
-                <a:spcPct val="100000"/>
-              </a:lnSpc>
-              <a:spcBef>
-                <a:spcPts val="0"/>
-              </a:spcBef>
-              <a:spcAft>
-                <a:spcPts val="0"/>
-              </a:spcAft>
-              <a:buClrTx/>
-              <a:buSzTx/>
-              <a:buFontTx/>
-              <a:buAutoNum type="arabicPeriod"/>
-              <a:tabLst/>
-              <a:defRPr/>
-            </a:pPr>
-            <a:endParaRPr lang="en-US" sz="1200" b="0" kern="1200" dirty="0">
-              <a:solidFill>
-                <a:schemeClr val="tx1"/>
-              </a:solidFill>
-              <a:effectLst/>
-              <a:latin typeface="+mn-lt"/>
-              <a:ea typeface="+mn-ea"/>
-              <a:cs typeface="+mn-cs"/>
+              <a:t> type.</a:t>
+            </a:r>
+          </a:p>
+          <a:p>
+            <a:endParaRPr lang="en-US" dirty="0">
+              <a:latin typeface="Calibri"/>
+              <a:ea typeface="Calibri"/>
+              <a:cs typeface="Calibri"/>
             </a:endParaRPr>
           </a:p>
           <a:p>
-            <a:pPr marL="0" marR="0" lvl="0" indent="0" algn="l" defTabSz="914400" rtl="0" eaLnBrk="1" fontAlgn="auto" latinLnBrk="0" hangingPunct="1">
-              <a:lnSpc>
-                <a:spcPct val="100000"/>
-              </a:lnSpc>
-              <a:spcBef>
-                <a:spcPts val="0"/>
-              </a:spcBef>
-              <a:spcAft>
-                <a:spcPts val="0"/>
-              </a:spcAft>
-              <a:buClrTx/>
-              <a:buSzTx/>
-              <a:buFontTx/>
-              <a:buNone/>
-              <a:tabLst/>
-              <a:defRPr/>
-            </a:pPr>
-            <a:r>
-              <a:rPr lang="en-US" sz="1200" b="0" kern="1200" dirty="0">
-                <a:solidFill>
-                  <a:schemeClr val="tx1"/>
-                </a:solidFill>
-                <a:effectLst/>
-                <a:latin typeface="+mn-lt"/>
-                <a:ea typeface="+mn-ea"/>
-                <a:cs typeface="+mn-cs"/>
+            <a:r>
+              <a:rPr lang="en-US" dirty="0">
+                <a:latin typeface="Calibri"/>
+                <a:ea typeface="Calibri"/>
+                <a:cs typeface="Calibri"/>
               </a:rPr>
-              <a:t>You can also, define functions that return a record. For example, Alexandira needs to create a function that takes in a string and parses the string into a well known structure in Pizza r us. The structure contains the id of the customer, the year the customer was onboarded and their unique id in the ERP system. E.g.: “juan#1998</a:t>
-            </a:r>
-          </a:p>
-          <a:p>
-            <a:pPr marL="0" marR="0" lvl="0" indent="0" algn="l" defTabSz="914400" rtl="0" eaLnBrk="1" fontAlgn="auto" latinLnBrk="0" hangingPunct="1">
-              <a:lnSpc>
-                <a:spcPct val="100000"/>
-              </a:lnSpc>
-              <a:spcBef>
-                <a:spcPts val="0"/>
-              </a:spcBef>
-              <a:spcAft>
-                <a:spcPts val="0"/>
-              </a:spcAft>
-              <a:buClrTx/>
-              <a:buSzTx/>
-              <a:buFontTx/>
-              <a:buNone/>
-              <a:tabLst/>
-              <a:defRPr/>
-            </a:pPr>
-            <a:endParaRPr lang="en-US" sz="1200" b="0" kern="1200" dirty="0">
-              <a:solidFill>
-                <a:schemeClr val="tx1"/>
-              </a:solidFill>
-              <a:effectLst/>
-              <a:latin typeface="+mn-lt"/>
-              <a:ea typeface="+mn-ea"/>
-              <a:cs typeface="+mn-cs"/>
-            </a:endParaRPr>
-          </a:p>
-          <a:p>
-            <a:pPr marL="228600" marR="0" lvl="0" indent="-228600" algn="l" defTabSz="914400" rtl="0" eaLnBrk="1" fontAlgn="auto" latinLnBrk="0" hangingPunct="1">
-              <a:lnSpc>
-                <a:spcPct val="100000"/>
-              </a:lnSpc>
-              <a:spcBef>
-                <a:spcPts val="0"/>
-              </a:spcBef>
-              <a:spcAft>
-                <a:spcPts val="0"/>
-              </a:spcAft>
-              <a:buClrTx/>
-              <a:buSzTx/>
-              <a:buFontTx/>
-              <a:buAutoNum type="arabicPeriod"/>
-              <a:tabLst/>
-              <a:defRPr/>
-            </a:pPr>
-            <a:r>
-              <a:rPr lang="en-US" sz="1200" b="0" kern="1200" dirty="0">
-                <a:solidFill>
-                  <a:schemeClr val="tx1"/>
-                </a:solidFill>
-                <a:effectLst/>
-                <a:latin typeface="+mn-lt"/>
-                <a:ea typeface="+mn-ea"/>
-                <a:cs typeface="+mn-cs"/>
+              <a:t>Formulas are basically named expressions. For each formula you give a name and then the valid </a:t>
+            </a:r>
+            <a:r>
+              <a:rPr lang="en-US" dirty="0" err="1">
+                <a:latin typeface="Calibri"/>
+                <a:ea typeface="Calibri"/>
+                <a:cs typeface="Calibri"/>
               </a:rPr>
-              <a:t>Same as before, but use Untyped type for the return value parameter in the base constructor. </a:t>
-            </a:r>
-          </a:p>
-          <a:p>
-            <a:pPr marL="228600" marR="0" lvl="0" indent="-228600" algn="l" defTabSz="914400" rtl="0" eaLnBrk="1" fontAlgn="auto" latinLnBrk="0" hangingPunct="1">
-              <a:lnSpc>
-                <a:spcPct val="100000"/>
-              </a:lnSpc>
-              <a:spcBef>
-                <a:spcPts val="0"/>
-              </a:spcBef>
-              <a:spcAft>
-                <a:spcPts val="0"/>
-              </a:spcAft>
-              <a:buClrTx/>
-              <a:buSzTx/>
-              <a:buFontTx/>
-              <a:buAutoNum type="arabicPeriod"/>
-              <a:tabLst/>
-              <a:defRPr/>
-            </a:pPr>
-            <a:r>
-              <a:rPr lang="en-US" sz="1200" b="0" kern="1200" dirty="0">
-                <a:solidFill>
-                  <a:schemeClr val="tx1"/>
-                </a:solidFill>
-                <a:effectLst/>
-                <a:latin typeface="+mn-lt"/>
-                <a:ea typeface="+mn-ea"/>
-                <a:cs typeface="+mn-cs"/>
+              <a:t>PowerFX</a:t>
+            </a:r>
+            <a:r>
+              <a:rPr lang="en-US" dirty="0">
+                <a:latin typeface="Calibri"/>
+                <a:ea typeface="Calibri"/>
+                <a:cs typeface="Calibri"/>
               </a:rPr>
-              <a:t>In the body of the execute method we build the record:</a:t>
-            </a:r>
-          </a:p>
-          <a:p>
-            <a:pPr marL="685800" marR="0" lvl="1" indent="-228600" algn="l" defTabSz="914400" rtl="0" eaLnBrk="1" fontAlgn="auto" latinLnBrk="0" hangingPunct="1">
-              <a:lnSpc>
-                <a:spcPct val="100000"/>
-              </a:lnSpc>
-              <a:spcBef>
-                <a:spcPts val="0"/>
-              </a:spcBef>
-              <a:spcAft>
-                <a:spcPts val="0"/>
-              </a:spcAft>
-              <a:buClrTx/>
-              <a:buSzTx/>
-              <a:buFontTx/>
-              <a:buAutoNum type="arabicPeriod"/>
-              <a:tabLst/>
-              <a:defRPr/>
-            </a:pPr>
-            <a:r>
-              <a:rPr lang="en-US" sz="1200" b="0" kern="1200" dirty="0">
-                <a:solidFill>
-                  <a:schemeClr val="tx1"/>
-                </a:solidFill>
-                <a:effectLst/>
-                <a:latin typeface="+mn-lt"/>
-                <a:ea typeface="+mn-ea"/>
-                <a:cs typeface="+mn-cs"/>
-              </a:rPr>
-              <a:t>Use </a:t>
-            </a:r>
-            <a:r>
-              <a:rPr lang="en-US" sz="1200" b="0" kern="1200" dirty="0" err="1">
-                <a:solidFill>
-                  <a:schemeClr val="tx1"/>
-                </a:solidFill>
-                <a:effectLst/>
-                <a:latin typeface="+mn-lt"/>
-                <a:ea typeface="+mn-ea"/>
-                <a:cs typeface="+mn-cs"/>
-              </a:rPr>
-              <a:t>NamedValue</a:t>
-            </a:r>
-            <a:r>
-              <a:rPr lang="en-US" sz="1200" b="0" kern="1200" dirty="0">
-                <a:solidFill>
-                  <a:schemeClr val="tx1"/>
-                </a:solidFill>
-                <a:effectLst/>
-                <a:latin typeface="+mn-lt"/>
-                <a:ea typeface="+mn-ea"/>
-                <a:cs typeface="+mn-cs"/>
-              </a:rPr>
-              <a:t> objects for the property-value pairs</a:t>
-            </a:r>
-          </a:p>
-          <a:p>
-            <a:pPr marL="685800" marR="0" lvl="1" indent="-228600" algn="l" defTabSz="914400" rtl="0" eaLnBrk="1" fontAlgn="auto" latinLnBrk="0" hangingPunct="1">
-              <a:lnSpc>
-                <a:spcPct val="100000"/>
-              </a:lnSpc>
-              <a:spcBef>
-                <a:spcPts val="0"/>
-              </a:spcBef>
-              <a:spcAft>
-                <a:spcPts val="0"/>
-              </a:spcAft>
-              <a:buClrTx/>
-              <a:buSzTx/>
-              <a:buFontTx/>
-              <a:buAutoNum type="arabicPeriod"/>
-              <a:tabLst/>
-              <a:defRPr/>
-            </a:pPr>
-            <a:r>
-              <a:rPr lang="en-US" sz="1200" b="0" kern="1200" dirty="0">
-                <a:solidFill>
-                  <a:schemeClr val="tx1"/>
-                </a:solidFill>
-                <a:effectLst/>
-                <a:latin typeface="+mn-lt"/>
-                <a:ea typeface="+mn-ea"/>
-                <a:cs typeface="+mn-cs"/>
-              </a:rPr>
-              <a:t>Use </a:t>
-            </a:r>
-            <a:r>
-              <a:rPr lang="en-US" sz="1200" b="0" kern="1200" dirty="0" err="1">
-                <a:solidFill>
-                  <a:schemeClr val="tx1"/>
-                </a:solidFill>
-                <a:effectLst/>
-                <a:latin typeface="+mn-lt"/>
-                <a:ea typeface="+mn-ea"/>
-                <a:cs typeface="+mn-cs"/>
-              </a:rPr>
-              <a:t>FormulaValue.NewRecordFromFields</a:t>
-            </a:r>
-            <a:r>
-              <a:rPr lang="en-US" sz="1200" b="0" kern="1200" dirty="0">
-                <a:solidFill>
-                  <a:schemeClr val="tx1"/>
-                </a:solidFill>
-                <a:effectLst/>
-                <a:latin typeface="+mn-lt"/>
-                <a:ea typeface="+mn-ea"/>
-                <a:cs typeface="+mn-cs"/>
-              </a:rPr>
-              <a:t> to build the record object</a:t>
-            </a:r>
-          </a:p>
-          <a:p>
-            <a:pPr marL="0" marR="0" lvl="0" indent="0" algn="l" defTabSz="914400" rtl="0" eaLnBrk="1" fontAlgn="auto" latinLnBrk="0" hangingPunct="1">
-              <a:lnSpc>
-                <a:spcPct val="100000"/>
-              </a:lnSpc>
-              <a:spcBef>
-                <a:spcPts val="0"/>
-              </a:spcBef>
-              <a:spcAft>
-                <a:spcPts val="0"/>
-              </a:spcAft>
-              <a:buClrTx/>
-              <a:buSzTx/>
-              <a:buFontTx/>
-              <a:buNone/>
-              <a:tabLst/>
-              <a:defRPr/>
-            </a:pPr>
-            <a:r>
-              <a:rPr lang="en-US" sz="1200" b="0" kern="1200" dirty="0">
-                <a:solidFill>
-                  <a:schemeClr val="tx1"/>
-                </a:solidFill>
-                <a:effectLst/>
-                <a:latin typeface="+mn-lt"/>
-                <a:ea typeface="+mn-ea"/>
-                <a:cs typeface="+mn-cs"/>
-              </a:rPr>
-              <a:t>As you can see, we can call that function from our </a:t>
-            </a:r>
-            <a:r>
-              <a:rPr lang="en-US" sz="1200" b="0" kern="1200" dirty="0" err="1">
-                <a:solidFill>
-                  <a:schemeClr val="tx1"/>
-                </a:solidFill>
-                <a:effectLst/>
-                <a:latin typeface="+mn-lt"/>
-                <a:ea typeface="+mn-ea"/>
-                <a:cs typeface="+mn-cs"/>
-              </a:rPr>
-              <a:t>powerfx</a:t>
-            </a:r>
-            <a:r>
-              <a:rPr lang="en-US" sz="1200" b="0" kern="1200" dirty="0">
-                <a:solidFill>
-                  <a:schemeClr val="tx1"/>
-                </a:solidFill>
-                <a:effectLst/>
-                <a:latin typeface="+mn-lt"/>
-                <a:ea typeface="+mn-ea"/>
-                <a:cs typeface="+mn-cs"/>
-              </a:rPr>
-              <a:t> code to get the record. We can access the properties of the record from </a:t>
-            </a:r>
-            <a:r>
-              <a:rPr lang="en-US" sz="1200" b="0" kern="1200" dirty="0" err="1">
-                <a:solidFill>
-                  <a:schemeClr val="tx1"/>
-                </a:solidFill>
-                <a:effectLst/>
-                <a:latin typeface="+mn-lt"/>
-                <a:ea typeface="+mn-ea"/>
-                <a:cs typeface="+mn-cs"/>
+              <a:t> expression that represents the formula. The string is a regular </a:t>
+            </a:r>
+            <a:r>
+              <a:rPr lang="en-US" dirty="0" err="1">
+                <a:latin typeface="Calibri"/>
+                <a:ea typeface="Calibri"/>
+                <a:cs typeface="Calibri"/>
               </a:rPr>
               <a:t>.net</a:t>
             </a:r>
             <a:r>
-              <a:rPr lang="en-US" sz="1200" b="0" kern="1200" dirty="0">
-                <a:solidFill>
-                  <a:schemeClr val="tx1"/>
-                </a:solidFill>
-                <a:effectLst/>
-                <a:latin typeface="+mn-lt"/>
-                <a:ea typeface="+mn-ea"/>
-                <a:cs typeface="+mn-cs"/>
+              <a:rPr lang="en-US" dirty="0">
+                <a:latin typeface="Calibri"/>
+                <a:ea typeface="Calibri"/>
+                <a:cs typeface="Calibri"/>
               </a:rPr>
-              <a:t> by treating the result of the evaluation as an </a:t>
-            </a:r>
-            <a:r>
-              <a:rPr lang="en-US" sz="1200" b="0" kern="1200" dirty="0" err="1">
-                <a:solidFill>
-                  <a:schemeClr val="tx1"/>
-                </a:solidFill>
-                <a:effectLst/>
-                <a:latin typeface="+mn-lt"/>
-                <a:ea typeface="+mn-ea"/>
-                <a:cs typeface="+mn-cs"/>
+              <a:t> string, but the contents of the string need to have a correct </a:t>
+            </a:r>
+            <a:r>
+              <a:rPr lang="en-US" dirty="0" err="1">
+                <a:latin typeface="Calibri"/>
+                <a:ea typeface="Calibri"/>
+                <a:cs typeface="Calibri"/>
               </a:rPr>
-              <a:t>Expando</a:t>
-            </a:r>
-            <a:r>
-              <a:rPr lang="en-US" sz="1200" b="0" kern="1200" dirty="0">
-                <a:solidFill>
-                  <a:schemeClr val="tx1"/>
-                </a:solidFill>
-                <a:effectLst/>
-                <a:latin typeface="+mn-lt"/>
-                <a:ea typeface="+mn-ea"/>
-                <a:cs typeface="+mn-cs"/>
+              <a:t>PowerFx</a:t>
+            </a:r>
+            <a:r>
+              <a:rPr lang="en-US" dirty="0">
+                <a:latin typeface="Calibri"/>
+                <a:ea typeface="Calibri"/>
+                <a:cs typeface="Calibri"/>
               </a:rPr>
-              <a:t> object, we can </a:t>
-            </a:r>
-            <a:r>
-              <a:rPr lang="en-US" sz="1200" b="0" kern="1200" dirty="0" err="1">
-                <a:solidFill>
-                  <a:schemeClr val="tx1"/>
-                </a:solidFill>
-                <a:effectLst/>
-                <a:latin typeface="+mn-lt"/>
-                <a:ea typeface="+mn-ea"/>
-                <a:cs typeface="+mn-cs"/>
+              <a:t> syntax. Valid syntax includes defining records, tables, </a:t>
+            </a:r>
+            <a:r>
+              <a:rPr lang="en-US" dirty="0" err="1">
+                <a:latin typeface="Calibri"/>
+                <a:ea typeface="Calibri"/>
+                <a:cs typeface="Calibri"/>
               </a:rPr>
-              <a:t>can</a:t>
-            </a:r>
-            <a:r>
-              <a:rPr lang="en-US" sz="1200" b="0" kern="1200" dirty="0">
-                <a:solidFill>
-                  <a:schemeClr val="tx1"/>
-                </a:solidFill>
-                <a:effectLst/>
-                <a:latin typeface="+mn-lt"/>
-                <a:ea typeface="+mn-ea"/>
-                <a:cs typeface="+mn-cs"/>
+              <a:t>PowerFx</a:t>
+            </a:r>
+            <a:r>
+              <a:rPr lang="en-US" dirty="0">
+                <a:latin typeface="Calibri"/>
+                <a:ea typeface="Calibri"/>
+                <a:cs typeface="Calibri"/>
               </a:rPr>
-              <a:t> translate its properties to a </a:t>
-            </a:r>
-            <a:r>
-              <a:rPr lang="en-US" sz="1200" b="0" kern="1200" dirty="0" err="1">
-                <a:solidFill>
-                  <a:schemeClr val="tx1"/>
-                </a:solidFill>
-                <a:effectLst/>
-                <a:latin typeface="+mn-lt"/>
-                <a:ea typeface="+mn-ea"/>
-                <a:cs typeface="+mn-cs"/>
+              <a:t> collection functions, etc. Notice there is no compile time check for the syntax and there is no error when you define a formula with a wrong syntax. At the time of calling "</a:t>
+            </a:r>
+            <a:r>
+              <a:rPr lang="en-US" dirty="0" err="1">
+                <a:latin typeface="Calibri"/>
+                <a:ea typeface="Calibri"/>
+                <a:cs typeface="Calibri"/>
+              </a:rPr>
+              <a:t>SetFormula</a:t>
+            </a:r>
+            <a:r>
+              <a:rPr lang="en-US" dirty="0">
+                <a:latin typeface="Calibri"/>
+                <a:ea typeface="Calibri"/>
+                <a:cs typeface="Calibri"/>
+              </a:rPr>
+              <a:t>", syntax is verified. Invalid expressions will throw an error (show example). Please note what PowerApps could support might not necessarily be what the .NET </a:t>
+            </a:r>
+            <a:r>
+              <a:rPr lang="en-US" dirty="0" err="1">
+                <a:latin typeface="Calibri"/>
+                <a:ea typeface="Calibri"/>
+                <a:cs typeface="Calibri"/>
+              </a:rPr>
+              <a:t>inptreter</a:t>
+            </a:r>
+            <a:r>
+              <a:rPr lang="en-US" dirty="0">
+                <a:latin typeface="Calibri"/>
+                <a:ea typeface="Calibri"/>
+                <a:cs typeface="Calibri"/>
+              </a:rPr>
+              <a:t> can support. Microsoft is building a formal definition document in their repo here, but it is a work in progress as they are taking the PowerApps docs and generalizing them.</a:t>
+            </a:r>
+          </a:p>
+          <a:p>
+            <a:endParaRPr lang="en-US" dirty="0">
+              <a:latin typeface="Calibri"/>
+              <a:ea typeface="Calibri"/>
+              <a:cs typeface="Calibri"/>
+            </a:endParaRPr>
+          </a:p>
+          <a:p>
+            <a:r>
+              <a:rPr lang="en-US" dirty="0">
+                <a:latin typeface="Calibri"/>
+                <a:ea typeface="Calibri"/>
+                <a:cs typeface="Calibri"/>
+              </a:rPr>
+              <a:t>Once you have the formulas defined, in order to evaluate them and get their value into the </a:t>
+            </a:r>
+            <a:r>
+              <a:rPr lang="en-US" dirty="0" err="1">
+                <a:latin typeface="Calibri"/>
+                <a:ea typeface="Calibri"/>
+                <a:cs typeface="Calibri"/>
               </a:rPr>
               <a:t>.net</a:t>
             </a:r>
             <a:r>
-              <a:rPr lang="en-US" sz="1200" b="0" kern="1200" dirty="0">
-                <a:solidFill>
-                  <a:schemeClr val="tx1"/>
-                </a:solidFill>
-                <a:effectLst/>
-                <a:latin typeface="+mn-lt"/>
-                <a:ea typeface="+mn-ea"/>
-                <a:cs typeface="+mn-cs"/>
+              <a:rPr lang="en-US" dirty="0">
+                <a:latin typeface="Calibri"/>
+                <a:ea typeface="Calibri"/>
+                <a:cs typeface="Calibri"/>
               </a:rPr>
-              <a:t>  dictionary.</a:t>
-            </a:r>
-          </a:p>
-          <a:p>
-            <a:pPr marL="685800" marR="0" lvl="1" indent="-228600" algn="l" defTabSz="914400" rtl="0" eaLnBrk="1" fontAlgn="auto" latinLnBrk="0" hangingPunct="1">
-              <a:lnSpc>
-                <a:spcPct val="100000"/>
-              </a:lnSpc>
-              <a:spcBef>
-                <a:spcPts val="0"/>
-              </a:spcBef>
-              <a:spcAft>
-                <a:spcPts val="0"/>
-              </a:spcAft>
-              <a:buClrTx/>
-              <a:buSzTx/>
-              <a:buFontTx/>
-              <a:buAutoNum type="arabicPeriod"/>
-              <a:tabLst/>
-              <a:defRPr/>
-            </a:pPr>
-            <a:endParaRPr lang="en-US" sz="1200" b="0" kern="1200" dirty="0">
-              <a:solidFill>
-                <a:schemeClr val="tx1"/>
-              </a:solidFill>
-              <a:effectLst/>
-              <a:latin typeface="+mn-lt"/>
-              <a:ea typeface="+mn-ea"/>
-              <a:cs typeface="+mn-cs"/>
+              <a:t> world, you need to call one of the evaluate methods in the engine. Notice there is a version for async, we will talk about that later. You can also call "</a:t>
+            </a:r>
+            <a:r>
+              <a:rPr lang="en-US" dirty="0" err="1">
+                <a:latin typeface="Calibri"/>
+                <a:ea typeface="Calibri"/>
+                <a:cs typeface="Calibri"/>
+              </a:rPr>
+              <a:t>GetFormulaValue</a:t>
+            </a:r>
+            <a:r>
+              <a:rPr lang="en-US" dirty="0">
+                <a:latin typeface="Calibri"/>
+                <a:ea typeface="Calibri"/>
+                <a:cs typeface="Calibri"/>
+              </a:rPr>
+              <a:t>“. The value returned by the Evaluate methods are a special </a:t>
+            </a:r>
+            <a:r>
+              <a:rPr lang="en-US" dirty="0" err="1">
+                <a:latin typeface="Calibri"/>
+                <a:ea typeface="Calibri"/>
+                <a:cs typeface="Calibri"/>
+              </a:rPr>
+              <a:t>PowerFX</a:t>
+            </a:r>
+            <a:r>
+              <a:rPr lang="en-US" dirty="0">
+                <a:latin typeface="Calibri"/>
+                <a:ea typeface="Calibri"/>
+                <a:cs typeface="Calibri"/>
+              </a:rPr>
+              <a:t> value. You can interrogate this value to find out what </a:t>
+            </a:r>
+            <a:r>
+              <a:rPr lang="en-US" dirty="0" err="1">
+                <a:latin typeface="Calibri"/>
+                <a:ea typeface="Calibri"/>
+                <a:cs typeface="Calibri"/>
+              </a:rPr>
+              <a:t>PowerFX</a:t>
+            </a:r>
+            <a:r>
+              <a:rPr lang="en-US" dirty="0">
+                <a:latin typeface="Calibri"/>
+                <a:ea typeface="Calibri"/>
+                <a:cs typeface="Calibri"/>
+              </a:rPr>
+              <a:t> </a:t>
+            </a:r>
+            <a:r>
+              <a:rPr lang="en-US" dirty="0" err="1">
+                <a:latin typeface="Calibri"/>
+                <a:ea typeface="Calibri"/>
+                <a:cs typeface="Calibri"/>
+              </a:rPr>
+              <a:t>tyupe</a:t>
+            </a:r>
+            <a:r>
+              <a:rPr lang="en-US" dirty="0">
+                <a:latin typeface="Calibri"/>
+                <a:ea typeface="Calibri"/>
+                <a:cs typeface="Calibri"/>
+              </a:rPr>
+              <a:t> it is. You can also convert it to a generic .NET object type and do something like “</a:t>
+            </a:r>
+            <a:r>
+              <a:rPr lang="en-US" dirty="0" err="1">
+                <a:latin typeface="Calibri"/>
+                <a:ea typeface="Calibri"/>
+                <a:cs typeface="Calibri"/>
+              </a:rPr>
+              <a:t>ToString</a:t>
+            </a:r>
+            <a:r>
+              <a:rPr lang="en-US" dirty="0">
+                <a:latin typeface="Calibri"/>
+                <a:ea typeface="Calibri"/>
+                <a:cs typeface="Calibri"/>
+              </a:rPr>
+              <a:t>()” to get its textual </a:t>
+            </a:r>
+            <a:r>
+              <a:rPr lang="en-US" dirty="0" err="1">
+                <a:latin typeface="Calibri"/>
+                <a:ea typeface="Calibri"/>
+                <a:cs typeface="Calibri"/>
+              </a:rPr>
+              <a:t>representaion</a:t>
+            </a:r>
+            <a:r>
+              <a:rPr lang="en-US" dirty="0">
+                <a:latin typeface="Calibri"/>
+                <a:ea typeface="Calibri"/>
+                <a:cs typeface="Calibri"/>
+              </a:rPr>
+              <a:t>. You can use </a:t>
+            </a:r>
+            <a:r>
+              <a:rPr lang="en-US" dirty="0" err="1">
+                <a:latin typeface="Calibri"/>
+                <a:ea typeface="Calibri"/>
+                <a:cs typeface="Calibri"/>
+              </a:rPr>
+              <a:t>c#</a:t>
+            </a:r>
+            <a:r>
+              <a:rPr lang="en-US" dirty="0">
+                <a:latin typeface="Calibri"/>
+                <a:ea typeface="Calibri"/>
+                <a:cs typeface="Calibri"/>
+              </a:rPr>
+              <a:t> pattern matching to get the </a:t>
+            </a:r>
+            <a:r>
+              <a:rPr lang="en-US" dirty="0" err="1">
+                <a:latin typeface="Calibri"/>
+                <a:ea typeface="Calibri"/>
+                <a:cs typeface="Calibri"/>
+              </a:rPr>
+              <a:t>PowerFX</a:t>
+            </a:r>
+            <a:r>
+              <a:rPr lang="en-US" dirty="0">
+                <a:latin typeface="Calibri"/>
+                <a:ea typeface="Calibri"/>
+                <a:cs typeface="Calibri"/>
+              </a:rPr>
+              <a:t> type of the result object from the evaluation.</a:t>
+            </a:r>
+            <a:endParaRPr lang="en-US" dirty="0"/>
+          </a:p>
+          <a:p>
+            <a:endParaRPr lang="en-US" dirty="0">
+              <a:latin typeface="Calibri"/>
+              <a:ea typeface="Calibri"/>
+              <a:cs typeface="Calibri"/>
             </a:endParaRPr>
           </a:p>
           <a:p>
-            <a:pPr marL="0" marR="0" lvl="0" indent="0" algn="l" defTabSz="914400" rtl="0" eaLnBrk="1" fontAlgn="auto" latinLnBrk="0" hangingPunct="1">
-              <a:lnSpc>
-                <a:spcPct val="100000"/>
-              </a:lnSpc>
-              <a:spcBef>
-                <a:spcPts val="0"/>
-              </a:spcBef>
-              <a:spcAft>
-                <a:spcPts val="0"/>
-              </a:spcAft>
-              <a:buClrTx/>
-              <a:buSzTx/>
-              <a:buFontTx/>
-              <a:buNone/>
-              <a:tabLst/>
-              <a:defRPr/>
-            </a:pPr>
-            <a:r>
-              <a:rPr lang="en-US" sz="1200" b="0" kern="1200" dirty="0">
-                <a:solidFill>
-                  <a:schemeClr val="tx1"/>
-                </a:solidFill>
-                <a:effectLst/>
-                <a:latin typeface="+mn-lt"/>
-                <a:ea typeface="+mn-ea"/>
-                <a:cs typeface="+mn-cs"/>
+            <a:r>
+              <a:rPr lang="en-US" dirty="0">
+                <a:latin typeface="Calibri"/>
+                <a:ea typeface="Calibri"/>
+                <a:cs typeface="Calibri"/>
               </a:rPr>
-              <a:t>Lastly, you can also have functions that return a table. </a:t>
-            </a:r>
-          </a:p>
-          <a:p>
-            <a:pPr marL="228600" marR="0" lvl="0" indent="-228600" algn="l" defTabSz="914400" rtl="0" eaLnBrk="1" fontAlgn="auto" latinLnBrk="0" hangingPunct="1">
-              <a:lnSpc>
-                <a:spcPct val="100000"/>
-              </a:lnSpc>
-              <a:spcBef>
-                <a:spcPts val="0"/>
-              </a:spcBef>
-              <a:spcAft>
-                <a:spcPts val="0"/>
-              </a:spcAft>
-              <a:buClrTx/>
-              <a:buSzTx/>
-              <a:buFontTx/>
-              <a:buAutoNum type="arabicPeriod"/>
-              <a:tabLst/>
-              <a:defRPr/>
-            </a:pPr>
-            <a:r>
-              <a:rPr lang="en-US" sz="1200" b="0" kern="1200" dirty="0">
-                <a:solidFill>
-                  <a:schemeClr val="tx1"/>
-                </a:solidFill>
-                <a:effectLst/>
-                <a:latin typeface="+mn-lt"/>
-                <a:ea typeface="+mn-ea"/>
-                <a:cs typeface="+mn-cs"/>
+              <a:t>I wish I could tell you that the engine does no execute the formulas until evaluation, but as we will see when we </a:t>
+            </a:r>
+            <a:r>
+              <a:rPr lang="en-US" dirty="0" err="1">
+                <a:latin typeface="Calibri"/>
+                <a:ea typeface="Calibri"/>
+                <a:cs typeface="Calibri"/>
               </a:rPr>
-              <a:t>As before, we need to derive from </a:t>
-            </a:r>
-            <a:r>
-              <a:rPr lang="en-US" sz="1200" b="0" kern="1200" dirty="0" err="1">
-                <a:solidFill>
-                  <a:schemeClr val="tx1"/>
-                </a:solidFill>
-                <a:effectLst/>
-                <a:latin typeface="+mn-lt"/>
-                <a:ea typeface="+mn-ea"/>
-                <a:cs typeface="+mn-cs"/>
+              <a:t>defne</a:t>
+            </a:r>
+            <a:r>
+              <a:rPr lang="en-US" dirty="0">
+                <a:latin typeface="Calibri"/>
+                <a:ea typeface="Calibri"/>
+                <a:cs typeface="Calibri"/>
               </a:rPr>
-              <a:t>ReflectionFunction</a:t>
-            </a:r>
-            <a:r>
-              <a:rPr lang="en-US" sz="1200" b="0" kern="1200" dirty="0">
-                <a:solidFill>
-                  <a:schemeClr val="tx1"/>
-                </a:solidFill>
-                <a:effectLst/>
-                <a:latin typeface="+mn-lt"/>
-                <a:ea typeface="+mn-ea"/>
-                <a:cs typeface="+mn-cs"/>
+              <a:t> our own methods, there is some sort of execution during the </a:t>
+            </a:r>
+            <a:r>
+              <a:rPr lang="en-US" dirty="0" err="1">
+                <a:latin typeface="Calibri"/>
+                <a:ea typeface="Calibri"/>
+                <a:cs typeface="Calibri"/>
               </a:rPr>
-              <a:t>, but we need to define the type of our table using </a:t>
-            </a:r>
-            <a:r>
-              <a:rPr lang="en-US" sz="1200" b="0" kern="1200" dirty="0" err="1">
-                <a:solidFill>
-                  <a:schemeClr val="tx1"/>
-                </a:solidFill>
-                <a:effectLst/>
-                <a:latin typeface="+mn-lt"/>
-                <a:ea typeface="+mn-ea"/>
-                <a:cs typeface="+mn-cs"/>
+              <a:t>setForumal</a:t>
+            </a:r>
+            <a:r>
+              <a:rPr lang="en-US" dirty="0">
+                <a:latin typeface="Calibri"/>
+                <a:ea typeface="Calibri"/>
+                <a:cs typeface="Calibri"/>
               </a:rPr>
-              <a:t>TableType.Empty</a:t>
-            </a:r>
-            <a:r>
-              <a:rPr lang="en-US" sz="1200" b="0" kern="1200" dirty="0">
-                <a:solidFill>
-                  <a:schemeClr val="tx1"/>
-                </a:solidFill>
-                <a:effectLst/>
-                <a:latin typeface="+mn-lt"/>
-                <a:ea typeface="+mn-ea"/>
-                <a:cs typeface="+mn-cs"/>
-              </a:rPr>
-              <a:t>() and then call Add(…) to add each of the columns our returned table supports.</a:t>
-            </a:r>
-          </a:p>
-          <a:p>
-            <a:pPr marL="228600" marR="0" lvl="0" indent="-228600" algn="l" defTabSz="914400" rtl="0" eaLnBrk="1" fontAlgn="auto" latinLnBrk="0" hangingPunct="1">
-              <a:lnSpc>
-                <a:spcPct val="100000"/>
-              </a:lnSpc>
-              <a:spcBef>
-                <a:spcPts val="0"/>
-              </a:spcBef>
-              <a:spcAft>
-                <a:spcPts val="0"/>
-              </a:spcAft>
-              <a:buClrTx/>
-              <a:buSzTx/>
-              <a:buFontTx/>
-              <a:buAutoNum type="arabicPeriod"/>
-              <a:tabLst/>
-              <a:defRPr/>
-            </a:pPr>
-            <a:r>
-              <a:rPr lang="en-US" sz="1200" b="0" kern="1200" dirty="0">
-                <a:solidFill>
-                  <a:schemeClr val="tx1"/>
-                </a:solidFill>
-                <a:effectLst/>
-                <a:latin typeface="+mn-lt"/>
-                <a:ea typeface="+mn-ea"/>
-                <a:cs typeface="+mn-cs"/>
-              </a:rPr>
-              <a:t>We need to then define the record type for each row.</a:t>
-            </a:r>
-          </a:p>
-          <a:p>
-            <a:pPr marL="228600" marR="0" lvl="0" indent="-228600" algn="l" defTabSz="914400" rtl="0" eaLnBrk="1" fontAlgn="auto" latinLnBrk="0" hangingPunct="1">
-              <a:lnSpc>
-                <a:spcPct val="100000"/>
-              </a:lnSpc>
-              <a:spcBef>
-                <a:spcPts val="0"/>
-              </a:spcBef>
-              <a:spcAft>
-                <a:spcPts val="0"/>
-              </a:spcAft>
-              <a:buClrTx/>
-              <a:buSzTx/>
-              <a:buFontTx/>
-              <a:buAutoNum type="arabicPeriod"/>
-              <a:tabLst/>
-              <a:defRPr/>
-            </a:pPr>
-            <a:r>
-              <a:rPr lang="en-US" sz="1200" b="0" kern="1200" dirty="0">
-                <a:solidFill>
-                  <a:schemeClr val="tx1"/>
-                </a:solidFill>
-                <a:effectLst/>
-                <a:latin typeface="+mn-lt"/>
-                <a:ea typeface="+mn-ea"/>
-                <a:cs typeface="+mn-cs"/>
-              </a:rPr>
-              <a:t>In the execute method, we build each row as a record and then add it to a list.</a:t>
-            </a:r>
-          </a:p>
-          <a:p>
-            <a:pPr marL="228600" marR="0" lvl="0" indent="-228600" algn="l" defTabSz="914400" rtl="0" eaLnBrk="1" fontAlgn="auto" latinLnBrk="0" hangingPunct="1">
-              <a:lnSpc>
-                <a:spcPct val="100000"/>
-              </a:lnSpc>
-              <a:spcBef>
-                <a:spcPts val="0"/>
-              </a:spcBef>
-              <a:spcAft>
-                <a:spcPts val="0"/>
-              </a:spcAft>
-              <a:buClrTx/>
-              <a:buSzTx/>
-              <a:buFontTx/>
-              <a:buAutoNum type="arabicPeriod"/>
-              <a:tabLst/>
-              <a:defRPr/>
-            </a:pPr>
-            <a:r>
-              <a:rPr lang="en-US" sz="1200" b="0" kern="1200" dirty="0">
-                <a:solidFill>
-                  <a:schemeClr val="tx1"/>
-                </a:solidFill>
-                <a:effectLst/>
-                <a:latin typeface="+mn-lt"/>
-                <a:ea typeface="+mn-ea"/>
-                <a:cs typeface="+mn-cs"/>
-              </a:rPr>
-              <a:t>We can take that list and use </a:t>
-            </a:r>
-            <a:r>
-              <a:rPr lang="en-US" sz="1200" kern="1200" dirty="0" err="1">
-                <a:solidFill>
-                  <a:schemeClr val="tx1"/>
-                </a:solidFill>
-                <a:effectLst/>
-                <a:latin typeface="+mn-lt"/>
-                <a:ea typeface="+mn-ea"/>
-                <a:cs typeface="+mn-cs"/>
-              </a:rPr>
-              <a:t>FormulaValue.NewTable</a:t>
-            </a:r>
-            <a:r>
-              <a:rPr lang="en-US" sz="1200" kern="1200" dirty="0">
-                <a:solidFill>
-                  <a:schemeClr val="tx1"/>
-                </a:solidFill>
-                <a:effectLst/>
-                <a:latin typeface="+mn-lt"/>
-                <a:ea typeface="+mn-ea"/>
-                <a:cs typeface="+mn-cs"/>
-              </a:rPr>
-              <a:t>(</a:t>
-            </a:r>
-            <a:r>
-              <a:rPr lang="en-US" sz="1200" kern="1200" dirty="0" err="1">
-                <a:solidFill>
-                  <a:schemeClr val="tx1"/>
-                </a:solidFill>
-                <a:effectLst/>
-                <a:latin typeface="+mn-lt"/>
-                <a:ea typeface="+mn-ea"/>
-                <a:cs typeface="+mn-cs"/>
-              </a:rPr>
-              <a:t>RecordType</a:t>
-            </a:r>
-            <a:r>
-              <a:rPr lang="en-US" sz="1200" kern="1200" dirty="0">
-                <a:solidFill>
-                  <a:schemeClr val="tx1"/>
-                </a:solidFill>
-                <a:effectLst/>
-                <a:latin typeface="+mn-lt"/>
-                <a:ea typeface="+mn-ea"/>
-                <a:cs typeface="+mn-cs"/>
-              </a:rPr>
-              <a:t>, rows) to build the table value.</a:t>
-            </a:r>
-            <a:endParaRPr lang="en-US" sz="1200" b="0" kern="1200" dirty="0">
-              <a:solidFill>
-                <a:schemeClr val="tx1"/>
-              </a:solidFill>
-              <a:effectLst/>
-              <a:latin typeface="+mn-lt"/>
-              <a:ea typeface="+mn-ea"/>
-              <a:cs typeface="+mn-cs"/>
+              <a:t> method.</a:t>
+            </a:r>
+          </a:p>
+          <a:p>
+            <a:endParaRPr lang="en-US" dirty="0">
+              <a:latin typeface="Calibri"/>
+              <a:ea typeface="Calibri"/>
+              <a:cs typeface="Calibri"/>
             </a:endParaRPr>
           </a:p>
           <a:p>
-            <a:pPr marL="228600" marR="0" lvl="0" indent="-228600" algn="l" defTabSz="914400" rtl="0" eaLnBrk="1" fontAlgn="auto" latinLnBrk="0" hangingPunct="1">
-              <a:lnSpc>
-                <a:spcPct val="100000"/>
-              </a:lnSpc>
-              <a:spcBef>
-                <a:spcPts val="0"/>
-              </a:spcBef>
-              <a:spcAft>
-                <a:spcPts val="0"/>
-              </a:spcAft>
-              <a:buClrTx/>
-              <a:buSzTx/>
-              <a:buFontTx/>
-              <a:buAutoNum type="arabicPeriod"/>
-              <a:tabLst/>
-              <a:defRPr/>
-            </a:pPr>
-            <a:r>
-              <a:rPr lang="en-US" sz="1200" b="0" kern="1200" dirty="0">
-                <a:solidFill>
-                  <a:schemeClr val="tx1"/>
-                </a:solidFill>
-                <a:effectLst/>
-                <a:latin typeface="+mn-lt"/>
-                <a:ea typeface="+mn-ea"/>
-                <a:cs typeface="+mn-cs"/>
-              </a:rPr>
-              <a:t>You can also define your own </a:t>
-            </a:r>
-            <a:r>
-              <a:rPr lang="en-US" sz="1200" b="0" kern="1200" dirty="0" err="1">
-                <a:solidFill>
-                  <a:schemeClr val="tx1"/>
-                </a:solidFill>
-                <a:effectLst/>
-                <a:latin typeface="+mn-lt"/>
-                <a:ea typeface="+mn-ea"/>
-                <a:cs typeface="+mn-cs"/>
-              </a:rPr>
-              <a:t>TableValue</a:t>
-            </a:r>
-            <a:r>
-              <a:rPr lang="en-US" sz="1200" b="0" kern="1200" dirty="0">
-                <a:solidFill>
-                  <a:schemeClr val="tx1"/>
-                </a:solidFill>
-                <a:effectLst/>
-                <a:latin typeface="+mn-lt"/>
-                <a:ea typeface="+mn-ea"/>
-                <a:cs typeface="+mn-cs"/>
-              </a:rPr>
-              <a:t> type, but that is out of scope of this session.</a:t>
-            </a:r>
-          </a:p>
-          <a:p>
-            <a:pPr marL="228600" marR="0" lvl="0" indent="-228600" algn="l" defTabSz="914400" rtl="0" eaLnBrk="1" fontAlgn="auto" latinLnBrk="0" hangingPunct="1">
-              <a:lnSpc>
-                <a:spcPct val="100000"/>
-              </a:lnSpc>
-              <a:spcBef>
-                <a:spcPts val="0"/>
-              </a:spcBef>
-              <a:spcAft>
-                <a:spcPts val="0"/>
-              </a:spcAft>
-              <a:buClrTx/>
-              <a:buSzTx/>
-              <a:buFontTx/>
-              <a:buAutoNum type="arabicPeriod"/>
-              <a:tabLst/>
-              <a:defRPr/>
-            </a:pPr>
-            <a:endParaRPr lang="en-US" sz="1200" b="0" kern="1200" dirty="0">
-              <a:solidFill>
-                <a:schemeClr val="tx1"/>
-              </a:solidFill>
-              <a:effectLst/>
-              <a:latin typeface="+mn-lt"/>
-              <a:ea typeface="+mn-ea"/>
-              <a:cs typeface="+mn-cs"/>
+            <a:endParaRPr lang="en-US" dirty="0">
+              <a:latin typeface="Calibri"/>
+              <a:ea typeface="Calibri"/>
+              <a:cs typeface="Calibri"/>
             </a:endParaRPr>
           </a:p>
           <a:p>
-            <a:pPr marL="0" marR="0" lvl="0" indent="0" algn="l" defTabSz="914400" rtl="0" eaLnBrk="1" fontAlgn="auto" latinLnBrk="0" hangingPunct="1">
-              <a:lnSpc>
-                <a:spcPct val="100000"/>
-              </a:lnSpc>
-              <a:spcBef>
-                <a:spcPts val="0"/>
-              </a:spcBef>
-              <a:spcAft>
-                <a:spcPts val="0"/>
-              </a:spcAft>
-              <a:buClrTx/>
-              <a:buSzTx/>
-              <a:buFontTx/>
-              <a:buNone/>
-              <a:tabLst/>
-              <a:defRPr/>
-            </a:pPr>
-            <a:r>
-              <a:rPr lang="en-US" sz="1200" b="0" kern="1200" dirty="0">
-                <a:solidFill>
-                  <a:schemeClr val="tx1"/>
-                </a:solidFill>
-                <a:effectLst/>
-                <a:latin typeface="+mn-lt"/>
-                <a:ea typeface="+mn-ea"/>
-                <a:cs typeface="+mn-cs"/>
-              </a:rPr>
-              <a:t>So far he have seen functions that operate </a:t>
-            </a:r>
-            <a:r>
-              <a:rPr lang="en-US" sz="1200" b="0" kern="1200" dirty="0" err="1">
-                <a:solidFill>
-                  <a:schemeClr val="tx1"/>
-                </a:solidFill>
-                <a:effectLst/>
-                <a:latin typeface="+mn-lt"/>
-                <a:ea typeface="+mn-ea"/>
-                <a:cs typeface="+mn-cs"/>
-              </a:rPr>
-              <a:t>synchrounsly</a:t>
-            </a:r>
-            <a:r>
-              <a:rPr lang="en-US" sz="1200" b="0" kern="1200" dirty="0">
-                <a:solidFill>
-                  <a:schemeClr val="tx1"/>
-                </a:solidFill>
-                <a:effectLst/>
-                <a:latin typeface="+mn-lt"/>
-                <a:ea typeface="+mn-ea"/>
-                <a:cs typeface="+mn-cs"/>
-              </a:rPr>
-              <a:t>, what if you need async? First, I would like to give a general warning that is based on my experience and the learning points from others: when it comes to business logic, if your code (whether is C# </a:t>
-            </a:r>
-            <a:r>
-              <a:rPr lang="en-US" sz="1200" b="0" kern="1200">
-                <a:solidFill>
-                  <a:schemeClr val="tx1"/>
-                </a:solidFill>
-                <a:effectLst/>
-                <a:latin typeface="+mn-lt"/>
-                <a:ea typeface="+mn-ea"/>
-                <a:cs typeface="+mn-cs"/>
-              </a:rPr>
-              <a:t>or something </a:t>
-            </a:r>
-            <a:r>
-              <a:rPr lang="en-US" sz="1200" b="0" kern="1200" dirty="0">
-                <a:solidFill>
-                  <a:schemeClr val="tx1"/>
-                </a:solidFill>
-                <a:effectLst/>
-                <a:latin typeface="+mn-lt"/>
-                <a:ea typeface="+mn-ea"/>
-                <a:cs typeface="+mn-cs"/>
-              </a:rPr>
-              <a:t>else) needs async operations, you might be introducing something that does not belong to the business logic of your app. Async code </a:t>
-            </a:r>
-            <a:r>
-              <a:rPr lang="en-US" sz="1200" b="0" i="1" kern="1200" dirty="0" err="1">
-                <a:solidFill>
-                  <a:schemeClr val="tx1"/>
-                </a:solidFill>
-                <a:effectLst/>
-                <a:latin typeface="+mn-lt"/>
-                <a:ea typeface="+mn-ea"/>
-                <a:cs typeface="+mn-cs"/>
-              </a:rPr>
-              <a:t>susually</a:t>
-            </a:r>
-            <a:r>
-              <a:rPr lang="en-US" sz="1200" b="0" i="0" kern="1200" dirty="0">
-                <a:solidFill>
-                  <a:schemeClr val="tx1"/>
-                </a:solidFill>
-                <a:effectLst/>
-                <a:latin typeface="+mn-lt"/>
-                <a:ea typeface="+mn-ea"/>
-                <a:cs typeface="+mn-cs"/>
-              </a:rPr>
-              <a:t> (but not </a:t>
-            </a:r>
-            <a:r>
-              <a:rPr lang="en-US" sz="1200" b="0" i="0" kern="1200" dirty="0" err="1">
-                <a:solidFill>
-                  <a:schemeClr val="tx1"/>
-                </a:solidFill>
-                <a:effectLst/>
-                <a:latin typeface="+mn-lt"/>
-                <a:ea typeface="+mn-ea"/>
-                <a:cs typeface="+mn-cs"/>
-              </a:rPr>
-              <a:t>walways</a:t>
-            </a:r>
-            <a:r>
-              <a:rPr lang="en-US" sz="1200" b="0" i="0" kern="1200" dirty="0">
-                <a:solidFill>
-                  <a:schemeClr val="tx1"/>
-                </a:solidFill>
-                <a:effectLst/>
-                <a:latin typeface="+mn-lt"/>
-                <a:ea typeface="+mn-ea"/>
-                <a:cs typeface="+mn-cs"/>
-              </a:rPr>
-              <a:t>) mean trying to reach to an external dependency. We want our business code to be </a:t>
-            </a:r>
-            <a:r>
-              <a:rPr lang="en-US" sz="1200" b="0" i="0" kern="1200" dirty="0" err="1">
-                <a:solidFill>
-                  <a:schemeClr val="tx1"/>
-                </a:solidFill>
-                <a:effectLst/>
-                <a:latin typeface="+mn-lt"/>
-                <a:ea typeface="+mn-ea"/>
-                <a:cs typeface="+mn-cs"/>
-              </a:rPr>
-              <a:t>dependcy</a:t>
-            </a:r>
-            <a:r>
-              <a:rPr lang="en-US" sz="1200" b="0" i="0" kern="1200" dirty="0">
-                <a:solidFill>
-                  <a:schemeClr val="tx1"/>
-                </a:solidFill>
-                <a:effectLst/>
-                <a:latin typeface="+mn-lt"/>
-                <a:ea typeface="+mn-ea"/>
-                <a:cs typeface="+mn-cs"/>
-              </a:rPr>
-              <a:t> free in the sense that any input comes from a </a:t>
-            </a:r>
-            <a:r>
-              <a:rPr lang="en-US" sz="1200" b="0" i="0" kern="1200" dirty="0" err="1">
-                <a:solidFill>
-                  <a:schemeClr val="tx1"/>
-                </a:solidFill>
-                <a:effectLst/>
-                <a:latin typeface="+mn-lt"/>
-                <a:ea typeface="+mn-ea"/>
-                <a:cs typeface="+mn-cs"/>
-              </a:rPr>
-              <a:t>regularinput</a:t>
-            </a:r>
-            <a:r>
-              <a:rPr lang="en-US" sz="1200" b="0" i="0" kern="1200" dirty="0">
-                <a:solidFill>
-                  <a:schemeClr val="tx1"/>
-                </a:solidFill>
-                <a:effectLst/>
-                <a:latin typeface="+mn-lt"/>
-                <a:ea typeface="+mn-ea"/>
-                <a:cs typeface="+mn-cs"/>
-              </a:rPr>
-              <a:t> parameter (the data itself could be obtained </a:t>
-            </a:r>
-            <a:r>
-              <a:rPr lang="en-US" sz="1200" b="0" i="0" kern="1200" dirty="0" err="1">
-                <a:solidFill>
-                  <a:schemeClr val="tx1"/>
-                </a:solidFill>
-                <a:effectLst/>
-                <a:latin typeface="+mn-lt"/>
-                <a:ea typeface="+mn-ea"/>
-                <a:cs typeface="+mn-cs"/>
-              </a:rPr>
-              <a:t>asyncrhounously</a:t>
-            </a:r>
-            <a:r>
-              <a:rPr lang="en-US" sz="1200" b="0" i="0" kern="1200" dirty="0">
-                <a:solidFill>
-                  <a:schemeClr val="tx1"/>
-                </a:solidFill>
-                <a:effectLst/>
-                <a:latin typeface="+mn-lt"/>
-                <a:ea typeface="+mn-ea"/>
-                <a:cs typeface="+mn-cs"/>
-              </a:rPr>
-              <a:t> before the business logic in invoked), same thing with outputs, we do not want our business logic to be the one writing to for example a </a:t>
-            </a:r>
-            <a:r>
-              <a:rPr lang="en-US" sz="1200" b="0" i="0" kern="1200" dirty="0" err="1">
-                <a:solidFill>
-                  <a:schemeClr val="tx1"/>
-                </a:solidFill>
-                <a:effectLst/>
-                <a:latin typeface="+mn-lt"/>
-                <a:ea typeface="+mn-ea"/>
-                <a:cs typeface="+mn-cs"/>
-              </a:rPr>
-              <a:t>db</a:t>
-            </a:r>
-            <a:r>
-              <a:rPr lang="en-US" sz="1200" b="0" i="0" kern="1200" dirty="0">
-                <a:solidFill>
-                  <a:schemeClr val="tx1"/>
-                </a:solidFill>
-                <a:effectLst/>
-                <a:latin typeface="+mn-lt"/>
-                <a:ea typeface="+mn-ea"/>
-                <a:cs typeface="+mn-cs"/>
-              </a:rPr>
-              <a:t> or file but rather to prepare the data for whatever integration code is the one putting that final form of the data into a </a:t>
-            </a:r>
-            <a:r>
-              <a:rPr lang="en-US" sz="1200" b="0" i="0" kern="1200" dirty="0" err="1">
-                <a:solidFill>
-                  <a:schemeClr val="tx1"/>
-                </a:solidFill>
-                <a:effectLst/>
-                <a:latin typeface="+mn-lt"/>
-                <a:ea typeface="+mn-ea"/>
-                <a:cs typeface="+mn-cs"/>
-              </a:rPr>
-              <a:t>db</a:t>
-            </a:r>
-            <a:r>
-              <a:rPr lang="en-US" sz="1200" b="0" i="0" kern="1200" dirty="0">
-                <a:solidFill>
-                  <a:schemeClr val="tx1"/>
-                </a:solidFill>
-                <a:effectLst/>
-                <a:latin typeface="+mn-lt"/>
-                <a:ea typeface="+mn-ea"/>
-                <a:cs typeface="+mn-cs"/>
-              </a:rPr>
-              <a:t> or file.</a:t>
-            </a:r>
-          </a:p>
-          <a:p>
-            <a:pPr marL="0" marR="0" lvl="0" indent="0" algn="l" defTabSz="914400" rtl="0" eaLnBrk="1" fontAlgn="auto" latinLnBrk="0" hangingPunct="1">
-              <a:lnSpc>
-                <a:spcPct val="100000"/>
-              </a:lnSpc>
-              <a:spcBef>
-                <a:spcPts val="0"/>
-              </a:spcBef>
-              <a:spcAft>
-                <a:spcPts val="0"/>
-              </a:spcAft>
-              <a:buClrTx/>
-              <a:buSzTx/>
-              <a:buFontTx/>
-              <a:buNone/>
-              <a:tabLst/>
-              <a:defRPr/>
-            </a:pPr>
-            <a:endParaRPr lang="en-US" sz="1200" b="0" i="0" kern="1200" dirty="0">
-              <a:solidFill>
-                <a:schemeClr val="tx1"/>
-              </a:solidFill>
-              <a:effectLst/>
-              <a:latin typeface="+mn-lt"/>
-              <a:ea typeface="+mn-ea"/>
-              <a:cs typeface="+mn-cs"/>
+            <a:endParaRPr lang="en-US" dirty="0">
+              <a:latin typeface="Calibri"/>
+              <a:ea typeface="Calibri"/>
+              <a:cs typeface="Calibri"/>
             </a:endParaRPr>
           </a:p>
           <a:p>
-            <a:pPr marL="0" marR="0" lvl="0" indent="0" algn="l" defTabSz="914400" rtl="0" eaLnBrk="1" fontAlgn="auto" latinLnBrk="0" hangingPunct="1">
-              <a:lnSpc>
-                <a:spcPct val="100000"/>
-              </a:lnSpc>
-              <a:spcBef>
-                <a:spcPts val="0"/>
-              </a:spcBef>
-              <a:spcAft>
-                <a:spcPts val="0"/>
-              </a:spcAft>
-              <a:buClrTx/>
-              <a:buSzTx/>
-              <a:buFontTx/>
-              <a:buNone/>
-              <a:tabLst/>
-              <a:defRPr/>
-            </a:pPr>
-            <a:r>
-              <a:rPr lang="en-US" sz="1200" b="0" i="0" kern="1200" dirty="0">
-                <a:solidFill>
-                  <a:schemeClr val="tx1"/>
-                </a:solidFill>
-                <a:effectLst/>
-                <a:latin typeface="+mn-lt"/>
-                <a:ea typeface="+mn-ea"/>
-                <a:cs typeface="+mn-cs"/>
-              </a:rPr>
-              <a:t>To make </a:t>
-            </a:r>
-            <a:r>
-              <a:rPr lang="en-US" sz="1200" b="0" i="0" kern="1200" dirty="0" err="1">
-                <a:solidFill>
-                  <a:schemeClr val="tx1"/>
-                </a:solidFill>
-                <a:effectLst/>
-                <a:latin typeface="+mn-lt"/>
-                <a:ea typeface="+mn-ea"/>
-                <a:cs typeface="+mn-cs"/>
-              </a:rPr>
-              <a:t>aysnc</a:t>
-            </a:r>
-            <a:r>
-              <a:rPr lang="en-US" sz="1200" b="0" i="0" kern="1200" dirty="0">
-                <a:solidFill>
-                  <a:schemeClr val="tx1"/>
-                </a:solidFill>
-                <a:effectLst/>
-                <a:latin typeface="+mn-lt"/>
-                <a:ea typeface="+mn-ea"/>
-                <a:cs typeface="+mn-cs"/>
-              </a:rPr>
-              <a:t> functions, you just need to modify the Execute method to return </a:t>
-            </a:r>
-            <a:r>
-              <a:rPr lang="en-US" sz="1200" b="0" kern="1200" dirty="0">
-                <a:solidFill>
-                  <a:schemeClr val="tx1"/>
-                </a:solidFill>
-                <a:effectLst/>
-                <a:latin typeface="+mn-lt"/>
-                <a:ea typeface="+mn-ea"/>
-                <a:cs typeface="+mn-cs"/>
-              </a:rPr>
-              <a:t>Task&lt;</a:t>
-            </a:r>
-            <a:r>
-              <a:rPr lang="en-US" sz="1200" b="0" kern="1200" dirty="0" err="1">
-                <a:solidFill>
-                  <a:schemeClr val="tx1"/>
-                </a:solidFill>
-                <a:effectLst/>
-                <a:latin typeface="+mn-lt"/>
-                <a:ea typeface="+mn-ea"/>
-                <a:cs typeface="+mn-cs"/>
-              </a:rPr>
-              <a:t>FormulaValue</a:t>
-            </a:r>
-            <a:r>
-              <a:rPr lang="en-US" sz="1200" b="0" kern="1200" dirty="0">
-                <a:solidFill>
-                  <a:schemeClr val="tx1"/>
-                </a:solidFill>
-                <a:effectLst/>
-                <a:latin typeface="+mn-lt"/>
-                <a:ea typeface="+mn-ea"/>
-                <a:cs typeface="+mn-cs"/>
-              </a:rPr>
-              <a:t>&gt; and must accept a cancellation token as your last param. Within the </a:t>
-            </a:r>
-            <a:r>
-              <a:rPr lang="en-US" sz="1200" b="0" kern="1200" dirty="0" err="1">
-                <a:solidFill>
-                  <a:schemeClr val="tx1"/>
-                </a:solidFill>
-                <a:effectLst/>
-                <a:latin typeface="+mn-lt"/>
-                <a:ea typeface="+mn-ea"/>
-                <a:cs typeface="+mn-cs"/>
-              </a:rPr>
-              <a:t>bodyof</a:t>
-            </a:r>
-            <a:r>
-              <a:rPr lang="en-US" sz="1200" b="0" kern="1200" dirty="0">
-                <a:solidFill>
-                  <a:schemeClr val="tx1"/>
-                </a:solidFill>
-                <a:effectLst/>
-                <a:latin typeface="+mn-lt"/>
-                <a:ea typeface="+mn-ea"/>
-                <a:cs typeface="+mn-cs"/>
-              </a:rPr>
-              <a:t> the </a:t>
-            </a:r>
-            <a:r>
-              <a:rPr lang="en-US" sz="1200" b="0" kern="1200" dirty="0" err="1">
-                <a:solidFill>
-                  <a:schemeClr val="tx1"/>
-                </a:solidFill>
-                <a:effectLst/>
-                <a:latin typeface="+mn-lt"/>
-                <a:ea typeface="+mn-ea"/>
-                <a:cs typeface="+mn-cs"/>
-              </a:rPr>
-              <a:t>metodyou</a:t>
-            </a:r>
-            <a:r>
-              <a:rPr lang="en-US" sz="1200" b="0" kern="1200" dirty="0">
-                <a:solidFill>
-                  <a:schemeClr val="tx1"/>
-                </a:solidFill>
-                <a:effectLst/>
-                <a:latin typeface="+mn-lt"/>
-                <a:ea typeface="+mn-ea"/>
-                <a:cs typeface="+mn-cs"/>
-              </a:rPr>
-              <a:t> can then do whatever normal async </a:t>
-            </a:r>
-            <a:r>
-              <a:rPr lang="en-US" sz="1200" b="0" kern="1200" dirty="0" err="1">
-                <a:solidFill>
-                  <a:schemeClr val="tx1"/>
-                </a:solidFill>
-                <a:effectLst/>
-                <a:latin typeface="+mn-lt"/>
-                <a:ea typeface="+mn-ea"/>
-                <a:cs typeface="+mn-cs"/>
-              </a:rPr>
-              <a:t>ogic</a:t>
-            </a:r>
-            <a:r>
-              <a:rPr lang="en-US" sz="1200" b="0" kern="1200" dirty="0">
-                <a:solidFill>
-                  <a:schemeClr val="tx1"/>
-                </a:solidFill>
-                <a:effectLst/>
-                <a:latin typeface="+mn-lt"/>
-                <a:ea typeface="+mn-ea"/>
-                <a:cs typeface="+mn-cs"/>
-              </a:rPr>
-              <a:t> you need. In this example, Alexandria is calling an </a:t>
-            </a:r>
-            <a:r>
-              <a:rPr lang="en-US" sz="1200" b="0" kern="1200" dirty="0" err="1">
-                <a:solidFill>
-                  <a:schemeClr val="tx1"/>
-                </a:solidFill>
-                <a:effectLst/>
-                <a:latin typeface="+mn-lt"/>
-                <a:ea typeface="+mn-ea"/>
-                <a:cs typeface="+mn-cs"/>
-              </a:rPr>
-              <a:t>ML.Net</a:t>
-            </a:r>
-            <a:r>
-              <a:rPr lang="en-US" sz="1200" b="0" kern="1200" dirty="0">
-                <a:solidFill>
-                  <a:schemeClr val="tx1"/>
-                </a:solidFill>
-                <a:effectLst/>
-                <a:latin typeface="+mn-lt"/>
-                <a:ea typeface="+mn-ea"/>
-                <a:cs typeface="+mn-cs"/>
-              </a:rPr>
-              <a:t> model to determine the sentiment of a string.</a:t>
-            </a:r>
+            <a:endParaRPr lang="en-US" dirty="0">
+              <a:latin typeface="Calibri"/>
+              <a:ea typeface="Calibri"/>
+              <a:cs typeface="Calibri"/>
+            </a:endParaRPr>
           </a:p>
         </p:txBody>
       </p:sp>
@@ -6410,7 +4907,7 @@
           <a:p>
             <a:fld id="{A3FADD39-AB8A-4278-99D9-40CD8D745BA1}" type="slidenum">
               <a:rPr lang="en-US" smtClean="0"/>
-              <a:t>17</a:t>
+              <a:t>16</a:t>
             </a:fld>
             <a:endParaRPr lang="en-US"/>
           </a:p>
@@ -6419,7 +4916,7 @@
     </p:spTree>
     <p:extLst>
       <p:ext uri="{BB962C8B-B14F-4D97-AF65-F5344CB8AC3E}">
-        <p14:creationId xmlns:p14="http://schemas.microsoft.com/office/powerpoint/2010/main" val="2157664933"/>
+        <p14:creationId xmlns:p14="http://schemas.microsoft.com/office/powerpoint/2010/main" val="2025954793"/>
       </p:ext>
     </p:extLst>
   </p:cSld>
@@ -6473,7 +4970,1592 @@
           <a:bodyPr/>
           <a:lstStyle/>
           <a:p>
+            <a:r>
+              <a:rPr lang="en-US" dirty="0"/>
+              <a:t>Let’s pretend the BU of </a:t>
+            </a:r>
+            <a:r>
+              <a:rPr lang="en-US" dirty="0" err="1"/>
+              <a:t>Pizzas’R”Us</a:t>
+            </a:r>
+            <a:r>
+              <a:rPr lang="en-US" dirty="0"/>
+              <a:t> comes back to Alexandria and say: “ this is really awesome that we can write the business rules in </a:t>
+            </a:r>
+            <a:r>
+              <a:rPr lang="en-US" dirty="0" err="1"/>
+              <a:t>powerfx</a:t>
+            </a:r>
+            <a:r>
+              <a:rPr lang="en-US" dirty="0"/>
+              <a:t>, but we would like to do things that the </a:t>
+            </a:r>
+            <a:r>
+              <a:rPr lang="en-US" dirty="0" err="1"/>
+              <a:t>PowerFX</a:t>
+            </a:r>
+            <a:r>
+              <a:rPr lang="en-US" dirty="0"/>
+              <a:t> version you gave us cannot do Business days math”. Alexandria then jumps into research mode to see if there is a way to extend the Interpreter with custom </a:t>
+            </a:r>
+            <a:r>
+              <a:rPr lang="en-US" dirty="0" err="1"/>
+              <a:t>PowerFX</a:t>
+            </a:r>
+            <a:r>
+              <a:rPr lang="en-US" dirty="0"/>
+              <a:t> functions implemented in </a:t>
+            </a:r>
+            <a:r>
+              <a:rPr lang="en-US" dirty="0" err="1"/>
+              <a:t>.net</a:t>
+            </a:r>
+            <a:r>
+              <a:rPr lang="en-US" dirty="0"/>
+              <a:t>. With the help of co-pilot, Her </a:t>
+            </a:r>
+            <a:r>
+              <a:rPr lang="en-US" dirty="0" err="1"/>
+              <a:t>reasearch</a:t>
+            </a:r>
+            <a:r>
+              <a:rPr lang="en-US" dirty="0"/>
+              <a:t> of the repo takes her to the some samples in the official repo. Using those examples, she figures out the following:</a:t>
+            </a:r>
+          </a:p>
+          <a:p>
             <a:endParaRPr lang="en-US" dirty="0"/>
+          </a:p>
+          <a:p>
+            <a:r>
+              <a:rPr lang="en-US" dirty="0"/>
+              <a:t>To create a custom function for the interpreter, we must:</a:t>
+            </a:r>
+          </a:p>
+          <a:p>
+            <a:endParaRPr lang="en-US" dirty="0"/>
+          </a:p>
+          <a:p>
+            <a:pPr marL="228600" indent="-228600">
+              <a:buAutoNum type="arabicPeriod"/>
+            </a:pPr>
+            <a:r>
+              <a:rPr lang="en-US" dirty="0"/>
+              <a:t>Create a new class that derives from </a:t>
+            </a:r>
+            <a:r>
+              <a:rPr lang="en-US" dirty="0" err="1"/>
+              <a:t>ReflectionFunction</a:t>
+            </a:r>
+            <a:endParaRPr lang="en-US" dirty="0"/>
+          </a:p>
+          <a:p>
+            <a:pPr marL="228600" indent="-228600">
+              <a:buAutoNum type="arabicPeriod"/>
+            </a:pPr>
+            <a:r>
+              <a:rPr lang="en-US" dirty="0"/>
+              <a:t>Need to pass to the base constructor: name of the function, return type, types of parameters.</a:t>
+            </a:r>
+          </a:p>
+          <a:p>
+            <a:pPr marL="685800" lvl="1" indent="-228600">
+              <a:buAutoNum type="arabicPeriod"/>
+            </a:pPr>
+            <a:r>
+              <a:rPr lang="en-US" dirty="0"/>
+              <a:t>In this particular example, for our business days add function, we pass the name, the return type of date, and we pass an array with 2 elements specifying that our first parameter is of type date, and the second parameter is a number.</a:t>
+            </a:r>
+          </a:p>
+          <a:p>
+            <a:pPr marL="228600" lvl="0" indent="-228600">
+              <a:buAutoNum type="arabicPeriod"/>
+            </a:pPr>
+            <a:r>
+              <a:rPr lang="en-US" dirty="0"/>
+              <a:t>Need to implement the “Execute” method. Notice this is not an override method. The engine will look it up by magic name. The method must return the </a:t>
+            </a:r>
+            <a:r>
+              <a:rPr lang="en-US" dirty="0" err="1"/>
+              <a:t>generica</a:t>
+            </a:r>
+            <a:r>
+              <a:rPr lang="en-US" dirty="0"/>
+              <a:t> </a:t>
+            </a:r>
+            <a:r>
+              <a:rPr lang="en-US" dirty="0" err="1"/>
+              <a:t>FormulaValue</a:t>
+            </a:r>
+            <a:r>
+              <a:rPr lang="en-US" dirty="0"/>
+              <a:t> type. The parameters must be the parameters your functions takes, in this case our starting date and the number of days to add.</a:t>
+            </a:r>
+          </a:p>
+          <a:p>
+            <a:pPr marL="228600" lvl="0" indent="-228600">
+              <a:buAutoNum type="arabicPeriod"/>
+            </a:pPr>
+            <a:r>
+              <a:rPr lang="en-US" dirty="0"/>
+              <a:t>Within the method we can convert the parameters to </a:t>
+            </a:r>
+            <a:r>
+              <a:rPr lang="en-US" dirty="0" err="1"/>
+              <a:t>.net</a:t>
+            </a:r>
+            <a:r>
+              <a:rPr lang="en-US" dirty="0"/>
+              <a:t> values using “.Value”. In the body you can then do whatever you need to do in the </a:t>
+            </a:r>
+            <a:r>
+              <a:rPr lang="en-US" dirty="0" err="1"/>
+              <a:t>.net</a:t>
+            </a:r>
+            <a:r>
+              <a:rPr lang="en-US" dirty="0"/>
+              <a:t> world to come up with the return value, in this case, we are writing normal </a:t>
+            </a:r>
+            <a:r>
+              <a:rPr lang="en-US" dirty="0" err="1"/>
+              <a:t>.net</a:t>
+            </a:r>
+            <a:r>
+              <a:rPr lang="en-US" dirty="0"/>
+              <a:t> code to add business days to a date using a popular </a:t>
+            </a:r>
+            <a:r>
+              <a:rPr lang="en-US" dirty="0" err="1"/>
+              <a:t>nuget</a:t>
+            </a:r>
+            <a:r>
+              <a:rPr lang="en-US" dirty="0"/>
+              <a:t> library for holidays.</a:t>
+            </a:r>
+          </a:p>
+          <a:p>
+            <a:pPr marL="228600" marR="0" lvl="0" indent="-228600" algn="l" defTabSz="914400" rtl="0" eaLnBrk="1" fontAlgn="auto" latinLnBrk="0" hangingPunct="1">
+              <a:lnSpc>
+                <a:spcPct val="100000"/>
+              </a:lnSpc>
+              <a:spcBef>
+                <a:spcPts val="0"/>
+              </a:spcBef>
+              <a:spcAft>
+                <a:spcPts val="0"/>
+              </a:spcAft>
+              <a:buClrTx/>
+              <a:buSzTx/>
+              <a:buFontTx/>
+              <a:buAutoNum type="arabicPeriod"/>
+              <a:tabLst/>
+              <a:defRPr/>
+            </a:pPr>
+            <a:r>
+              <a:rPr lang="en-US" dirty="0"/>
+              <a:t>To return the value, use </a:t>
+            </a:r>
+            <a:r>
+              <a:rPr lang="en-US" sz="1200" b="0" kern="1200" dirty="0" err="1">
+                <a:solidFill>
+                  <a:schemeClr val="tx1"/>
+                </a:solidFill>
+                <a:effectLst/>
+                <a:latin typeface="+mn-lt"/>
+                <a:ea typeface="+mn-ea"/>
+                <a:cs typeface="+mn-cs"/>
+              </a:rPr>
+              <a:t>FormulaValue.New</a:t>
+            </a:r>
+            <a:r>
+              <a:rPr lang="en-US" sz="1200" b="0" kern="1200" dirty="0">
+                <a:solidFill>
+                  <a:schemeClr val="tx1"/>
+                </a:solidFill>
+                <a:effectLst/>
+                <a:latin typeface="+mn-lt"/>
+                <a:ea typeface="+mn-ea"/>
+                <a:cs typeface="+mn-cs"/>
+              </a:rPr>
+              <a:t> to convert the </a:t>
+            </a:r>
+            <a:r>
+              <a:rPr lang="en-US" sz="1200" b="0" kern="1200" dirty="0" err="1">
+                <a:solidFill>
+                  <a:schemeClr val="tx1"/>
+                </a:solidFill>
+                <a:effectLst/>
+                <a:latin typeface="+mn-lt"/>
+                <a:ea typeface="+mn-ea"/>
+                <a:cs typeface="+mn-cs"/>
+              </a:rPr>
+              <a:t>.net</a:t>
+            </a:r>
+            <a:r>
+              <a:rPr lang="en-US" sz="1200" b="0" kern="1200" dirty="0">
+                <a:solidFill>
+                  <a:schemeClr val="tx1"/>
+                </a:solidFill>
+                <a:effectLst/>
+                <a:latin typeface="+mn-lt"/>
+                <a:ea typeface="+mn-ea"/>
+                <a:cs typeface="+mn-cs"/>
+              </a:rPr>
+              <a:t> value to an object the Interpreter can use.</a:t>
+            </a:r>
+          </a:p>
+          <a:p>
+            <a:pPr marL="228600" marR="0" lvl="0" indent="-228600" algn="l" defTabSz="914400" rtl="0" eaLnBrk="1" fontAlgn="auto" latinLnBrk="0" hangingPunct="1">
+              <a:lnSpc>
+                <a:spcPct val="100000"/>
+              </a:lnSpc>
+              <a:spcBef>
+                <a:spcPts val="0"/>
+              </a:spcBef>
+              <a:spcAft>
+                <a:spcPts val="0"/>
+              </a:spcAft>
+              <a:buClrTx/>
+              <a:buSzTx/>
+              <a:buFontTx/>
+              <a:buAutoNum type="arabicPeriod"/>
+              <a:tabLst/>
+              <a:defRPr/>
+            </a:pPr>
+            <a:r>
+              <a:rPr lang="en-US" sz="1200" b="0" kern="1200" dirty="0">
+                <a:solidFill>
+                  <a:schemeClr val="tx1"/>
+                </a:solidFill>
+                <a:effectLst/>
+                <a:latin typeface="+mn-lt"/>
+                <a:ea typeface="+mn-ea"/>
+                <a:cs typeface="+mn-cs"/>
+              </a:rPr>
+              <a:t>We must tell the interpreter engine about the function by registering the function using </a:t>
+            </a:r>
+            <a:r>
+              <a:rPr lang="en-US" sz="1200" b="0" kern="1200" dirty="0" err="1">
+                <a:solidFill>
+                  <a:schemeClr val="tx1"/>
+                </a:solidFill>
+                <a:effectLst/>
+                <a:latin typeface="+mn-lt"/>
+                <a:ea typeface="+mn-ea"/>
+                <a:cs typeface="+mn-cs"/>
+              </a:rPr>
+              <a:t>AddFunction</a:t>
+            </a:r>
+            <a:r>
+              <a:rPr lang="en-US" sz="1200" b="0" kern="1200" dirty="0">
+                <a:solidFill>
+                  <a:schemeClr val="tx1"/>
+                </a:solidFill>
+                <a:effectLst/>
+                <a:latin typeface="+mn-lt"/>
+                <a:ea typeface="+mn-ea"/>
+                <a:cs typeface="+mn-cs"/>
+              </a:rPr>
+              <a:t> and passing an instance of the custom class.</a:t>
+            </a:r>
+          </a:p>
+          <a:p>
+            <a:pPr marL="228600" marR="0" lvl="0" indent="-228600" algn="l" defTabSz="914400" rtl="0" eaLnBrk="1" fontAlgn="auto" latinLnBrk="0" hangingPunct="1">
+              <a:lnSpc>
+                <a:spcPct val="100000"/>
+              </a:lnSpc>
+              <a:spcBef>
+                <a:spcPts val="0"/>
+              </a:spcBef>
+              <a:spcAft>
+                <a:spcPts val="0"/>
+              </a:spcAft>
+              <a:buClrTx/>
+              <a:buSzTx/>
+              <a:buFontTx/>
+              <a:buAutoNum type="arabicPeriod"/>
+              <a:tabLst/>
+              <a:defRPr/>
+            </a:pPr>
+            <a:r>
+              <a:rPr lang="en-US" sz="1200" b="0" kern="1200" dirty="0">
+                <a:solidFill>
+                  <a:schemeClr val="tx1"/>
+                </a:solidFill>
+                <a:effectLst/>
+                <a:latin typeface="+mn-lt"/>
+                <a:ea typeface="+mn-ea"/>
+                <a:cs typeface="+mn-cs"/>
+              </a:rPr>
+              <a:t>Then we can call that function as if it were a regular </a:t>
+            </a:r>
+            <a:r>
+              <a:rPr lang="en-US" sz="1200" b="0" kern="1200" dirty="0" err="1">
+                <a:solidFill>
+                  <a:schemeClr val="tx1"/>
+                </a:solidFill>
+                <a:effectLst/>
+                <a:latin typeface="+mn-lt"/>
+                <a:ea typeface="+mn-ea"/>
+                <a:cs typeface="+mn-cs"/>
+              </a:rPr>
+              <a:t>PowerFX</a:t>
+            </a:r>
+            <a:r>
+              <a:rPr lang="en-US" sz="1200" b="0" kern="1200" dirty="0">
+                <a:solidFill>
+                  <a:schemeClr val="tx1"/>
+                </a:solidFill>
+                <a:effectLst/>
+                <a:latin typeface="+mn-lt"/>
+                <a:ea typeface="+mn-ea"/>
+                <a:cs typeface="+mn-cs"/>
+              </a:rPr>
+              <a:t> function.</a:t>
+            </a:r>
+          </a:p>
+          <a:p>
+            <a:pPr marL="228600" marR="0" lvl="0" indent="-228600" algn="l" defTabSz="914400" rtl="0" eaLnBrk="1" fontAlgn="auto" latinLnBrk="0" hangingPunct="1">
+              <a:lnSpc>
+                <a:spcPct val="100000"/>
+              </a:lnSpc>
+              <a:spcBef>
+                <a:spcPts val="0"/>
+              </a:spcBef>
+              <a:spcAft>
+                <a:spcPts val="0"/>
+              </a:spcAft>
+              <a:buClrTx/>
+              <a:buSzTx/>
+              <a:buFontTx/>
+              <a:buAutoNum type="arabicPeriod"/>
+              <a:tabLst/>
+              <a:defRPr/>
+            </a:pPr>
+            <a:endParaRPr lang="en-US" sz="1200" b="0" kern="1200" dirty="0">
+              <a:solidFill>
+                <a:schemeClr val="tx1"/>
+              </a:solidFill>
+              <a:effectLst/>
+              <a:latin typeface="+mn-lt"/>
+              <a:ea typeface="+mn-ea"/>
+              <a:cs typeface="+mn-cs"/>
+            </a:endParaRPr>
+          </a:p>
+          <a:p>
+            <a:pPr marL="0" marR="0" lvl="0" indent="0" algn="l" defTabSz="914400" rtl="0" eaLnBrk="1" fontAlgn="auto" latinLnBrk="0" hangingPunct="1">
+              <a:lnSpc>
+                <a:spcPct val="100000"/>
+              </a:lnSpc>
+              <a:spcBef>
+                <a:spcPts val="0"/>
+              </a:spcBef>
+              <a:spcAft>
+                <a:spcPts val="0"/>
+              </a:spcAft>
+              <a:buClrTx/>
+              <a:buSzTx/>
+              <a:buFontTx/>
+              <a:buNone/>
+              <a:tabLst/>
+              <a:defRPr/>
+            </a:pPr>
+            <a:r>
+              <a:rPr lang="en-US" sz="1200" b="0" kern="1200" dirty="0">
+                <a:solidFill>
+                  <a:schemeClr val="tx1"/>
+                </a:solidFill>
+                <a:effectLst/>
+                <a:latin typeface="+mn-lt"/>
+                <a:ea typeface="+mn-ea"/>
+                <a:cs typeface="+mn-cs"/>
+              </a:rPr>
+              <a:t>You can also, define functions that return a record. For example, Alexandira needs to create a function that takes in a string and parses the string into a well known structure in Pizza r us. The structure contains the id of the customer, the year the customer was onboarded and their unique id in the ERP system. E.g.: “juan#1998</a:t>
+            </a:r>
+          </a:p>
+          <a:p>
+            <a:pPr marL="0" marR="0" lvl="0" indent="0" algn="l" defTabSz="914400" rtl="0" eaLnBrk="1" fontAlgn="auto" latinLnBrk="0" hangingPunct="1">
+              <a:lnSpc>
+                <a:spcPct val="100000"/>
+              </a:lnSpc>
+              <a:spcBef>
+                <a:spcPts val="0"/>
+              </a:spcBef>
+              <a:spcAft>
+                <a:spcPts val="0"/>
+              </a:spcAft>
+              <a:buClrTx/>
+              <a:buSzTx/>
+              <a:buFontTx/>
+              <a:buNone/>
+              <a:tabLst/>
+              <a:defRPr/>
+            </a:pPr>
+            <a:endParaRPr lang="en-US" sz="1200" b="0" kern="1200" dirty="0">
+              <a:solidFill>
+                <a:schemeClr val="tx1"/>
+              </a:solidFill>
+              <a:effectLst/>
+              <a:latin typeface="+mn-lt"/>
+              <a:ea typeface="+mn-ea"/>
+              <a:cs typeface="+mn-cs"/>
+            </a:endParaRPr>
+          </a:p>
+          <a:p>
+            <a:pPr marL="228600" marR="0" lvl="0" indent="-228600" algn="l" defTabSz="914400" rtl="0" eaLnBrk="1" fontAlgn="auto" latinLnBrk="0" hangingPunct="1">
+              <a:lnSpc>
+                <a:spcPct val="100000"/>
+              </a:lnSpc>
+              <a:spcBef>
+                <a:spcPts val="0"/>
+              </a:spcBef>
+              <a:spcAft>
+                <a:spcPts val="0"/>
+              </a:spcAft>
+              <a:buClrTx/>
+              <a:buSzTx/>
+              <a:buFontTx/>
+              <a:buAutoNum type="arabicPeriod"/>
+              <a:tabLst/>
+              <a:defRPr/>
+            </a:pPr>
+            <a:r>
+              <a:rPr lang="en-US" sz="1200" b="0" kern="1200" dirty="0">
+                <a:solidFill>
+                  <a:schemeClr val="tx1"/>
+                </a:solidFill>
+                <a:effectLst/>
+                <a:latin typeface="+mn-lt"/>
+                <a:ea typeface="+mn-ea"/>
+                <a:cs typeface="+mn-cs"/>
+              </a:rPr>
+              <a:t>Same as before, but use Untyped type for the return value parameter in the base constructor. </a:t>
+            </a:r>
+          </a:p>
+          <a:p>
+            <a:pPr marL="228600" marR="0" lvl="0" indent="-228600" algn="l" defTabSz="914400" rtl="0" eaLnBrk="1" fontAlgn="auto" latinLnBrk="0" hangingPunct="1">
+              <a:lnSpc>
+                <a:spcPct val="100000"/>
+              </a:lnSpc>
+              <a:spcBef>
+                <a:spcPts val="0"/>
+              </a:spcBef>
+              <a:spcAft>
+                <a:spcPts val="0"/>
+              </a:spcAft>
+              <a:buClrTx/>
+              <a:buSzTx/>
+              <a:buFontTx/>
+              <a:buAutoNum type="arabicPeriod"/>
+              <a:tabLst/>
+              <a:defRPr/>
+            </a:pPr>
+            <a:r>
+              <a:rPr lang="en-US" sz="1200" b="0" kern="1200" dirty="0">
+                <a:solidFill>
+                  <a:schemeClr val="tx1"/>
+                </a:solidFill>
+                <a:effectLst/>
+                <a:latin typeface="+mn-lt"/>
+                <a:ea typeface="+mn-ea"/>
+                <a:cs typeface="+mn-cs"/>
+              </a:rPr>
+              <a:t>In the body of the execute method we build the record:</a:t>
+            </a:r>
+          </a:p>
+          <a:p>
+            <a:pPr marL="685800" marR="0" lvl="1" indent="-228600" algn="l" defTabSz="914400" rtl="0" eaLnBrk="1" fontAlgn="auto" latinLnBrk="0" hangingPunct="1">
+              <a:lnSpc>
+                <a:spcPct val="100000"/>
+              </a:lnSpc>
+              <a:spcBef>
+                <a:spcPts val="0"/>
+              </a:spcBef>
+              <a:spcAft>
+                <a:spcPts val="0"/>
+              </a:spcAft>
+              <a:buClrTx/>
+              <a:buSzTx/>
+              <a:buFontTx/>
+              <a:buAutoNum type="arabicPeriod"/>
+              <a:tabLst/>
+              <a:defRPr/>
+            </a:pPr>
+            <a:r>
+              <a:rPr lang="en-US" sz="1200" b="0" kern="1200" dirty="0">
+                <a:solidFill>
+                  <a:schemeClr val="tx1"/>
+                </a:solidFill>
+                <a:effectLst/>
+                <a:latin typeface="+mn-lt"/>
+                <a:ea typeface="+mn-ea"/>
+                <a:cs typeface="+mn-cs"/>
+              </a:rPr>
+              <a:t>Use </a:t>
+            </a:r>
+            <a:r>
+              <a:rPr lang="en-US" sz="1200" b="0" kern="1200" dirty="0" err="1">
+                <a:solidFill>
+                  <a:schemeClr val="tx1"/>
+                </a:solidFill>
+                <a:effectLst/>
+                <a:latin typeface="+mn-lt"/>
+                <a:ea typeface="+mn-ea"/>
+                <a:cs typeface="+mn-cs"/>
+              </a:rPr>
+              <a:t>NamedValue</a:t>
+            </a:r>
+            <a:r>
+              <a:rPr lang="en-US" sz="1200" b="0" kern="1200" dirty="0">
+                <a:solidFill>
+                  <a:schemeClr val="tx1"/>
+                </a:solidFill>
+                <a:effectLst/>
+                <a:latin typeface="+mn-lt"/>
+                <a:ea typeface="+mn-ea"/>
+                <a:cs typeface="+mn-cs"/>
+              </a:rPr>
+              <a:t> objects for the property-value pairs</a:t>
+            </a:r>
+          </a:p>
+          <a:p>
+            <a:pPr marL="685800" marR="0" lvl="1" indent="-228600" algn="l" defTabSz="914400" rtl="0" eaLnBrk="1" fontAlgn="auto" latinLnBrk="0" hangingPunct="1">
+              <a:lnSpc>
+                <a:spcPct val="100000"/>
+              </a:lnSpc>
+              <a:spcBef>
+                <a:spcPts val="0"/>
+              </a:spcBef>
+              <a:spcAft>
+                <a:spcPts val="0"/>
+              </a:spcAft>
+              <a:buClrTx/>
+              <a:buSzTx/>
+              <a:buFontTx/>
+              <a:buAutoNum type="arabicPeriod"/>
+              <a:tabLst/>
+              <a:defRPr/>
+            </a:pPr>
+            <a:r>
+              <a:rPr lang="en-US" sz="1200" b="0" kern="1200" dirty="0">
+                <a:solidFill>
+                  <a:schemeClr val="tx1"/>
+                </a:solidFill>
+                <a:effectLst/>
+                <a:latin typeface="+mn-lt"/>
+                <a:ea typeface="+mn-ea"/>
+                <a:cs typeface="+mn-cs"/>
+              </a:rPr>
+              <a:t>Use </a:t>
+            </a:r>
+            <a:r>
+              <a:rPr lang="en-US" sz="1200" b="0" kern="1200" dirty="0" err="1">
+                <a:solidFill>
+                  <a:schemeClr val="tx1"/>
+                </a:solidFill>
+                <a:effectLst/>
+                <a:latin typeface="+mn-lt"/>
+                <a:ea typeface="+mn-ea"/>
+                <a:cs typeface="+mn-cs"/>
+              </a:rPr>
+              <a:t>FormulaValue.NewRecordFromFields</a:t>
+            </a:r>
+            <a:r>
+              <a:rPr lang="en-US" sz="1200" b="0" kern="1200" dirty="0">
+                <a:solidFill>
+                  <a:schemeClr val="tx1"/>
+                </a:solidFill>
+                <a:effectLst/>
+                <a:latin typeface="+mn-lt"/>
+                <a:ea typeface="+mn-ea"/>
+                <a:cs typeface="+mn-cs"/>
+              </a:rPr>
+              <a:t> to build the record object</a:t>
+            </a:r>
+          </a:p>
+          <a:p>
+            <a:pPr marL="0" marR="0" lvl="0" indent="0" algn="l" defTabSz="914400" rtl="0" eaLnBrk="1" fontAlgn="auto" latinLnBrk="0" hangingPunct="1">
+              <a:lnSpc>
+                <a:spcPct val="100000"/>
+              </a:lnSpc>
+              <a:spcBef>
+                <a:spcPts val="0"/>
+              </a:spcBef>
+              <a:spcAft>
+                <a:spcPts val="0"/>
+              </a:spcAft>
+              <a:buClrTx/>
+              <a:buSzTx/>
+              <a:buFontTx/>
+              <a:buNone/>
+              <a:tabLst/>
+              <a:defRPr/>
+            </a:pPr>
+            <a:r>
+              <a:rPr lang="en-US" sz="1200" b="0" kern="1200" dirty="0">
+                <a:solidFill>
+                  <a:schemeClr val="tx1"/>
+                </a:solidFill>
+                <a:effectLst/>
+                <a:latin typeface="+mn-lt"/>
+                <a:ea typeface="+mn-ea"/>
+                <a:cs typeface="+mn-cs"/>
+              </a:rPr>
+              <a:t>As you can see, we can call that function from our </a:t>
+            </a:r>
+            <a:r>
+              <a:rPr lang="en-US" sz="1200" b="0" kern="1200" dirty="0" err="1">
+                <a:solidFill>
+                  <a:schemeClr val="tx1"/>
+                </a:solidFill>
+                <a:effectLst/>
+                <a:latin typeface="+mn-lt"/>
+                <a:ea typeface="+mn-ea"/>
+                <a:cs typeface="+mn-cs"/>
+              </a:rPr>
+              <a:t>powerfx</a:t>
+            </a:r>
+            <a:r>
+              <a:rPr lang="en-US" sz="1200" b="0" kern="1200" dirty="0">
+                <a:solidFill>
+                  <a:schemeClr val="tx1"/>
+                </a:solidFill>
+                <a:effectLst/>
+                <a:latin typeface="+mn-lt"/>
+                <a:ea typeface="+mn-ea"/>
+                <a:cs typeface="+mn-cs"/>
+              </a:rPr>
+              <a:t> code to get the record. We can access the properties of the record from </a:t>
+            </a:r>
+            <a:r>
+              <a:rPr lang="en-US" sz="1200" b="0" kern="1200" dirty="0" err="1">
+                <a:solidFill>
+                  <a:schemeClr val="tx1"/>
+                </a:solidFill>
+                <a:effectLst/>
+                <a:latin typeface="+mn-lt"/>
+                <a:ea typeface="+mn-ea"/>
+                <a:cs typeface="+mn-cs"/>
+              </a:rPr>
+              <a:t>.net</a:t>
+            </a:r>
+            <a:r>
+              <a:rPr lang="en-US" sz="1200" b="0" kern="1200" dirty="0">
+                <a:solidFill>
+                  <a:schemeClr val="tx1"/>
+                </a:solidFill>
+                <a:effectLst/>
+                <a:latin typeface="+mn-lt"/>
+                <a:ea typeface="+mn-ea"/>
+                <a:cs typeface="+mn-cs"/>
+              </a:rPr>
+              <a:t> by treating the result of the evaluation as an </a:t>
+            </a:r>
+            <a:r>
+              <a:rPr lang="en-US" sz="1200" b="0" kern="1200" dirty="0" err="1">
+                <a:solidFill>
+                  <a:schemeClr val="tx1"/>
+                </a:solidFill>
+                <a:effectLst/>
+                <a:latin typeface="+mn-lt"/>
+                <a:ea typeface="+mn-ea"/>
+                <a:cs typeface="+mn-cs"/>
+              </a:rPr>
+              <a:t>Expando</a:t>
+            </a:r>
+            <a:r>
+              <a:rPr lang="en-US" sz="1200" b="0" kern="1200" dirty="0">
+                <a:solidFill>
+                  <a:schemeClr val="tx1"/>
+                </a:solidFill>
+                <a:effectLst/>
+                <a:latin typeface="+mn-lt"/>
+                <a:ea typeface="+mn-ea"/>
+                <a:cs typeface="+mn-cs"/>
+              </a:rPr>
+              <a:t> object, we can </a:t>
+            </a:r>
+            <a:r>
+              <a:rPr lang="en-US" sz="1200" b="0" kern="1200" dirty="0" err="1">
+                <a:solidFill>
+                  <a:schemeClr val="tx1"/>
+                </a:solidFill>
+                <a:effectLst/>
+                <a:latin typeface="+mn-lt"/>
+                <a:ea typeface="+mn-ea"/>
+                <a:cs typeface="+mn-cs"/>
+              </a:rPr>
+              <a:t>can</a:t>
+            </a:r>
+            <a:r>
+              <a:rPr lang="en-US" sz="1200" b="0" kern="1200" dirty="0">
+                <a:solidFill>
+                  <a:schemeClr val="tx1"/>
+                </a:solidFill>
+                <a:effectLst/>
+                <a:latin typeface="+mn-lt"/>
+                <a:ea typeface="+mn-ea"/>
+                <a:cs typeface="+mn-cs"/>
+              </a:rPr>
+              <a:t> translate its properties to a </a:t>
+            </a:r>
+            <a:r>
+              <a:rPr lang="en-US" sz="1200" b="0" kern="1200" dirty="0" err="1">
+                <a:solidFill>
+                  <a:schemeClr val="tx1"/>
+                </a:solidFill>
+                <a:effectLst/>
+                <a:latin typeface="+mn-lt"/>
+                <a:ea typeface="+mn-ea"/>
+                <a:cs typeface="+mn-cs"/>
+              </a:rPr>
+              <a:t>.net</a:t>
+            </a:r>
+            <a:r>
+              <a:rPr lang="en-US" sz="1200" b="0" kern="1200" dirty="0">
+                <a:solidFill>
+                  <a:schemeClr val="tx1"/>
+                </a:solidFill>
+                <a:effectLst/>
+                <a:latin typeface="+mn-lt"/>
+                <a:ea typeface="+mn-ea"/>
+                <a:cs typeface="+mn-cs"/>
+              </a:rPr>
+              <a:t>  dictionary.</a:t>
+            </a:r>
+          </a:p>
+          <a:p>
+            <a:pPr marL="685800" marR="0" lvl="1" indent="-228600" algn="l" defTabSz="914400" rtl="0" eaLnBrk="1" fontAlgn="auto" latinLnBrk="0" hangingPunct="1">
+              <a:lnSpc>
+                <a:spcPct val="100000"/>
+              </a:lnSpc>
+              <a:spcBef>
+                <a:spcPts val="0"/>
+              </a:spcBef>
+              <a:spcAft>
+                <a:spcPts val="0"/>
+              </a:spcAft>
+              <a:buClrTx/>
+              <a:buSzTx/>
+              <a:buFontTx/>
+              <a:buAutoNum type="arabicPeriod"/>
+              <a:tabLst/>
+              <a:defRPr/>
+            </a:pPr>
+            <a:endParaRPr lang="en-US" sz="1200" b="0" kern="1200" dirty="0">
+              <a:solidFill>
+                <a:schemeClr val="tx1"/>
+              </a:solidFill>
+              <a:effectLst/>
+              <a:latin typeface="+mn-lt"/>
+              <a:ea typeface="+mn-ea"/>
+              <a:cs typeface="+mn-cs"/>
+            </a:endParaRPr>
+          </a:p>
+          <a:p>
+            <a:pPr marL="0" marR="0" lvl="0" indent="0" algn="l" defTabSz="914400" rtl="0" eaLnBrk="1" fontAlgn="auto" latinLnBrk="0" hangingPunct="1">
+              <a:lnSpc>
+                <a:spcPct val="100000"/>
+              </a:lnSpc>
+              <a:spcBef>
+                <a:spcPts val="0"/>
+              </a:spcBef>
+              <a:spcAft>
+                <a:spcPts val="0"/>
+              </a:spcAft>
+              <a:buClrTx/>
+              <a:buSzTx/>
+              <a:buFontTx/>
+              <a:buNone/>
+              <a:tabLst/>
+              <a:defRPr/>
+            </a:pPr>
+            <a:r>
+              <a:rPr lang="en-US" sz="1200" b="0" kern="1200" dirty="0">
+                <a:solidFill>
+                  <a:schemeClr val="tx1"/>
+                </a:solidFill>
+                <a:effectLst/>
+                <a:latin typeface="+mn-lt"/>
+                <a:ea typeface="+mn-ea"/>
+                <a:cs typeface="+mn-cs"/>
+              </a:rPr>
+              <a:t>Lastly, you can also have functions that return a table. </a:t>
+            </a:r>
+          </a:p>
+          <a:p>
+            <a:pPr marL="228600" marR="0" lvl="0" indent="-228600" algn="l" defTabSz="914400" rtl="0" eaLnBrk="1" fontAlgn="auto" latinLnBrk="0" hangingPunct="1">
+              <a:lnSpc>
+                <a:spcPct val="100000"/>
+              </a:lnSpc>
+              <a:spcBef>
+                <a:spcPts val="0"/>
+              </a:spcBef>
+              <a:spcAft>
+                <a:spcPts val="0"/>
+              </a:spcAft>
+              <a:buClrTx/>
+              <a:buSzTx/>
+              <a:buFontTx/>
+              <a:buAutoNum type="arabicPeriod"/>
+              <a:tabLst/>
+              <a:defRPr/>
+            </a:pPr>
+            <a:r>
+              <a:rPr lang="en-US" sz="1200" b="0" kern="1200" dirty="0">
+                <a:solidFill>
+                  <a:schemeClr val="tx1"/>
+                </a:solidFill>
+                <a:effectLst/>
+                <a:latin typeface="+mn-lt"/>
+                <a:ea typeface="+mn-ea"/>
+                <a:cs typeface="+mn-cs"/>
+              </a:rPr>
+              <a:t>As before, we need to derive from </a:t>
+            </a:r>
+            <a:r>
+              <a:rPr lang="en-US" sz="1200" b="0" kern="1200" dirty="0" err="1">
+                <a:solidFill>
+                  <a:schemeClr val="tx1"/>
+                </a:solidFill>
+                <a:effectLst/>
+                <a:latin typeface="+mn-lt"/>
+                <a:ea typeface="+mn-ea"/>
+                <a:cs typeface="+mn-cs"/>
+              </a:rPr>
+              <a:t>ReflectionFunction</a:t>
+            </a:r>
+            <a:r>
+              <a:rPr lang="en-US" sz="1200" b="0" kern="1200" dirty="0">
+                <a:solidFill>
+                  <a:schemeClr val="tx1"/>
+                </a:solidFill>
+                <a:effectLst/>
+                <a:latin typeface="+mn-lt"/>
+                <a:ea typeface="+mn-ea"/>
+                <a:cs typeface="+mn-cs"/>
+              </a:rPr>
+              <a:t>, but we need to define the type of our table using </a:t>
+            </a:r>
+            <a:r>
+              <a:rPr lang="en-US" sz="1200" b="0" kern="1200" dirty="0" err="1">
+                <a:solidFill>
+                  <a:schemeClr val="tx1"/>
+                </a:solidFill>
+                <a:effectLst/>
+                <a:latin typeface="+mn-lt"/>
+                <a:ea typeface="+mn-ea"/>
+                <a:cs typeface="+mn-cs"/>
+              </a:rPr>
+              <a:t>TableType.Empty</a:t>
+            </a:r>
+            <a:r>
+              <a:rPr lang="en-US" sz="1200" b="0" kern="1200" dirty="0">
+                <a:solidFill>
+                  <a:schemeClr val="tx1"/>
+                </a:solidFill>
+                <a:effectLst/>
+                <a:latin typeface="+mn-lt"/>
+                <a:ea typeface="+mn-ea"/>
+                <a:cs typeface="+mn-cs"/>
+              </a:rPr>
+              <a:t>() and then call Add(…) to add each of the columns our returned table supports.</a:t>
+            </a:r>
+          </a:p>
+          <a:p>
+            <a:pPr marL="228600" marR="0" lvl="0" indent="-228600" algn="l" defTabSz="914400" rtl="0" eaLnBrk="1" fontAlgn="auto" latinLnBrk="0" hangingPunct="1">
+              <a:lnSpc>
+                <a:spcPct val="100000"/>
+              </a:lnSpc>
+              <a:spcBef>
+                <a:spcPts val="0"/>
+              </a:spcBef>
+              <a:spcAft>
+                <a:spcPts val="0"/>
+              </a:spcAft>
+              <a:buClrTx/>
+              <a:buSzTx/>
+              <a:buFontTx/>
+              <a:buAutoNum type="arabicPeriod"/>
+              <a:tabLst/>
+              <a:defRPr/>
+            </a:pPr>
+            <a:r>
+              <a:rPr lang="en-US" sz="1200" b="0" kern="1200" dirty="0">
+                <a:solidFill>
+                  <a:schemeClr val="tx1"/>
+                </a:solidFill>
+                <a:effectLst/>
+                <a:latin typeface="+mn-lt"/>
+                <a:ea typeface="+mn-ea"/>
+                <a:cs typeface="+mn-cs"/>
+              </a:rPr>
+              <a:t>We need to then define the record type for each row.</a:t>
+            </a:r>
+          </a:p>
+          <a:p>
+            <a:pPr marL="228600" marR="0" lvl="0" indent="-228600" algn="l" defTabSz="914400" rtl="0" eaLnBrk="1" fontAlgn="auto" latinLnBrk="0" hangingPunct="1">
+              <a:lnSpc>
+                <a:spcPct val="100000"/>
+              </a:lnSpc>
+              <a:spcBef>
+                <a:spcPts val="0"/>
+              </a:spcBef>
+              <a:spcAft>
+                <a:spcPts val="0"/>
+              </a:spcAft>
+              <a:buClrTx/>
+              <a:buSzTx/>
+              <a:buFontTx/>
+              <a:buAutoNum type="arabicPeriod"/>
+              <a:tabLst/>
+              <a:defRPr/>
+            </a:pPr>
+            <a:r>
+              <a:rPr lang="en-US" sz="1200" b="0" kern="1200" dirty="0">
+                <a:solidFill>
+                  <a:schemeClr val="tx1"/>
+                </a:solidFill>
+                <a:effectLst/>
+                <a:latin typeface="+mn-lt"/>
+                <a:ea typeface="+mn-ea"/>
+                <a:cs typeface="+mn-cs"/>
+              </a:rPr>
+              <a:t>In the execute method, we build each row as a record and then add it to a list.</a:t>
+            </a:r>
+          </a:p>
+          <a:p>
+            <a:pPr marL="228600" marR="0" lvl="0" indent="-228600" algn="l" defTabSz="914400" rtl="0" eaLnBrk="1" fontAlgn="auto" latinLnBrk="0" hangingPunct="1">
+              <a:lnSpc>
+                <a:spcPct val="100000"/>
+              </a:lnSpc>
+              <a:spcBef>
+                <a:spcPts val="0"/>
+              </a:spcBef>
+              <a:spcAft>
+                <a:spcPts val="0"/>
+              </a:spcAft>
+              <a:buClrTx/>
+              <a:buSzTx/>
+              <a:buFontTx/>
+              <a:buAutoNum type="arabicPeriod"/>
+              <a:tabLst/>
+              <a:defRPr/>
+            </a:pPr>
+            <a:r>
+              <a:rPr lang="en-US" sz="1200" b="0" kern="1200" dirty="0">
+                <a:solidFill>
+                  <a:schemeClr val="tx1"/>
+                </a:solidFill>
+                <a:effectLst/>
+                <a:latin typeface="+mn-lt"/>
+                <a:ea typeface="+mn-ea"/>
+                <a:cs typeface="+mn-cs"/>
+              </a:rPr>
+              <a:t>We can take that list and use </a:t>
+            </a:r>
+            <a:r>
+              <a:rPr lang="en-US" sz="1200" kern="1200" dirty="0" err="1">
+                <a:solidFill>
+                  <a:schemeClr val="tx1"/>
+                </a:solidFill>
+                <a:effectLst/>
+                <a:latin typeface="+mn-lt"/>
+                <a:ea typeface="+mn-ea"/>
+                <a:cs typeface="+mn-cs"/>
+              </a:rPr>
+              <a:t>FormulaValue.NewTable</a:t>
+            </a:r>
+            <a:r>
+              <a:rPr lang="en-US" sz="1200" kern="1200" dirty="0">
+                <a:solidFill>
+                  <a:schemeClr val="tx1"/>
+                </a:solidFill>
+                <a:effectLst/>
+                <a:latin typeface="+mn-lt"/>
+                <a:ea typeface="+mn-ea"/>
+                <a:cs typeface="+mn-cs"/>
+              </a:rPr>
+              <a:t>(</a:t>
+            </a:r>
+            <a:r>
+              <a:rPr lang="en-US" sz="1200" kern="1200" dirty="0" err="1">
+                <a:solidFill>
+                  <a:schemeClr val="tx1"/>
+                </a:solidFill>
+                <a:effectLst/>
+                <a:latin typeface="+mn-lt"/>
+                <a:ea typeface="+mn-ea"/>
+                <a:cs typeface="+mn-cs"/>
+              </a:rPr>
+              <a:t>RecordType</a:t>
+            </a:r>
+            <a:r>
+              <a:rPr lang="en-US" sz="1200" kern="1200" dirty="0">
+                <a:solidFill>
+                  <a:schemeClr val="tx1"/>
+                </a:solidFill>
+                <a:effectLst/>
+                <a:latin typeface="+mn-lt"/>
+                <a:ea typeface="+mn-ea"/>
+                <a:cs typeface="+mn-cs"/>
+              </a:rPr>
+              <a:t>, rows) to build the table value.</a:t>
+            </a:r>
+            <a:endParaRPr lang="en-US" sz="1200" b="0" kern="1200" dirty="0">
+              <a:solidFill>
+                <a:schemeClr val="tx1"/>
+              </a:solidFill>
+              <a:effectLst/>
+              <a:latin typeface="+mn-lt"/>
+              <a:ea typeface="+mn-ea"/>
+              <a:cs typeface="+mn-cs"/>
+            </a:endParaRPr>
+          </a:p>
+          <a:p>
+            <a:pPr marL="228600" marR="0" lvl="0" indent="-228600" algn="l" defTabSz="914400" rtl="0" eaLnBrk="1" fontAlgn="auto" latinLnBrk="0" hangingPunct="1">
+              <a:lnSpc>
+                <a:spcPct val="100000"/>
+              </a:lnSpc>
+              <a:spcBef>
+                <a:spcPts val="0"/>
+              </a:spcBef>
+              <a:spcAft>
+                <a:spcPts val="0"/>
+              </a:spcAft>
+              <a:buClrTx/>
+              <a:buSzTx/>
+              <a:buFontTx/>
+              <a:buAutoNum type="arabicPeriod"/>
+              <a:tabLst/>
+              <a:defRPr/>
+            </a:pPr>
+            <a:r>
+              <a:rPr lang="en-US" sz="1200" b="0" kern="1200" dirty="0">
+                <a:solidFill>
+                  <a:schemeClr val="tx1"/>
+                </a:solidFill>
+                <a:effectLst/>
+                <a:latin typeface="+mn-lt"/>
+                <a:ea typeface="+mn-ea"/>
+                <a:cs typeface="+mn-cs"/>
+              </a:rPr>
+              <a:t>You can also define your own </a:t>
+            </a:r>
+            <a:r>
+              <a:rPr lang="en-US" sz="1200" b="0" kern="1200" dirty="0" err="1">
+                <a:solidFill>
+                  <a:schemeClr val="tx1"/>
+                </a:solidFill>
+                <a:effectLst/>
+                <a:latin typeface="+mn-lt"/>
+                <a:ea typeface="+mn-ea"/>
+                <a:cs typeface="+mn-cs"/>
+              </a:rPr>
+              <a:t>TableValue</a:t>
+            </a:r>
+            <a:r>
+              <a:rPr lang="en-US" sz="1200" b="0" kern="1200" dirty="0">
+                <a:solidFill>
+                  <a:schemeClr val="tx1"/>
+                </a:solidFill>
+                <a:effectLst/>
+                <a:latin typeface="+mn-lt"/>
+                <a:ea typeface="+mn-ea"/>
+                <a:cs typeface="+mn-cs"/>
+              </a:rPr>
+              <a:t> type, but that is out of scope of this session.</a:t>
+            </a:r>
+          </a:p>
+          <a:p>
+            <a:pPr marL="228600" marR="0" lvl="0" indent="-228600" algn="l" defTabSz="914400" rtl="0" eaLnBrk="1" fontAlgn="auto" latinLnBrk="0" hangingPunct="1">
+              <a:lnSpc>
+                <a:spcPct val="100000"/>
+              </a:lnSpc>
+              <a:spcBef>
+                <a:spcPts val="0"/>
+              </a:spcBef>
+              <a:spcAft>
+                <a:spcPts val="0"/>
+              </a:spcAft>
+              <a:buClrTx/>
+              <a:buSzTx/>
+              <a:buFontTx/>
+              <a:buAutoNum type="arabicPeriod"/>
+              <a:tabLst/>
+              <a:defRPr/>
+            </a:pPr>
+            <a:endParaRPr lang="en-US" sz="1200" b="0" kern="1200" dirty="0">
+              <a:solidFill>
+                <a:schemeClr val="tx1"/>
+              </a:solidFill>
+              <a:effectLst/>
+              <a:latin typeface="+mn-lt"/>
+              <a:ea typeface="+mn-ea"/>
+              <a:cs typeface="+mn-cs"/>
+            </a:endParaRPr>
+          </a:p>
+          <a:p>
+            <a:pPr marL="0" marR="0" lvl="0" indent="0" algn="l" defTabSz="914400" rtl="0" eaLnBrk="1" fontAlgn="auto" latinLnBrk="0" hangingPunct="1">
+              <a:lnSpc>
+                <a:spcPct val="100000"/>
+              </a:lnSpc>
+              <a:spcBef>
+                <a:spcPts val="0"/>
+              </a:spcBef>
+              <a:spcAft>
+                <a:spcPts val="0"/>
+              </a:spcAft>
+              <a:buClrTx/>
+              <a:buSzTx/>
+              <a:buFontTx/>
+              <a:buNone/>
+              <a:tabLst/>
+              <a:defRPr/>
+            </a:pPr>
+            <a:r>
+              <a:rPr lang="en-US" sz="1200" b="0" kern="1200" dirty="0">
+                <a:solidFill>
+                  <a:schemeClr val="tx1"/>
+                </a:solidFill>
+                <a:effectLst/>
+                <a:latin typeface="+mn-lt"/>
+                <a:ea typeface="+mn-ea"/>
+                <a:cs typeface="+mn-cs"/>
+              </a:rPr>
+              <a:t>So far he have seen functions that operate </a:t>
+            </a:r>
+            <a:r>
+              <a:rPr lang="en-US" sz="1200" b="0" kern="1200" dirty="0" err="1">
+                <a:solidFill>
+                  <a:schemeClr val="tx1"/>
+                </a:solidFill>
+                <a:effectLst/>
+                <a:latin typeface="+mn-lt"/>
+                <a:ea typeface="+mn-ea"/>
+                <a:cs typeface="+mn-cs"/>
+              </a:rPr>
+              <a:t>synchrounsly</a:t>
+            </a:r>
+            <a:r>
+              <a:rPr lang="en-US" sz="1200" b="0" kern="1200" dirty="0">
+                <a:solidFill>
+                  <a:schemeClr val="tx1"/>
+                </a:solidFill>
+                <a:effectLst/>
+                <a:latin typeface="+mn-lt"/>
+                <a:ea typeface="+mn-ea"/>
+                <a:cs typeface="+mn-cs"/>
+              </a:rPr>
+              <a:t>, what if you need async? First, I would like to give a general warning that is based on my experience and the learning points from others: when it comes to business logic, if your code (whether is C# </a:t>
+            </a:r>
+            <a:r>
+              <a:rPr lang="en-US" sz="1200" b="0" kern="1200">
+                <a:solidFill>
+                  <a:schemeClr val="tx1"/>
+                </a:solidFill>
+                <a:effectLst/>
+                <a:latin typeface="+mn-lt"/>
+                <a:ea typeface="+mn-ea"/>
+                <a:cs typeface="+mn-cs"/>
+              </a:rPr>
+              <a:t>or something </a:t>
+            </a:r>
+            <a:r>
+              <a:rPr lang="en-US" sz="1200" b="0" kern="1200" dirty="0">
+                <a:solidFill>
+                  <a:schemeClr val="tx1"/>
+                </a:solidFill>
+                <a:effectLst/>
+                <a:latin typeface="+mn-lt"/>
+                <a:ea typeface="+mn-ea"/>
+                <a:cs typeface="+mn-cs"/>
+              </a:rPr>
+              <a:t>else) needs async operations, you might be introducing something that does not belong to the business logic of your app. Async code </a:t>
+            </a:r>
+            <a:r>
+              <a:rPr lang="en-US" sz="1200" b="0" i="1" kern="1200" dirty="0" err="1">
+                <a:solidFill>
+                  <a:schemeClr val="tx1"/>
+                </a:solidFill>
+                <a:effectLst/>
+                <a:latin typeface="+mn-lt"/>
+                <a:ea typeface="+mn-ea"/>
+                <a:cs typeface="+mn-cs"/>
+              </a:rPr>
+              <a:t>susually</a:t>
+            </a:r>
+            <a:r>
+              <a:rPr lang="en-US" sz="1200" b="0" i="0" kern="1200" dirty="0">
+                <a:solidFill>
+                  <a:schemeClr val="tx1"/>
+                </a:solidFill>
+                <a:effectLst/>
+                <a:latin typeface="+mn-lt"/>
+                <a:ea typeface="+mn-ea"/>
+                <a:cs typeface="+mn-cs"/>
+              </a:rPr>
+              <a:t> (but not </a:t>
+            </a:r>
+            <a:r>
+              <a:rPr lang="en-US" sz="1200" b="0" i="0" kern="1200" dirty="0" err="1">
+                <a:solidFill>
+                  <a:schemeClr val="tx1"/>
+                </a:solidFill>
+                <a:effectLst/>
+                <a:latin typeface="+mn-lt"/>
+                <a:ea typeface="+mn-ea"/>
+                <a:cs typeface="+mn-cs"/>
+              </a:rPr>
+              <a:t>walways</a:t>
+            </a:r>
+            <a:r>
+              <a:rPr lang="en-US" sz="1200" b="0" i="0" kern="1200" dirty="0">
+                <a:solidFill>
+                  <a:schemeClr val="tx1"/>
+                </a:solidFill>
+                <a:effectLst/>
+                <a:latin typeface="+mn-lt"/>
+                <a:ea typeface="+mn-ea"/>
+                <a:cs typeface="+mn-cs"/>
+              </a:rPr>
+              <a:t>) mean trying to reach to an external dependency. We want our business code to be </a:t>
+            </a:r>
+            <a:r>
+              <a:rPr lang="en-US" sz="1200" b="0" i="0" kern="1200" dirty="0" err="1">
+                <a:solidFill>
+                  <a:schemeClr val="tx1"/>
+                </a:solidFill>
+                <a:effectLst/>
+                <a:latin typeface="+mn-lt"/>
+                <a:ea typeface="+mn-ea"/>
+                <a:cs typeface="+mn-cs"/>
+              </a:rPr>
+              <a:t>dependcy</a:t>
+            </a:r>
+            <a:r>
+              <a:rPr lang="en-US" sz="1200" b="0" i="0" kern="1200" dirty="0">
+                <a:solidFill>
+                  <a:schemeClr val="tx1"/>
+                </a:solidFill>
+                <a:effectLst/>
+                <a:latin typeface="+mn-lt"/>
+                <a:ea typeface="+mn-ea"/>
+                <a:cs typeface="+mn-cs"/>
+              </a:rPr>
+              <a:t> free in the sense that any input comes from a </a:t>
+            </a:r>
+            <a:r>
+              <a:rPr lang="en-US" sz="1200" b="0" i="0" kern="1200" dirty="0" err="1">
+                <a:solidFill>
+                  <a:schemeClr val="tx1"/>
+                </a:solidFill>
+                <a:effectLst/>
+                <a:latin typeface="+mn-lt"/>
+                <a:ea typeface="+mn-ea"/>
+                <a:cs typeface="+mn-cs"/>
+              </a:rPr>
+              <a:t>regularinput</a:t>
+            </a:r>
+            <a:r>
+              <a:rPr lang="en-US" sz="1200" b="0" i="0" kern="1200" dirty="0">
+                <a:solidFill>
+                  <a:schemeClr val="tx1"/>
+                </a:solidFill>
+                <a:effectLst/>
+                <a:latin typeface="+mn-lt"/>
+                <a:ea typeface="+mn-ea"/>
+                <a:cs typeface="+mn-cs"/>
+              </a:rPr>
+              <a:t> parameter (the data itself could be obtained </a:t>
+            </a:r>
+            <a:r>
+              <a:rPr lang="en-US" sz="1200" b="0" i="0" kern="1200" dirty="0" err="1">
+                <a:solidFill>
+                  <a:schemeClr val="tx1"/>
+                </a:solidFill>
+                <a:effectLst/>
+                <a:latin typeface="+mn-lt"/>
+                <a:ea typeface="+mn-ea"/>
+                <a:cs typeface="+mn-cs"/>
+              </a:rPr>
+              <a:t>asyncrhounously</a:t>
+            </a:r>
+            <a:r>
+              <a:rPr lang="en-US" sz="1200" b="0" i="0" kern="1200" dirty="0">
+                <a:solidFill>
+                  <a:schemeClr val="tx1"/>
+                </a:solidFill>
+                <a:effectLst/>
+                <a:latin typeface="+mn-lt"/>
+                <a:ea typeface="+mn-ea"/>
+                <a:cs typeface="+mn-cs"/>
+              </a:rPr>
+              <a:t> before the business logic in invoked), same thing with outputs, we do not want our business logic to be the one writing to for example a </a:t>
+            </a:r>
+            <a:r>
+              <a:rPr lang="en-US" sz="1200" b="0" i="0" kern="1200" dirty="0" err="1">
+                <a:solidFill>
+                  <a:schemeClr val="tx1"/>
+                </a:solidFill>
+                <a:effectLst/>
+                <a:latin typeface="+mn-lt"/>
+                <a:ea typeface="+mn-ea"/>
+                <a:cs typeface="+mn-cs"/>
+              </a:rPr>
+              <a:t>db</a:t>
+            </a:r>
+            <a:r>
+              <a:rPr lang="en-US" sz="1200" b="0" i="0" kern="1200" dirty="0">
+                <a:solidFill>
+                  <a:schemeClr val="tx1"/>
+                </a:solidFill>
+                <a:effectLst/>
+                <a:latin typeface="+mn-lt"/>
+                <a:ea typeface="+mn-ea"/>
+                <a:cs typeface="+mn-cs"/>
+              </a:rPr>
+              <a:t> or file but rather to prepare the data for whatever integration code is the one putting that final form of the data into a </a:t>
+            </a:r>
+            <a:r>
+              <a:rPr lang="en-US" sz="1200" b="0" i="0" kern="1200" dirty="0" err="1">
+                <a:solidFill>
+                  <a:schemeClr val="tx1"/>
+                </a:solidFill>
+                <a:effectLst/>
+                <a:latin typeface="+mn-lt"/>
+                <a:ea typeface="+mn-ea"/>
+                <a:cs typeface="+mn-cs"/>
+              </a:rPr>
+              <a:t>db</a:t>
+            </a:r>
+            <a:r>
+              <a:rPr lang="en-US" sz="1200" b="0" i="0" kern="1200" dirty="0">
+                <a:solidFill>
+                  <a:schemeClr val="tx1"/>
+                </a:solidFill>
+                <a:effectLst/>
+                <a:latin typeface="+mn-lt"/>
+                <a:ea typeface="+mn-ea"/>
+                <a:cs typeface="+mn-cs"/>
+              </a:rPr>
+              <a:t> or file.</a:t>
+            </a:r>
+          </a:p>
+          <a:p>
+            <a:pPr marL="0" marR="0" lvl="0" indent="0" algn="l" defTabSz="914400" rtl="0" eaLnBrk="1" fontAlgn="auto" latinLnBrk="0" hangingPunct="1">
+              <a:lnSpc>
+                <a:spcPct val="100000"/>
+              </a:lnSpc>
+              <a:spcBef>
+                <a:spcPts val="0"/>
+              </a:spcBef>
+              <a:spcAft>
+                <a:spcPts val="0"/>
+              </a:spcAft>
+              <a:buClrTx/>
+              <a:buSzTx/>
+              <a:buFontTx/>
+              <a:buNone/>
+              <a:tabLst/>
+              <a:defRPr/>
+            </a:pPr>
+            <a:endParaRPr lang="en-US" sz="1200" b="0" i="0" kern="1200" dirty="0">
+              <a:solidFill>
+                <a:schemeClr val="tx1"/>
+              </a:solidFill>
+              <a:effectLst/>
+              <a:latin typeface="+mn-lt"/>
+              <a:ea typeface="+mn-ea"/>
+              <a:cs typeface="+mn-cs"/>
+            </a:endParaRPr>
+          </a:p>
+          <a:p>
+            <a:pPr marL="0" marR="0" lvl="0" indent="0" algn="l" defTabSz="914400" rtl="0" eaLnBrk="1" fontAlgn="auto" latinLnBrk="0" hangingPunct="1">
+              <a:lnSpc>
+                <a:spcPct val="100000"/>
+              </a:lnSpc>
+              <a:spcBef>
+                <a:spcPts val="0"/>
+              </a:spcBef>
+              <a:spcAft>
+                <a:spcPts val="0"/>
+              </a:spcAft>
+              <a:buClrTx/>
+              <a:buSzTx/>
+              <a:buFontTx/>
+              <a:buNone/>
+              <a:tabLst/>
+              <a:defRPr/>
+            </a:pPr>
+            <a:r>
+              <a:rPr lang="en-US" sz="1200" b="0" i="0" kern="1200" dirty="0">
+                <a:solidFill>
+                  <a:schemeClr val="tx1"/>
+                </a:solidFill>
+                <a:effectLst/>
+                <a:latin typeface="+mn-lt"/>
+                <a:ea typeface="+mn-ea"/>
+                <a:cs typeface="+mn-cs"/>
+              </a:rPr>
+              <a:t>To make </a:t>
+            </a:r>
+            <a:r>
+              <a:rPr lang="en-US" sz="1200" b="0" i="0" kern="1200" dirty="0" err="1">
+                <a:solidFill>
+                  <a:schemeClr val="tx1"/>
+                </a:solidFill>
+                <a:effectLst/>
+                <a:latin typeface="+mn-lt"/>
+                <a:ea typeface="+mn-ea"/>
+                <a:cs typeface="+mn-cs"/>
+              </a:rPr>
+              <a:t>aysnc</a:t>
+            </a:r>
+            <a:r>
+              <a:rPr lang="en-US" sz="1200" b="0" i="0" kern="1200" dirty="0">
+                <a:solidFill>
+                  <a:schemeClr val="tx1"/>
+                </a:solidFill>
+                <a:effectLst/>
+                <a:latin typeface="+mn-lt"/>
+                <a:ea typeface="+mn-ea"/>
+                <a:cs typeface="+mn-cs"/>
+              </a:rPr>
+              <a:t> functions, you just need to modify the Execute method to return </a:t>
+            </a:r>
+            <a:r>
+              <a:rPr lang="en-US" sz="1200" b="0" kern="1200" dirty="0">
+                <a:solidFill>
+                  <a:schemeClr val="tx1"/>
+                </a:solidFill>
+                <a:effectLst/>
+                <a:latin typeface="+mn-lt"/>
+                <a:ea typeface="+mn-ea"/>
+                <a:cs typeface="+mn-cs"/>
+              </a:rPr>
+              <a:t>Task&lt;</a:t>
+            </a:r>
+            <a:r>
+              <a:rPr lang="en-US" sz="1200" b="0" kern="1200" dirty="0" err="1">
+                <a:solidFill>
+                  <a:schemeClr val="tx1"/>
+                </a:solidFill>
+                <a:effectLst/>
+                <a:latin typeface="+mn-lt"/>
+                <a:ea typeface="+mn-ea"/>
+                <a:cs typeface="+mn-cs"/>
+              </a:rPr>
+              <a:t>FormulaValue</a:t>
+            </a:r>
+            <a:r>
+              <a:rPr lang="en-US" sz="1200" b="0" kern="1200" dirty="0">
+                <a:solidFill>
+                  <a:schemeClr val="tx1"/>
+                </a:solidFill>
+                <a:effectLst/>
+                <a:latin typeface="+mn-lt"/>
+                <a:ea typeface="+mn-ea"/>
+                <a:cs typeface="+mn-cs"/>
+              </a:rPr>
+              <a:t>&gt; and must accept a cancellation token as your last param. Within the </a:t>
+            </a:r>
+            <a:r>
+              <a:rPr lang="en-US" sz="1200" b="0" kern="1200" dirty="0" err="1">
+                <a:solidFill>
+                  <a:schemeClr val="tx1"/>
+                </a:solidFill>
+                <a:effectLst/>
+                <a:latin typeface="+mn-lt"/>
+                <a:ea typeface="+mn-ea"/>
+                <a:cs typeface="+mn-cs"/>
+              </a:rPr>
+              <a:t>bodyof</a:t>
+            </a:r>
+            <a:r>
+              <a:rPr lang="en-US" sz="1200" b="0" kern="1200" dirty="0">
+                <a:solidFill>
+                  <a:schemeClr val="tx1"/>
+                </a:solidFill>
+                <a:effectLst/>
+                <a:latin typeface="+mn-lt"/>
+                <a:ea typeface="+mn-ea"/>
+                <a:cs typeface="+mn-cs"/>
+              </a:rPr>
+              <a:t> the </a:t>
+            </a:r>
+            <a:r>
+              <a:rPr lang="en-US" sz="1200" b="0" kern="1200" dirty="0" err="1">
+                <a:solidFill>
+                  <a:schemeClr val="tx1"/>
+                </a:solidFill>
+                <a:effectLst/>
+                <a:latin typeface="+mn-lt"/>
+                <a:ea typeface="+mn-ea"/>
+                <a:cs typeface="+mn-cs"/>
+              </a:rPr>
+              <a:t>metodyou</a:t>
+            </a:r>
+            <a:r>
+              <a:rPr lang="en-US" sz="1200" b="0" kern="1200" dirty="0">
+                <a:solidFill>
+                  <a:schemeClr val="tx1"/>
+                </a:solidFill>
+                <a:effectLst/>
+                <a:latin typeface="+mn-lt"/>
+                <a:ea typeface="+mn-ea"/>
+                <a:cs typeface="+mn-cs"/>
+              </a:rPr>
+              <a:t> can then do whatever normal async </a:t>
+            </a:r>
+            <a:r>
+              <a:rPr lang="en-US" sz="1200" b="0" kern="1200" dirty="0" err="1">
+                <a:solidFill>
+                  <a:schemeClr val="tx1"/>
+                </a:solidFill>
+                <a:effectLst/>
+                <a:latin typeface="+mn-lt"/>
+                <a:ea typeface="+mn-ea"/>
+                <a:cs typeface="+mn-cs"/>
+              </a:rPr>
+              <a:t>ogic</a:t>
+            </a:r>
+            <a:r>
+              <a:rPr lang="en-US" sz="1200" b="0" kern="1200" dirty="0">
+                <a:solidFill>
+                  <a:schemeClr val="tx1"/>
+                </a:solidFill>
+                <a:effectLst/>
+                <a:latin typeface="+mn-lt"/>
+                <a:ea typeface="+mn-ea"/>
+                <a:cs typeface="+mn-cs"/>
+              </a:rPr>
+              <a:t> you need. In this example, Alexandria is calling an </a:t>
+            </a:r>
+            <a:r>
+              <a:rPr lang="en-US" sz="1200" b="0" kern="1200" dirty="0" err="1">
+                <a:solidFill>
+                  <a:schemeClr val="tx1"/>
+                </a:solidFill>
+                <a:effectLst/>
+                <a:latin typeface="+mn-lt"/>
+                <a:ea typeface="+mn-ea"/>
+                <a:cs typeface="+mn-cs"/>
+              </a:rPr>
+              <a:t>ML.Net</a:t>
+            </a:r>
+            <a:r>
+              <a:rPr lang="en-US" sz="1200" b="0" kern="1200" dirty="0">
+                <a:solidFill>
+                  <a:schemeClr val="tx1"/>
+                </a:solidFill>
+                <a:effectLst/>
+                <a:latin typeface="+mn-lt"/>
+                <a:ea typeface="+mn-ea"/>
+                <a:cs typeface="+mn-cs"/>
+              </a:rPr>
+              <a:t> model to determine the sentiment of a string.</a:t>
+            </a:r>
           </a:p>
         </p:txBody>
       </p:sp>
@@ -6492,9 +6574,9 @@
           <a:bodyPr/>
           <a:lstStyle/>
           <a:p>
-            <a:fld id="{CDDD3684-6E52-4019-8D61-A9B0BAC0DBD6}" type="slidenum">
+            <a:fld id="{A3FADD39-AB8A-4278-99D9-40CD8D745BA1}" type="slidenum">
               <a:rPr lang="en-US" smtClean="0"/>
-              <a:t>20</a:t>
+              <a:t>18</a:t>
             </a:fld>
             <a:endParaRPr lang="en-US"/>
           </a:p>
@@ -6503,7 +6585,7 @@
     </p:spTree>
     <p:extLst>
       <p:ext uri="{BB962C8B-B14F-4D97-AF65-F5344CB8AC3E}">
-        <p14:creationId xmlns:p14="http://schemas.microsoft.com/office/powerpoint/2010/main" val="2242484124"/>
+        <p14:creationId xmlns:p14="http://schemas.microsoft.com/office/powerpoint/2010/main" val="2157664933"/>
       </p:ext>
     </p:extLst>
   </p:cSld>
@@ -6557,7 +6639,7 @@
           <a:bodyPr/>
           <a:lstStyle/>
           <a:p>
-            <a:endParaRPr lang="en-US"/>
+            <a:endParaRPr lang="en-US" dirty="0"/>
           </a:p>
         </p:txBody>
       </p:sp>
@@ -6579,6 +6661,90 @@
             <a:fld id="{CDDD3684-6E52-4019-8D61-A9B0BAC0DBD6}" type="slidenum">
               <a:rPr lang="en-US" smtClean="0"/>
               <a:t>21</a:t>
+            </a:fld>
+            <a:endParaRPr lang="en-US"/>
+          </a:p>
+        </p:txBody>
+      </p:sp>
+    </p:spTree>
+    <p:extLst>
+      <p:ext uri="{BB962C8B-B14F-4D97-AF65-F5344CB8AC3E}">
+        <p14:creationId xmlns:p14="http://schemas.microsoft.com/office/powerpoint/2010/main" val="2242484124"/>
+      </p:ext>
+    </p:extLst>
+  </p:cSld>
+  <p:clrMapOvr>
+    <a:masterClrMapping/>
+  </p:clrMapOvr>
+</p:notes>
+</file>
+
+<file path=ppt/notesSlides/notesSlide17.xml><?xml version="1.0" encoding="utf-8"?>
+<p:notes xmlns:a="http://schemas.openxmlformats.org/drawingml/2006/main" xmlns:r="http://schemas.openxmlformats.org/officeDocument/2006/relationships" xmlns:p="http://schemas.openxmlformats.org/presentationml/2006/main">
+  <p:cSld>
+    <p:spTree>
+      <p:nvGrpSpPr>
+        <p:cNvPr id="1" name=""/>
+        <p:cNvGrpSpPr/>
+        <p:nvPr/>
+      </p:nvGrpSpPr>
+      <p:grpSpPr>
+        <a:xfrm>
+          <a:off x="0" y="0"/>
+          <a:ext cx="0" cy="0"/>
+          <a:chOff x="0" y="0"/>
+          <a:chExt cx="0" cy="0"/>
+        </a:xfrm>
+      </p:grpSpPr>
+      <p:sp>
+        <p:nvSpPr>
+          <p:cNvPr id="2" name="Slide Image Placeholder 1"/>
+          <p:cNvSpPr>
+            <a:spLocks noGrp="1" noRot="1" noChangeAspect="1"/>
+          </p:cNvSpPr>
+          <p:nvPr>
+            <p:ph type="sldImg"/>
+          </p:nvPr>
+        </p:nvSpPr>
+        <p:spPr/>
+      </p:sp>
+      <p:sp>
+        <p:nvSpPr>
+          <p:cNvPr id="3" name="Notes Placeholder 2"/>
+          <p:cNvSpPr>
+            <a:spLocks noGrp="1"/>
+          </p:cNvSpPr>
+          <p:nvPr>
+            <p:ph type="body" idx="1"/>
+          </p:nvPr>
+        </p:nvSpPr>
+        <p:spPr/>
+        <p:txBody>
+          <a:bodyPr/>
+          <a:lstStyle/>
+          <a:p>
+            <a:endParaRPr lang="en-US"/>
+          </a:p>
+        </p:txBody>
+      </p:sp>
+      <p:sp>
+        <p:nvSpPr>
+          <p:cNvPr id="4" name="Slide Number Placeholder 3"/>
+          <p:cNvSpPr>
+            <a:spLocks noGrp="1"/>
+          </p:cNvSpPr>
+          <p:nvPr>
+            <p:ph type="sldNum" sz="quarter" idx="5"/>
+          </p:nvPr>
+        </p:nvSpPr>
+        <p:spPr/>
+        <p:txBody>
+          <a:bodyPr/>
+          <a:lstStyle/>
+          <a:p>
+            <a:fld id="{CDDD3684-6E52-4019-8D61-A9B0BAC0DBD6}" type="slidenum">
+              <a:rPr lang="en-US" smtClean="0"/>
+              <a:t>22</a:t>
             </a:fld>
             <a:endParaRPr lang="en-US"/>
           </a:p>
@@ -6746,92 +6912,7 @@
           <a:bodyPr/>
           <a:lstStyle/>
           <a:p>
-            <a:r>
-              <a:rPr lang="en-US" dirty="0"/>
-              <a:t>Today we will talk about how to use </a:t>
-            </a:r>
-            <a:r>
-              <a:rPr lang="en-US" dirty="0" err="1"/>
-              <a:t>PowerFX</a:t>
-            </a:r>
-            <a:r>
-              <a:rPr lang="en-US" dirty="0"/>
-              <a:t> from a .NET app. But before we move to that we will first go through a pretend scenario that will describe a problem that many Dev teams in the enterprise face.</a:t>
-            </a:r>
-          </a:p>
-          <a:p>
-            <a:r>
-              <a:rPr lang="en-US" dirty="0"/>
-              <a:t>We will then introduce what </a:t>
-            </a:r>
-            <a:r>
-              <a:rPr lang="en-US" dirty="0" err="1"/>
-              <a:t>PowerFX</a:t>
-            </a:r>
-            <a:r>
-              <a:rPr lang="en-US" dirty="0"/>
-              <a:t> is and how it can be a solution to the problem stated. </a:t>
-            </a:r>
-          </a:p>
-          <a:p>
-            <a:r>
-              <a:rPr lang="en-US" dirty="0"/>
-              <a:t>We will then move to how we can embed a </a:t>
-            </a:r>
-            <a:r>
-              <a:rPr lang="en-US" dirty="0" err="1"/>
-              <a:t>PowerFX</a:t>
-            </a:r>
-            <a:r>
-              <a:rPr lang="en-US" dirty="0"/>
-              <a:t> </a:t>
-            </a:r>
-            <a:r>
-              <a:rPr lang="en-US" dirty="0" err="1"/>
-              <a:t>interpereter</a:t>
-            </a:r>
-            <a:r>
-              <a:rPr lang="en-US" dirty="0"/>
-              <a:t> from a </a:t>
-            </a:r>
-            <a:r>
-              <a:rPr lang="en-US" dirty="0" err="1"/>
-              <a:t>.net</a:t>
-            </a:r>
-            <a:r>
-              <a:rPr lang="en-US" dirty="0"/>
-              <a:t> app in order to run </a:t>
-            </a:r>
-            <a:r>
-              <a:rPr lang="en-US" dirty="0" err="1"/>
-              <a:t>PowerFX</a:t>
-            </a:r>
-            <a:r>
-              <a:rPr lang="en-US" dirty="0"/>
-              <a:t> formulas from .NET.</a:t>
-            </a:r>
-          </a:p>
-          <a:p>
-            <a:r>
-              <a:rPr lang="en-US" dirty="0"/>
-              <a:t>Finally, we will explore ways we can extend </a:t>
-            </a:r>
-            <a:r>
-              <a:rPr lang="en-US" dirty="0" err="1"/>
-              <a:t>PowerFX</a:t>
-            </a:r>
-            <a:r>
-              <a:rPr lang="en-US" dirty="0"/>
-              <a:t> by creating custom functions in .NET that can be called from </a:t>
-            </a:r>
-            <a:r>
-              <a:rPr lang="en-US" dirty="0" err="1"/>
-              <a:t>PowerFX</a:t>
-            </a:r>
-            <a:r>
-              <a:rPr lang="en-US" dirty="0"/>
-              <a:t>.</a:t>
-            </a:r>
+            <a:endParaRPr lang="en-US"/>
           </a:p>
         </p:txBody>
       </p:sp>
@@ -6861,7 +6942,7 @@
     </p:spTree>
     <p:extLst>
       <p:ext uri="{BB962C8B-B14F-4D97-AF65-F5344CB8AC3E}">
-        <p14:creationId xmlns:p14="http://schemas.microsoft.com/office/powerpoint/2010/main" val="1514823605"/>
+        <p14:creationId xmlns:p14="http://schemas.microsoft.com/office/powerpoint/2010/main" val="2919710667"/>
       </p:ext>
     </p:extLst>
   </p:cSld>
@@ -6917,15 +6998,7 @@
           <a:p>
             <a:r>
               <a:rPr lang="en-US" dirty="0"/>
-              <a:t>We will start our session with a story abut a pretend company and a </a:t>
-            </a:r>
-            <a:r>
-              <a:rPr lang="en-US" dirty="0" err="1"/>
-              <a:t>a</a:t>
-            </a:r>
-            <a:r>
-              <a:rPr lang="en-US" dirty="0"/>
-              <a:t> fake dev team. This story will help us frame a problem that </a:t>
+              <a:t>Today we will talk about how to use </a:t>
             </a:r>
             <a:r>
               <a:rPr lang="en-US" dirty="0" err="1"/>
@@ -6933,24 +7006,81 @@
             </a:r>
             <a:r>
               <a:rPr lang="en-US" dirty="0"/>
-              <a:t> is a good candidate to solve.</a:t>
-            </a:r>
-          </a:p>
-          <a:p>
-            <a:endParaRPr lang="en-US" dirty="0"/>
+              <a:t> from a .NET app. But before we move to that we will first go through a pretend scenario that will describe a problem that many Dev teams in the enterprise face.</a:t>
+            </a:r>
           </a:p>
           <a:p>
             <a:r>
               <a:rPr lang="en-US" dirty="0"/>
-              <a:t>Our pretend enterprise is </a:t>
+              <a:t>We will then introduce what </a:t>
             </a:r>
             <a:r>
               <a:rPr lang="en-US" dirty="0" err="1"/>
-              <a:t>Pizzas’R’Us</a:t>
+              <a:t>PowerFX</a:t>
             </a:r>
             <a:r>
               <a:rPr lang="en-US" dirty="0"/>
-              <a:t>. A small but profitable company, trying to be as nimble as possible. They provide pizza services to restaurants and super-markets.</a:t>
+              <a:t> is and how it can be a solution to the problem stated. </a:t>
+            </a:r>
+          </a:p>
+          <a:p>
+            <a:r>
+              <a:rPr lang="en-US" dirty="0"/>
+              <a:t>We will then move to how we can embed a </a:t>
+            </a:r>
+            <a:r>
+              <a:rPr lang="en-US" dirty="0" err="1"/>
+              <a:t>PowerFX</a:t>
+            </a:r>
+            <a:r>
+              <a:rPr lang="en-US" dirty="0"/>
+              <a:t> </a:t>
+            </a:r>
+            <a:r>
+              <a:rPr lang="en-US" dirty="0" err="1"/>
+              <a:t>interpereter</a:t>
+            </a:r>
+            <a:r>
+              <a:rPr lang="en-US" dirty="0"/>
+              <a:t> from a </a:t>
+            </a:r>
+            <a:r>
+              <a:rPr lang="en-US" dirty="0" err="1"/>
+              <a:t>.net</a:t>
+            </a:r>
+            <a:r>
+              <a:rPr lang="en-US" dirty="0"/>
+              <a:t> app in order to run </a:t>
+            </a:r>
+            <a:r>
+              <a:rPr lang="en-US" dirty="0" err="1"/>
+              <a:t>PowerFX</a:t>
+            </a:r>
+            <a:r>
+              <a:rPr lang="en-US" dirty="0"/>
+              <a:t> formulas from .NET.</a:t>
+            </a:r>
+          </a:p>
+          <a:p>
+            <a:r>
+              <a:rPr lang="en-US" dirty="0"/>
+              <a:t>Finally, we will explore ways we can extend </a:t>
+            </a:r>
+            <a:r>
+              <a:rPr lang="en-US" dirty="0" err="1"/>
+              <a:t>PowerFX</a:t>
+            </a:r>
+            <a:r>
+              <a:rPr lang="en-US" dirty="0"/>
+              <a:t> by creating custom functions in .NET that can be called from </a:t>
+            </a:r>
+            <a:r>
+              <a:rPr lang="en-US" dirty="0" err="1"/>
+              <a:t>PowerFX</a:t>
+            </a:r>
+            <a:r>
+              <a:rPr lang="en-US" dirty="0"/>
+              <a:t>.</a:t>
             </a:r>
           </a:p>
         </p:txBody>
@@ -6970,7 +7100,7 @@
           <a:bodyPr/>
           <a:lstStyle/>
           <a:p>
-            <a:fld id="{CDDD3684-6E52-4019-8D61-A9B0BAC0DBD6}" type="slidenum">
+            <a:fld id="{A3FADD39-AB8A-4278-99D9-40CD8D745BA1}" type="slidenum">
               <a:rPr lang="en-US" smtClean="0"/>
               <a:t>4</a:t>
             </a:fld>
@@ -6981,7 +7111,7 @@
     </p:spTree>
     <p:extLst>
       <p:ext uri="{BB962C8B-B14F-4D97-AF65-F5344CB8AC3E}">
-        <p14:creationId xmlns:p14="http://schemas.microsoft.com/office/powerpoint/2010/main" val="2486648016"/>
+        <p14:creationId xmlns:p14="http://schemas.microsoft.com/office/powerpoint/2010/main" val="1514823605"/>
       </p:ext>
     </p:extLst>
   </p:cSld>
@@ -7036,39 +7166,41 @@
           <a:lstStyle/>
           <a:p>
             <a:r>
+              <a:rPr lang="en-US" dirty="0"/>
+              <a:t>We will start our session with a story abut a pretend company and a </a:t>
+            </a:r>
+            <a:r>
               <a:rPr lang="en-US" dirty="0" err="1"/>
-              <a:t>Pizza’r’us</a:t>
+              <a:t>a</a:t>
             </a:r>
             <a:r>
               <a:rPr lang="en-US" dirty="0"/>
-              <a:t> has a small dev team led by Alexandria. Alexandria is great .NET developer, and her talent has helped the business units achieve many of their goals via the custom apps and jobs she has created for them.</a:t>
-            </a:r>
-          </a:p>
-          <a:p>
+              <a:t> fake dev team. This story will help us frame a problem that </a:t>
+            </a:r>
+            <a:r>
+              <a:rPr lang="en-US" dirty="0" err="1"/>
+              <a:t>PowerFX</a:t>
+            </a:r>
             <a:r>
               <a:rPr lang="en-US" dirty="0"/>
-              <a:t>Because of the competitive business environment, the business units have been busy asking Alexandria for changes and new features. </a:t>
-            </a:r>
+              <a:t> is a good candidate to solve.</a:t>
+            </a:r>
+          </a:p>
+          <a:p>
+            <a:endParaRPr lang="en-US" dirty="0"/>
           </a:p>
           <a:p>
             <a:r>
               <a:rPr lang="en-US" dirty="0"/>
-              <a:t>Alexandria has a great reputation with the business side, but she sometimes feels like the bottleneck and wishes their was a way to make those changes faster or for another team to be able to help with the changes.</a:t>
-            </a:r>
-          </a:p>
-          <a:p>
-            <a:endParaRPr lang="en-US" dirty="0"/>
-          </a:p>
-          <a:p>
+              <a:t>Our pretend enterprise is </a:t>
+            </a:r>
+            <a:r>
+              <a:rPr lang="en-US" dirty="0" err="1"/>
+              <a:t>Pizzas’R’Us</a:t>
+            </a:r>
             <a:r>
               <a:rPr lang="en-US" dirty="0"/>
-              <a:t>She notices that the biggest part of those changes have been changes to business rules, as the business is trying to evolve their tactics to gain a competitive advantage.</a:t>
-            </a:r>
-          </a:p>
-          <a:p>
-            <a:r>
-              <a:rPr lang="en-US" dirty="0"/>
-              <a:t> </a:t>
+              <a:t>. A small but profitable company, trying to be as nimble as possible. They provide pizza services to restaurants and super-markets.</a:t>
             </a:r>
           </a:p>
         </p:txBody>
@@ -7088,9 +7220,127 @@
           <a:bodyPr/>
           <a:lstStyle/>
           <a:p>
+            <a:fld id="{CDDD3684-6E52-4019-8D61-A9B0BAC0DBD6}" type="slidenum">
+              <a:rPr lang="en-US" smtClean="0"/>
+              <a:t>5</a:t>
+            </a:fld>
+            <a:endParaRPr lang="en-US"/>
+          </a:p>
+        </p:txBody>
+      </p:sp>
+    </p:spTree>
+    <p:extLst>
+      <p:ext uri="{BB962C8B-B14F-4D97-AF65-F5344CB8AC3E}">
+        <p14:creationId xmlns:p14="http://schemas.microsoft.com/office/powerpoint/2010/main" val="2486648016"/>
+      </p:ext>
+    </p:extLst>
+  </p:cSld>
+  <p:clrMapOvr>
+    <a:masterClrMapping/>
+  </p:clrMapOvr>
+</p:notes>
+</file>
+
+<file path=ppt/notesSlides/notesSlide6.xml><?xml version="1.0" encoding="utf-8"?>
+<p:notes xmlns:a="http://schemas.openxmlformats.org/drawingml/2006/main" xmlns:r="http://schemas.openxmlformats.org/officeDocument/2006/relationships" xmlns:p="http://schemas.openxmlformats.org/presentationml/2006/main">
+  <p:cSld>
+    <p:spTree>
+      <p:nvGrpSpPr>
+        <p:cNvPr id="1" name=""/>
+        <p:cNvGrpSpPr/>
+        <p:nvPr/>
+      </p:nvGrpSpPr>
+      <p:grpSpPr>
+        <a:xfrm>
+          <a:off x="0" y="0"/>
+          <a:ext cx="0" cy="0"/>
+          <a:chOff x="0" y="0"/>
+          <a:chExt cx="0" cy="0"/>
+        </a:xfrm>
+      </p:grpSpPr>
+      <p:sp>
+        <p:nvSpPr>
+          <p:cNvPr id="2" name="Slide Image Placeholder 1"/>
+          <p:cNvSpPr>
+            <a:spLocks noGrp="1" noRot="1" noChangeAspect="1"/>
+          </p:cNvSpPr>
+          <p:nvPr>
+            <p:ph type="sldImg"/>
+          </p:nvPr>
+        </p:nvSpPr>
+        <p:spPr/>
+      </p:sp>
+      <p:sp>
+        <p:nvSpPr>
+          <p:cNvPr id="3" name="Notes Placeholder 2"/>
+          <p:cNvSpPr>
+            <a:spLocks noGrp="1"/>
+          </p:cNvSpPr>
+          <p:nvPr>
+            <p:ph type="body" idx="1"/>
+          </p:nvPr>
+        </p:nvSpPr>
+        <p:spPr/>
+        <p:txBody>
+          <a:bodyPr/>
+          <a:lstStyle/>
+          <a:p>
+            <a:r>
+              <a:rPr lang="en-US" dirty="0" err="1"/>
+              <a:t>Pizza’r’us</a:t>
+            </a:r>
+            <a:r>
+              <a:rPr lang="en-US" dirty="0"/>
+              <a:t> has a small dev team led by Alexandria. Alexandria is great .NET developer, and her talent has helped the business units achieve many of their goals via the custom apps and jobs she has created for them.</a:t>
+            </a:r>
+          </a:p>
+          <a:p>
+            <a:r>
+              <a:rPr lang="en-US" dirty="0"/>
+              <a:t>Because of the competitive business environment, the business units have been busy asking Alexandria for changes and new features. </a:t>
+            </a:r>
+          </a:p>
+          <a:p>
+            <a:r>
+              <a:rPr lang="en-US" dirty="0"/>
+              <a:t>Alexandria has a great reputation with the business side, but she sometimes feels like the bottleneck and wishes their was a way to make those changes faster or for another team to be able to help with the changes.</a:t>
+            </a:r>
+          </a:p>
+          <a:p>
+            <a:endParaRPr lang="en-US" dirty="0"/>
+          </a:p>
+          <a:p>
+            <a:r>
+              <a:rPr lang="en-US" dirty="0"/>
+              <a:t>She notices that the biggest part of those changes have been changes to business rules, as the business is trying to evolve their tactics to gain a competitive advantage.</a:t>
+            </a:r>
+          </a:p>
+          <a:p>
+            <a:r>
+              <a:rPr lang="en-US" dirty="0"/>
+              <a:t> </a:t>
+            </a:r>
+          </a:p>
+        </p:txBody>
+      </p:sp>
+      <p:sp>
+        <p:nvSpPr>
+          <p:cNvPr id="4" name="Slide Number Placeholder 3"/>
+          <p:cNvSpPr>
+            <a:spLocks noGrp="1"/>
+          </p:cNvSpPr>
+          <p:nvPr>
+            <p:ph type="sldNum" sz="quarter" idx="5"/>
+          </p:nvPr>
+        </p:nvSpPr>
+        <p:spPr/>
+        <p:txBody>
+          <a:bodyPr/>
+          <a:lstStyle/>
+          <a:p>
             <a:fld id="{A3FADD39-AB8A-4278-99D9-40CD8D745BA1}" type="slidenum">
               <a:rPr lang="en-US" smtClean="0"/>
-              <a:t>5</a:t>
+              <a:t>6</a:t>
             </a:fld>
             <a:endParaRPr lang="en-US"/>
           </a:p>
@@ -7109,7 +7359,7 @@
 </p:notes>
 </file>
 
-<file path=ppt/notesSlides/notesSlide6.xml><?xml version="1.0" encoding="utf-8"?>
+<file path=ppt/notesSlides/notesSlide7.xml><?xml version="1.0" encoding="utf-8"?>
 <p:notes xmlns:a="http://schemas.openxmlformats.org/drawingml/2006/main" xmlns:r="http://schemas.openxmlformats.org/officeDocument/2006/relationships" xmlns:p="http://schemas.openxmlformats.org/presentationml/2006/main">
   <p:cSld>
     <p:spTree>
@@ -7242,7 +7492,7 @@
           <a:p>
             <a:fld id="{A3FADD39-AB8A-4278-99D9-40CD8D745BA1}" type="slidenum">
               <a:rPr lang="en-US" smtClean="0"/>
-              <a:t>6</a:t>
+              <a:t>7</a:t>
             </a:fld>
             <a:endParaRPr lang="en-US"/>
           </a:p>
@@ -7252,132 +7502,6 @@
     <p:extLst>
       <p:ext uri="{BB962C8B-B14F-4D97-AF65-F5344CB8AC3E}">
         <p14:creationId xmlns:p14="http://schemas.microsoft.com/office/powerpoint/2010/main" val="904800643"/>
-      </p:ext>
-    </p:extLst>
-  </p:cSld>
-  <p:clrMapOvr>
-    <a:masterClrMapping/>
-  </p:clrMapOvr>
-</p:notes>
-</file>
-
-<file path=ppt/notesSlides/notesSlide7.xml><?xml version="1.0" encoding="utf-8"?>
-<p:notes xmlns:a="http://schemas.openxmlformats.org/drawingml/2006/main" xmlns:r="http://schemas.openxmlformats.org/officeDocument/2006/relationships" xmlns:p="http://schemas.openxmlformats.org/presentationml/2006/main">
-  <p:cSld>
-    <p:spTree>
-      <p:nvGrpSpPr>
-        <p:cNvPr id="1" name=""/>
-        <p:cNvGrpSpPr/>
-        <p:nvPr/>
-      </p:nvGrpSpPr>
-      <p:grpSpPr>
-        <a:xfrm>
-          <a:off x="0" y="0"/>
-          <a:ext cx="0" cy="0"/>
-          <a:chOff x="0" y="0"/>
-          <a:chExt cx="0" cy="0"/>
-        </a:xfrm>
-      </p:grpSpPr>
-      <p:sp>
-        <p:nvSpPr>
-          <p:cNvPr id="2" name="Slide Image Placeholder 1"/>
-          <p:cNvSpPr>
-            <a:spLocks noGrp="1" noRot="1" noChangeAspect="1"/>
-          </p:cNvSpPr>
-          <p:nvPr>
-            <p:ph type="sldImg"/>
-          </p:nvPr>
-        </p:nvSpPr>
-        <p:spPr/>
-      </p:sp>
-      <p:sp>
-        <p:nvSpPr>
-          <p:cNvPr id="3" name="Notes Placeholder 2"/>
-          <p:cNvSpPr>
-            <a:spLocks noGrp="1"/>
-          </p:cNvSpPr>
-          <p:nvPr>
-            <p:ph type="body" idx="1"/>
-          </p:nvPr>
-        </p:nvSpPr>
-        <p:spPr/>
-        <p:txBody>
-          <a:bodyPr/>
-          <a:lstStyle/>
-          <a:p>
-            <a:r>
-              <a:rPr lang="en-US" dirty="0"/>
-              <a:t>Alexandria starts to engage the Business Units to try to find out what tools they use every day, in an effort find patterns that then she can use to help them with the changes they request.</a:t>
-            </a:r>
-          </a:p>
-          <a:p>
-            <a:r>
-              <a:rPr lang="en-US" dirty="0"/>
-              <a:t>She observes that many in the </a:t>
-            </a:r>
-            <a:r>
-              <a:rPr lang="en-US" dirty="0" err="1"/>
-              <a:t>the</a:t>
-            </a:r>
-            <a:r>
-              <a:rPr lang="en-US" dirty="0"/>
-              <a:t> business units are very good Excel users. Many the apps Alexandria created for them had their </a:t>
-            </a:r>
-            <a:r>
-              <a:rPr lang="en-US" dirty="0" err="1"/>
-              <a:t>originins</a:t>
-            </a:r>
-            <a:r>
-              <a:rPr lang="en-US" dirty="0"/>
-              <a:t> on an Excel file created by business user that then grow into a critical business resource.</a:t>
-            </a:r>
-          </a:p>
-          <a:p>
-            <a:r>
-              <a:rPr lang="en-US" dirty="0"/>
-              <a:t>She learns that some of the requests from the business go to a larger IT team, different from the Development team. This team uses the Microsoft </a:t>
-            </a:r>
-            <a:r>
-              <a:rPr lang="en-US" dirty="0" err="1"/>
-              <a:t>PowerPlatform</a:t>
-            </a:r>
-            <a:r>
-              <a:rPr lang="en-US" dirty="0"/>
-              <a:t> to build solutions for the business. However, quite a good part of those requests are too complex or fall outside the skills of that team, so the requests get redirected to the Dev Team to be addressed by custom software.</a:t>
-            </a:r>
-          </a:p>
-          <a:p>
-            <a:endParaRPr lang="en-US" dirty="0"/>
-          </a:p>
-        </p:txBody>
-      </p:sp>
-      <p:sp>
-        <p:nvSpPr>
-          <p:cNvPr id="4" name="Slide Number Placeholder 3"/>
-          <p:cNvSpPr>
-            <a:spLocks noGrp="1"/>
-          </p:cNvSpPr>
-          <p:nvPr>
-            <p:ph type="sldNum" sz="quarter" idx="5"/>
-          </p:nvPr>
-        </p:nvSpPr>
-        <p:spPr/>
-        <p:txBody>
-          <a:bodyPr/>
-          <a:lstStyle/>
-          <a:p>
-            <a:fld id="{A3FADD39-AB8A-4278-99D9-40CD8D745BA1}" type="slidenum">
-              <a:rPr lang="en-US" smtClean="0"/>
-              <a:t>7</a:t>
-            </a:fld>
-            <a:endParaRPr lang="en-US"/>
-          </a:p>
-        </p:txBody>
-      </p:sp>
-    </p:spTree>
-    <p:extLst>
-      <p:ext uri="{BB962C8B-B14F-4D97-AF65-F5344CB8AC3E}">
-        <p14:creationId xmlns:p14="http://schemas.microsoft.com/office/powerpoint/2010/main" val="1107287744"/>
       </p:ext>
     </p:extLst>
   </p:cSld>
@@ -7433,58 +7557,47 @@
           <a:p>
             <a:r>
               <a:rPr lang="en-US" dirty="0"/>
-              <a:t>Alexandria starts looking for tools that can assist the business units with coming with solutions to their needs. She finds many applications and </a:t>
+              <a:t>Alexandria starts to engage the Business Units to try to find out what tools they use every day, in an effort find patterns that then she can use to help them with the changes they request.</a:t>
+            </a:r>
+          </a:p>
+          <a:p>
+            <a:r>
+              <a:rPr lang="en-US" dirty="0"/>
+              <a:t>She observes that many in the </a:t>
             </a:r>
             <a:r>
               <a:rPr lang="en-US" dirty="0" err="1"/>
-              <a:t>frmeworks</a:t>
+              <a:t>the</a:t>
             </a:r>
             <a:r>
               <a:rPr lang="en-US" dirty="0"/>
-              <a:t> whose purpose is to define and execute business. </a:t>
-            </a:r>
-          </a:p>
-          <a:p>
+              <a:t> business units are very good Excel users. Many the apps Alexandria created for them had their </a:t>
+            </a:r>
+            <a:r>
+              <a:rPr lang="en-US" dirty="0" err="1"/>
+              <a:t>originins</a:t>
+            </a:r>
             <a:r>
               <a:rPr lang="en-US" dirty="0"/>
-              <a:t>A lot of the software out there for business rules is actually pretty mature, with </a:t>
+              <a:t> on an Excel file created by business user that then grow into a critical business resource.</a:t>
+            </a:r>
+          </a:p>
+          <a:p>
+            <a:r>
+              <a:rPr lang="en-US" dirty="0"/>
+              <a:t>She learns that some of the requests from the business go to a larger IT team, different from the Development team. This team uses the Microsoft </a:t>
             </a:r>
             <a:r>
               <a:rPr lang="en-US" dirty="0" err="1"/>
-              <a:t>frameowkrs</a:t>
+              <a:t>PowerPlatform</a:t>
             </a:r>
             <a:r>
               <a:rPr lang="en-US" dirty="0"/>
-              <a:t> such as Drools, and Camunda’s DNN. However, as good as those tools are, they are not a good fit for her org because most of those tools are Java based and would require the business units to learn new paradigms and syntaxes.</a:t>
-            </a:r>
-          </a:p>
-          <a:p>
-            <a:r>
-              <a:rPr lang="en-US" dirty="0"/>
-              <a:t>Alexandria does find that Microsoft has an Open Source engine for </a:t>
-            </a:r>
-            <a:r>
-              <a:rPr lang="en-US" dirty="0" err="1"/>
-              <a:t>.net</a:t>
-            </a:r>
-            <a:r>
-              <a:rPr lang="en-US" dirty="0"/>
-              <a:t> for rules. Even though this one is based in </a:t>
-            </a:r>
-            <a:r>
-              <a:rPr lang="en-US" dirty="0" err="1"/>
-              <a:t>.net</a:t>
-            </a:r>
-            <a:r>
-              <a:rPr lang="en-US" dirty="0"/>
-              <a:t>, the syntax is still a little bit unfamiliar to the business.</a:t>
-            </a:r>
-          </a:p>
-          <a:p>
-            <a:r>
-              <a:rPr lang="en-US" dirty="0"/>
-              <a:t>Another approach she finds is using Windows Workflows as a business friendly to define business logic.</a:t>
-            </a:r>
+              <a:t> to build solutions for the business. However, quite a good part of those requests are too complex or fall outside the skills of that team, so the requests get redirected to the Dev Team to be addressed by custom software.</a:t>
+            </a:r>
+          </a:p>
+          <a:p>
+            <a:endParaRPr lang="en-US" dirty="0"/>
           </a:p>
         </p:txBody>
       </p:sp>
@@ -7514,7 +7627,7 @@
     </p:spTree>
     <p:extLst>
       <p:ext uri="{BB962C8B-B14F-4D97-AF65-F5344CB8AC3E}">
-        <p14:creationId xmlns:p14="http://schemas.microsoft.com/office/powerpoint/2010/main" val="2463375002"/>
+        <p14:creationId xmlns:p14="http://schemas.microsoft.com/office/powerpoint/2010/main" val="1107287744"/>
       </p:ext>
     </p:extLst>
   </p:cSld>
@@ -7570,55 +7683,57 @@
           <a:p>
             <a:r>
               <a:rPr lang="en-US" dirty="0"/>
-              <a:t>According to Microsoft “</a:t>
-            </a:r>
-            <a:r>
-              <a:rPr lang="en-US" sz="1200" b="0" i="0" kern="1200" dirty="0">
-                <a:solidFill>
-                  <a:schemeClr val="tx1"/>
-                </a:solidFill>
-                <a:effectLst/>
-                <a:latin typeface="+mn-lt"/>
-                <a:ea typeface="+mn-ea"/>
-                <a:cs typeface="+mn-cs"/>
-              </a:rPr>
-              <a:t>It's a general-purpose, strong-typed, declarative, and functional programming language.” (</a:t>
-            </a:r>
-            <a:r>
-              <a:rPr lang="en-US" dirty="0">
-                <a:hlinkClick r:id="rId3"/>
-              </a:rPr>
-              <a:t>Microsoft Power </a:t>
-            </a:r>
-            <a:r>
-              <a:rPr lang="en-US" dirty="0" err="1">
-                <a:hlinkClick r:id="rId3"/>
-              </a:rPr>
-              <a:t>Fx</a:t>
-            </a:r>
-            <a:r>
-              <a:rPr lang="en-US" dirty="0">
-                <a:hlinkClick r:id="rId3"/>
-              </a:rPr>
-              <a:t> overview - Power Platform | Microsoft Learn</a:t>
+              <a:t>Alexandria starts looking for tools that can assist the business units with coming with solutions to their needs. She finds many applications and </a:t>
+            </a:r>
+            <a:r>
+              <a:rPr lang="en-US" dirty="0" err="1"/>
+              <a:t>frmeworks</a:t>
             </a:r>
             <a:r>
               <a:rPr lang="en-US" dirty="0"/>
-              <a:t>)</a:t>
+              <a:t> whose purpose is to define and execute business. </a:t>
             </a:r>
           </a:p>
           <a:p>
             <a:r>
               <a:rPr lang="en-US" dirty="0"/>
-              <a:t>One of the design goals is to have people think of </a:t>
+              <a:t>A lot of the software out there for business rules is actually pretty mature, with </a:t>
             </a:r>
             <a:r>
               <a:rPr lang="en-US" dirty="0" err="1"/>
-              <a:t>PowerFX</a:t>
+              <a:t>frameowkrs</a:t>
             </a:r>
             <a:r>
               <a:rPr lang="en-US" dirty="0"/>
-              <a:t> as spreadsheets (https://learn.microsoft.com/en-us/power-platform/power-fx/overview#think-spreadsheet )</a:t>
+              <a:t> such as Drools, and Camunda’s DNN. However, as good as those tools are, they are not a good fit for her org because most of those tools are Java based and would require the business units to learn new paradigms and syntaxes.</a:t>
+            </a:r>
+          </a:p>
+          <a:p>
+            <a:r>
+              <a:rPr lang="en-US" dirty="0"/>
+              <a:t>Alexandria does find that Microsoft has an Open Source engine for </a:t>
+            </a:r>
+            <a:r>
+              <a:rPr lang="en-US" dirty="0" err="1"/>
+              <a:t>.net</a:t>
+            </a:r>
+            <a:r>
+              <a:rPr lang="en-US" dirty="0"/>
+              <a:t> for rules. Even though this one is based in </a:t>
+            </a:r>
+            <a:r>
+              <a:rPr lang="en-US" dirty="0" err="1"/>
+              <a:t>.net</a:t>
+            </a:r>
+            <a:r>
+              <a:rPr lang="en-US" dirty="0"/>
+              <a:t>, the syntax is still a little bit unfamiliar to the business.</a:t>
+            </a:r>
+          </a:p>
+          <a:p>
+            <a:r>
+              <a:rPr lang="en-US" dirty="0"/>
+              <a:t>Another approach she finds is using Windows Workflows as a business friendly to define business logic.</a:t>
             </a:r>
           </a:p>
         </p:txBody>
@@ -7649,7 +7764,7 @@
     </p:spTree>
     <p:extLst>
       <p:ext uri="{BB962C8B-B14F-4D97-AF65-F5344CB8AC3E}">
-        <p14:creationId xmlns:p14="http://schemas.microsoft.com/office/powerpoint/2010/main" val="3461771002"/>
+        <p14:creationId xmlns:p14="http://schemas.microsoft.com/office/powerpoint/2010/main" val="2463375002"/>
       </p:ext>
     </p:extLst>
   </p:cSld>
@@ -7806,7 +7921,7 @@
           <a:p>
             <a:fld id="{5CDD294D-83BB-48C2-9EE9-4B0B0168A414}" type="datetimeFigureOut">
               <a:rPr lang="en-US" smtClean="0"/>
-              <a:t>4/7/2026</a:t>
+              <a:t>4/10/2026</a:t>
             </a:fld>
             <a:endParaRPr lang="en-US"/>
           </a:p>
@@ -8004,7 +8119,7 @@
           <a:p>
             <a:fld id="{5CDD294D-83BB-48C2-9EE9-4B0B0168A414}" type="datetimeFigureOut">
               <a:rPr lang="en-US" smtClean="0"/>
-              <a:t>4/7/2026</a:t>
+              <a:t>4/10/2026</a:t>
             </a:fld>
             <a:endParaRPr lang="en-US"/>
           </a:p>
@@ -8212,7 +8327,7 @@
           <a:p>
             <a:fld id="{5CDD294D-83BB-48C2-9EE9-4B0B0168A414}" type="datetimeFigureOut">
               <a:rPr lang="en-US" smtClean="0"/>
-              <a:t>4/7/2026</a:t>
+              <a:t>4/10/2026</a:t>
             </a:fld>
             <a:endParaRPr lang="en-US"/>
           </a:p>
@@ -8410,7 +8525,7 @@
           <a:p>
             <a:fld id="{5CDD294D-83BB-48C2-9EE9-4B0B0168A414}" type="datetimeFigureOut">
               <a:rPr lang="en-US" smtClean="0"/>
-              <a:t>4/7/2026</a:t>
+              <a:t>4/10/2026</a:t>
             </a:fld>
             <a:endParaRPr lang="en-US"/>
           </a:p>
@@ -8685,7 +8800,7 @@
           <a:p>
             <a:fld id="{5CDD294D-83BB-48C2-9EE9-4B0B0168A414}" type="datetimeFigureOut">
               <a:rPr lang="en-US" smtClean="0"/>
-              <a:t>4/7/2026</a:t>
+              <a:t>4/10/2026</a:t>
             </a:fld>
             <a:endParaRPr lang="en-US"/>
           </a:p>
@@ -8950,7 +9065,7 @@
           <a:p>
             <a:fld id="{5CDD294D-83BB-48C2-9EE9-4B0B0168A414}" type="datetimeFigureOut">
               <a:rPr lang="en-US" smtClean="0"/>
-              <a:t>4/7/2026</a:t>
+              <a:t>4/10/2026</a:t>
             </a:fld>
             <a:endParaRPr lang="en-US"/>
           </a:p>
@@ -9362,7 +9477,7 @@
           <a:p>
             <a:fld id="{5CDD294D-83BB-48C2-9EE9-4B0B0168A414}" type="datetimeFigureOut">
               <a:rPr lang="en-US" smtClean="0"/>
-              <a:t>4/7/2026</a:t>
+              <a:t>4/10/2026</a:t>
             </a:fld>
             <a:endParaRPr lang="en-US"/>
           </a:p>
@@ -9503,7 +9618,7 @@
           <a:p>
             <a:fld id="{5CDD294D-83BB-48C2-9EE9-4B0B0168A414}" type="datetimeFigureOut">
               <a:rPr lang="en-US" smtClean="0"/>
-              <a:t>4/7/2026</a:t>
+              <a:t>4/10/2026</a:t>
             </a:fld>
             <a:endParaRPr lang="en-US"/>
           </a:p>
@@ -9616,7 +9731,7 @@
           <a:p>
             <a:fld id="{5CDD294D-83BB-48C2-9EE9-4B0B0168A414}" type="datetimeFigureOut">
               <a:rPr lang="en-US" smtClean="0"/>
-              <a:t>4/7/2026</a:t>
+              <a:t>4/10/2026</a:t>
             </a:fld>
             <a:endParaRPr lang="en-US"/>
           </a:p>
@@ -9927,7 +10042,7 @@
           <a:p>
             <a:fld id="{5CDD294D-83BB-48C2-9EE9-4B0B0168A414}" type="datetimeFigureOut">
               <a:rPr lang="en-US" smtClean="0"/>
-              <a:t>4/7/2026</a:t>
+              <a:t>4/10/2026</a:t>
             </a:fld>
             <a:endParaRPr lang="en-US"/>
           </a:p>
@@ -10215,7 +10330,7 @@
           <a:p>
             <a:fld id="{5CDD294D-83BB-48C2-9EE9-4B0B0168A414}" type="datetimeFigureOut">
               <a:rPr lang="en-US" smtClean="0"/>
-              <a:t>4/7/2026</a:t>
+              <a:t>4/10/2026</a:t>
             </a:fld>
             <a:endParaRPr lang="en-US"/>
           </a:p>
@@ -10456,7 +10571,7 @@
           <a:p>
             <a:fld id="{5CDD294D-83BB-48C2-9EE9-4B0B0168A414}" type="datetimeFigureOut">
               <a:rPr lang="en-US" smtClean="0"/>
-              <a:t>4/7/2026</a:t>
+              <a:t>4/10/2026</a:t>
             </a:fld>
             <a:endParaRPr lang="en-US"/>
           </a:p>
@@ -10869,7 +10984,13 @@
     </p:bg>
     <p:spTree>
       <p:nvGrpSpPr>
-        <p:cNvPr id="1" name=""/>
+        <p:cNvPr id="1" name="">
+          <a:extLst>
+            <a:ext uri="{FF2B5EF4-FFF2-40B4-BE49-F238E27FC236}">
+              <a16:creationId xmlns:a16="http://schemas.microsoft.com/office/drawing/2014/main" id="{7E860007-79FA-046B-0958-586DF534F237}"/>
+            </a:ext>
+          </a:extLst>
+        </p:cNvPr>
         <p:cNvGrpSpPr/>
         <p:nvPr/>
       </p:nvGrpSpPr>
@@ -10886,7 +11007,7 @@
           <p:cNvPr id="8" name="Rectangle 7">
             <a:extLst>
               <a:ext uri="{FF2B5EF4-FFF2-40B4-BE49-F238E27FC236}">
-                <a16:creationId xmlns:a16="http://schemas.microsoft.com/office/drawing/2014/main" id="{32D45EE4-C4F0-4F72-B1C6-39F596D138A9}"/>
+                <a16:creationId xmlns:a16="http://schemas.microsoft.com/office/drawing/2014/main" id="{075D4693-B4CD-8528-E26F-1B15D282D5D6}"/>
               </a:ext>
               <a:ext uri="{C183D7F6-B498-43B3-948B-1728B52AA6E4}">
                 <adec:decorative xmlns:adec="http://schemas.microsoft.com/office/drawing/2017/decorative" val="1"/>
@@ -10946,7 +11067,7 @@
           <p:cNvPr id="10" name="Oval 9">
             <a:extLst>
               <a:ext uri="{FF2B5EF4-FFF2-40B4-BE49-F238E27FC236}">
-                <a16:creationId xmlns:a16="http://schemas.microsoft.com/office/drawing/2014/main" id="{8C459BAD-4279-4A9D-B0C5-662C5F5ED21F}"/>
+                <a16:creationId xmlns:a16="http://schemas.microsoft.com/office/drawing/2014/main" id="{CB79AB83-CA12-FDB1-1F0B-49FA8EABBC65}"/>
               </a:ext>
               <a:ext uri="{C183D7F6-B498-43B3-948B-1728B52AA6E4}">
                 <adec:decorative xmlns:adec="http://schemas.microsoft.com/office/drawing/2017/decorative" val="1"/>
@@ -11108,7 +11229,7 @@
           <p:cNvPr id="2" name="Title 1">
             <a:extLst>
               <a:ext uri="{FF2B5EF4-FFF2-40B4-BE49-F238E27FC236}">
-                <a16:creationId xmlns:a16="http://schemas.microsoft.com/office/drawing/2014/main" id="{21C7C281-0D8A-7D1A-1A3A-A9AA7B2EC34A}"/>
+                <a16:creationId xmlns:a16="http://schemas.microsoft.com/office/drawing/2014/main" id="{A872CD7C-FDDF-B9D1-71F0-1EB5BDF11CF9}"/>
               </a:ext>
             </a:extLst>
           </p:cNvPr>
@@ -11163,7 +11284,7 @@
           <p:cNvPr id="3" name="Subtitle 2">
             <a:extLst>
               <a:ext uri="{FF2B5EF4-FFF2-40B4-BE49-F238E27FC236}">
-                <a16:creationId xmlns:a16="http://schemas.microsoft.com/office/drawing/2014/main" id="{CA977AF2-7DD2-BDC2-A7C1-9D392D486378}"/>
+                <a16:creationId xmlns:a16="http://schemas.microsoft.com/office/drawing/2014/main" id="{51D3A53A-65D1-E513-6571-80561EB8DF5F}"/>
               </a:ext>
             </a:extLst>
           </p:cNvPr>
@@ -11199,7 +11320,7 @@
           <p:cNvPr id="12" name="sketch line">
             <a:extLst>
               <a:ext uri="{FF2B5EF4-FFF2-40B4-BE49-F238E27FC236}">
-                <a16:creationId xmlns:a16="http://schemas.microsoft.com/office/drawing/2014/main" id="{0953BC39-9D68-40BE-BF3C-5C4EB782AF94}"/>
+                <a16:creationId xmlns:a16="http://schemas.microsoft.com/office/drawing/2014/main" id="{5E95D95A-2FD3-7763-4D09-9468110F2FB6}"/>
               </a:ext>
               <a:ext uri="{C183D7F6-B498-43B3-948B-1728B52AA6E4}">
                 <adec:decorative xmlns:adec="http://schemas.microsoft.com/office/drawing/2017/decorative" val="1"/>
@@ -11537,10 +11658,40 @@
           </a:p>
         </p:txBody>
       </p:sp>
+      <p:pic>
+        <p:nvPicPr>
+          <p:cNvPr id="4" name="Picture 3">
+            <a:extLst>
+              <a:ext uri="{FF2B5EF4-FFF2-40B4-BE49-F238E27FC236}">
+                <a16:creationId xmlns:a16="http://schemas.microsoft.com/office/drawing/2014/main" id="{B229868C-0DCF-F23B-B5B6-F16402163C62}"/>
+              </a:ext>
+            </a:extLst>
+          </p:cNvPr>
+          <p:cNvPicPr>
+            <a:picLocks noChangeAspect="1"/>
+          </p:cNvPicPr>
+          <p:nvPr/>
+        </p:nvPicPr>
+        <p:blipFill>
+          <a:blip r:embed="rId3"/>
+          <a:stretch>
+            <a:fillRect/>
+          </a:stretch>
+        </p:blipFill>
+        <p:spPr>
+          <a:xfrm>
+            <a:off x="10569176" y="5129213"/>
+            <a:ext cx="1486752" cy="1486752"/>
+          </a:xfrm>
+          <a:prstGeom prst="rect">
+            <a:avLst/>
+          </a:prstGeom>
+        </p:spPr>
+      </p:pic>
     </p:spTree>
     <p:extLst>
       <p:ext uri="{BB962C8B-B14F-4D97-AF65-F5344CB8AC3E}">
-        <p14:creationId xmlns:p14="http://schemas.microsoft.com/office/powerpoint/2010/main" val="3411481011"/>
+        <p14:creationId xmlns:p14="http://schemas.microsoft.com/office/powerpoint/2010/main" val="2558385719"/>
       </p:ext>
     </p:extLst>
   </p:cSld>
@@ -11551,6 +11702,421 @@
 </file>
 
 <file path=ppt/slides/slide10.xml><?xml version="1.0" encoding="utf-8"?>
+<p:sld xmlns:a="http://schemas.openxmlformats.org/drawingml/2006/main" xmlns:r="http://schemas.openxmlformats.org/officeDocument/2006/relationships" xmlns:p="http://schemas.openxmlformats.org/presentationml/2006/main">
+  <p:cSld>
+    <p:bg>
+      <p:bgPr>
+        <a:solidFill>
+          <a:schemeClr val="bg1"/>
+        </a:solidFill>
+        <a:effectLst/>
+      </p:bgPr>
+    </p:bg>
+    <p:spTree>
+      <p:nvGrpSpPr>
+        <p:cNvPr id="1" name="">
+          <a:extLst>
+            <a:ext uri="{FF2B5EF4-FFF2-40B4-BE49-F238E27FC236}">
+              <a16:creationId xmlns:a16="http://schemas.microsoft.com/office/drawing/2014/main" id="{59AE677F-C6E5-FFA4-6478-5D58E56AA595}"/>
+            </a:ext>
+          </a:extLst>
+        </p:cNvPr>
+        <p:cNvGrpSpPr/>
+        <p:nvPr/>
+      </p:nvGrpSpPr>
+      <p:grpSpPr>
+        <a:xfrm>
+          <a:off x="0" y="0"/>
+          <a:ext cx="0" cy="0"/>
+          <a:chOff x="0" y="0"/>
+          <a:chExt cx="0" cy="0"/>
+        </a:xfrm>
+      </p:grpSpPr>
+      <p:sp useBgFill="1">
+        <p:nvSpPr>
+          <p:cNvPr id="8" name="Rectangle 7">
+            <a:extLst>
+              <a:ext uri="{FF2B5EF4-FFF2-40B4-BE49-F238E27FC236}">
+                <a16:creationId xmlns:a16="http://schemas.microsoft.com/office/drawing/2014/main" id="{907EF6B7-1338-4443-8C46-6A318D952DFD}"/>
+              </a:ext>
+              <a:ext uri="{C183D7F6-B498-43B3-948B-1728B52AA6E4}">
+                <adec:decorative xmlns:adec="http://schemas.microsoft.com/office/drawing/2017/decorative" val="1"/>
+              </a:ext>
+            </a:extLst>
+          </p:cNvPr>
+          <p:cNvSpPr>
+            <a:spLocks noGrp="1" noRot="1" noChangeAspect="1" noMove="1" noResize="1" noEditPoints="1" noAdjustHandles="1" noChangeArrowheads="1" noChangeShapeType="1" noTextEdit="1"/>
+          </p:cNvSpPr>
+          <p:nvPr>
+            <p:extLst>
+              <p:ext uri="{386F3935-93C4-4BCD-93E2-E3B085C9AB24}">
+                <p16:designElem xmlns:p16="http://schemas.microsoft.com/office/powerpoint/2015/main" val="1"/>
+              </p:ext>
+            </p:extLst>
+          </p:nvPr>
+        </p:nvSpPr>
+        <p:spPr>
+          <a:xfrm>
+            <a:off x="3048" y="0"/>
+            <a:ext cx="12188952" cy="6858000"/>
+          </a:xfrm>
+          <a:prstGeom prst="rect">
+            <a:avLst/>
+          </a:prstGeom>
+          <a:ln>
+            <a:noFill/>
+          </a:ln>
+        </p:spPr>
+        <p:style>
+          <a:lnRef idx="2">
+            <a:schemeClr val="accent1">
+              <a:shade val="50000"/>
+            </a:schemeClr>
+          </a:lnRef>
+          <a:fillRef idx="1">
+            <a:schemeClr val="accent1"/>
+          </a:fillRef>
+          <a:effectRef idx="0">
+            <a:schemeClr val="accent1"/>
+          </a:effectRef>
+          <a:fontRef idx="minor">
+            <a:schemeClr val="lt1"/>
+          </a:fontRef>
+        </p:style>
+        <p:txBody>
+          <a:bodyPr rtlCol="0" anchor="ctr"/>
+          <a:lstStyle/>
+          <a:p>
+            <a:pPr algn="ctr"/>
+            <a:endParaRPr lang="en-US"/>
+          </a:p>
+        </p:txBody>
+      </p:sp>
+      <p:sp>
+        <p:nvSpPr>
+          <p:cNvPr id="10" name="Freeform: Shape 9">
+            <a:extLst>
+              <a:ext uri="{FF2B5EF4-FFF2-40B4-BE49-F238E27FC236}">
+                <a16:creationId xmlns:a16="http://schemas.microsoft.com/office/drawing/2014/main" id="{DAAE4CDD-124C-4DCF-9584-B6033B545DD5}"/>
+              </a:ext>
+              <a:ext uri="{C183D7F6-B498-43B3-948B-1728B52AA6E4}">
+                <adec:decorative xmlns:adec="http://schemas.microsoft.com/office/drawing/2017/decorative" val="1"/>
+              </a:ext>
+            </a:extLst>
+          </p:cNvPr>
+          <p:cNvSpPr>
+            <a:spLocks noGrp="1" noRot="1" noChangeAspect="1" noMove="1" noResize="1" noEditPoints="1" noAdjustHandles="1" noChangeArrowheads="1" noChangeShapeType="1" noTextEdit="1"/>
+          </p:cNvSpPr>
+          <p:nvPr>
+            <p:extLst>
+              <p:ext uri="{386F3935-93C4-4BCD-93E2-E3B085C9AB24}">
+                <p16:designElem xmlns:p16="http://schemas.microsoft.com/office/powerpoint/2015/main" val="1"/>
+              </p:ext>
+            </p:extLst>
+          </p:nvPr>
+        </p:nvSpPr>
+        <p:spPr>
+          <a:xfrm>
+            <a:off x="1" y="0"/>
+            <a:ext cx="4167271" cy="6858000"/>
+          </a:xfrm>
+          <a:custGeom>
+            <a:avLst/>
+            <a:gdLst>
+              <a:gd name="connsiteX0" fmla="*/ 0 w 4167271"/>
+              <a:gd name="connsiteY0" fmla="*/ 0 h 6858000"/>
+              <a:gd name="connsiteX1" fmla="*/ 2259550 w 4167271"/>
+              <a:gd name="connsiteY1" fmla="*/ 0 h 6858000"/>
+              <a:gd name="connsiteX2" fmla="*/ 2387803 w 4167271"/>
+              <a:gd name="connsiteY2" fmla="*/ 82222 h 6858000"/>
+              <a:gd name="connsiteX3" fmla="*/ 4167271 w 4167271"/>
+              <a:gd name="connsiteY3" fmla="*/ 3429000 h 6858000"/>
+              <a:gd name="connsiteX4" fmla="*/ 2387803 w 4167271"/>
+              <a:gd name="connsiteY4" fmla="*/ 6775779 h 6858000"/>
+              <a:gd name="connsiteX5" fmla="*/ 2259550 w 4167271"/>
+              <a:gd name="connsiteY5" fmla="*/ 6858000 h 6858000"/>
+              <a:gd name="connsiteX6" fmla="*/ 0 w 4167271"/>
+              <a:gd name="connsiteY6" fmla="*/ 6858000 h 6858000"/>
+            </a:gdLst>
+            <a:ahLst/>
+            <a:cxnLst>
+              <a:cxn ang="0">
+                <a:pos x="connsiteX0" y="connsiteY0"/>
+              </a:cxn>
+              <a:cxn ang="0">
+                <a:pos x="connsiteX1" y="connsiteY1"/>
+              </a:cxn>
+              <a:cxn ang="0">
+                <a:pos x="connsiteX2" y="connsiteY2"/>
+              </a:cxn>
+              <a:cxn ang="0">
+                <a:pos x="connsiteX3" y="connsiteY3"/>
+              </a:cxn>
+              <a:cxn ang="0">
+                <a:pos x="connsiteX4" y="connsiteY4"/>
+              </a:cxn>
+              <a:cxn ang="0">
+                <a:pos x="connsiteX5" y="connsiteY5"/>
+              </a:cxn>
+              <a:cxn ang="0">
+                <a:pos x="connsiteX6" y="connsiteY6"/>
+              </a:cxn>
+            </a:cxnLst>
+            <a:rect l="l" t="t" r="r" b="b"/>
+            <a:pathLst>
+              <a:path w="4167271" h="6858000">
+                <a:moveTo>
+                  <a:pt x="0" y="0"/>
+                </a:moveTo>
+                <a:lnTo>
+                  <a:pt x="2259550" y="0"/>
+                </a:lnTo>
+                <a:lnTo>
+                  <a:pt x="2387803" y="82222"/>
+                </a:lnTo>
+                <a:cubicBezTo>
+                  <a:pt x="3461407" y="807534"/>
+                  <a:pt x="4167271" y="2035835"/>
+                  <a:pt x="4167271" y="3429000"/>
+                </a:cubicBezTo>
+                <a:cubicBezTo>
+                  <a:pt x="4167271" y="4822165"/>
+                  <a:pt x="3461407" y="6050467"/>
+                  <a:pt x="2387803" y="6775779"/>
+                </a:cubicBezTo>
+                <a:lnTo>
+                  <a:pt x="2259550" y="6858000"/>
+                </a:lnTo>
+                <a:lnTo>
+                  <a:pt x="0" y="6858000"/>
+                </a:lnTo>
+                <a:close/>
+              </a:path>
+            </a:pathLst>
+          </a:custGeom>
+          <a:solidFill>
+            <a:schemeClr val="accent2"/>
+          </a:solidFill>
+          <a:ln>
+            <a:noFill/>
+          </a:ln>
+        </p:spPr>
+        <p:style>
+          <a:lnRef idx="2">
+            <a:schemeClr val="accent1">
+              <a:shade val="50000"/>
+            </a:schemeClr>
+          </a:lnRef>
+          <a:fillRef idx="1">
+            <a:schemeClr val="accent1"/>
+          </a:fillRef>
+          <a:effectRef idx="0">
+            <a:schemeClr val="accent1"/>
+          </a:effectRef>
+          <a:fontRef idx="minor">
+            <a:schemeClr val="lt1"/>
+          </a:fontRef>
+        </p:style>
+        <p:txBody>
+          <a:bodyPr rtlCol="0" anchor="ctr"/>
+          <a:lstStyle/>
+          <a:p>
+            <a:pPr algn="ctr"/>
+            <a:endParaRPr lang="en-US"/>
+          </a:p>
+        </p:txBody>
+      </p:sp>
+      <p:sp>
+        <p:nvSpPr>
+          <p:cNvPr id="2" name="Title 1">
+            <a:extLst>
+              <a:ext uri="{FF2B5EF4-FFF2-40B4-BE49-F238E27FC236}">
+                <a16:creationId xmlns:a16="http://schemas.microsoft.com/office/drawing/2014/main" id="{1F6F1046-F7CA-D566-9E0D-D15AB3B8D754}"/>
+              </a:ext>
+            </a:extLst>
+          </p:cNvPr>
+          <p:cNvSpPr>
+            <a:spLocks noGrp="1"/>
+          </p:cNvSpPr>
+          <p:nvPr>
+            <p:ph type="title"/>
+          </p:nvPr>
+        </p:nvSpPr>
+        <p:spPr>
+          <a:xfrm>
+            <a:off x="686834" y="1153572"/>
+            <a:ext cx="3200400" cy="4461163"/>
+          </a:xfrm>
+        </p:spPr>
+        <p:txBody>
+          <a:bodyPr>
+            <a:normAutofit/>
+          </a:bodyPr>
+          <a:lstStyle/>
+          <a:p>
+            <a:r>
+              <a:rPr lang="en-US">
+                <a:solidFill>
+                  <a:srgbClr val="FFFFFF"/>
+                </a:solidFill>
+              </a:rPr>
+              <a:t>Intro to PowerFX</a:t>
+            </a:r>
+          </a:p>
+        </p:txBody>
+      </p:sp>
+      <p:sp>
+        <p:nvSpPr>
+          <p:cNvPr id="12" name="Arc 11">
+            <a:extLst>
+              <a:ext uri="{FF2B5EF4-FFF2-40B4-BE49-F238E27FC236}">
+                <a16:creationId xmlns:a16="http://schemas.microsoft.com/office/drawing/2014/main" id="{081E4A58-353D-44AE-B2FC-2A74E2E400F7}"/>
+              </a:ext>
+              <a:ext uri="{C183D7F6-B498-43B3-948B-1728B52AA6E4}">
+                <adec:decorative xmlns:adec="http://schemas.microsoft.com/office/drawing/2017/decorative" val="1"/>
+              </a:ext>
+            </a:extLst>
+          </p:cNvPr>
+          <p:cNvSpPr>
+            <a:spLocks noGrp="1" noRot="1" noChangeAspect="1" noMove="1" noResize="1" noEditPoints="1" noAdjustHandles="1" noChangeArrowheads="1" noChangeShapeType="1" noTextEdit="1"/>
+          </p:cNvSpPr>
+          <p:nvPr>
+            <p:extLst>
+              <p:ext uri="{386F3935-93C4-4BCD-93E2-E3B085C9AB24}">
+                <p16:designElem xmlns:p16="http://schemas.microsoft.com/office/powerpoint/2015/main" val="1"/>
+              </p:ext>
+            </p:extLst>
+          </p:nvPr>
+        </p:nvSpPr>
+        <p:spPr>
+          <a:xfrm flipV="1">
+            <a:off x="7550402" y="2455479"/>
+            <a:ext cx="4083433" cy="4083433"/>
+          </a:xfrm>
+          <a:prstGeom prst="arc">
+            <a:avLst/>
+          </a:prstGeom>
+          <a:ln w="127000" cap="rnd">
+            <a:solidFill>
+              <a:schemeClr val="accent4"/>
+            </a:solidFill>
+            <a:prstDash val="dash"/>
+          </a:ln>
+        </p:spPr>
+        <p:style>
+          <a:lnRef idx="1">
+            <a:schemeClr val="accent1"/>
+          </a:lnRef>
+          <a:fillRef idx="0">
+            <a:schemeClr val="accent1"/>
+          </a:fillRef>
+          <a:effectRef idx="0">
+            <a:schemeClr val="accent1"/>
+          </a:effectRef>
+          <a:fontRef idx="minor">
+            <a:schemeClr val="tx1"/>
+          </a:fontRef>
+        </p:style>
+        <p:txBody>
+          <a:bodyPr rtlCol="0" anchor="ctr"/>
+          <a:lstStyle/>
+          <a:p>
+            <a:pPr algn="ctr"/>
+            <a:endParaRPr lang="en-US" dirty="0"/>
+          </a:p>
+        </p:txBody>
+      </p:sp>
+      <p:sp>
+        <p:nvSpPr>
+          <p:cNvPr id="3" name="Content Placeholder 2">
+            <a:extLst>
+              <a:ext uri="{FF2B5EF4-FFF2-40B4-BE49-F238E27FC236}">
+                <a16:creationId xmlns:a16="http://schemas.microsoft.com/office/drawing/2014/main" id="{8B69A762-FEC8-E2E1-6828-B3877AE8878A}"/>
+              </a:ext>
+            </a:extLst>
+          </p:cNvPr>
+          <p:cNvSpPr>
+            <a:spLocks noGrp="1"/>
+          </p:cNvSpPr>
+          <p:nvPr>
+            <p:ph idx="1"/>
+          </p:nvPr>
+        </p:nvSpPr>
+        <p:spPr>
+          <a:xfrm>
+            <a:off x="4447308" y="591344"/>
+            <a:ext cx="6906491" cy="5585619"/>
+          </a:xfrm>
+        </p:spPr>
+        <p:txBody>
+          <a:bodyPr anchor="ctr">
+            <a:normAutofit/>
+          </a:bodyPr>
+          <a:lstStyle/>
+          <a:p>
+            <a:r>
+              <a:rPr lang="en-US" dirty="0"/>
+              <a:t>Business user friendly</a:t>
+            </a:r>
+          </a:p>
+          <a:p>
+            <a:r>
+              <a:rPr lang="en-US" dirty="0"/>
+              <a:t>Open sourced by Microsoft</a:t>
+            </a:r>
+          </a:p>
+          <a:p>
+            <a:r>
+              <a:rPr lang="en-US" dirty="0"/>
+              <a:t>Similar to Excel formulas</a:t>
+            </a:r>
+          </a:p>
+          <a:p>
+            <a:r>
+              <a:rPr lang="en-US" dirty="0"/>
+              <a:t>Use in many parts of the Power Platform</a:t>
+            </a:r>
+          </a:p>
+          <a:p>
+            <a:pPr lvl="1"/>
+            <a:r>
+              <a:rPr lang="en-US" dirty="0"/>
+              <a:t>Many Experts, Tutorials, Articles, </a:t>
+            </a:r>
+            <a:r>
+              <a:rPr lang="en-US" dirty="0" err="1"/>
+              <a:t>etc</a:t>
+            </a:r>
+            <a:endParaRPr lang="en-US" dirty="0"/>
+          </a:p>
+          <a:p>
+            <a:r>
+              <a:rPr lang="en-US" dirty="0">
+                <a:hlinkClick r:id="rId3"/>
+              </a:rPr>
+              <a:t>https://learn.microsoft.com/en-us/power-platform/power-fx/overview</a:t>
+            </a:r>
+            <a:r>
+              <a:rPr lang="en-US" dirty="0"/>
+              <a:t> </a:t>
+            </a:r>
+          </a:p>
+        </p:txBody>
+      </p:sp>
+    </p:spTree>
+    <p:extLst>
+      <p:ext uri="{BB962C8B-B14F-4D97-AF65-F5344CB8AC3E}">
+        <p14:creationId xmlns:p14="http://schemas.microsoft.com/office/powerpoint/2010/main" val="2726405216"/>
+      </p:ext>
+    </p:extLst>
+  </p:cSld>
+  <p:clrMapOvr>
+    <a:masterClrMapping/>
+  </p:clrMapOvr>
+</p:sld>
+</file>
+
+<file path=ppt/slides/slide11.xml><?xml version="1.0" encoding="utf-8"?>
 <p:sld xmlns:a="http://schemas.openxmlformats.org/drawingml/2006/main" xmlns:r="http://schemas.openxmlformats.org/officeDocument/2006/relationships" xmlns:p="http://schemas.openxmlformats.org/presentationml/2006/main">
   <p:cSld>
     <p:bg>
@@ -12418,7 +12984,7 @@
 </p:sld>
 </file>
 
-<file path=ppt/slides/slide11.xml><?xml version="1.0" encoding="utf-8"?>
+<file path=ppt/slides/slide12.xml><?xml version="1.0" encoding="utf-8"?>
 <p:sld xmlns:a="http://schemas.openxmlformats.org/drawingml/2006/main" xmlns:r="http://schemas.openxmlformats.org/officeDocument/2006/relationships" xmlns:p="http://schemas.openxmlformats.org/presentationml/2006/main">
   <p:cSld>
     <p:spTree>
@@ -12501,7 +13067,7 @@
 </p:sld>
 </file>
 
-<file path=ppt/slides/slide12.xml><?xml version="1.0" encoding="utf-8"?>
+<file path=ppt/slides/slide13.xml><?xml version="1.0" encoding="utf-8"?>
 <p:sld xmlns:a="http://schemas.openxmlformats.org/drawingml/2006/main" xmlns:r="http://schemas.openxmlformats.org/officeDocument/2006/relationships" xmlns:p="http://schemas.openxmlformats.org/presentationml/2006/main">
   <p:cSld>
     <p:bg>
@@ -13345,7 +13911,7 @@
 </p:sld>
 </file>
 
-<file path=ppt/slides/slide13.xml><?xml version="1.0" encoding="utf-8"?>
+<file path=ppt/slides/slide14.xml><?xml version="1.0" encoding="utf-8"?>
 <p:sld xmlns:a="http://schemas.openxmlformats.org/drawingml/2006/main" xmlns:r="http://schemas.openxmlformats.org/officeDocument/2006/relationships" xmlns:p="http://schemas.openxmlformats.org/presentationml/2006/main">
   <p:cSld>
     <p:spTree>
@@ -13434,7 +14000,7 @@
 </p:sld>
 </file>
 
-<file path=ppt/slides/slide14.xml><?xml version="1.0" encoding="utf-8"?>
+<file path=ppt/slides/slide15.xml><?xml version="1.0" encoding="utf-8"?>
 <p:sld xmlns:a="http://schemas.openxmlformats.org/drawingml/2006/main" xmlns:r="http://schemas.openxmlformats.org/officeDocument/2006/relationships" xmlns:p="http://schemas.openxmlformats.org/presentationml/2006/main">
   <p:cSld>
     <p:bg>
@@ -14288,7 +14854,7 @@
 </p:sld>
 </file>
 
-<file path=ppt/slides/slide15.xml><?xml version="1.0" encoding="utf-8"?>
+<file path=ppt/slides/slide16.xml><?xml version="1.0" encoding="utf-8"?>
 <p:sld xmlns:a="http://schemas.openxmlformats.org/drawingml/2006/main" xmlns:r="http://schemas.openxmlformats.org/officeDocument/2006/relationships" xmlns:p="http://schemas.openxmlformats.org/presentationml/2006/main">
   <p:cSld>
     <p:bg>
@@ -15155,7 +15721,7 @@
 </p:sld>
 </file>
 
-<file path=ppt/slides/slide16.xml><?xml version="1.0" encoding="utf-8"?>
+<file path=ppt/slides/slide17.xml><?xml version="1.0" encoding="utf-8"?>
 <p:sld xmlns:a="http://schemas.openxmlformats.org/drawingml/2006/main" xmlns:r="http://schemas.openxmlformats.org/officeDocument/2006/relationships" xmlns:p="http://schemas.openxmlformats.org/presentationml/2006/main">
   <p:cSld>
     <p:spTree>
@@ -15244,7 +15810,7 @@
 </p:sld>
 </file>
 
-<file path=ppt/slides/slide17.xml><?xml version="1.0" encoding="utf-8"?>
+<file path=ppt/slides/slide18.xml><?xml version="1.0" encoding="utf-8"?>
 <p:sld xmlns:a="http://schemas.openxmlformats.org/drawingml/2006/main" xmlns:r="http://schemas.openxmlformats.org/officeDocument/2006/relationships" xmlns:p="http://schemas.openxmlformats.org/presentationml/2006/main">
   <p:cSld>
     <p:bg>
@@ -16128,7 +16694,7 @@
 </p:sld>
 </file>
 
-<file path=ppt/slides/slide18.xml><?xml version="1.0" encoding="utf-8"?>
+<file path=ppt/slides/slide19.xml><?xml version="1.0" encoding="utf-8"?>
 <p:sld xmlns:a="http://schemas.openxmlformats.org/drawingml/2006/main" xmlns:r="http://schemas.openxmlformats.org/officeDocument/2006/relationships" xmlns:p="http://schemas.openxmlformats.org/presentationml/2006/main">
   <p:cSld>
     <p:spTree>
@@ -16217,7 +16783,391 @@
 </p:sld>
 </file>
 
-<file path=ppt/slides/slide19.xml><?xml version="1.0" encoding="utf-8"?>
+<file path=ppt/slides/slide2.xml><?xml version="1.0" encoding="utf-8"?>
+<p:sld xmlns:a="http://schemas.openxmlformats.org/drawingml/2006/main" xmlns:r="http://schemas.openxmlformats.org/officeDocument/2006/relationships" xmlns:p="http://schemas.openxmlformats.org/presentationml/2006/main">
+  <p:cSld>
+    <p:spTree>
+      <p:nvGrpSpPr>
+        <p:cNvPr id="1" name=""/>
+        <p:cNvGrpSpPr/>
+        <p:nvPr/>
+      </p:nvGrpSpPr>
+      <p:grpSpPr>
+        <a:xfrm>
+          <a:off x="0" y="0"/>
+          <a:ext cx="0" cy="0"/>
+          <a:chOff x="0" y="0"/>
+          <a:chExt cx="0" cy="0"/>
+        </a:xfrm>
+      </p:grpSpPr>
+      <p:sp>
+        <p:nvSpPr>
+          <p:cNvPr id="2" name="Title 1">
+            <a:extLst>
+              <a:ext uri="{FF2B5EF4-FFF2-40B4-BE49-F238E27FC236}">
+                <a16:creationId xmlns:a16="http://schemas.microsoft.com/office/drawing/2014/main" id="{B340EC05-4BE2-0827-7AA6-45C23C981DF4}"/>
+              </a:ext>
+            </a:extLst>
+          </p:cNvPr>
+          <p:cNvSpPr>
+            <a:spLocks noGrp="1"/>
+          </p:cNvSpPr>
+          <p:nvPr>
+            <p:ph type="title"/>
+          </p:nvPr>
+        </p:nvSpPr>
+        <p:spPr>
+          <a:xfrm>
+            <a:off x="640080" y="329184"/>
+            <a:ext cx="6894576" cy="1783080"/>
+          </a:xfrm>
+        </p:spPr>
+        <p:txBody>
+          <a:bodyPr anchor="b">
+            <a:normAutofit/>
+          </a:bodyPr>
+          <a:lstStyle/>
+          <a:p>
+            <a:r>
+              <a:rPr lang="en-US" sz="6600" dirty="0"/>
+              <a:t>Intro</a:t>
+            </a:r>
+          </a:p>
+        </p:txBody>
+      </p:sp>
+      <p:sp>
+        <p:nvSpPr>
+          <p:cNvPr id="3" name="Content Placeholder 2">
+            <a:extLst>
+              <a:ext uri="{FF2B5EF4-FFF2-40B4-BE49-F238E27FC236}">
+                <a16:creationId xmlns:a16="http://schemas.microsoft.com/office/drawing/2014/main" id="{9482E84A-BDAD-C72C-F004-13D054A6BB29}"/>
+              </a:ext>
+            </a:extLst>
+          </p:cNvPr>
+          <p:cNvSpPr>
+            <a:spLocks noGrp="1"/>
+          </p:cNvSpPr>
+          <p:nvPr>
+            <p:ph idx="1"/>
+          </p:nvPr>
+        </p:nvSpPr>
+        <p:spPr>
+          <a:xfrm>
+            <a:off x="640080" y="2706624"/>
+            <a:ext cx="6894576" cy="3483864"/>
+          </a:xfrm>
+        </p:spPr>
+        <p:txBody>
+          <a:bodyPr>
+            <a:normAutofit/>
+          </a:bodyPr>
+          <a:lstStyle/>
+          <a:p>
+            <a:r>
+              <a:rPr lang="en-US" sz="2200" dirty="0"/>
+              <a:t>Juan Pablo Tarquino </a:t>
+            </a:r>
+          </a:p>
+          <a:p>
+            <a:r>
+              <a:rPr lang="en-US" sz="2200" dirty="0"/>
+              <a:t>Software Developer with about 20 years of experience</a:t>
+            </a:r>
+          </a:p>
+          <a:p>
+            <a:pPr lvl="1"/>
+            <a:r>
+              <a:rPr lang="en-US" sz="2200" dirty="0"/>
+              <a:t>LinkedIn</a:t>
+            </a:r>
+          </a:p>
+          <a:p>
+            <a:pPr lvl="2"/>
+            <a:r>
+              <a:rPr lang="en-US" sz="2200" dirty="0">
+                <a:hlinkClick r:id="rId3"/>
+              </a:rPr>
+              <a:t>https://www.linkedin.com/in/juantarquino</a:t>
+            </a:r>
+            <a:r>
+              <a:rPr lang="en-US" sz="2200" dirty="0"/>
+              <a:t> </a:t>
+            </a:r>
+          </a:p>
+          <a:p>
+            <a:pPr lvl="1"/>
+            <a:r>
+              <a:rPr lang="en-US" sz="2200" dirty="0"/>
+              <a:t>Blog (not updated often </a:t>
+            </a:r>
+            <a:r>
+              <a:rPr lang="en-US" sz="2200" dirty="0">
+                <a:sym typeface="Wingdings" panose="05000000000000000000" pitchFamily="2" charset="2"/>
+              </a:rPr>
+              <a:t> </a:t>
+            </a:r>
+            <a:r>
+              <a:rPr lang="en-US" sz="2200" dirty="0"/>
+              <a:t>)</a:t>
+            </a:r>
+          </a:p>
+          <a:p>
+            <a:pPr lvl="2"/>
+            <a:r>
+              <a:rPr lang="en-US" sz="2200" dirty="0">
+                <a:hlinkClick r:id="rId4"/>
+              </a:rPr>
+              <a:t>https://jptarqu.blogspot.com</a:t>
+            </a:r>
+            <a:r>
+              <a:rPr lang="en-US" sz="2200" dirty="0"/>
+              <a:t>  </a:t>
+            </a:r>
+          </a:p>
+          <a:p>
+            <a:r>
+              <a:rPr lang="en-US" sz="2200" dirty="0"/>
+              <a:t>Sample repo and slides for this session: </a:t>
+            </a:r>
+          </a:p>
+          <a:p>
+            <a:pPr lvl="1"/>
+            <a:r>
+              <a:rPr lang="en-US" sz="2200" dirty="0">
+                <a:hlinkClick r:id="rId5"/>
+              </a:rPr>
+              <a:t>https://tinyurl.com/PowerFX-NET</a:t>
+            </a:r>
+            <a:r>
+              <a:rPr lang="en-US" sz="2200" dirty="0"/>
+              <a:t> </a:t>
+            </a:r>
+          </a:p>
+        </p:txBody>
+      </p:sp>
+      <p:pic>
+        <p:nvPicPr>
+          <p:cNvPr id="7" name="Picture 6">
+            <a:extLst>
+              <a:ext uri="{FF2B5EF4-FFF2-40B4-BE49-F238E27FC236}">
+                <a16:creationId xmlns:a16="http://schemas.microsoft.com/office/drawing/2014/main" id="{685DA20C-00C6-81E7-993F-496E86E2B133}"/>
+              </a:ext>
+            </a:extLst>
+          </p:cNvPr>
+          <p:cNvPicPr>
+            <a:picLocks noChangeAspect="1"/>
+          </p:cNvPicPr>
+          <p:nvPr/>
+        </p:nvPicPr>
+        <p:blipFill>
+          <a:blip r:embed="rId6"/>
+          <a:srcRect t="24668" r="-4" b="15002"/>
+          <a:stretch/>
+        </p:blipFill>
+        <p:spPr>
+          <a:xfrm>
+            <a:off x="8144356" y="4267201"/>
+            <a:ext cx="4047645" cy="2590808"/>
+          </a:xfrm>
+          <a:custGeom>
+            <a:avLst/>
+            <a:gdLst/>
+            <a:ahLst/>
+            <a:cxnLst/>
+            <a:rect l="l" t="t" r="r" b="b"/>
+            <a:pathLst>
+              <a:path w="4047645" h="2495811">
+                <a:moveTo>
+                  <a:pt x="2441891" y="4"/>
+                </a:moveTo>
+                <a:cubicBezTo>
+                  <a:pt x="2489381" y="-78"/>
+                  <a:pt x="2536882" y="1163"/>
+                  <a:pt x="2584383" y="4428"/>
+                </a:cubicBezTo>
+                <a:cubicBezTo>
+                  <a:pt x="2744314" y="17813"/>
+                  <a:pt x="2904989" y="21079"/>
+                  <a:pt x="3065367" y="14222"/>
+                </a:cubicBezTo>
+                <a:cubicBezTo>
+                  <a:pt x="3194244" y="5694"/>
+                  <a:pt x="3323514" y="4206"/>
+                  <a:pt x="3452568" y="9782"/>
+                </a:cubicBezTo>
+                <a:cubicBezTo>
+                  <a:pt x="3572813" y="16442"/>
+                  <a:pt x="3693059" y="23233"/>
+                  <a:pt x="3813712" y="19315"/>
+                </a:cubicBezTo>
+                <a:cubicBezTo>
+                  <a:pt x="3861755" y="17748"/>
+                  <a:pt x="3909121" y="15789"/>
+                  <a:pt x="3956758" y="13177"/>
+                </a:cubicBezTo>
+                <a:lnTo>
+                  <a:pt x="4047645" y="9696"/>
+                </a:lnTo>
+                <a:lnTo>
+                  <a:pt x="4047645" y="2495811"/>
+                </a:lnTo>
+                <a:lnTo>
+                  <a:pt x="28177" y="2495811"/>
+                </a:lnTo>
+                <a:lnTo>
+                  <a:pt x="28782" y="2485852"/>
+                </a:lnTo>
+                <a:cubicBezTo>
+                  <a:pt x="31911" y="2365446"/>
+                  <a:pt x="35027" y="2245002"/>
+                  <a:pt x="38157" y="2124521"/>
+                </a:cubicBezTo>
+                <a:cubicBezTo>
+                  <a:pt x="38284" y="2119444"/>
+                  <a:pt x="39171" y="2114494"/>
+                  <a:pt x="39171" y="2109417"/>
+                </a:cubicBezTo>
+                <a:cubicBezTo>
+                  <a:pt x="48166" y="1995573"/>
+                  <a:pt x="53107" y="1881729"/>
+                  <a:pt x="18899" y="1770550"/>
+                </a:cubicBezTo>
+                <a:cubicBezTo>
+                  <a:pt x="15871" y="1760104"/>
+                  <a:pt x="14262" y="1749304"/>
+                  <a:pt x="14084" y="1738440"/>
+                </a:cubicBezTo>
+                <a:cubicBezTo>
+                  <a:pt x="12413" y="1641514"/>
+                  <a:pt x="16644" y="1544587"/>
+                  <a:pt x="26754" y="1448181"/>
+                </a:cubicBezTo>
+                <a:cubicBezTo>
+                  <a:pt x="31949" y="1389038"/>
+                  <a:pt x="26754" y="1329006"/>
+                  <a:pt x="43478" y="1270498"/>
+                </a:cubicBezTo>
+                <a:cubicBezTo>
+                  <a:pt x="50864" y="1241421"/>
+                  <a:pt x="55109" y="1211634"/>
+                  <a:pt x="56147" y="1181656"/>
+                </a:cubicBezTo>
+                <a:cubicBezTo>
+                  <a:pt x="59948" y="1109060"/>
+                  <a:pt x="38537" y="1040779"/>
+                  <a:pt x="18139" y="972244"/>
+                </a:cubicBezTo>
+                <a:cubicBezTo>
+                  <a:pt x="7370" y="935945"/>
+                  <a:pt x="-5426" y="898886"/>
+                  <a:pt x="2429" y="860811"/>
+                </a:cubicBezTo>
+                <a:cubicBezTo>
+                  <a:pt x="16707" y="802251"/>
+                  <a:pt x="24854" y="742359"/>
+                  <a:pt x="26754" y="682112"/>
+                </a:cubicBezTo>
+                <a:cubicBezTo>
+                  <a:pt x="26754" y="639468"/>
+                  <a:pt x="16365" y="597712"/>
+                  <a:pt x="20039" y="555195"/>
+                </a:cubicBezTo>
+                <a:cubicBezTo>
+                  <a:pt x="28211" y="472712"/>
+                  <a:pt x="30238" y="389734"/>
+                  <a:pt x="26121" y="306946"/>
+                </a:cubicBezTo>
+                <a:cubicBezTo>
+                  <a:pt x="26095" y="273846"/>
+                  <a:pt x="29846" y="240848"/>
+                  <a:pt x="37270" y="208585"/>
+                </a:cubicBezTo>
+                <a:cubicBezTo>
+                  <a:pt x="46506" y="151651"/>
+                  <a:pt x="48419" y="93777"/>
+                  <a:pt x="42971" y="36360"/>
+                </a:cubicBezTo>
+                <a:lnTo>
+                  <a:pt x="38853" y="8429"/>
+                </a:lnTo>
+                <a:lnTo>
+                  <a:pt x="56649" y="7824"/>
+                </a:lnTo>
+                <a:cubicBezTo>
+                  <a:pt x="210497" y="-156"/>
+                  <a:pt x="364754" y="3162"/>
+                  <a:pt x="518087" y="17748"/>
+                </a:cubicBezTo>
+                <a:cubicBezTo>
+                  <a:pt x="626567" y="25440"/>
+                  <a:pt x="735534" y="24213"/>
+                  <a:pt x="843809" y="14092"/>
+                </a:cubicBezTo>
+                <a:cubicBezTo>
+                  <a:pt x="1042499" y="-1711"/>
+                  <a:pt x="1240782" y="10958"/>
+                  <a:pt x="1439065" y="21666"/>
+                </a:cubicBezTo>
+                <a:cubicBezTo>
+                  <a:pt x="1631105" y="32113"/>
+                  <a:pt x="1823010" y="24408"/>
+                  <a:pt x="2015050" y="17487"/>
+                </a:cubicBezTo>
+                <a:cubicBezTo>
+                  <a:pt x="2157045" y="12394"/>
+                  <a:pt x="2299420" y="249"/>
+                  <a:pt x="2441891" y="4"/>
+                </a:cubicBezTo>
+                <a:close/>
+              </a:path>
+            </a:pathLst>
+          </a:custGeom>
+        </p:spPr>
+      </p:pic>
+      <p:pic>
+        <p:nvPicPr>
+          <p:cNvPr id="5" name="Picture 4">
+            <a:extLst>
+              <a:ext uri="{FF2B5EF4-FFF2-40B4-BE49-F238E27FC236}">
+                <a16:creationId xmlns:a16="http://schemas.microsoft.com/office/drawing/2014/main" id="{14FE3455-90A4-7EA8-C301-229D17616FE0}"/>
+              </a:ext>
+            </a:extLst>
+          </p:cNvPr>
+          <p:cNvPicPr>
+            <a:picLocks noChangeAspect="1"/>
+          </p:cNvPicPr>
+          <p:nvPr/>
+        </p:nvPicPr>
+        <p:blipFill>
+          <a:blip r:embed="rId7"/>
+          <a:stretch>
+            <a:fillRect/>
+          </a:stretch>
+        </p:blipFill>
+        <p:spPr>
+          <a:xfrm>
+            <a:off x="8332950" y="502779"/>
+            <a:ext cx="3218970" cy="3218970"/>
+          </a:xfrm>
+          <a:prstGeom prst="rect">
+            <a:avLst/>
+          </a:prstGeom>
+        </p:spPr>
+      </p:pic>
+    </p:spTree>
+    <p:extLst>
+      <p:ext uri="{BB962C8B-B14F-4D97-AF65-F5344CB8AC3E}">
+        <p14:creationId xmlns:p14="http://schemas.microsoft.com/office/powerpoint/2010/main" val="1528468167"/>
+      </p:ext>
+    </p:extLst>
+  </p:cSld>
+  <p:clrMapOvr>
+    <a:masterClrMapping/>
+  </p:clrMapOvr>
+</p:sld>
+</file>
+
+<file path=ppt/slides/slide20.xml><?xml version="1.0" encoding="utf-8"?>
 <p:sld xmlns:a="http://schemas.openxmlformats.org/drawingml/2006/main" xmlns:r="http://schemas.openxmlformats.org/officeDocument/2006/relationships" xmlns:p="http://schemas.openxmlformats.org/presentationml/2006/main">
   <p:cSld>
     <p:bg>
@@ -16754,391 +17704,7 @@
 </p:sld>
 </file>
 
-<file path=ppt/slides/slide2.xml><?xml version="1.0" encoding="utf-8"?>
-<p:sld xmlns:a="http://schemas.openxmlformats.org/drawingml/2006/main" xmlns:r="http://schemas.openxmlformats.org/officeDocument/2006/relationships" xmlns:p="http://schemas.openxmlformats.org/presentationml/2006/main">
-  <p:cSld>
-    <p:spTree>
-      <p:nvGrpSpPr>
-        <p:cNvPr id="1" name=""/>
-        <p:cNvGrpSpPr/>
-        <p:nvPr/>
-      </p:nvGrpSpPr>
-      <p:grpSpPr>
-        <a:xfrm>
-          <a:off x="0" y="0"/>
-          <a:ext cx="0" cy="0"/>
-          <a:chOff x="0" y="0"/>
-          <a:chExt cx="0" cy="0"/>
-        </a:xfrm>
-      </p:grpSpPr>
-      <p:sp>
-        <p:nvSpPr>
-          <p:cNvPr id="2" name="Title 1">
-            <a:extLst>
-              <a:ext uri="{FF2B5EF4-FFF2-40B4-BE49-F238E27FC236}">
-                <a16:creationId xmlns:a16="http://schemas.microsoft.com/office/drawing/2014/main" id="{B340EC05-4BE2-0827-7AA6-45C23C981DF4}"/>
-              </a:ext>
-            </a:extLst>
-          </p:cNvPr>
-          <p:cNvSpPr>
-            <a:spLocks noGrp="1"/>
-          </p:cNvSpPr>
-          <p:nvPr>
-            <p:ph type="title"/>
-          </p:nvPr>
-        </p:nvSpPr>
-        <p:spPr>
-          <a:xfrm>
-            <a:off x="640080" y="329184"/>
-            <a:ext cx="6894576" cy="1783080"/>
-          </a:xfrm>
-        </p:spPr>
-        <p:txBody>
-          <a:bodyPr anchor="b">
-            <a:normAutofit/>
-          </a:bodyPr>
-          <a:lstStyle/>
-          <a:p>
-            <a:r>
-              <a:rPr lang="en-US" sz="6600" dirty="0"/>
-              <a:t>Intro</a:t>
-            </a:r>
-          </a:p>
-        </p:txBody>
-      </p:sp>
-      <p:sp>
-        <p:nvSpPr>
-          <p:cNvPr id="3" name="Content Placeholder 2">
-            <a:extLst>
-              <a:ext uri="{FF2B5EF4-FFF2-40B4-BE49-F238E27FC236}">
-                <a16:creationId xmlns:a16="http://schemas.microsoft.com/office/drawing/2014/main" id="{9482E84A-BDAD-C72C-F004-13D054A6BB29}"/>
-              </a:ext>
-            </a:extLst>
-          </p:cNvPr>
-          <p:cNvSpPr>
-            <a:spLocks noGrp="1"/>
-          </p:cNvSpPr>
-          <p:nvPr>
-            <p:ph idx="1"/>
-          </p:nvPr>
-        </p:nvSpPr>
-        <p:spPr>
-          <a:xfrm>
-            <a:off x="640080" y="2706624"/>
-            <a:ext cx="6894576" cy="3483864"/>
-          </a:xfrm>
-        </p:spPr>
-        <p:txBody>
-          <a:bodyPr>
-            <a:normAutofit/>
-          </a:bodyPr>
-          <a:lstStyle/>
-          <a:p>
-            <a:r>
-              <a:rPr lang="en-US" sz="2200" dirty="0"/>
-              <a:t>Juan Pablo Tarquino </a:t>
-            </a:r>
-          </a:p>
-          <a:p>
-            <a:r>
-              <a:rPr lang="en-US" sz="2200" dirty="0"/>
-              <a:t>Software Developer with about 20 years of experience</a:t>
-            </a:r>
-          </a:p>
-          <a:p>
-            <a:pPr lvl="1"/>
-            <a:r>
-              <a:rPr lang="en-US" sz="2200" dirty="0"/>
-              <a:t>LinkedIn</a:t>
-            </a:r>
-          </a:p>
-          <a:p>
-            <a:pPr lvl="2"/>
-            <a:r>
-              <a:rPr lang="en-US" sz="2200" dirty="0">
-                <a:hlinkClick r:id="rId3"/>
-              </a:rPr>
-              <a:t>https://www.linkedin.com/in/juantarquino</a:t>
-            </a:r>
-            <a:r>
-              <a:rPr lang="en-US" sz="2200" dirty="0"/>
-              <a:t> </a:t>
-            </a:r>
-          </a:p>
-          <a:p>
-            <a:pPr lvl="1"/>
-            <a:r>
-              <a:rPr lang="en-US" sz="2200" dirty="0"/>
-              <a:t>Blog (not updated often </a:t>
-            </a:r>
-            <a:r>
-              <a:rPr lang="en-US" sz="2200" dirty="0">
-                <a:sym typeface="Wingdings" panose="05000000000000000000" pitchFamily="2" charset="2"/>
-              </a:rPr>
-              <a:t> </a:t>
-            </a:r>
-            <a:r>
-              <a:rPr lang="en-US" sz="2200" dirty="0"/>
-              <a:t>)</a:t>
-            </a:r>
-          </a:p>
-          <a:p>
-            <a:pPr lvl="2"/>
-            <a:r>
-              <a:rPr lang="en-US" sz="2200" dirty="0">
-                <a:hlinkClick r:id="rId4"/>
-              </a:rPr>
-              <a:t>https://jptarqu.blogspot.com</a:t>
-            </a:r>
-            <a:r>
-              <a:rPr lang="en-US" sz="2200" dirty="0"/>
-              <a:t>  </a:t>
-            </a:r>
-          </a:p>
-          <a:p>
-            <a:r>
-              <a:rPr lang="en-US" sz="2200" dirty="0"/>
-              <a:t>Sample repo and slides for this session: </a:t>
-            </a:r>
-          </a:p>
-          <a:p>
-            <a:pPr lvl="1"/>
-            <a:r>
-              <a:rPr lang="en-US" sz="2200" dirty="0">
-                <a:hlinkClick r:id="rId5"/>
-              </a:rPr>
-              <a:t>https://tinyurl.com/PowerFX-NET</a:t>
-            </a:r>
-            <a:r>
-              <a:rPr lang="en-US" sz="2200" dirty="0"/>
-              <a:t> </a:t>
-            </a:r>
-          </a:p>
-        </p:txBody>
-      </p:sp>
-      <p:pic>
-        <p:nvPicPr>
-          <p:cNvPr id="7" name="Picture 6">
-            <a:extLst>
-              <a:ext uri="{FF2B5EF4-FFF2-40B4-BE49-F238E27FC236}">
-                <a16:creationId xmlns:a16="http://schemas.microsoft.com/office/drawing/2014/main" id="{685DA20C-00C6-81E7-993F-496E86E2B133}"/>
-              </a:ext>
-            </a:extLst>
-          </p:cNvPr>
-          <p:cNvPicPr>
-            <a:picLocks noChangeAspect="1"/>
-          </p:cNvPicPr>
-          <p:nvPr/>
-        </p:nvPicPr>
-        <p:blipFill>
-          <a:blip r:embed="rId6"/>
-          <a:srcRect t="24668" r="-4" b="15002"/>
-          <a:stretch/>
-        </p:blipFill>
-        <p:spPr>
-          <a:xfrm>
-            <a:off x="8144356" y="4267201"/>
-            <a:ext cx="4047645" cy="2590808"/>
-          </a:xfrm>
-          <a:custGeom>
-            <a:avLst/>
-            <a:gdLst/>
-            <a:ahLst/>
-            <a:cxnLst/>
-            <a:rect l="l" t="t" r="r" b="b"/>
-            <a:pathLst>
-              <a:path w="4047645" h="2495811">
-                <a:moveTo>
-                  <a:pt x="2441891" y="4"/>
-                </a:moveTo>
-                <a:cubicBezTo>
-                  <a:pt x="2489381" y="-78"/>
-                  <a:pt x="2536882" y="1163"/>
-                  <a:pt x="2584383" y="4428"/>
-                </a:cubicBezTo>
-                <a:cubicBezTo>
-                  <a:pt x="2744314" y="17813"/>
-                  <a:pt x="2904989" y="21079"/>
-                  <a:pt x="3065367" y="14222"/>
-                </a:cubicBezTo>
-                <a:cubicBezTo>
-                  <a:pt x="3194244" y="5694"/>
-                  <a:pt x="3323514" y="4206"/>
-                  <a:pt x="3452568" y="9782"/>
-                </a:cubicBezTo>
-                <a:cubicBezTo>
-                  <a:pt x="3572813" y="16442"/>
-                  <a:pt x="3693059" y="23233"/>
-                  <a:pt x="3813712" y="19315"/>
-                </a:cubicBezTo>
-                <a:cubicBezTo>
-                  <a:pt x="3861755" y="17748"/>
-                  <a:pt x="3909121" y="15789"/>
-                  <a:pt x="3956758" y="13177"/>
-                </a:cubicBezTo>
-                <a:lnTo>
-                  <a:pt x="4047645" y="9696"/>
-                </a:lnTo>
-                <a:lnTo>
-                  <a:pt x="4047645" y="2495811"/>
-                </a:lnTo>
-                <a:lnTo>
-                  <a:pt x="28177" y="2495811"/>
-                </a:lnTo>
-                <a:lnTo>
-                  <a:pt x="28782" y="2485852"/>
-                </a:lnTo>
-                <a:cubicBezTo>
-                  <a:pt x="31911" y="2365446"/>
-                  <a:pt x="35027" y="2245002"/>
-                  <a:pt x="38157" y="2124521"/>
-                </a:cubicBezTo>
-                <a:cubicBezTo>
-                  <a:pt x="38284" y="2119444"/>
-                  <a:pt x="39171" y="2114494"/>
-                  <a:pt x="39171" y="2109417"/>
-                </a:cubicBezTo>
-                <a:cubicBezTo>
-                  <a:pt x="48166" y="1995573"/>
-                  <a:pt x="53107" y="1881729"/>
-                  <a:pt x="18899" y="1770550"/>
-                </a:cubicBezTo>
-                <a:cubicBezTo>
-                  <a:pt x="15871" y="1760104"/>
-                  <a:pt x="14262" y="1749304"/>
-                  <a:pt x="14084" y="1738440"/>
-                </a:cubicBezTo>
-                <a:cubicBezTo>
-                  <a:pt x="12413" y="1641514"/>
-                  <a:pt x="16644" y="1544587"/>
-                  <a:pt x="26754" y="1448181"/>
-                </a:cubicBezTo>
-                <a:cubicBezTo>
-                  <a:pt x="31949" y="1389038"/>
-                  <a:pt x="26754" y="1329006"/>
-                  <a:pt x="43478" y="1270498"/>
-                </a:cubicBezTo>
-                <a:cubicBezTo>
-                  <a:pt x="50864" y="1241421"/>
-                  <a:pt x="55109" y="1211634"/>
-                  <a:pt x="56147" y="1181656"/>
-                </a:cubicBezTo>
-                <a:cubicBezTo>
-                  <a:pt x="59948" y="1109060"/>
-                  <a:pt x="38537" y="1040779"/>
-                  <a:pt x="18139" y="972244"/>
-                </a:cubicBezTo>
-                <a:cubicBezTo>
-                  <a:pt x="7370" y="935945"/>
-                  <a:pt x="-5426" y="898886"/>
-                  <a:pt x="2429" y="860811"/>
-                </a:cubicBezTo>
-                <a:cubicBezTo>
-                  <a:pt x="16707" y="802251"/>
-                  <a:pt x="24854" y="742359"/>
-                  <a:pt x="26754" y="682112"/>
-                </a:cubicBezTo>
-                <a:cubicBezTo>
-                  <a:pt x="26754" y="639468"/>
-                  <a:pt x="16365" y="597712"/>
-                  <a:pt x="20039" y="555195"/>
-                </a:cubicBezTo>
-                <a:cubicBezTo>
-                  <a:pt x="28211" y="472712"/>
-                  <a:pt x="30238" y="389734"/>
-                  <a:pt x="26121" y="306946"/>
-                </a:cubicBezTo>
-                <a:cubicBezTo>
-                  <a:pt x="26095" y="273846"/>
-                  <a:pt x="29846" y="240848"/>
-                  <a:pt x="37270" y="208585"/>
-                </a:cubicBezTo>
-                <a:cubicBezTo>
-                  <a:pt x="46506" y="151651"/>
-                  <a:pt x="48419" y="93777"/>
-                  <a:pt x="42971" y="36360"/>
-                </a:cubicBezTo>
-                <a:lnTo>
-                  <a:pt x="38853" y="8429"/>
-                </a:lnTo>
-                <a:lnTo>
-                  <a:pt x="56649" y="7824"/>
-                </a:lnTo>
-                <a:cubicBezTo>
-                  <a:pt x="210497" y="-156"/>
-                  <a:pt x="364754" y="3162"/>
-                  <a:pt x="518087" y="17748"/>
-                </a:cubicBezTo>
-                <a:cubicBezTo>
-                  <a:pt x="626567" y="25440"/>
-                  <a:pt x="735534" y="24213"/>
-                  <a:pt x="843809" y="14092"/>
-                </a:cubicBezTo>
-                <a:cubicBezTo>
-                  <a:pt x="1042499" y="-1711"/>
-                  <a:pt x="1240782" y="10958"/>
-                  <a:pt x="1439065" y="21666"/>
-                </a:cubicBezTo>
-                <a:cubicBezTo>
-                  <a:pt x="1631105" y="32113"/>
-                  <a:pt x="1823010" y="24408"/>
-                  <a:pt x="2015050" y="17487"/>
-                </a:cubicBezTo>
-                <a:cubicBezTo>
-                  <a:pt x="2157045" y="12394"/>
-                  <a:pt x="2299420" y="249"/>
-                  <a:pt x="2441891" y="4"/>
-                </a:cubicBezTo>
-                <a:close/>
-              </a:path>
-            </a:pathLst>
-          </a:custGeom>
-        </p:spPr>
-      </p:pic>
-      <p:pic>
-        <p:nvPicPr>
-          <p:cNvPr id="5" name="Picture 4">
-            <a:extLst>
-              <a:ext uri="{FF2B5EF4-FFF2-40B4-BE49-F238E27FC236}">
-                <a16:creationId xmlns:a16="http://schemas.microsoft.com/office/drawing/2014/main" id="{14FE3455-90A4-7EA8-C301-229D17616FE0}"/>
-              </a:ext>
-            </a:extLst>
-          </p:cNvPr>
-          <p:cNvPicPr>
-            <a:picLocks noChangeAspect="1"/>
-          </p:cNvPicPr>
-          <p:nvPr/>
-        </p:nvPicPr>
-        <p:blipFill>
-          <a:blip r:embed="rId7"/>
-          <a:stretch>
-            <a:fillRect/>
-          </a:stretch>
-        </p:blipFill>
-        <p:spPr>
-          <a:xfrm>
-            <a:off x="8332950" y="502779"/>
-            <a:ext cx="3218970" cy="3218970"/>
-          </a:xfrm>
-          <a:prstGeom prst="rect">
-            <a:avLst/>
-          </a:prstGeom>
-        </p:spPr>
-      </p:pic>
-    </p:spTree>
-    <p:extLst>
-      <p:ext uri="{BB962C8B-B14F-4D97-AF65-F5344CB8AC3E}">
-        <p14:creationId xmlns:p14="http://schemas.microsoft.com/office/powerpoint/2010/main" val="1528468167"/>
-      </p:ext>
-    </p:extLst>
-  </p:cSld>
-  <p:clrMapOvr>
-    <a:masterClrMapping/>
-  </p:clrMapOvr>
-</p:sld>
-</file>
-
-<file path=ppt/slides/slide20.xml><?xml version="1.0" encoding="utf-8"?>
+<file path=ppt/slides/slide21.xml><?xml version="1.0" encoding="utf-8"?>
 <p:sld xmlns:a="http://schemas.openxmlformats.org/drawingml/2006/main" xmlns:r="http://schemas.openxmlformats.org/officeDocument/2006/relationships" xmlns:p="http://schemas.openxmlformats.org/presentationml/2006/main">
   <p:cSld>
     <p:spTree>
@@ -17219,24 +17785,76 @@
           <a:lstStyle/>
           <a:p>
             <a:r>
-              <a:rPr lang="en-US" sz="2200"/>
+              <a:rPr lang="en-US" sz="2200" dirty="0"/>
               <a:t>Best part of sessions like this one </a:t>
             </a:r>
             <a:r>
-              <a:rPr lang="en-US" sz="2200">
+              <a:rPr lang="en-US" sz="2200" dirty="0">
                 <a:sym typeface="Wingdings" panose="05000000000000000000" pitchFamily="2" charset="2"/>
               </a:rPr>
               <a:t></a:t>
             </a:r>
           </a:p>
           <a:p>
+            <a:r>
+              <a:rPr lang="en-US" sz="2200" dirty="0">
+                <a:sym typeface="Wingdings" panose="05000000000000000000" pitchFamily="2" charset="2"/>
+              </a:rPr>
+              <a:t>Feedback:</a:t>
+            </a:r>
+          </a:p>
+          <a:p>
             <a:pPr marL="0" indent="0">
               <a:buNone/>
             </a:pPr>
-            <a:endParaRPr lang="en-US" sz="2200"/>
+            <a:endParaRPr lang="en-US" sz="2200" dirty="0">
+              <a:sym typeface="Wingdings" panose="05000000000000000000" pitchFamily="2" charset="2"/>
+            </a:endParaRPr>
+          </a:p>
+          <a:p>
+            <a:pPr marL="0" indent="0">
+              <a:buNone/>
+            </a:pPr>
+            <a:endParaRPr lang="en-US" sz="2200" dirty="0"/>
           </a:p>
         </p:txBody>
       </p:sp>
+      <p:pic>
+        <p:nvPicPr>
+          <p:cNvPr id="5" name="Picture 4">
+            <a:extLst>
+              <a:ext uri="{FF2B5EF4-FFF2-40B4-BE49-F238E27FC236}">
+                <a16:creationId xmlns:a16="http://schemas.microsoft.com/office/drawing/2014/main" id="{D2ADC734-DAC4-1697-38F8-97E3F531D423}"/>
+              </a:ext>
+            </a:extLst>
+          </p:cNvPr>
+          <p:cNvPicPr>
+            <a:picLocks noChangeAspect="1"/>
+          </p:cNvPicPr>
+          <p:nvPr/>
+        </p:nvPicPr>
+        <p:blipFill>
+          <a:blip r:embed="rId3">
+            <a:extLst>
+              <a:ext uri="{28A0092B-C50C-407E-A947-70E740481C1C}">
+                <a14:useLocalDpi xmlns:a14="http://schemas.microsoft.com/office/drawing/2010/main" val="0"/>
+              </a:ext>
+            </a:extLst>
+          </a:blip>
+          <a:stretch>
+            <a:fillRect/>
+          </a:stretch>
+        </p:blipFill>
+        <p:spPr>
+          <a:xfrm>
+            <a:off x="1257300" y="2790825"/>
+            <a:ext cx="2209800" cy="2209800"/>
+          </a:xfrm>
+          <a:prstGeom prst="rect">
+            <a:avLst/>
+          </a:prstGeom>
+        </p:spPr>
+      </p:pic>
     </p:spTree>
     <p:extLst>
       <p:ext uri="{BB962C8B-B14F-4D97-AF65-F5344CB8AC3E}">
@@ -17250,7 +17868,7 @@
 </p:sld>
 </file>
 
-<file path=ppt/slides/slide21.xml><?xml version="1.0" encoding="utf-8"?>
+<file path=ppt/slides/slide22.xml><?xml version="1.0" encoding="utf-8"?>
 <p:sld xmlns:a="http://schemas.openxmlformats.org/drawingml/2006/main" xmlns:r="http://schemas.openxmlformats.org/officeDocument/2006/relationships" xmlns:p="http://schemas.openxmlformats.org/presentationml/2006/main">
   <p:cSld>
     <p:spTree>
@@ -17354,6 +17972,736 @@
 </file>
 
 <file path=ppt/slides/slide3.xml><?xml version="1.0" encoding="utf-8"?>
+<p:sld xmlns:a="http://schemas.openxmlformats.org/drawingml/2006/main" xmlns:r="http://schemas.openxmlformats.org/officeDocument/2006/relationships" xmlns:p="http://schemas.openxmlformats.org/presentationml/2006/main">
+  <p:cSld>
+    <p:bg>
+      <p:bgPr>
+        <a:solidFill>
+          <a:schemeClr val="bg1"/>
+        </a:solidFill>
+        <a:effectLst/>
+      </p:bgPr>
+    </p:bg>
+    <p:spTree>
+      <p:nvGrpSpPr>
+        <p:cNvPr id="1" name=""/>
+        <p:cNvGrpSpPr/>
+        <p:nvPr/>
+      </p:nvGrpSpPr>
+      <p:grpSpPr>
+        <a:xfrm>
+          <a:off x="0" y="0"/>
+          <a:ext cx="0" cy="0"/>
+          <a:chOff x="0" y="0"/>
+          <a:chExt cx="0" cy="0"/>
+        </a:xfrm>
+      </p:grpSpPr>
+      <p:sp useBgFill="1">
+        <p:nvSpPr>
+          <p:cNvPr id="8" name="Rectangle 7">
+            <a:extLst>
+              <a:ext uri="{FF2B5EF4-FFF2-40B4-BE49-F238E27FC236}">
+                <a16:creationId xmlns:a16="http://schemas.microsoft.com/office/drawing/2014/main" id="{32D45EE4-C4F0-4F72-B1C6-39F596D138A9}"/>
+              </a:ext>
+              <a:ext uri="{C183D7F6-B498-43B3-948B-1728B52AA6E4}">
+                <adec:decorative xmlns:adec="http://schemas.microsoft.com/office/drawing/2017/decorative" val="1"/>
+              </a:ext>
+            </a:extLst>
+          </p:cNvPr>
+          <p:cNvSpPr>
+            <a:spLocks noGrp="1" noRot="1" noChangeAspect="1" noMove="1" noResize="1" noEditPoints="1" noAdjustHandles="1" noChangeArrowheads="1" noChangeShapeType="1" noTextEdit="1"/>
+          </p:cNvSpPr>
+          <p:nvPr>
+            <p:extLst>
+              <p:ext uri="{386F3935-93C4-4BCD-93E2-E3B085C9AB24}">
+                <p16:designElem xmlns:p16="http://schemas.microsoft.com/office/powerpoint/2015/main" val="1"/>
+              </p:ext>
+            </p:extLst>
+          </p:nvPr>
+        </p:nvSpPr>
+        <p:spPr>
+          <a:xfrm>
+            <a:off x="0" y="0"/>
+            <a:ext cx="12188952" cy="6858000"/>
+          </a:xfrm>
+          <a:prstGeom prst="rect">
+            <a:avLst/>
+          </a:prstGeom>
+          <a:ln>
+            <a:noFill/>
+          </a:ln>
+        </p:spPr>
+        <p:style>
+          <a:lnRef idx="2">
+            <a:schemeClr val="accent1">
+              <a:shade val="50000"/>
+            </a:schemeClr>
+          </a:lnRef>
+          <a:fillRef idx="1">
+            <a:schemeClr val="accent1"/>
+          </a:fillRef>
+          <a:effectRef idx="0">
+            <a:schemeClr val="accent1"/>
+          </a:effectRef>
+          <a:fontRef idx="minor">
+            <a:schemeClr val="lt1"/>
+          </a:fontRef>
+        </p:style>
+        <p:txBody>
+          <a:bodyPr rtlCol="0" anchor="ctr"/>
+          <a:lstStyle/>
+          <a:p>
+            <a:pPr algn="ctr"/>
+            <a:endParaRPr lang="en-US"/>
+          </a:p>
+        </p:txBody>
+      </p:sp>
+      <p:sp>
+        <p:nvSpPr>
+          <p:cNvPr id="10" name="Oval 9">
+            <a:extLst>
+              <a:ext uri="{FF2B5EF4-FFF2-40B4-BE49-F238E27FC236}">
+                <a16:creationId xmlns:a16="http://schemas.microsoft.com/office/drawing/2014/main" id="{8C459BAD-4279-4A9D-B0C5-662C5F5ED21F}"/>
+              </a:ext>
+              <a:ext uri="{C183D7F6-B498-43B3-948B-1728B52AA6E4}">
+                <adec:decorative xmlns:adec="http://schemas.microsoft.com/office/drawing/2017/decorative" val="1"/>
+              </a:ext>
+            </a:extLst>
+          </p:cNvPr>
+          <p:cNvSpPr>
+            <a:spLocks noGrp="1" noRot="1" noChangeAspect="1" noMove="1" noResize="1" noEditPoints="1" noAdjustHandles="1" noChangeArrowheads="1" noChangeShapeType="1" noTextEdit="1"/>
+          </p:cNvSpPr>
+          <p:nvPr>
+            <p:extLst>
+              <p:ext uri="{386F3935-93C4-4BCD-93E2-E3B085C9AB24}">
+                <p16:designElem xmlns:p16="http://schemas.microsoft.com/office/powerpoint/2015/main" val="1"/>
+              </p:ext>
+            </p:extLst>
+          </p:nvPr>
+        </p:nvSpPr>
+        <p:spPr>
+          <a:xfrm rot="5400000" flipV="1">
+            <a:off x="3203463" y="-2060461"/>
+            <a:ext cx="5649003" cy="10651671"/>
+          </a:xfrm>
+          <a:custGeom>
+            <a:avLst/>
+            <a:gdLst>
+              <a:gd name="csX0" fmla="*/ 0 w 5649003"/>
+              <a:gd name="csY0" fmla="*/ 5325836 h 10651671"/>
+              <a:gd name="csX1" fmla="*/ 2824502 w 5649003"/>
+              <a:gd name="csY1" fmla="*/ 0 h 10651671"/>
+              <a:gd name="csX2" fmla="*/ 5649004 w 5649003"/>
+              <a:gd name="csY2" fmla="*/ 5325836 h 10651671"/>
+              <a:gd name="csX3" fmla="*/ 2824502 w 5649003"/>
+              <a:gd name="csY3" fmla="*/ 10651672 h 10651671"/>
+              <a:gd name="csX4" fmla="*/ 0 w 5649003"/>
+              <a:gd name="csY4" fmla="*/ 5325836 h 10651671"/>
+            </a:gdLst>
+            <a:ahLst/>
+            <a:cxnLst>
+              <a:cxn ang="0">
+                <a:pos x="csX0" y="csY0"/>
+              </a:cxn>
+              <a:cxn ang="0">
+                <a:pos x="csX1" y="csY1"/>
+              </a:cxn>
+              <a:cxn ang="0">
+                <a:pos x="csX2" y="csY2"/>
+              </a:cxn>
+              <a:cxn ang="0">
+                <a:pos x="csX3" y="csY3"/>
+              </a:cxn>
+              <a:cxn ang="0">
+                <a:pos x="csX4" y="csY4"/>
+              </a:cxn>
+            </a:cxnLst>
+            <a:rect l="l" t="t" r="r" b="b"/>
+            <a:pathLst>
+              <a:path w="5649003" h="10651671" fill="none" extrusionOk="0">
+                <a:moveTo>
+                  <a:pt x="0" y="5325836"/>
+                </a:moveTo>
+                <a:cubicBezTo>
+                  <a:pt x="186946" y="2320485"/>
+                  <a:pt x="1438121" y="-52385"/>
+                  <a:pt x="2824502" y="0"/>
+                </a:cubicBezTo>
+                <a:cubicBezTo>
+                  <a:pt x="4703838" y="-43168"/>
+                  <a:pt x="5583840" y="2369660"/>
+                  <a:pt x="5649004" y="5325836"/>
+                </a:cubicBezTo>
+                <a:cubicBezTo>
+                  <a:pt x="5518761" y="8289338"/>
+                  <a:pt x="4285196" y="10894014"/>
+                  <a:pt x="2824502" y="10651672"/>
+                </a:cubicBezTo>
+                <a:cubicBezTo>
+                  <a:pt x="1536945" y="11016699"/>
+                  <a:pt x="142947" y="8418643"/>
+                  <a:pt x="0" y="5325836"/>
+                </a:cubicBezTo>
+                <a:close/>
+              </a:path>
+              <a:path w="5649003" h="10651671" stroke="0" extrusionOk="0">
+                <a:moveTo>
+                  <a:pt x="0" y="5325836"/>
+                </a:moveTo>
+                <a:cubicBezTo>
+                  <a:pt x="-54350" y="2332108"/>
+                  <a:pt x="1351726" y="167869"/>
+                  <a:pt x="2824502" y="0"/>
+                </a:cubicBezTo>
+                <a:cubicBezTo>
+                  <a:pt x="4182679" y="-143942"/>
+                  <a:pt x="5672665" y="2549517"/>
+                  <a:pt x="5649004" y="5325836"/>
+                </a:cubicBezTo>
+                <a:cubicBezTo>
+                  <a:pt x="5518596" y="8280244"/>
+                  <a:pt x="4081190" y="10622204"/>
+                  <a:pt x="2824502" y="10651672"/>
+                </a:cubicBezTo>
+                <a:cubicBezTo>
+                  <a:pt x="1216708" y="10537144"/>
+                  <a:pt x="-100850" y="8264979"/>
+                  <a:pt x="0" y="5325836"/>
+                </a:cubicBezTo>
+                <a:close/>
+              </a:path>
+            </a:pathLst>
+          </a:custGeom>
+          <a:solidFill>
+            <a:schemeClr val="accent2"/>
+          </a:solidFill>
+          <a:ln w="57150">
+            <a:solidFill>
+              <a:schemeClr val="accent2"/>
+            </a:solidFill>
+            <a:extLst>
+              <a:ext uri="{C807C97D-BFC1-408E-A445-0C87EB9F89A2}">
+                <ask:lineSketchStyleProps xmlns:ask="http://schemas.microsoft.com/office/drawing/2018/sketchyshapes" sd="63743190">
+                  <a:prstGeom prst="ellipse">
+                    <a:avLst/>
+                  </a:prstGeom>
+                  <ask:type>
+                    <ask:lineSketchCurved/>
+                  </ask:type>
+                </ask:lineSketchStyleProps>
+              </a:ext>
+            </a:extLst>
+          </a:ln>
+        </p:spPr>
+        <p:style>
+          <a:lnRef idx="2">
+            <a:schemeClr val="accent1">
+              <a:shade val="50000"/>
+            </a:schemeClr>
+          </a:lnRef>
+          <a:fillRef idx="1">
+            <a:schemeClr val="accent1"/>
+          </a:fillRef>
+          <a:effectRef idx="0">
+            <a:schemeClr val="accent1"/>
+          </a:effectRef>
+          <a:fontRef idx="minor">
+            <a:schemeClr val="lt1"/>
+          </a:fontRef>
+        </p:style>
+        <p:txBody>
+          <a:bodyPr rtlCol="0" anchor="ctr"/>
+          <a:lstStyle/>
+          <a:p>
+            <a:pPr algn="ctr"/>
+            <a:endParaRPr lang="en-US" dirty="0"/>
+          </a:p>
+        </p:txBody>
+      </p:sp>
+      <p:sp>
+        <p:nvSpPr>
+          <p:cNvPr id="2" name="Title 1">
+            <a:extLst>
+              <a:ext uri="{FF2B5EF4-FFF2-40B4-BE49-F238E27FC236}">
+                <a16:creationId xmlns:a16="http://schemas.microsoft.com/office/drawing/2014/main" id="{21C7C281-0D8A-7D1A-1A3A-A9AA7B2EC34A}"/>
+              </a:ext>
+            </a:extLst>
+          </p:cNvPr>
+          <p:cNvSpPr>
+            <a:spLocks noGrp="1"/>
+          </p:cNvSpPr>
+          <p:nvPr>
+            <p:ph type="ctrTitle"/>
+          </p:nvPr>
+        </p:nvSpPr>
+        <p:spPr>
+          <a:xfrm>
+            <a:off x="2066544" y="1911096"/>
+            <a:ext cx="8055864" cy="2076651"/>
+          </a:xfrm>
+        </p:spPr>
+        <p:txBody>
+          <a:bodyPr anchor="b">
+            <a:normAutofit/>
+          </a:bodyPr>
+          <a:lstStyle/>
+          <a:p>
+            <a:r>
+              <a:rPr lang="en-US" sz="6600" dirty="0">
+                <a:solidFill>
+                  <a:srgbClr val="FFFFFF"/>
+                </a:solidFill>
+              </a:rPr>
+              <a:t>Embed </a:t>
+            </a:r>
+            <a:r>
+              <a:rPr lang="en-US" sz="6600" dirty="0" err="1">
+                <a:solidFill>
+                  <a:srgbClr val="FFFFFF"/>
+                </a:solidFill>
+              </a:rPr>
+              <a:t>PowerFX</a:t>
+            </a:r>
+            <a:r>
+              <a:rPr lang="en-US" sz="6600" dirty="0">
+                <a:solidFill>
+                  <a:srgbClr val="FFFFFF"/>
+                </a:solidFill>
+              </a:rPr>
+              <a:t> in your .NET Apps!</a:t>
+            </a:r>
+          </a:p>
+        </p:txBody>
+      </p:sp>
+      <p:sp>
+        <p:nvSpPr>
+          <p:cNvPr id="3" name="Subtitle 2">
+            <a:extLst>
+              <a:ext uri="{FF2B5EF4-FFF2-40B4-BE49-F238E27FC236}">
+                <a16:creationId xmlns:a16="http://schemas.microsoft.com/office/drawing/2014/main" id="{CA977AF2-7DD2-BDC2-A7C1-9D392D486378}"/>
+              </a:ext>
+            </a:extLst>
+          </p:cNvPr>
+          <p:cNvSpPr>
+            <a:spLocks noGrp="1"/>
+          </p:cNvSpPr>
+          <p:nvPr>
+            <p:ph type="subTitle" idx="1"/>
+          </p:nvPr>
+        </p:nvSpPr>
+        <p:spPr>
+          <a:xfrm>
+            <a:off x="3227832" y="4353507"/>
+            <a:ext cx="5733288" cy="932688"/>
+          </a:xfrm>
+        </p:spPr>
+        <p:txBody>
+          <a:bodyPr>
+            <a:normAutofit/>
+          </a:bodyPr>
+          <a:lstStyle/>
+          <a:p>
+            <a:endParaRPr lang="en-US">
+              <a:solidFill>
+                <a:srgbClr val="FFFFFF"/>
+              </a:solidFill>
+            </a:endParaRPr>
+          </a:p>
+        </p:txBody>
+      </p:sp>
+      <p:sp>
+        <p:nvSpPr>
+          <p:cNvPr id="12" name="sketch line">
+            <a:extLst>
+              <a:ext uri="{FF2B5EF4-FFF2-40B4-BE49-F238E27FC236}">
+                <a16:creationId xmlns:a16="http://schemas.microsoft.com/office/drawing/2014/main" id="{0953BC39-9D68-40BE-BF3C-5C4EB782AF94}"/>
+              </a:ext>
+              <a:ext uri="{C183D7F6-B498-43B3-948B-1728B52AA6E4}">
+                <adec:decorative xmlns:adec="http://schemas.microsoft.com/office/drawing/2017/decorative" val="1"/>
+              </a:ext>
+            </a:extLst>
+          </p:cNvPr>
+          <p:cNvSpPr>
+            <a:spLocks noGrp="1" noRot="1" noChangeAspect="1" noMove="1" noResize="1" noEditPoints="1" noAdjustHandles="1" noChangeArrowheads="1" noChangeShapeType="1" noTextEdit="1"/>
+          </p:cNvSpPr>
+          <p:nvPr>
+            <p:extLst>
+              <p:ext uri="{386F3935-93C4-4BCD-93E2-E3B085C9AB24}">
+                <p16:designElem xmlns:p16="http://schemas.microsoft.com/office/powerpoint/2015/main" val="1"/>
+              </p:ext>
+            </p:extLst>
+          </p:nvPr>
+        </p:nvSpPr>
+        <p:spPr>
+          <a:xfrm>
+            <a:off x="3974206" y="4173498"/>
+            <a:ext cx="4243589" cy="18288"/>
+          </a:xfrm>
+          <a:custGeom>
+            <a:avLst/>
+            <a:gdLst>
+              <a:gd name="csX0" fmla="*/ 0 w 4243589"/>
+              <a:gd name="csY0" fmla="*/ 0 h 18288"/>
+              <a:gd name="csX1" fmla="*/ 563791 w 4243589"/>
+              <a:gd name="csY1" fmla="*/ 0 h 18288"/>
+              <a:gd name="csX2" fmla="*/ 1042710 w 4243589"/>
+              <a:gd name="csY2" fmla="*/ 0 h 18288"/>
+              <a:gd name="csX3" fmla="*/ 1564066 w 4243589"/>
+              <a:gd name="csY3" fmla="*/ 0 h 18288"/>
+              <a:gd name="csX4" fmla="*/ 2212729 w 4243589"/>
+              <a:gd name="csY4" fmla="*/ 0 h 18288"/>
+              <a:gd name="csX5" fmla="*/ 2776520 w 4243589"/>
+              <a:gd name="csY5" fmla="*/ 0 h 18288"/>
+              <a:gd name="csX6" fmla="*/ 3297875 w 4243589"/>
+              <a:gd name="csY6" fmla="*/ 0 h 18288"/>
+              <a:gd name="csX7" fmla="*/ 4243589 w 4243589"/>
+              <a:gd name="csY7" fmla="*/ 0 h 18288"/>
+              <a:gd name="csX8" fmla="*/ 4243589 w 4243589"/>
+              <a:gd name="csY8" fmla="*/ 18288 h 18288"/>
+              <a:gd name="csX9" fmla="*/ 3637362 w 4243589"/>
+              <a:gd name="csY9" fmla="*/ 18288 h 18288"/>
+              <a:gd name="csX10" fmla="*/ 3116007 w 4243589"/>
+              <a:gd name="csY10" fmla="*/ 18288 h 18288"/>
+              <a:gd name="csX11" fmla="*/ 2424908 w 4243589"/>
+              <a:gd name="csY11" fmla="*/ 18288 h 18288"/>
+              <a:gd name="csX12" fmla="*/ 1861117 w 4243589"/>
+              <a:gd name="csY12" fmla="*/ 18288 h 18288"/>
+              <a:gd name="csX13" fmla="*/ 1382198 w 4243589"/>
+              <a:gd name="csY13" fmla="*/ 18288 h 18288"/>
+              <a:gd name="csX14" fmla="*/ 733535 w 4243589"/>
+              <a:gd name="csY14" fmla="*/ 18288 h 18288"/>
+              <a:gd name="csX15" fmla="*/ 0 w 4243589"/>
+              <a:gd name="csY15" fmla="*/ 18288 h 18288"/>
+              <a:gd name="csX16" fmla="*/ 0 w 4243589"/>
+              <a:gd name="csY16" fmla="*/ 0 h 18288"/>
+            </a:gdLst>
+            <a:ahLst/>
+            <a:cxnLst>
+              <a:cxn ang="0">
+                <a:pos x="csX0" y="csY0"/>
+              </a:cxn>
+              <a:cxn ang="0">
+                <a:pos x="csX1" y="csY1"/>
+              </a:cxn>
+              <a:cxn ang="0">
+                <a:pos x="csX2" y="csY2"/>
+              </a:cxn>
+              <a:cxn ang="0">
+                <a:pos x="csX3" y="csY3"/>
+              </a:cxn>
+              <a:cxn ang="0">
+                <a:pos x="csX4" y="csY4"/>
+              </a:cxn>
+              <a:cxn ang="0">
+                <a:pos x="csX5" y="csY5"/>
+              </a:cxn>
+              <a:cxn ang="0">
+                <a:pos x="csX6" y="csY6"/>
+              </a:cxn>
+              <a:cxn ang="0">
+                <a:pos x="csX7" y="csY7"/>
+              </a:cxn>
+              <a:cxn ang="0">
+                <a:pos x="csX8" y="csY8"/>
+              </a:cxn>
+              <a:cxn ang="0">
+                <a:pos x="csX9" y="csY9"/>
+              </a:cxn>
+              <a:cxn ang="0">
+                <a:pos x="csX10" y="csY10"/>
+              </a:cxn>
+              <a:cxn ang="0">
+                <a:pos x="csX11" y="csY11"/>
+              </a:cxn>
+              <a:cxn ang="0">
+                <a:pos x="csX12" y="csY12"/>
+              </a:cxn>
+              <a:cxn ang="0">
+                <a:pos x="csX13" y="csY13"/>
+              </a:cxn>
+              <a:cxn ang="0">
+                <a:pos x="csX14" y="csY14"/>
+              </a:cxn>
+              <a:cxn ang="0">
+                <a:pos x="csX15" y="csY15"/>
+              </a:cxn>
+              <a:cxn ang="0">
+                <a:pos x="csX16" y="csY16"/>
+              </a:cxn>
+            </a:cxnLst>
+            <a:rect l="l" t="t" r="r" b="b"/>
+            <a:pathLst>
+              <a:path w="4243589" h="18288" fill="none" extrusionOk="0">
+                <a:moveTo>
+                  <a:pt x="0" y="0"/>
+                </a:moveTo>
+                <a:cubicBezTo>
+                  <a:pt x="157351" y="-15653"/>
+                  <a:pt x="378877" y="-5828"/>
+                  <a:pt x="563791" y="0"/>
+                </a:cubicBezTo>
+                <a:cubicBezTo>
+                  <a:pt x="748705" y="5828"/>
+                  <a:pt x="905659" y="-5525"/>
+                  <a:pt x="1042710" y="0"/>
+                </a:cubicBezTo>
+                <a:cubicBezTo>
+                  <a:pt x="1179761" y="5525"/>
+                  <a:pt x="1356845" y="-21288"/>
+                  <a:pt x="1564066" y="0"/>
+                </a:cubicBezTo>
+                <a:cubicBezTo>
+                  <a:pt x="1771287" y="21288"/>
+                  <a:pt x="1912099" y="25135"/>
+                  <a:pt x="2212729" y="0"/>
+                </a:cubicBezTo>
+                <a:cubicBezTo>
+                  <a:pt x="2513359" y="-25135"/>
+                  <a:pt x="2514918" y="-27119"/>
+                  <a:pt x="2776520" y="0"/>
+                </a:cubicBezTo>
+                <a:cubicBezTo>
+                  <a:pt x="3038122" y="27119"/>
+                  <a:pt x="3178771" y="18116"/>
+                  <a:pt x="3297875" y="0"/>
+                </a:cubicBezTo>
+                <a:cubicBezTo>
+                  <a:pt x="3416980" y="-18116"/>
+                  <a:pt x="4012240" y="-40869"/>
+                  <a:pt x="4243589" y="0"/>
+                </a:cubicBezTo>
+                <a:cubicBezTo>
+                  <a:pt x="4243987" y="7429"/>
+                  <a:pt x="4243569" y="10822"/>
+                  <a:pt x="4243589" y="18288"/>
+                </a:cubicBezTo>
+                <a:cubicBezTo>
+                  <a:pt x="4112949" y="-2855"/>
+                  <a:pt x="3928037" y="1831"/>
+                  <a:pt x="3637362" y="18288"/>
+                </a:cubicBezTo>
+                <a:cubicBezTo>
+                  <a:pt x="3346687" y="34745"/>
+                  <a:pt x="3254446" y="26669"/>
+                  <a:pt x="3116007" y="18288"/>
+                </a:cubicBezTo>
+                <a:cubicBezTo>
+                  <a:pt x="2977569" y="9907"/>
+                  <a:pt x="2620228" y="28873"/>
+                  <a:pt x="2424908" y="18288"/>
+                </a:cubicBezTo>
+                <a:cubicBezTo>
+                  <a:pt x="2229588" y="7703"/>
+                  <a:pt x="2088287" y="-3854"/>
+                  <a:pt x="1861117" y="18288"/>
+                </a:cubicBezTo>
+                <a:cubicBezTo>
+                  <a:pt x="1633947" y="40430"/>
+                  <a:pt x="1502447" y="-871"/>
+                  <a:pt x="1382198" y="18288"/>
+                </a:cubicBezTo>
+                <a:cubicBezTo>
+                  <a:pt x="1261949" y="37447"/>
+                  <a:pt x="1045440" y="28353"/>
+                  <a:pt x="733535" y="18288"/>
+                </a:cubicBezTo>
+                <a:cubicBezTo>
+                  <a:pt x="421630" y="8223"/>
+                  <a:pt x="341257" y="-18359"/>
+                  <a:pt x="0" y="18288"/>
+                </a:cubicBezTo>
+                <a:cubicBezTo>
+                  <a:pt x="-591" y="13205"/>
+                  <a:pt x="-663" y="6329"/>
+                  <a:pt x="0" y="0"/>
+                </a:cubicBezTo>
+                <a:close/>
+              </a:path>
+              <a:path w="4243589" h="18288" stroke="0" extrusionOk="0">
+                <a:moveTo>
+                  <a:pt x="0" y="0"/>
+                </a:moveTo>
+                <a:cubicBezTo>
+                  <a:pt x="128164" y="17204"/>
+                  <a:pt x="312653" y="1129"/>
+                  <a:pt x="563791" y="0"/>
+                </a:cubicBezTo>
+                <a:cubicBezTo>
+                  <a:pt x="814929" y="-1129"/>
+                  <a:pt x="837271" y="8503"/>
+                  <a:pt x="1042710" y="0"/>
+                </a:cubicBezTo>
+                <a:cubicBezTo>
+                  <a:pt x="1248149" y="-8503"/>
+                  <a:pt x="1588432" y="-28862"/>
+                  <a:pt x="1733809" y="0"/>
+                </a:cubicBezTo>
+                <a:cubicBezTo>
+                  <a:pt x="1879186" y="28862"/>
+                  <a:pt x="2052815" y="5974"/>
+                  <a:pt x="2297600" y="0"/>
+                </a:cubicBezTo>
+                <a:cubicBezTo>
+                  <a:pt x="2542385" y="-5974"/>
+                  <a:pt x="2699960" y="-23550"/>
+                  <a:pt x="2861391" y="0"/>
+                </a:cubicBezTo>
+                <a:cubicBezTo>
+                  <a:pt x="3022822" y="23550"/>
+                  <a:pt x="3390411" y="25272"/>
+                  <a:pt x="3552490" y="0"/>
+                </a:cubicBezTo>
+                <a:cubicBezTo>
+                  <a:pt x="3714569" y="-25272"/>
+                  <a:pt x="3950585" y="-31327"/>
+                  <a:pt x="4243589" y="0"/>
+                </a:cubicBezTo>
+                <a:cubicBezTo>
+                  <a:pt x="4242703" y="5429"/>
+                  <a:pt x="4244410" y="14046"/>
+                  <a:pt x="4243589" y="18288"/>
+                </a:cubicBezTo>
+                <a:cubicBezTo>
+                  <a:pt x="4130424" y="-1240"/>
+                  <a:pt x="3932803" y="42249"/>
+                  <a:pt x="3722234" y="18288"/>
+                </a:cubicBezTo>
+                <a:cubicBezTo>
+                  <a:pt x="3511665" y="-5673"/>
+                  <a:pt x="3269903" y="45994"/>
+                  <a:pt x="3116007" y="18288"/>
+                </a:cubicBezTo>
+                <a:cubicBezTo>
+                  <a:pt x="2962111" y="-9418"/>
+                  <a:pt x="2744280" y="23224"/>
+                  <a:pt x="2509780" y="18288"/>
+                </a:cubicBezTo>
+                <a:cubicBezTo>
+                  <a:pt x="2275280" y="13352"/>
+                  <a:pt x="2066059" y="43664"/>
+                  <a:pt x="1945989" y="18288"/>
+                </a:cubicBezTo>
+                <a:cubicBezTo>
+                  <a:pt x="1825919" y="-7088"/>
+                  <a:pt x="1407329" y="12616"/>
+                  <a:pt x="1254890" y="18288"/>
+                </a:cubicBezTo>
+                <a:cubicBezTo>
+                  <a:pt x="1102451" y="23960"/>
+                  <a:pt x="837950" y="31673"/>
+                  <a:pt x="563791" y="18288"/>
+                </a:cubicBezTo>
+                <a:cubicBezTo>
+                  <a:pt x="289632" y="4903"/>
+                  <a:pt x="132768" y="7105"/>
+                  <a:pt x="0" y="18288"/>
+                </a:cubicBezTo>
+                <a:cubicBezTo>
+                  <a:pt x="668" y="13665"/>
+                  <a:pt x="578" y="5675"/>
+                  <a:pt x="0" y="0"/>
+                </a:cubicBezTo>
+                <a:close/>
+              </a:path>
+            </a:pathLst>
+          </a:custGeom>
+          <a:solidFill>
+            <a:srgbClr val="FFFFFF"/>
+          </a:solidFill>
+          <a:ln w="41275" cap="rnd">
+            <a:solidFill>
+              <a:srgbClr val="FFFFFF"/>
+            </a:solidFill>
+            <a:round/>
+            <a:extLst>
+              <a:ext uri="{C807C97D-BFC1-408E-A445-0C87EB9F89A2}">
+                <ask:lineSketchStyleProps xmlns:ask="http://schemas.microsoft.com/office/drawing/2018/sketchyshapes" sd="1219033472">
+                  <a:prstGeom prst="rect">
+                    <a:avLst/>
+                  </a:prstGeom>
+                  <ask:type>
+                    <ask:lineSketchFreehand/>
+                  </ask:type>
+                </ask:lineSketchStyleProps>
+              </a:ext>
+            </a:extLst>
+          </a:ln>
+        </p:spPr>
+        <p:style>
+          <a:lnRef idx="2">
+            <a:schemeClr val="accent1">
+              <a:shade val="50000"/>
+            </a:schemeClr>
+          </a:lnRef>
+          <a:fillRef idx="1">
+            <a:schemeClr val="accent1"/>
+          </a:fillRef>
+          <a:effectRef idx="0">
+            <a:schemeClr val="accent1"/>
+          </a:effectRef>
+          <a:fontRef idx="minor">
+            <a:schemeClr val="lt1"/>
+          </a:fontRef>
+        </p:style>
+        <p:txBody>
+          <a:bodyPr rtlCol="0" anchor="ctr"/>
+          <a:lstStyle/>
+          <a:p>
+            <a:pPr algn="ctr"/>
+            <a:endParaRPr lang="en-US"/>
+          </a:p>
+        </p:txBody>
+      </p:sp>
+      <p:pic>
+        <p:nvPicPr>
+          <p:cNvPr id="5" name="Picture 4">
+            <a:extLst>
+              <a:ext uri="{FF2B5EF4-FFF2-40B4-BE49-F238E27FC236}">
+                <a16:creationId xmlns:a16="http://schemas.microsoft.com/office/drawing/2014/main" id="{D18BEF6B-12D5-86DC-65B0-0992A8BB507F}"/>
+              </a:ext>
+            </a:extLst>
+          </p:cNvPr>
+          <p:cNvPicPr>
+            <a:picLocks noChangeAspect="1"/>
+          </p:cNvPicPr>
+          <p:nvPr/>
+        </p:nvPicPr>
+        <p:blipFill>
+          <a:blip r:embed="rId3">
+            <a:extLst>
+              <a:ext uri="{28A0092B-C50C-407E-A947-70E740481C1C}">
+                <a14:useLocalDpi xmlns:a14="http://schemas.microsoft.com/office/drawing/2010/main" val="0"/>
+              </a:ext>
+            </a:extLst>
+          </a:blip>
+          <a:stretch>
+            <a:fillRect/>
+          </a:stretch>
+        </p:blipFill>
+        <p:spPr>
+          <a:xfrm>
+            <a:off x="0" y="0"/>
+            <a:ext cx="12192000" cy="6858000"/>
+          </a:xfrm>
+          <a:prstGeom prst="rect">
+            <a:avLst/>
+          </a:prstGeom>
+        </p:spPr>
+      </p:pic>
+    </p:spTree>
+    <p:extLst>
+      <p:ext uri="{BB962C8B-B14F-4D97-AF65-F5344CB8AC3E}">
+        <p14:creationId xmlns:p14="http://schemas.microsoft.com/office/powerpoint/2010/main" val="3411481011"/>
+      </p:ext>
+    </p:extLst>
+  </p:cSld>
+  <p:clrMapOvr>
+    <a:masterClrMapping/>
+  </p:clrMapOvr>
+</p:sld>
+</file>
+
+<file path=ppt/slides/slide4.xml><?xml version="1.0" encoding="utf-8"?>
 <p:sld xmlns:a="http://schemas.openxmlformats.org/drawingml/2006/main" xmlns:r="http://schemas.openxmlformats.org/officeDocument/2006/relationships" xmlns:p="http://schemas.openxmlformats.org/presentationml/2006/main">
   <p:cSld>
     <p:bg>
@@ -18212,7 +19560,7 @@
 </p:sld>
 </file>
 
-<file path=ppt/slides/slide4.xml><?xml version="1.0" encoding="utf-8"?>
+<file path=ppt/slides/slide5.xml><?xml version="1.0" encoding="utf-8"?>
 <p:sld xmlns:a="http://schemas.openxmlformats.org/drawingml/2006/main" xmlns:r="http://schemas.openxmlformats.org/officeDocument/2006/relationships" xmlns:p="http://schemas.openxmlformats.org/presentationml/2006/main">
   <p:cSld>
     <p:bg>
@@ -18579,7 +19927,7 @@
 </p:sld>
 </file>
 
-<file path=ppt/slides/slide5.xml><?xml version="1.0" encoding="utf-8"?>
+<file path=ppt/slides/slide6.xml><?xml version="1.0" encoding="utf-8"?>
 <p:sld xmlns:a="http://schemas.openxmlformats.org/drawingml/2006/main" xmlns:r="http://schemas.openxmlformats.org/officeDocument/2006/relationships" xmlns:p="http://schemas.openxmlformats.org/presentationml/2006/main">
   <p:cSld>
     <p:bg>
@@ -19464,7 +20812,7 @@
 </p:sld>
 </file>
 
-<file path=ppt/slides/slide6.xml><?xml version="1.0" encoding="utf-8"?>
+<file path=ppt/slides/slide7.xml><?xml version="1.0" encoding="utf-8"?>
 <p:sld xmlns:a="http://schemas.openxmlformats.org/drawingml/2006/main" xmlns:r="http://schemas.openxmlformats.org/officeDocument/2006/relationships" xmlns:p="http://schemas.openxmlformats.org/presentationml/2006/main">
   <p:cSld>
     <p:bg>
@@ -20309,7 +21657,7 @@
 </p:sld>
 </file>
 
-<file path=ppt/slides/slide7.xml><?xml version="1.0" encoding="utf-8"?>
+<file path=ppt/slides/slide8.xml><?xml version="1.0" encoding="utf-8"?>
 <p:sld xmlns:a="http://schemas.openxmlformats.org/drawingml/2006/main" xmlns:r="http://schemas.openxmlformats.org/officeDocument/2006/relationships" xmlns:p="http://schemas.openxmlformats.org/presentationml/2006/main">
   <p:cSld>
     <p:bg>
@@ -21168,7 +22516,7 @@
 </p:sld>
 </file>
 
-<file path=ppt/slides/slide8.xml><?xml version="1.0" encoding="utf-8"?>
+<file path=ppt/slides/slide9.xml><?xml version="1.0" encoding="utf-8"?>
 <p:sld xmlns:a="http://schemas.openxmlformats.org/drawingml/2006/main" xmlns:r="http://schemas.openxmlformats.org/officeDocument/2006/relationships" xmlns:p="http://schemas.openxmlformats.org/presentationml/2006/main">
   <p:cSld>
     <p:bg>
@@ -22042,421 +23390,6 @@
     <p:extLst>
       <p:ext uri="{BB962C8B-B14F-4D97-AF65-F5344CB8AC3E}">
         <p14:creationId xmlns:p14="http://schemas.microsoft.com/office/powerpoint/2010/main" val="1560222976"/>
-      </p:ext>
-    </p:extLst>
-  </p:cSld>
-  <p:clrMapOvr>
-    <a:masterClrMapping/>
-  </p:clrMapOvr>
-</p:sld>
-</file>
-
-<file path=ppt/slides/slide9.xml><?xml version="1.0" encoding="utf-8"?>
-<p:sld xmlns:a="http://schemas.openxmlformats.org/drawingml/2006/main" xmlns:r="http://schemas.openxmlformats.org/officeDocument/2006/relationships" xmlns:p="http://schemas.openxmlformats.org/presentationml/2006/main">
-  <p:cSld>
-    <p:bg>
-      <p:bgPr>
-        <a:solidFill>
-          <a:schemeClr val="bg1"/>
-        </a:solidFill>
-        <a:effectLst/>
-      </p:bgPr>
-    </p:bg>
-    <p:spTree>
-      <p:nvGrpSpPr>
-        <p:cNvPr id="1" name="">
-          <a:extLst>
-            <a:ext uri="{FF2B5EF4-FFF2-40B4-BE49-F238E27FC236}">
-              <a16:creationId xmlns:a16="http://schemas.microsoft.com/office/drawing/2014/main" id="{59AE677F-C6E5-FFA4-6478-5D58E56AA595}"/>
-            </a:ext>
-          </a:extLst>
-        </p:cNvPr>
-        <p:cNvGrpSpPr/>
-        <p:nvPr/>
-      </p:nvGrpSpPr>
-      <p:grpSpPr>
-        <a:xfrm>
-          <a:off x="0" y="0"/>
-          <a:ext cx="0" cy="0"/>
-          <a:chOff x="0" y="0"/>
-          <a:chExt cx="0" cy="0"/>
-        </a:xfrm>
-      </p:grpSpPr>
-      <p:sp useBgFill="1">
-        <p:nvSpPr>
-          <p:cNvPr id="8" name="Rectangle 7">
-            <a:extLst>
-              <a:ext uri="{FF2B5EF4-FFF2-40B4-BE49-F238E27FC236}">
-                <a16:creationId xmlns:a16="http://schemas.microsoft.com/office/drawing/2014/main" id="{907EF6B7-1338-4443-8C46-6A318D952DFD}"/>
-              </a:ext>
-              <a:ext uri="{C183D7F6-B498-43B3-948B-1728B52AA6E4}">
-                <adec:decorative xmlns:adec="http://schemas.microsoft.com/office/drawing/2017/decorative" val="1"/>
-              </a:ext>
-            </a:extLst>
-          </p:cNvPr>
-          <p:cNvSpPr>
-            <a:spLocks noGrp="1" noRot="1" noChangeAspect="1" noMove="1" noResize="1" noEditPoints="1" noAdjustHandles="1" noChangeArrowheads="1" noChangeShapeType="1" noTextEdit="1"/>
-          </p:cNvSpPr>
-          <p:nvPr>
-            <p:extLst>
-              <p:ext uri="{386F3935-93C4-4BCD-93E2-E3B085C9AB24}">
-                <p16:designElem xmlns:p16="http://schemas.microsoft.com/office/powerpoint/2015/main" val="1"/>
-              </p:ext>
-            </p:extLst>
-          </p:nvPr>
-        </p:nvSpPr>
-        <p:spPr>
-          <a:xfrm>
-            <a:off x="3048" y="0"/>
-            <a:ext cx="12188952" cy="6858000"/>
-          </a:xfrm>
-          <a:prstGeom prst="rect">
-            <a:avLst/>
-          </a:prstGeom>
-          <a:ln>
-            <a:noFill/>
-          </a:ln>
-        </p:spPr>
-        <p:style>
-          <a:lnRef idx="2">
-            <a:schemeClr val="accent1">
-              <a:shade val="50000"/>
-            </a:schemeClr>
-          </a:lnRef>
-          <a:fillRef idx="1">
-            <a:schemeClr val="accent1"/>
-          </a:fillRef>
-          <a:effectRef idx="0">
-            <a:schemeClr val="accent1"/>
-          </a:effectRef>
-          <a:fontRef idx="minor">
-            <a:schemeClr val="lt1"/>
-          </a:fontRef>
-        </p:style>
-        <p:txBody>
-          <a:bodyPr rtlCol="0" anchor="ctr"/>
-          <a:lstStyle/>
-          <a:p>
-            <a:pPr algn="ctr"/>
-            <a:endParaRPr lang="en-US"/>
-          </a:p>
-        </p:txBody>
-      </p:sp>
-      <p:sp>
-        <p:nvSpPr>
-          <p:cNvPr id="10" name="Freeform: Shape 9">
-            <a:extLst>
-              <a:ext uri="{FF2B5EF4-FFF2-40B4-BE49-F238E27FC236}">
-                <a16:creationId xmlns:a16="http://schemas.microsoft.com/office/drawing/2014/main" id="{DAAE4CDD-124C-4DCF-9584-B6033B545DD5}"/>
-              </a:ext>
-              <a:ext uri="{C183D7F6-B498-43B3-948B-1728B52AA6E4}">
-                <adec:decorative xmlns:adec="http://schemas.microsoft.com/office/drawing/2017/decorative" val="1"/>
-              </a:ext>
-            </a:extLst>
-          </p:cNvPr>
-          <p:cNvSpPr>
-            <a:spLocks noGrp="1" noRot="1" noChangeAspect="1" noMove="1" noResize="1" noEditPoints="1" noAdjustHandles="1" noChangeArrowheads="1" noChangeShapeType="1" noTextEdit="1"/>
-          </p:cNvSpPr>
-          <p:nvPr>
-            <p:extLst>
-              <p:ext uri="{386F3935-93C4-4BCD-93E2-E3B085C9AB24}">
-                <p16:designElem xmlns:p16="http://schemas.microsoft.com/office/powerpoint/2015/main" val="1"/>
-              </p:ext>
-            </p:extLst>
-          </p:nvPr>
-        </p:nvSpPr>
-        <p:spPr>
-          <a:xfrm>
-            <a:off x="1" y="0"/>
-            <a:ext cx="4167271" cy="6858000"/>
-          </a:xfrm>
-          <a:custGeom>
-            <a:avLst/>
-            <a:gdLst>
-              <a:gd name="connsiteX0" fmla="*/ 0 w 4167271"/>
-              <a:gd name="connsiteY0" fmla="*/ 0 h 6858000"/>
-              <a:gd name="connsiteX1" fmla="*/ 2259550 w 4167271"/>
-              <a:gd name="connsiteY1" fmla="*/ 0 h 6858000"/>
-              <a:gd name="connsiteX2" fmla="*/ 2387803 w 4167271"/>
-              <a:gd name="connsiteY2" fmla="*/ 82222 h 6858000"/>
-              <a:gd name="connsiteX3" fmla="*/ 4167271 w 4167271"/>
-              <a:gd name="connsiteY3" fmla="*/ 3429000 h 6858000"/>
-              <a:gd name="connsiteX4" fmla="*/ 2387803 w 4167271"/>
-              <a:gd name="connsiteY4" fmla="*/ 6775779 h 6858000"/>
-              <a:gd name="connsiteX5" fmla="*/ 2259550 w 4167271"/>
-              <a:gd name="connsiteY5" fmla="*/ 6858000 h 6858000"/>
-              <a:gd name="connsiteX6" fmla="*/ 0 w 4167271"/>
-              <a:gd name="connsiteY6" fmla="*/ 6858000 h 6858000"/>
-            </a:gdLst>
-            <a:ahLst/>
-            <a:cxnLst>
-              <a:cxn ang="0">
-                <a:pos x="connsiteX0" y="connsiteY0"/>
-              </a:cxn>
-              <a:cxn ang="0">
-                <a:pos x="connsiteX1" y="connsiteY1"/>
-              </a:cxn>
-              <a:cxn ang="0">
-                <a:pos x="connsiteX2" y="connsiteY2"/>
-              </a:cxn>
-              <a:cxn ang="0">
-                <a:pos x="connsiteX3" y="connsiteY3"/>
-              </a:cxn>
-              <a:cxn ang="0">
-                <a:pos x="connsiteX4" y="connsiteY4"/>
-              </a:cxn>
-              <a:cxn ang="0">
-                <a:pos x="connsiteX5" y="connsiteY5"/>
-              </a:cxn>
-              <a:cxn ang="0">
-                <a:pos x="connsiteX6" y="connsiteY6"/>
-              </a:cxn>
-            </a:cxnLst>
-            <a:rect l="l" t="t" r="r" b="b"/>
-            <a:pathLst>
-              <a:path w="4167271" h="6858000">
-                <a:moveTo>
-                  <a:pt x="0" y="0"/>
-                </a:moveTo>
-                <a:lnTo>
-                  <a:pt x="2259550" y="0"/>
-                </a:lnTo>
-                <a:lnTo>
-                  <a:pt x="2387803" y="82222"/>
-                </a:lnTo>
-                <a:cubicBezTo>
-                  <a:pt x="3461407" y="807534"/>
-                  <a:pt x="4167271" y="2035835"/>
-                  <a:pt x="4167271" y="3429000"/>
-                </a:cubicBezTo>
-                <a:cubicBezTo>
-                  <a:pt x="4167271" y="4822165"/>
-                  <a:pt x="3461407" y="6050467"/>
-                  <a:pt x="2387803" y="6775779"/>
-                </a:cubicBezTo>
-                <a:lnTo>
-                  <a:pt x="2259550" y="6858000"/>
-                </a:lnTo>
-                <a:lnTo>
-                  <a:pt x="0" y="6858000"/>
-                </a:lnTo>
-                <a:close/>
-              </a:path>
-            </a:pathLst>
-          </a:custGeom>
-          <a:solidFill>
-            <a:schemeClr val="accent2"/>
-          </a:solidFill>
-          <a:ln>
-            <a:noFill/>
-          </a:ln>
-        </p:spPr>
-        <p:style>
-          <a:lnRef idx="2">
-            <a:schemeClr val="accent1">
-              <a:shade val="50000"/>
-            </a:schemeClr>
-          </a:lnRef>
-          <a:fillRef idx="1">
-            <a:schemeClr val="accent1"/>
-          </a:fillRef>
-          <a:effectRef idx="0">
-            <a:schemeClr val="accent1"/>
-          </a:effectRef>
-          <a:fontRef idx="minor">
-            <a:schemeClr val="lt1"/>
-          </a:fontRef>
-        </p:style>
-        <p:txBody>
-          <a:bodyPr rtlCol="0" anchor="ctr"/>
-          <a:lstStyle/>
-          <a:p>
-            <a:pPr algn="ctr"/>
-            <a:endParaRPr lang="en-US"/>
-          </a:p>
-        </p:txBody>
-      </p:sp>
-      <p:sp>
-        <p:nvSpPr>
-          <p:cNvPr id="2" name="Title 1">
-            <a:extLst>
-              <a:ext uri="{FF2B5EF4-FFF2-40B4-BE49-F238E27FC236}">
-                <a16:creationId xmlns:a16="http://schemas.microsoft.com/office/drawing/2014/main" id="{1F6F1046-F7CA-D566-9E0D-D15AB3B8D754}"/>
-              </a:ext>
-            </a:extLst>
-          </p:cNvPr>
-          <p:cNvSpPr>
-            <a:spLocks noGrp="1"/>
-          </p:cNvSpPr>
-          <p:nvPr>
-            <p:ph type="title"/>
-          </p:nvPr>
-        </p:nvSpPr>
-        <p:spPr>
-          <a:xfrm>
-            <a:off x="686834" y="1153572"/>
-            <a:ext cx="3200400" cy="4461163"/>
-          </a:xfrm>
-        </p:spPr>
-        <p:txBody>
-          <a:bodyPr>
-            <a:normAutofit/>
-          </a:bodyPr>
-          <a:lstStyle/>
-          <a:p>
-            <a:r>
-              <a:rPr lang="en-US">
-                <a:solidFill>
-                  <a:srgbClr val="FFFFFF"/>
-                </a:solidFill>
-              </a:rPr>
-              <a:t>Intro to PowerFX</a:t>
-            </a:r>
-          </a:p>
-        </p:txBody>
-      </p:sp>
-      <p:sp>
-        <p:nvSpPr>
-          <p:cNvPr id="12" name="Arc 11">
-            <a:extLst>
-              <a:ext uri="{FF2B5EF4-FFF2-40B4-BE49-F238E27FC236}">
-                <a16:creationId xmlns:a16="http://schemas.microsoft.com/office/drawing/2014/main" id="{081E4A58-353D-44AE-B2FC-2A74E2E400F7}"/>
-              </a:ext>
-              <a:ext uri="{C183D7F6-B498-43B3-948B-1728B52AA6E4}">
-                <adec:decorative xmlns:adec="http://schemas.microsoft.com/office/drawing/2017/decorative" val="1"/>
-              </a:ext>
-            </a:extLst>
-          </p:cNvPr>
-          <p:cNvSpPr>
-            <a:spLocks noGrp="1" noRot="1" noChangeAspect="1" noMove="1" noResize="1" noEditPoints="1" noAdjustHandles="1" noChangeArrowheads="1" noChangeShapeType="1" noTextEdit="1"/>
-          </p:cNvSpPr>
-          <p:nvPr>
-            <p:extLst>
-              <p:ext uri="{386F3935-93C4-4BCD-93E2-E3B085C9AB24}">
-                <p16:designElem xmlns:p16="http://schemas.microsoft.com/office/powerpoint/2015/main" val="1"/>
-              </p:ext>
-            </p:extLst>
-          </p:nvPr>
-        </p:nvSpPr>
-        <p:spPr>
-          <a:xfrm flipV="1">
-            <a:off x="7550402" y="2455479"/>
-            <a:ext cx="4083433" cy="4083433"/>
-          </a:xfrm>
-          <a:prstGeom prst="arc">
-            <a:avLst/>
-          </a:prstGeom>
-          <a:ln w="127000" cap="rnd">
-            <a:solidFill>
-              <a:schemeClr val="accent4"/>
-            </a:solidFill>
-            <a:prstDash val="dash"/>
-          </a:ln>
-        </p:spPr>
-        <p:style>
-          <a:lnRef idx="1">
-            <a:schemeClr val="accent1"/>
-          </a:lnRef>
-          <a:fillRef idx="0">
-            <a:schemeClr val="accent1"/>
-          </a:fillRef>
-          <a:effectRef idx="0">
-            <a:schemeClr val="accent1"/>
-          </a:effectRef>
-          <a:fontRef idx="minor">
-            <a:schemeClr val="tx1"/>
-          </a:fontRef>
-        </p:style>
-        <p:txBody>
-          <a:bodyPr rtlCol="0" anchor="ctr"/>
-          <a:lstStyle/>
-          <a:p>
-            <a:pPr algn="ctr"/>
-            <a:endParaRPr lang="en-US" dirty="0"/>
-          </a:p>
-        </p:txBody>
-      </p:sp>
-      <p:sp>
-        <p:nvSpPr>
-          <p:cNvPr id="3" name="Content Placeholder 2">
-            <a:extLst>
-              <a:ext uri="{FF2B5EF4-FFF2-40B4-BE49-F238E27FC236}">
-                <a16:creationId xmlns:a16="http://schemas.microsoft.com/office/drawing/2014/main" id="{8B69A762-FEC8-E2E1-6828-B3877AE8878A}"/>
-              </a:ext>
-            </a:extLst>
-          </p:cNvPr>
-          <p:cNvSpPr>
-            <a:spLocks noGrp="1"/>
-          </p:cNvSpPr>
-          <p:nvPr>
-            <p:ph idx="1"/>
-          </p:nvPr>
-        </p:nvSpPr>
-        <p:spPr>
-          <a:xfrm>
-            <a:off x="4447308" y="591344"/>
-            <a:ext cx="6906491" cy="5585619"/>
-          </a:xfrm>
-        </p:spPr>
-        <p:txBody>
-          <a:bodyPr anchor="ctr">
-            <a:normAutofit/>
-          </a:bodyPr>
-          <a:lstStyle/>
-          <a:p>
-            <a:r>
-              <a:rPr lang="en-US" dirty="0"/>
-              <a:t>Business user friendly</a:t>
-            </a:r>
-          </a:p>
-          <a:p>
-            <a:r>
-              <a:rPr lang="en-US" dirty="0"/>
-              <a:t>Open sourced by Microsoft</a:t>
-            </a:r>
-          </a:p>
-          <a:p>
-            <a:r>
-              <a:rPr lang="en-US" dirty="0"/>
-              <a:t>Similar to Excel formulas</a:t>
-            </a:r>
-          </a:p>
-          <a:p>
-            <a:r>
-              <a:rPr lang="en-US" dirty="0"/>
-              <a:t>Use in many parts of the Power Platform</a:t>
-            </a:r>
-          </a:p>
-          <a:p>
-            <a:pPr lvl="1"/>
-            <a:r>
-              <a:rPr lang="en-US" dirty="0"/>
-              <a:t>Many Experts, Tutorials, Articles, </a:t>
-            </a:r>
-            <a:r>
-              <a:rPr lang="en-US" dirty="0" err="1"/>
-              <a:t>etc</a:t>
-            </a:r>
-            <a:endParaRPr lang="en-US" dirty="0"/>
-          </a:p>
-          <a:p>
-            <a:r>
-              <a:rPr lang="en-US" dirty="0">
-                <a:hlinkClick r:id="rId3"/>
-              </a:rPr>
-              <a:t>https://learn.microsoft.com/en-us/power-platform/power-fx/overview</a:t>
-            </a:r>
-            <a:r>
-              <a:rPr lang="en-US" dirty="0"/>
-              <a:t> </a:t>
-            </a:r>
-          </a:p>
-        </p:txBody>
-      </p:sp>
-    </p:spTree>
-    <p:extLst>
-      <p:ext uri="{BB962C8B-B14F-4D97-AF65-F5344CB8AC3E}">
-        <p14:creationId xmlns:p14="http://schemas.microsoft.com/office/powerpoint/2010/main" val="2726405216"/>
       </p:ext>
     </p:extLst>
   </p:cSld>

--- a/slides/PowerFX embedding session.pptx
+++ b/slides/PowerFX embedding session.pptx
@@ -5,7 +5,7 @@
     <p:sldMasterId id="2147483648" r:id="rId1"/>
   </p:sldMasterIdLst>
   <p:notesMasterIdLst>
-    <p:notesMasterId r:id="rId24"/>
+    <p:notesMasterId r:id="rId22"/>
   </p:notesMasterIdLst>
   <p:sldIdLst>
     <p:sldId id="278" r:id="rId2"/>
@@ -19,20 +19,26 @@
     <p:sldId id="268" r:id="rId10"/>
     <p:sldId id="265" r:id="rId11"/>
     <p:sldId id="274" r:id="rId12"/>
-    <p:sldId id="260" r:id="rId13"/>
-    <p:sldId id="259" r:id="rId14"/>
-    <p:sldId id="261" r:id="rId15"/>
-    <p:sldId id="262" r:id="rId16"/>
-    <p:sldId id="269" r:id="rId17"/>
-    <p:sldId id="263" r:id="rId18"/>
-    <p:sldId id="270" r:id="rId19"/>
-    <p:sldId id="276" r:id="rId20"/>
-    <p:sldId id="264" r:id="rId21"/>
-    <p:sldId id="266" r:id="rId22"/>
-    <p:sldId id="277" r:id="rId23"/>
+    <p:sldId id="259" r:id="rId13"/>
+    <p:sldId id="262" r:id="rId14"/>
+    <p:sldId id="269" r:id="rId15"/>
+    <p:sldId id="263" r:id="rId16"/>
+    <p:sldId id="270" r:id="rId17"/>
+    <p:sldId id="276" r:id="rId18"/>
+    <p:sldId id="264" r:id="rId19"/>
+    <p:sldId id="266" r:id="rId20"/>
+    <p:sldId id="277" r:id="rId21"/>
   </p:sldIdLst>
   <p:sldSz cx="12192000" cy="6858000"/>
   <p:notesSz cx="6858000" cy="9144000"/>
+  <p:custShowLst>
+    <p:custShow name="Pre-session" id="0">
+      <p:sldLst>
+        <p:sld r:id="rId4"/>
+        <p:sld r:id="rId2"/>
+      </p:sldLst>
+    </p:custShow>
+  </p:custShowLst>
   <p:defaultTextStyle>
     <a:defPPr>
       <a:defRPr lang="en-US"/>
@@ -142,13 +148,262 @@
 <file path=ppt/revisionInfo.xml><?xml version="1.0" encoding="utf-8"?>
 <p1510:revInfo xmlns:a="http://schemas.openxmlformats.org/drawingml/2006/main" xmlns:r="http://schemas.openxmlformats.org/officeDocument/2006/relationships" xmlns:p1510="http://schemas.microsoft.com/office/powerpoint/2015/10/main">
   <p1510:revLst>
-    <p1510:client id="{39122C61-325C-4458-AFCB-0CB4C4D07DCE}" v="8" dt="2026-04-10T21:03:22.737"/>
+    <p1510:client id="{39122C61-325C-4458-AFCB-0CB4C4D07DCE}" v="9" dt="2026-04-11T00:59:39.230"/>
   </p1510:revLst>
 </p1510:revInfo>
 </file>
 
 <file path=ppt/changesInfos/changesInfo1.xml><?xml version="1.0" encoding="utf-8"?>
 <pc:chgInfo xmlns:a="http://schemas.openxmlformats.org/drawingml/2006/main" xmlns:r="http://schemas.openxmlformats.org/officeDocument/2006/relationships" xmlns:ac="http://schemas.microsoft.com/office/drawing/2013/main/command" xmlns:pc="http://schemas.microsoft.com/office/powerpoint/2013/main/command">
+  <pc:docChgLst>
+    <pc:chgData name="Juan Pablo Tarquino" userId="619fa53a89ad4d51" providerId="Windows Live" clId="Web-{50598D2B-965E-8C84-681F-541CC65C532D}"/>
+    <pc:docChg chg="modSld">
+      <pc:chgData name="Juan Pablo Tarquino" userId="619fa53a89ad4d51" providerId="Windows Live" clId="Web-{50598D2B-965E-8C84-681F-541CC65C532D}" dt="2026-03-15T01:15:24.930" v="74"/>
+      <pc:docMkLst>
+        <pc:docMk/>
+      </pc:docMkLst>
+      <pc:sldChg chg="modNotes">
+        <pc:chgData name="Juan Pablo Tarquino" userId="619fa53a89ad4d51" providerId="Windows Live" clId="Web-{50598D2B-965E-8C84-681F-541CC65C532D}" dt="2026-03-15T01:15:24.930" v="74"/>
+        <pc:sldMkLst>
+          <pc:docMk/>
+          <pc:sldMk cId="3248658166" sldId="269"/>
+        </pc:sldMkLst>
+      </pc:sldChg>
+    </pc:docChg>
+  </pc:docChgLst>
+  <pc:docChgLst>
+    <pc:chgData name="Juan Pablo Tarquino" userId="619fa53a89ad4d51" providerId="LiveId" clId="{7EB37E31-EF5E-4BCC-BF63-A19A62539991}"/>
+    <pc:docChg chg="undo custSel addSld delSld modSld sldOrd">
+      <pc:chgData name="Juan Pablo Tarquino" userId="619fa53a89ad4d51" providerId="LiveId" clId="{7EB37E31-EF5E-4BCC-BF63-A19A62539991}" dt="2026-04-10T21:07:48.733" v="668" actId="313"/>
+      <pc:docMkLst>
+        <pc:docMk/>
+      </pc:docMkLst>
+      <pc:sldChg chg="addSp modSp mod ord">
+        <pc:chgData name="Juan Pablo Tarquino" userId="619fa53a89ad4d51" providerId="LiveId" clId="{7EB37E31-EF5E-4BCC-BF63-A19A62539991}" dt="2026-04-10T21:03:13.670" v="485"/>
+        <pc:sldMkLst>
+          <pc:docMk/>
+          <pc:sldMk cId="3411481011" sldId="256"/>
+        </pc:sldMkLst>
+        <pc:picChg chg="add mod">
+          <ac:chgData name="Juan Pablo Tarquino" userId="619fa53a89ad4d51" providerId="LiveId" clId="{7EB37E31-EF5E-4BCC-BF63-A19A62539991}" dt="2026-04-10T21:02:40.874" v="481"/>
+          <ac:picMkLst>
+            <pc:docMk/>
+            <pc:sldMk cId="3411481011" sldId="256"/>
+            <ac:picMk id="5" creationId="{D18BEF6B-12D5-86DC-65B0-0992A8BB507F}"/>
+          </ac:picMkLst>
+        </pc:picChg>
+      </pc:sldChg>
+      <pc:sldChg chg="modSp mod">
+        <pc:chgData name="Juan Pablo Tarquino" userId="619fa53a89ad4d51" providerId="LiveId" clId="{7EB37E31-EF5E-4BCC-BF63-A19A62539991}" dt="2026-04-07T15:43:31.049" v="319" actId="20577"/>
+        <pc:sldMkLst>
+          <pc:docMk/>
+          <pc:sldMk cId="3085556934" sldId="257"/>
+        </pc:sldMkLst>
+        <pc:spChg chg="mod">
+          <ac:chgData name="Juan Pablo Tarquino" userId="619fa53a89ad4d51" providerId="LiveId" clId="{7EB37E31-EF5E-4BCC-BF63-A19A62539991}" dt="2026-04-07T15:43:31.049" v="319" actId="20577"/>
+          <ac:spMkLst>
+            <pc:docMk/>
+            <pc:sldMk cId="3085556934" sldId="257"/>
+            <ac:spMk id="3" creationId="{598D7916-63CE-FB74-076E-E44A9B1B59C9}"/>
+          </ac:spMkLst>
+        </pc:spChg>
+      </pc:sldChg>
+      <pc:sldChg chg="modNotesTx">
+        <pc:chgData name="Juan Pablo Tarquino" userId="619fa53a89ad4d51" providerId="LiveId" clId="{7EB37E31-EF5E-4BCC-BF63-A19A62539991}" dt="2026-03-31T02:01:54.209" v="0" actId="313"/>
+        <pc:sldMkLst>
+          <pc:docMk/>
+          <pc:sldMk cId="96671113" sldId="258"/>
+        </pc:sldMkLst>
+      </pc:sldChg>
+      <pc:sldChg chg="del">
+        <pc:chgData name="Juan Pablo Tarquino" userId="619fa53a89ad4d51" providerId="LiveId" clId="{7EB37E31-EF5E-4BCC-BF63-A19A62539991}" dt="2026-04-10T21:05:16.793" v="510" actId="47"/>
+        <pc:sldMkLst>
+          <pc:docMk/>
+          <pc:sldMk cId="2253528452" sldId="260"/>
+        </pc:sldMkLst>
+      </pc:sldChg>
+      <pc:sldChg chg="del">
+        <pc:chgData name="Juan Pablo Tarquino" userId="619fa53a89ad4d51" providerId="LiveId" clId="{7EB37E31-EF5E-4BCC-BF63-A19A62539991}" dt="2026-04-10T21:05:24.669" v="511" actId="47"/>
+        <pc:sldMkLst>
+          <pc:docMk/>
+          <pc:sldMk cId="3591279662" sldId="261"/>
+        </pc:sldMkLst>
+      </pc:sldChg>
+      <pc:sldChg chg="modSp mod modNotesTx">
+        <pc:chgData name="Juan Pablo Tarquino" userId="619fa53a89ad4d51" providerId="LiveId" clId="{7EB37E31-EF5E-4BCC-BF63-A19A62539991}" dt="2026-04-07T15:45:55.481" v="336" actId="313"/>
+        <pc:sldMkLst>
+          <pc:docMk/>
+          <pc:sldMk cId="828761936" sldId="262"/>
+        </pc:sldMkLst>
+        <pc:spChg chg="mod">
+          <ac:chgData name="Juan Pablo Tarquino" userId="619fa53a89ad4d51" providerId="LiveId" clId="{7EB37E31-EF5E-4BCC-BF63-A19A62539991}" dt="2026-04-07T15:45:27.574" v="321" actId="20577"/>
+          <ac:spMkLst>
+            <pc:docMk/>
+            <pc:sldMk cId="828761936" sldId="262"/>
+            <ac:spMk id="3" creationId="{19714051-6D8A-B5CC-084A-649ADEC99D71}"/>
+          </ac:spMkLst>
+        </pc:spChg>
+      </pc:sldChg>
+      <pc:sldChg chg="addSp delSp modSp add mod setBg delDesignElem">
+        <pc:chgData name="Juan Pablo Tarquino" userId="619fa53a89ad4d51" providerId="LiveId" clId="{7EB37E31-EF5E-4BCC-BF63-A19A62539991}" dt="2026-04-10T21:04:34.423" v="506" actId="1076"/>
+        <pc:sldMkLst>
+          <pc:docMk/>
+          <pc:sldMk cId="462932405" sldId="266"/>
+        </pc:sldMkLst>
+        <pc:spChg chg="mod">
+          <ac:chgData name="Juan Pablo Tarquino" userId="619fa53a89ad4d51" providerId="LiveId" clId="{7EB37E31-EF5E-4BCC-BF63-A19A62539991}" dt="2026-04-10T21:04:01.228" v="501" actId="5793"/>
+          <ac:spMkLst>
+            <pc:docMk/>
+            <pc:sldMk cId="462932405" sldId="266"/>
+            <ac:spMk id="3" creationId="{33A1B896-9F0D-736F-E7D8-94F4BE6C1423}"/>
+          </ac:spMkLst>
+        </pc:spChg>
+        <pc:picChg chg="add mod">
+          <ac:chgData name="Juan Pablo Tarquino" userId="619fa53a89ad4d51" providerId="LiveId" clId="{7EB37E31-EF5E-4BCC-BF63-A19A62539991}" dt="2026-04-10T21:04:34.423" v="506" actId="1076"/>
+          <ac:picMkLst>
+            <pc:docMk/>
+            <pc:sldMk cId="462932405" sldId="266"/>
+            <ac:picMk id="5" creationId="{D2ADC734-DAC4-1697-38F8-97E3F531D423}"/>
+          </ac:picMkLst>
+        </pc:picChg>
+      </pc:sldChg>
+      <pc:sldChg chg="modSp mod">
+        <pc:chgData name="Juan Pablo Tarquino" userId="619fa53a89ad4d51" providerId="LiveId" clId="{7EB37E31-EF5E-4BCC-BF63-A19A62539991}" dt="2026-04-07T19:44:00.173" v="479" actId="403"/>
+        <pc:sldMkLst>
+          <pc:docMk/>
+          <pc:sldMk cId="2381318140" sldId="267"/>
+        </pc:sldMkLst>
+        <pc:spChg chg="mod">
+          <ac:chgData name="Juan Pablo Tarquino" userId="619fa53a89ad4d51" providerId="LiveId" clId="{7EB37E31-EF5E-4BCC-BF63-A19A62539991}" dt="2026-04-07T19:44:00.173" v="479" actId="403"/>
+          <ac:spMkLst>
+            <pc:docMk/>
+            <pc:sldMk cId="2381318140" sldId="267"/>
+            <ac:spMk id="3" creationId="{AAE76935-EB5F-674B-F17B-F1D882ED1694}"/>
+          </ac:spMkLst>
+        </pc:spChg>
+      </pc:sldChg>
+      <pc:sldChg chg="modNotesTx">
+        <pc:chgData name="Juan Pablo Tarquino" userId="619fa53a89ad4d51" providerId="LiveId" clId="{7EB37E31-EF5E-4BCC-BF63-A19A62539991}" dt="2026-04-10T21:05:53.484" v="516" actId="20577"/>
+        <pc:sldMkLst>
+          <pc:docMk/>
+          <pc:sldMk cId="3248658166" sldId="269"/>
+        </pc:sldMkLst>
+      </pc:sldChg>
+      <pc:sldChg chg="modNotesTx">
+        <pc:chgData name="Juan Pablo Tarquino" userId="619fa53a89ad4d51" providerId="LiveId" clId="{7EB37E31-EF5E-4BCC-BF63-A19A62539991}" dt="2026-04-10T21:07:48.733" v="668" actId="313"/>
+        <pc:sldMkLst>
+          <pc:docMk/>
+          <pc:sldMk cId="3174467460" sldId="270"/>
+        </pc:sldMkLst>
+      </pc:sldChg>
+      <pc:sldChg chg="addSp modSp mod">
+        <pc:chgData name="Juan Pablo Tarquino" userId="619fa53a89ad4d51" providerId="LiveId" clId="{7EB37E31-EF5E-4BCC-BF63-A19A62539991}" dt="2026-04-07T19:37:06.046" v="359" actId="20577"/>
+        <pc:sldMkLst>
+          <pc:docMk/>
+          <pc:sldMk cId="1528468167" sldId="272"/>
+        </pc:sldMkLst>
+        <pc:spChg chg="mod">
+          <ac:chgData name="Juan Pablo Tarquino" userId="619fa53a89ad4d51" providerId="LiveId" clId="{7EB37E31-EF5E-4BCC-BF63-A19A62539991}" dt="2026-04-07T19:37:06.046" v="359" actId="20577"/>
+          <ac:spMkLst>
+            <pc:docMk/>
+            <pc:sldMk cId="1528468167" sldId="272"/>
+            <ac:spMk id="3" creationId="{9482E84A-BDAD-C72C-F004-13D054A6BB29}"/>
+          </ac:spMkLst>
+        </pc:spChg>
+        <pc:picChg chg="add mod">
+          <ac:chgData name="Juan Pablo Tarquino" userId="619fa53a89ad4d51" providerId="LiveId" clId="{7EB37E31-EF5E-4BCC-BF63-A19A62539991}" dt="2026-04-07T15:42:38.324" v="318" actId="1076"/>
+          <ac:picMkLst>
+            <pc:docMk/>
+            <pc:sldMk cId="1528468167" sldId="272"/>
+            <ac:picMk id="5" creationId="{14FE3455-90A4-7EA8-C301-229D17616FE0}"/>
+          </ac:picMkLst>
+        </pc:picChg>
+      </pc:sldChg>
+      <pc:sldChg chg="modNotesTx">
+        <pc:chgData name="Juan Pablo Tarquino" userId="619fa53a89ad4d51" providerId="LiveId" clId="{7EB37E31-EF5E-4BCC-BF63-A19A62539991}" dt="2026-04-07T19:23:10.589" v="348" actId="20577"/>
+        <pc:sldMkLst>
+          <pc:docMk/>
+          <pc:sldMk cId="3681795694" sldId="273"/>
+        </pc:sldMkLst>
+      </pc:sldChg>
+      <pc:sldChg chg="modNotesTx">
+        <pc:chgData name="Juan Pablo Tarquino" userId="619fa53a89ad4d51" providerId="LiveId" clId="{7EB37E31-EF5E-4BCC-BF63-A19A62539991}" dt="2026-04-10T21:05:09.723" v="509" actId="33524"/>
+        <pc:sldMkLst>
+          <pc:docMk/>
+          <pc:sldMk cId="276874375" sldId="274"/>
+        </pc:sldMkLst>
+      </pc:sldChg>
+      <pc:sldChg chg="addSp delSp modSp add del mod setBg delDesignElem">
+        <pc:chgData name="Juan Pablo Tarquino" userId="619fa53a89ad4d51" providerId="LiveId" clId="{7EB37E31-EF5E-4BCC-BF63-A19A62539991}" dt="2026-04-07T15:48:27.158" v="347" actId="14100"/>
+        <pc:sldMkLst>
+          <pc:docMk/>
+          <pc:sldMk cId="3052380813" sldId="277"/>
+        </pc:sldMkLst>
+        <pc:picChg chg="add mod">
+          <ac:chgData name="Juan Pablo Tarquino" userId="619fa53a89ad4d51" providerId="LiveId" clId="{7EB37E31-EF5E-4BCC-BF63-A19A62539991}" dt="2026-04-07T15:48:27.158" v="347" actId="14100"/>
+          <ac:picMkLst>
+            <pc:docMk/>
+            <pc:sldMk cId="3052380813" sldId="277"/>
+            <ac:picMk id="4" creationId="{EDF94011-DA43-88DA-9A42-4EF12162BD6D}"/>
+          </ac:picMkLst>
+        </pc:picChg>
+      </pc:sldChg>
+      <pc:sldChg chg="addSp delSp modSp add mod">
+        <pc:chgData name="Juan Pablo Tarquino" userId="619fa53a89ad4d51" providerId="LiveId" clId="{7EB37E31-EF5E-4BCC-BF63-A19A62539991}" dt="2026-04-10T21:03:36.846" v="489" actId="14100"/>
+        <pc:sldMkLst>
+          <pc:docMk/>
+          <pc:sldMk cId="2558385719" sldId="278"/>
+        </pc:sldMkLst>
+        <pc:picChg chg="add mod">
+          <ac:chgData name="Juan Pablo Tarquino" userId="619fa53a89ad4d51" providerId="LiveId" clId="{7EB37E31-EF5E-4BCC-BF63-A19A62539991}" dt="2026-04-10T21:03:36.846" v="489" actId="14100"/>
+          <ac:picMkLst>
+            <pc:docMk/>
+            <pc:sldMk cId="2558385719" sldId="278"/>
+            <ac:picMk id="4" creationId="{B229868C-0DCF-F23B-B5B6-F16402163C62}"/>
+          </ac:picMkLst>
+        </pc:picChg>
+        <pc:picChg chg="del">
+          <ac:chgData name="Juan Pablo Tarquino" userId="619fa53a89ad4d51" providerId="LiveId" clId="{7EB37E31-EF5E-4BCC-BF63-A19A62539991}" dt="2026-04-10T21:02:50.938" v="483" actId="478"/>
+          <ac:picMkLst>
+            <pc:docMk/>
+            <pc:sldMk cId="2558385719" sldId="278"/>
+            <ac:picMk id="5" creationId="{D35BD234-D6E7-4703-3DB1-F604681E72EB}"/>
+          </ac:picMkLst>
+        </pc:picChg>
+      </pc:sldChg>
+    </pc:docChg>
+  </pc:docChgLst>
+  <pc:docChgLst>
+    <pc:chgData name="Juan Pablo Tarquino" userId="619fa53a89ad4d51" providerId="Windows Live" clId="Web-{FC6B2FF4-71B7-4DFB-083C-5CB76D271A57}"/>
+    <pc:docChg chg="modSld">
+      <pc:chgData name="Juan Pablo Tarquino" userId="619fa53a89ad4d51" providerId="Windows Live" clId="Web-{FC6B2FF4-71B7-4DFB-083C-5CB76D271A57}" dt="2026-03-14T19:27:56.068" v="980"/>
+      <pc:docMkLst>
+        <pc:docMk/>
+      </pc:docMkLst>
+      <pc:sldChg chg="modNotes">
+        <pc:chgData name="Juan Pablo Tarquino" userId="619fa53a89ad4d51" providerId="Windows Live" clId="Web-{FC6B2FF4-71B7-4DFB-083C-5CB76D271A57}" dt="2026-03-14T19:19:12.761" v="288"/>
+        <pc:sldMkLst>
+          <pc:docMk/>
+          <pc:sldMk cId="828761936" sldId="262"/>
+        </pc:sldMkLst>
+      </pc:sldChg>
+      <pc:sldChg chg="modSp modNotes">
+        <pc:chgData name="Juan Pablo Tarquino" userId="619fa53a89ad4d51" providerId="Windows Live" clId="Web-{FC6B2FF4-71B7-4DFB-083C-5CB76D271A57}" dt="2026-03-14T19:27:56.068" v="980"/>
+        <pc:sldMkLst>
+          <pc:docMk/>
+          <pc:sldMk cId="3248658166" sldId="269"/>
+        </pc:sldMkLst>
+        <pc:spChg chg="mod">
+          <ac:chgData name="Juan Pablo Tarquino" userId="619fa53a89ad4d51" providerId="Windows Live" clId="Web-{FC6B2FF4-71B7-4DFB-083C-5CB76D271A57}" dt="2026-03-14T19:19:29.168" v="297" actId="20577"/>
+          <ac:spMkLst>
+            <pc:docMk/>
+            <pc:sldMk cId="3248658166" sldId="269"/>
+            <ac:spMk id="3" creationId="{DFBFC627-69DC-AD8A-E1DA-A63C6D11291E}"/>
+          </ac:spMkLst>
+        </pc:spChg>
+      </pc:sldChg>
+    </pc:docChg>
+  </pc:docChgLst>
   <pc:docChgLst>
     <pc:chgData name="Juan Pablo Tarquino" userId="619fa53a89ad4d51" providerId="Windows Live" clId="Web-{110A16D8-9303-E760-0BAF-AA0EEC9ECBB2}"/>
     <pc:docChg chg="modSld">
@@ -158,22 +413,6 @@
       </pc:docMkLst>
       <pc:sldChg chg="modNotes">
         <pc:chgData name="Juan Pablo Tarquino" userId="619fa53a89ad4d51" providerId="Windows Live" clId="Web-{110A16D8-9303-E760-0BAF-AA0EEC9ECBB2}" dt="2026-03-14T19:29:03.534" v="51"/>
-        <pc:sldMkLst>
-          <pc:docMk/>
-          <pc:sldMk cId="3248658166" sldId="269"/>
-        </pc:sldMkLst>
-      </pc:sldChg>
-    </pc:docChg>
-  </pc:docChgLst>
-  <pc:docChgLst>
-    <pc:chgData name="Juan Pablo Tarquino" userId="619fa53a89ad4d51" providerId="Windows Live" clId="Web-{50598D2B-965E-8C84-681F-541CC65C532D}"/>
-    <pc:docChg chg="modSld">
-      <pc:chgData name="Juan Pablo Tarquino" userId="619fa53a89ad4d51" providerId="Windows Live" clId="Web-{50598D2B-965E-8C84-681F-541CC65C532D}" dt="2026-03-15T01:15:24.930" v="74"/>
-      <pc:docMkLst>
-        <pc:docMk/>
-      </pc:docMkLst>
-      <pc:sldChg chg="modNotes">
-        <pc:chgData name="Juan Pablo Tarquino" userId="619fa53a89ad4d51" providerId="Windows Live" clId="Web-{50598D2B-965E-8C84-681F-541CC65C532D}" dt="2026-03-15T01:15:24.930" v="74"/>
         <pc:sldMkLst>
           <pc:docMk/>
           <pc:sldMk cId="3248658166" sldId="269"/>
@@ -246,211 +485,6 @@
           <pc:docMk/>
           <pc:sldMk cId="3943072546" sldId="276"/>
         </pc:sldMkLst>
-      </pc:sldChg>
-    </pc:docChg>
-  </pc:docChgLst>
-  <pc:docChgLst>
-    <pc:chgData name="Juan Pablo Tarquino" userId="619fa53a89ad4d51" providerId="LiveId" clId="{7EB37E31-EF5E-4BCC-BF63-A19A62539991}"/>
-    <pc:docChg chg="undo custSel addSld delSld modSld sldOrd">
-      <pc:chgData name="Juan Pablo Tarquino" userId="619fa53a89ad4d51" providerId="LiveId" clId="{7EB37E31-EF5E-4BCC-BF63-A19A62539991}" dt="2026-04-10T21:04:34.423" v="506" actId="1076"/>
-      <pc:docMkLst>
-        <pc:docMk/>
-      </pc:docMkLst>
-      <pc:sldChg chg="addSp modSp mod ord">
-        <pc:chgData name="Juan Pablo Tarquino" userId="619fa53a89ad4d51" providerId="LiveId" clId="{7EB37E31-EF5E-4BCC-BF63-A19A62539991}" dt="2026-04-10T21:03:13.670" v="485"/>
-        <pc:sldMkLst>
-          <pc:docMk/>
-          <pc:sldMk cId="3411481011" sldId="256"/>
-        </pc:sldMkLst>
-        <pc:picChg chg="add mod">
-          <ac:chgData name="Juan Pablo Tarquino" userId="619fa53a89ad4d51" providerId="LiveId" clId="{7EB37E31-EF5E-4BCC-BF63-A19A62539991}" dt="2026-04-10T21:02:40.874" v="481"/>
-          <ac:picMkLst>
-            <pc:docMk/>
-            <pc:sldMk cId="3411481011" sldId="256"/>
-            <ac:picMk id="5" creationId="{D18BEF6B-12D5-86DC-65B0-0992A8BB507F}"/>
-          </ac:picMkLst>
-        </pc:picChg>
-      </pc:sldChg>
-      <pc:sldChg chg="modSp mod">
-        <pc:chgData name="Juan Pablo Tarquino" userId="619fa53a89ad4d51" providerId="LiveId" clId="{7EB37E31-EF5E-4BCC-BF63-A19A62539991}" dt="2026-04-07T15:43:31.049" v="319" actId="20577"/>
-        <pc:sldMkLst>
-          <pc:docMk/>
-          <pc:sldMk cId="3085556934" sldId="257"/>
-        </pc:sldMkLst>
-        <pc:spChg chg="mod">
-          <ac:chgData name="Juan Pablo Tarquino" userId="619fa53a89ad4d51" providerId="LiveId" clId="{7EB37E31-EF5E-4BCC-BF63-A19A62539991}" dt="2026-04-07T15:43:31.049" v="319" actId="20577"/>
-          <ac:spMkLst>
-            <pc:docMk/>
-            <pc:sldMk cId="3085556934" sldId="257"/>
-            <ac:spMk id="3" creationId="{598D7916-63CE-FB74-076E-E44A9B1B59C9}"/>
-          </ac:spMkLst>
-        </pc:spChg>
-      </pc:sldChg>
-      <pc:sldChg chg="modNotesTx">
-        <pc:chgData name="Juan Pablo Tarquino" userId="619fa53a89ad4d51" providerId="LiveId" clId="{7EB37E31-EF5E-4BCC-BF63-A19A62539991}" dt="2026-03-31T02:01:54.209" v="0" actId="313"/>
-        <pc:sldMkLst>
-          <pc:docMk/>
-          <pc:sldMk cId="96671113" sldId="258"/>
-        </pc:sldMkLst>
-      </pc:sldChg>
-      <pc:sldChg chg="modSp mod modNotesTx">
-        <pc:chgData name="Juan Pablo Tarquino" userId="619fa53a89ad4d51" providerId="LiveId" clId="{7EB37E31-EF5E-4BCC-BF63-A19A62539991}" dt="2026-04-07T15:45:55.481" v="336" actId="313"/>
-        <pc:sldMkLst>
-          <pc:docMk/>
-          <pc:sldMk cId="828761936" sldId="262"/>
-        </pc:sldMkLst>
-        <pc:spChg chg="mod">
-          <ac:chgData name="Juan Pablo Tarquino" userId="619fa53a89ad4d51" providerId="LiveId" clId="{7EB37E31-EF5E-4BCC-BF63-A19A62539991}" dt="2026-04-07T15:45:27.574" v="321" actId="20577"/>
-          <ac:spMkLst>
-            <pc:docMk/>
-            <pc:sldMk cId="828761936" sldId="262"/>
-            <ac:spMk id="3" creationId="{19714051-6D8A-B5CC-084A-649ADEC99D71}"/>
-          </ac:spMkLst>
-        </pc:spChg>
-      </pc:sldChg>
-      <pc:sldChg chg="addSp delSp modSp add mod setBg delDesignElem">
-        <pc:chgData name="Juan Pablo Tarquino" userId="619fa53a89ad4d51" providerId="LiveId" clId="{7EB37E31-EF5E-4BCC-BF63-A19A62539991}" dt="2026-04-10T21:04:34.423" v="506" actId="1076"/>
-        <pc:sldMkLst>
-          <pc:docMk/>
-          <pc:sldMk cId="462932405" sldId="266"/>
-        </pc:sldMkLst>
-        <pc:spChg chg="mod">
-          <ac:chgData name="Juan Pablo Tarquino" userId="619fa53a89ad4d51" providerId="LiveId" clId="{7EB37E31-EF5E-4BCC-BF63-A19A62539991}" dt="2026-04-10T21:04:01.228" v="501" actId="5793"/>
-          <ac:spMkLst>
-            <pc:docMk/>
-            <pc:sldMk cId="462932405" sldId="266"/>
-            <ac:spMk id="3" creationId="{33A1B896-9F0D-736F-E7D8-94F4BE6C1423}"/>
-          </ac:spMkLst>
-        </pc:spChg>
-        <pc:picChg chg="add mod">
-          <ac:chgData name="Juan Pablo Tarquino" userId="619fa53a89ad4d51" providerId="LiveId" clId="{7EB37E31-EF5E-4BCC-BF63-A19A62539991}" dt="2026-04-10T21:04:34.423" v="506" actId="1076"/>
-          <ac:picMkLst>
-            <pc:docMk/>
-            <pc:sldMk cId="462932405" sldId="266"/>
-            <ac:picMk id="5" creationId="{D2ADC734-DAC4-1697-38F8-97E3F531D423}"/>
-          </ac:picMkLst>
-        </pc:picChg>
-      </pc:sldChg>
-      <pc:sldChg chg="modSp mod">
-        <pc:chgData name="Juan Pablo Tarquino" userId="619fa53a89ad4d51" providerId="LiveId" clId="{7EB37E31-EF5E-4BCC-BF63-A19A62539991}" dt="2026-04-07T19:44:00.173" v="479" actId="403"/>
-        <pc:sldMkLst>
-          <pc:docMk/>
-          <pc:sldMk cId="2381318140" sldId="267"/>
-        </pc:sldMkLst>
-        <pc:spChg chg="mod">
-          <ac:chgData name="Juan Pablo Tarquino" userId="619fa53a89ad4d51" providerId="LiveId" clId="{7EB37E31-EF5E-4BCC-BF63-A19A62539991}" dt="2026-04-07T19:44:00.173" v="479" actId="403"/>
-          <ac:spMkLst>
-            <pc:docMk/>
-            <pc:sldMk cId="2381318140" sldId="267"/>
-            <ac:spMk id="3" creationId="{AAE76935-EB5F-674B-F17B-F1D882ED1694}"/>
-          </ac:spMkLst>
-        </pc:spChg>
-      </pc:sldChg>
-      <pc:sldChg chg="modNotesTx">
-        <pc:chgData name="Juan Pablo Tarquino" userId="619fa53a89ad4d51" providerId="LiveId" clId="{7EB37E31-EF5E-4BCC-BF63-A19A62539991}" dt="2026-04-07T00:57:00.376" v="312" actId="313"/>
-        <pc:sldMkLst>
-          <pc:docMk/>
-          <pc:sldMk cId="3174467460" sldId="270"/>
-        </pc:sldMkLst>
-      </pc:sldChg>
-      <pc:sldChg chg="addSp modSp mod">
-        <pc:chgData name="Juan Pablo Tarquino" userId="619fa53a89ad4d51" providerId="LiveId" clId="{7EB37E31-EF5E-4BCC-BF63-A19A62539991}" dt="2026-04-07T19:37:06.046" v="359" actId="20577"/>
-        <pc:sldMkLst>
-          <pc:docMk/>
-          <pc:sldMk cId="1528468167" sldId="272"/>
-        </pc:sldMkLst>
-        <pc:spChg chg="mod">
-          <ac:chgData name="Juan Pablo Tarquino" userId="619fa53a89ad4d51" providerId="LiveId" clId="{7EB37E31-EF5E-4BCC-BF63-A19A62539991}" dt="2026-04-07T19:37:06.046" v="359" actId="20577"/>
-          <ac:spMkLst>
-            <pc:docMk/>
-            <pc:sldMk cId="1528468167" sldId="272"/>
-            <ac:spMk id="3" creationId="{9482E84A-BDAD-C72C-F004-13D054A6BB29}"/>
-          </ac:spMkLst>
-        </pc:spChg>
-        <pc:picChg chg="add mod">
-          <ac:chgData name="Juan Pablo Tarquino" userId="619fa53a89ad4d51" providerId="LiveId" clId="{7EB37E31-EF5E-4BCC-BF63-A19A62539991}" dt="2026-04-07T15:42:38.324" v="318" actId="1076"/>
-          <ac:picMkLst>
-            <pc:docMk/>
-            <pc:sldMk cId="1528468167" sldId="272"/>
-            <ac:picMk id="5" creationId="{14FE3455-90A4-7EA8-C301-229D17616FE0}"/>
-          </ac:picMkLst>
-        </pc:picChg>
-      </pc:sldChg>
-      <pc:sldChg chg="modNotesTx">
-        <pc:chgData name="Juan Pablo Tarquino" userId="619fa53a89ad4d51" providerId="LiveId" clId="{7EB37E31-EF5E-4BCC-BF63-A19A62539991}" dt="2026-04-07T19:23:10.589" v="348" actId="20577"/>
-        <pc:sldMkLst>
-          <pc:docMk/>
-          <pc:sldMk cId="3681795694" sldId="273"/>
-        </pc:sldMkLst>
-      </pc:sldChg>
-      <pc:sldChg chg="addSp delSp modSp add del mod setBg delDesignElem">
-        <pc:chgData name="Juan Pablo Tarquino" userId="619fa53a89ad4d51" providerId="LiveId" clId="{7EB37E31-EF5E-4BCC-BF63-A19A62539991}" dt="2026-04-07T15:48:27.158" v="347" actId="14100"/>
-        <pc:sldMkLst>
-          <pc:docMk/>
-          <pc:sldMk cId="3052380813" sldId="277"/>
-        </pc:sldMkLst>
-        <pc:picChg chg="add mod">
-          <ac:chgData name="Juan Pablo Tarquino" userId="619fa53a89ad4d51" providerId="LiveId" clId="{7EB37E31-EF5E-4BCC-BF63-A19A62539991}" dt="2026-04-07T15:48:27.158" v="347" actId="14100"/>
-          <ac:picMkLst>
-            <pc:docMk/>
-            <pc:sldMk cId="3052380813" sldId="277"/>
-            <ac:picMk id="4" creationId="{EDF94011-DA43-88DA-9A42-4EF12162BD6D}"/>
-          </ac:picMkLst>
-        </pc:picChg>
-      </pc:sldChg>
-      <pc:sldChg chg="addSp delSp modSp add mod">
-        <pc:chgData name="Juan Pablo Tarquino" userId="619fa53a89ad4d51" providerId="LiveId" clId="{7EB37E31-EF5E-4BCC-BF63-A19A62539991}" dt="2026-04-10T21:03:36.846" v="489" actId="14100"/>
-        <pc:sldMkLst>
-          <pc:docMk/>
-          <pc:sldMk cId="2558385719" sldId="278"/>
-        </pc:sldMkLst>
-        <pc:picChg chg="add mod">
-          <ac:chgData name="Juan Pablo Tarquino" userId="619fa53a89ad4d51" providerId="LiveId" clId="{7EB37E31-EF5E-4BCC-BF63-A19A62539991}" dt="2026-04-10T21:03:36.846" v="489" actId="14100"/>
-          <ac:picMkLst>
-            <pc:docMk/>
-            <pc:sldMk cId="2558385719" sldId="278"/>
-            <ac:picMk id="4" creationId="{B229868C-0DCF-F23B-B5B6-F16402163C62}"/>
-          </ac:picMkLst>
-        </pc:picChg>
-        <pc:picChg chg="del">
-          <ac:chgData name="Juan Pablo Tarquino" userId="619fa53a89ad4d51" providerId="LiveId" clId="{7EB37E31-EF5E-4BCC-BF63-A19A62539991}" dt="2026-04-10T21:02:50.938" v="483" actId="478"/>
-          <ac:picMkLst>
-            <pc:docMk/>
-            <pc:sldMk cId="2558385719" sldId="278"/>
-            <ac:picMk id="5" creationId="{D35BD234-D6E7-4703-3DB1-F604681E72EB}"/>
-          </ac:picMkLst>
-        </pc:picChg>
-      </pc:sldChg>
-    </pc:docChg>
-  </pc:docChgLst>
-  <pc:docChgLst>
-    <pc:chgData name="Juan Pablo Tarquino" userId="619fa53a89ad4d51" providerId="Windows Live" clId="Web-{FC6B2FF4-71B7-4DFB-083C-5CB76D271A57}"/>
-    <pc:docChg chg="modSld">
-      <pc:chgData name="Juan Pablo Tarquino" userId="619fa53a89ad4d51" providerId="Windows Live" clId="Web-{FC6B2FF4-71B7-4DFB-083C-5CB76D271A57}" dt="2026-03-14T19:27:56.068" v="980"/>
-      <pc:docMkLst>
-        <pc:docMk/>
-      </pc:docMkLst>
-      <pc:sldChg chg="modNotes">
-        <pc:chgData name="Juan Pablo Tarquino" userId="619fa53a89ad4d51" providerId="Windows Live" clId="Web-{FC6B2FF4-71B7-4DFB-083C-5CB76D271A57}" dt="2026-03-14T19:19:12.761" v="288"/>
-        <pc:sldMkLst>
-          <pc:docMk/>
-          <pc:sldMk cId="828761936" sldId="262"/>
-        </pc:sldMkLst>
-      </pc:sldChg>
-      <pc:sldChg chg="modSp modNotes">
-        <pc:chgData name="Juan Pablo Tarquino" userId="619fa53a89ad4d51" providerId="Windows Live" clId="Web-{FC6B2FF4-71B7-4DFB-083C-5CB76D271A57}" dt="2026-03-14T19:27:56.068" v="980"/>
-        <pc:sldMkLst>
-          <pc:docMk/>
-          <pc:sldMk cId="3248658166" sldId="269"/>
-        </pc:sldMkLst>
-        <pc:spChg chg="mod">
-          <ac:chgData name="Juan Pablo Tarquino" userId="619fa53a89ad4d51" providerId="Windows Live" clId="Web-{FC6B2FF4-71B7-4DFB-083C-5CB76D271A57}" dt="2026-03-14T19:19:29.168" v="297" actId="20577"/>
-          <ac:spMkLst>
-            <pc:docMk/>
-            <pc:sldMk cId="3248658166" sldId="269"/>
-            <ac:spMk id="3" creationId="{DFBFC627-69DC-AD8A-E1DA-A63C6D11291E}"/>
-          </ac:spMkLst>
-        </pc:spChg>
       </pc:sldChg>
     </pc:docChg>
   </pc:docChgLst>
@@ -3375,7 +3409,7 @@
           <a:p>
             <a:fld id="{23F0FD94-F7CE-4D08-B49E-5E530976B685}" type="datetimeFigureOut">
               <a:rPr lang="en-US" smtClean="0"/>
-              <a:t>4/10/2026</a:t>
+              <a:t>4/11/2026</a:t>
             </a:fld>
             <a:endParaRPr lang="en-US"/>
           </a:p>
@@ -3949,35 +3983,19 @@
           <a:p>
             <a:r>
               <a:rPr lang="en-US" dirty="0"/>
-              <a:t>Alexandria starts looking for tools that can assist the business units with coming with solutions to their needs. She finds many applications and </a:t>
-            </a:r>
-            <a:r>
-              <a:rPr lang="en-US" dirty="0" err="1"/>
-              <a:t>frmeworks</a:t>
-            </a:r>
+              <a:t>Alexandria starts looking for tools that can assist the business units with coming with solutions to their needs. She finds many applications and frameworks whose purpose is to define and execute business. </a:t>
+            </a:r>
+          </a:p>
+          <a:p>
             <a:r>
               <a:rPr lang="en-US" dirty="0"/>
-              <a:t> whose purpose is to define and execute business. </a:t>
+              <a:t>A lot of the software out there for business rules is actually pretty mature, with frameworks such as Drools, and Camunda’s DNN. However, as good as those tools are, they are not a good fit for her org because most of those tools are Java based and would require the business units to learn new paradigms and syntaxes.</a:t>
             </a:r>
           </a:p>
           <a:p>
             <a:r>
               <a:rPr lang="en-US" dirty="0"/>
-              <a:t>A lot of the software out there for business rules is actually pretty mature, with </a:t>
-            </a:r>
-            <a:r>
-              <a:rPr lang="en-US" dirty="0" err="1"/>
-              <a:t>frameowkrs</a:t>
-            </a:r>
-            <a:r>
-              <a:rPr lang="en-US" dirty="0"/>
-              <a:t> such as Drools, and Camunda’s DNN. However, as good as those tools are, they are not a good fit for her org because most of those tools are Java based and would require the business units to learn new paradigms and syntaxes.</a:t>
-            </a:r>
-          </a:p>
-          <a:p>
-            <a:r>
-              <a:rPr lang="en-US" dirty="0"/>
-              <a:t>Alexandria does find that Microsoft has an Open Source engine for </a:t>
+              <a:t>Alexandria does find that Microsoft has an Open-Source engine for </a:t>
             </a:r>
             <a:r>
               <a:rPr lang="en-US" dirty="0" err="1"/>
@@ -4201,7 +4219,7 @@
           <a:p>
             <a:fld id="{A3FADD39-AB8A-4278-99D9-40CD8D745BA1}" type="slidenum">
               <a:rPr lang="en-US" smtClean="0"/>
-              <a:t>13</a:t>
+              <a:t>12</a:t>
             </a:fld>
             <a:endParaRPr lang="en-US"/>
           </a:p>
@@ -4356,7 +4374,7 @@
           <a:p>
             <a:fld id="{A3FADD39-AB8A-4278-99D9-40CD8D745BA1}" type="slidenum">
               <a:rPr lang="en-US" smtClean="0"/>
-              <a:t>15</a:t>
+              <a:t>13</a:t>
             </a:fld>
             <a:endParaRPr lang="en-US"/>
           </a:p>
@@ -4630,23 +4648,7 @@
                 <a:ea typeface="Calibri"/>
                 <a:cs typeface="Calibri"/>
               </a:rPr>
-              <a:t>", syntax is verified. Invalid expressions will throw an error (show example). Please note what PowerApps could support might not necessarily be what the .NET </a:t>
-            </a:r>
-            <a:r>
-              <a:rPr lang="en-US" dirty="0" err="1">
-                <a:latin typeface="Calibri"/>
-                <a:ea typeface="Calibri"/>
-                <a:cs typeface="Calibri"/>
-              </a:rPr>
-              <a:t>inptreter</a:t>
-            </a:r>
-            <a:r>
-              <a:rPr lang="en-US" dirty="0">
-                <a:latin typeface="Calibri"/>
-                <a:ea typeface="Calibri"/>
-                <a:cs typeface="Calibri"/>
-              </a:rPr>
-              <a:t> can support. Microsoft is building a formal definition document in their repo here, but it is a work in progress as they are taking the PowerApps docs and generalizing them.</a:t>
+              <a:t>", syntax is verified. Invalid expressions will throw an error (show example). Please note what PowerApps could support might not necessarily be what the .NET interpreter can support. Microsoft is building a formal definition document in their repo here, but it is a work in progress as they are taking the PowerApps docs and generalizing them.</a:t>
             </a:r>
           </a:p>
           <a:p>
@@ -4759,23 +4761,7 @@
                 <a:ea typeface="Calibri"/>
                 <a:cs typeface="Calibri"/>
               </a:rPr>
-              <a:t>()” to get its textual </a:t>
-            </a:r>
-            <a:r>
-              <a:rPr lang="en-US" dirty="0" err="1">
-                <a:latin typeface="Calibri"/>
-                <a:ea typeface="Calibri"/>
-                <a:cs typeface="Calibri"/>
-              </a:rPr>
-              <a:t>representaion</a:t>
-            </a:r>
-            <a:r>
-              <a:rPr lang="en-US" dirty="0">
-                <a:latin typeface="Calibri"/>
-                <a:ea typeface="Calibri"/>
-                <a:cs typeface="Calibri"/>
-              </a:rPr>
-              <a:t>. You can use </a:t>
+              <a:t>()” to get its textual representation. You can use </a:t>
             </a:r>
             <a:r>
               <a:rPr lang="en-US" dirty="0" err="1">
@@ -4907,7 +4893,7 @@
           <a:p>
             <a:fld id="{A3FADD39-AB8A-4278-99D9-40CD8D745BA1}" type="slidenum">
               <a:rPr lang="en-US" smtClean="0"/>
-              <a:t>16</a:t>
+              <a:t>14</a:t>
             </a:fld>
             <a:endParaRPr lang="en-US"/>
           </a:p>
@@ -5073,15 +5059,7 @@
             </a:pPr>
             <a:r>
               <a:rPr lang="en-US" dirty="0"/>
-              <a:t>Need to implement the “Execute” method. Notice this is not an override method. The engine will look it up by magic name. The method must return the </a:t>
-            </a:r>
-            <a:r>
-              <a:rPr lang="en-US" dirty="0" err="1"/>
-              <a:t>generica</a:t>
-            </a:r>
-            <a:r>
-              <a:rPr lang="en-US" dirty="0"/>
-              <a:t> </a:t>
+              <a:t>Need to implement the “Execute” method. Notice this is not an override method. The engine will look it up by magic name. The method must return the generic </a:t>
             </a:r>
             <a:r>
               <a:rPr lang="en-US" dirty="0" err="1"/>
@@ -5429,7 +5407,55 @@
                 <a:ea typeface="+mn-ea"/>
                 <a:cs typeface="+mn-cs"/>
               </a:rPr>
-              <a:t>Same as before, but use Untyped type for the return value parameter in the base constructor. </a:t>
+              <a:t>Same as before, but use a </a:t>
+            </a:r>
+            <a:r>
+              <a:rPr lang="en-US" sz="1200" b="0" kern="1200" dirty="0" err="1">
+                <a:solidFill>
+                  <a:schemeClr val="tx1"/>
+                </a:solidFill>
+                <a:effectLst/>
+                <a:latin typeface="+mn-lt"/>
+                <a:ea typeface="+mn-ea"/>
+                <a:cs typeface="+mn-cs"/>
+              </a:rPr>
+              <a:t>RecordType</a:t>
+            </a:r>
+            <a:r>
+              <a:rPr lang="en-US" sz="1200" b="0" kern="1200" dirty="0">
+                <a:solidFill>
+                  <a:schemeClr val="tx1"/>
+                </a:solidFill>
+                <a:effectLst/>
+                <a:latin typeface="+mn-lt"/>
+                <a:ea typeface="+mn-ea"/>
+                <a:cs typeface="+mn-cs"/>
+              </a:rPr>
+              <a:t> for the return value parameter in the base constructor. You must build the </a:t>
+            </a:r>
+            <a:r>
+              <a:rPr lang="en-US" sz="1200" b="0" kern="1200" dirty="0" err="1">
+                <a:solidFill>
+                  <a:schemeClr val="tx1"/>
+                </a:solidFill>
+                <a:effectLst/>
+                <a:latin typeface="+mn-lt"/>
+                <a:ea typeface="+mn-ea"/>
+                <a:cs typeface="+mn-cs"/>
+              </a:rPr>
+              <a:t>RecordType</a:t>
+            </a:r>
+            <a:r>
+              <a:rPr lang="en-US" sz="1200" b="0" kern="1200" dirty="0">
+                <a:solidFill>
+                  <a:schemeClr val="tx1"/>
+                </a:solidFill>
+                <a:effectLst/>
+                <a:latin typeface="+mn-lt"/>
+                <a:ea typeface="+mn-ea"/>
+                <a:cs typeface="+mn-cs"/>
+              </a:rPr>
+              <a:t>.</a:t>
             </a:r>
           </a:p>
           <a:p>
@@ -6123,10 +6149,10 @@
                 <a:ea typeface="+mn-ea"/>
                 <a:cs typeface="+mn-cs"/>
               </a:rPr>
-              <a:t>So far he have seen functions that operate </a:t>
-            </a:r>
-            <a:r>
-              <a:rPr lang="en-US" sz="1200" b="0" kern="1200" dirty="0" err="1">
+              <a:t>So far he have seen functions that operate synchronously, what if you need async? First, I would like to give a general warning that is based on my experience and the learning points from others: when it comes to business logic, if your code (whether is C# or something else) needs async operations, you might be introducing something that does not belong to the business logic of your app. Async code </a:t>
+            </a:r>
+            <a:r>
+              <a:rPr lang="en-US" sz="1200" b="0" i="1" kern="1200" dirty="0">
                 <a:solidFill>
                   <a:schemeClr val="tx1"/>
                 </a:solidFill>
@@ -6135,55 +6161,7 @@
                 <a:ea typeface="+mn-ea"/>
                 <a:cs typeface="+mn-cs"/>
               </a:rPr>
-              <a:t>synchrounsly</a:t>
-            </a:r>
-            <a:r>
-              <a:rPr lang="en-US" sz="1200" b="0" kern="1200" dirty="0">
-                <a:solidFill>
-                  <a:schemeClr val="tx1"/>
-                </a:solidFill>
-                <a:effectLst/>
-                <a:latin typeface="+mn-lt"/>
-                <a:ea typeface="+mn-ea"/>
-                <a:cs typeface="+mn-cs"/>
-              </a:rPr>
-              <a:t>, what if you need async? First, I would like to give a general warning that is based on my experience and the learning points from others: when it comes to business logic, if your code (whether is C# </a:t>
-            </a:r>
-            <a:r>
-              <a:rPr lang="en-US" sz="1200" b="0" kern="1200">
-                <a:solidFill>
-                  <a:schemeClr val="tx1"/>
-                </a:solidFill>
-                <a:effectLst/>
-                <a:latin typeface="+mn-lt"/>
-                <a:ea typeface="+mn-ea"/>
-                <a:cs typeface="+mn-cs"/>
-              </a:rPr>
-              <a:t>or something </a:t>
-            </a:r>
-            <a:r>
-              <a:rPr lang="en-US" sz="1200" b="0" kern="1200" dirty="0">
-                <a:solidFill>
-                  <a:schemeClr val="tx1"/>
-                </a:solidFill>
-                <a:effectLst/>
-                <a:latin typeface="+mn-lt"/>
-                <a:ea typeface="+mn-ea"/>
-                <a:cs typeface="+mn-cs"/>
-              </a:rPr>
-              <a:t>else) needs async operations, you might be introducing something that does not belong to the business logic of your app. Async code </a:t>
-            </a:r>
-            <a:r>
-              <a:rPr lang="en-US" sz="1200" b="0" i="1" kern="1200" dirty="0" err="1">
-                <a:solidFill>
-                  <a:schemeClr val="tx1"/>
-                </a:solidFill>
-                <a:effectLst/>
-                <a:latin typeface="+mn-lt"/>
-                <a:ea typeface="+mn-ea"/>
-                <a:cs typeface="+mn-cs"/>
-              </a:rPr>
-              <a:t>susually</a:t>
+              <a:t>usually</a:t>
             </a:r>
             <a:r>
               <a:rPr lang="en-US" sz="1200" b="0" i="0" kern="1200" dirty="0">
@@ -6195,103 +6173,7 @@
                 <a:ea typeface="+mn-ea"/>
                 <a:cs typeface="+mn-cs"/>
               </a:rPr>
-              <a:t> (but not </a:t>
-            </a:r>
-            <a:r>
-              <a:rPr lang="en-US" sz="1200" b="0" i="0" kern="1200" dirty="0" err="1">
-                <a:solidFill>
-                  <a:schemeClr val="tx1"/>
-                </a:solidFill>
-                <a:effectLst/>
-                <a:latin typeface="+mn-lt"/>
-                <a:ea typeface="+mn-ea"/>
-                <a:cs typeface="+mn-cs"/>
-              </a:rPr>
-              <a:t>walways</a:t>
-            </a:r>
-            <a:r>
-              <a:rPr lang="en-US" sz="1200" b="0" i="0" kern="1200" dirty="0">
-                <a:solidFill>
-                  <a:schemeClr val="tx1"/>
-                </a:solidFill>
-                <a:effectLst/>
-                <a:latin typeface="+mn-lt"/>
-                <a:ea typeface="+mn-ea"/>
-                <a:cs typeface="+mn-cs"/>
-              </a:rPr>
-              <a:t>) mean trying to reach to an external dependency. We want our business code to be </a:t>
-            </a:r>
-            <a:r>
-              <a:rPr lang="en-US" sz="1200" b="0" i="0" kern="1200" dirty="0" err="1">
-                <a:solidFill>
-                  <a:schemeClr val="tx1"/>
-                </a:solidFill>
-                <a:effectLst/>
-                <a:latin typeface="+mn-lt"/>
-                <a:ea typeface="+mn-ea"/>
-                <a:cs typeface="+mn-cs"/>
-              </a:rPr>
-              <a:t>dependcy</a:t>
-            </a:r>
-            <a:r>
-              <a:rPr lang="en-US" sz="1200" b="0" i="0" kern="1200" dirty="0">
-                <a:solidFill>
-                  <a:schemeClr val="tx1"/>
-                </a:solidFill>
-                <a:effectLst/>
-                <a:latin typeface="+mn-lt"/>
-                <a:ea typeface="+mn-ea"/>
-                <a:cs typeface="+mn-cs"/>
-              </a:rPr>
-              <a:t> free in the sense that any input comes from a </a:t>
-            </a:r>
-            <a:r>
-              <a:rPr lang="en-US" sz="1200" b="0" i="0" kern="1200" dirty="0" err="1">
-                <a:solidFill>
-                  <a:schemeClr val="tx1"/>
-                </a:solidFill>
-                <a:effectLst/>
-                <a:latin typeface="+mn-lt"/>
-                <a:ea typeface="+mn-ea"/>
-                <a:cs typeface="+mn-cs"/>
-              </a:rPr>
-              <a:t>regularinput</a:t>
-            </a:r>
-            <a:r>
-              <a:rPr lang="en-US" sz="1200" b="0" i="0" kern="1200" dirty="0">
-                <a:solidFill>
-                  <a:schemeClr val="tx1"/>
-                </a:solidFill>
-                <a:effectLst/>
-                <a:latin typeface="+mn-lt"/>
-                <a:ea typeface="+mn-ea"/>
-                <a:cs typeface="+mn-cs"/>
-              </a:rPr>
-              <a:t> parameter (the data itself could be obtained </a:t>
-            </a:r>
-            <a:r>
-              <a:rPr lang="en-US" sz="1200" b="0" i="0" kern="1200" dirty="0" err="1">
-                <a:solidFill>
-                  <a:schemeClr val="tx1"/>
-                </a:solidFill>
-                <a:effectLst/>
-                <a:latin typeface="+mn-lt"/>
-                <a:ea typeface="+mn-ea"/>
-                <a:cs typeface="+mn-cs"/>
-              </a:rPr>
-              <a:t>asyncrhounously</a:t>
-            </a:r>
-            <a:r>
-              <a:rPr lang="en-US" sz="1200" b="0" i="0" kern="1200" dirty="0">
-                <a:solidFill>
-                  <a:schemeClr val="tx1"/>
-                </a:solidFill>
-                <a:effectLst/>
-                <a:latin typeface="+mn-lt"/>
-                <a:ea typeface="+mn-ea"/>
-                <a:cs typeface="+mn-cs"/>
-              </a:rPr>
-              <a:t> before the business logic in invoked), same thing with outputs, we do not want our business logic to be the one writing to for example a </a:t>
+              <a:t> (but not always) mean trying to reach to an external dependency. We want our business code to be dependency free in the sense that any input comes from a regular input parameter (the data itself could be obtained asynchronously before the business logic in invoked), same thing with outputs, we do not want our business logic to be the one writing to for example a </a:t>
             </a:r>
             <a:r>
               <a:rPr lang="en-US" sz="1200" b="0" i="0" kern="1200" dirty="0" err="1">
@@ -6398,31 +6280,7 @@
                 <a:ea typeface="+mn-ea"/>
                 <a:cs typeface="+mn-cs"/>
               </a:rPr>
-              <a:t>To make </a:t>
-            </a:r>
-            <a:r>
-              <a:rPr lang="en-US" sz="1200" b="0" i="0" kern="1200" dirty="0" err="1">
-                <a:solidFill>
-                  <a:schemeClr val="tx1"/>
-                </a:solidFill>
-                <a:effectLst/>
-                <a:latin typeface="+mn-lt"/>
-                <a:ea typeface="+mn-ea"/>
-                <a:cs typeface="+mn-cs"/>
-              </a:rPr>
-              <a:t>aysnc</a:t>
-            </a:r>
-            <a:r>
-              <a:rPr lang="en-US" sz="1200" b="0" i="0" kern="1200" dirty="0">
-                <a:solidFill>
-                  <a:schemeClr val="tx1"/>
-                </a:solidFill>
-                <a:effectLst/>
-                <a:latin typeface="+mn-lt"/>
-                <a:ea typeface="+mn-ea"/>
-                <a:cs typeface="+mn-cs"/>
-              </a:rPr>
-              <a:t> functions, you just need to modify the Execute method to return </a:t>
+              <a:t>To make async functions, you just need to modify the Execute method to return </a:t>
             </a:r>
             <a:r>
               <a:rPr lang="en-US" sz="1200" b="0" kern="1200" dirty="0">
@@ -6458,103 +6316,7 @@
                 <a:ea typeface="+mn-ea"/>
                 <a:cs typeface="+mn-cs"/>
               </a:rPr>
-              <a:t>&gt; and must accept a cancellation token as your last param. Within the </a:t>
-            </a:r>
-            <a:r>
-              <a:rPr lang="en-US" sz="1200" b="0" kern="1200" dirty="0" err="1">
-                <a:solidFill>
-                  <a:schemeClr val="tx1"/>
-                </a:solidFill>
-                <a:effectLst/>
-                <a:latin typeface="+mn-lt"/>
-                <a:ea typeface="+mn-ea"/>
-                <a:cs typeface="+mn-cs"/>
-              </a:rPr>
-              <a:t>bodyof</a:t>
-            </a:r>
-            <a:r>
-              <a:rPr lang="en-US" sz="1200" b="0" kern="1200" dirty="0">
-                <a:solidFill>
-                  <a:schemeClr val="tx1"/>
-                </a:solidFill>
-                <a:effectLst/>
-                <a:latin typeface="+mn-lt"/>
-                <a:ea typeface="+mn-ea"/>
-                <a:cs typeface="+mn-cs"/>
-              </a:rPr>
-              <a:t> the </a:t>
-            </a:r>
-            <a:r>
-              <a:rPr lang="en-US" sz="1200" b="0" kern="1200" dirty="0" err="1">
-                <a:solidFill>
-                  <a:schemeClr val="tx1"/>
-                </a:solidFill>
-                <a:effectLst/>
-                <a:latin typeface="+mn-lt"/>
-                <a:ea typeface="+mn-ea"/>
-                <a:cs typeface="+mn-cs"/>
-              </a:rPr>
-              <a:t>metodyou</a:t>
-            </a:r>
-            <a:r>
-              <a:rPr lang="en-US" sz="1200" b="0" kern="1200" dirty="0">
-                <a:solidFill>
-                  <a:schemeClr val="tx1"/>
-                </a:solidFill>
-                <a:effectLst/>
-                <a:latin typeface="+mn-lt"/>
-                <a:ea typeface="+mn-ea"/>
-                <a:cs typeface="+mn-cs"/>
-              </a:rPr>
-              <a:t> can then do whatever normal async </a:t>
-            </a:r>
-            <a:r>
-              <a:rPr lang="en-US" sz="1200" b="0" kern="1200" dirty="0" err="1">
-                <a:solidFill>
-                  <a:schemeClr val="tx1"/>
-                </a:solidFill>
-                <a:effectLst/>
-                <a:latin typeface="+mn-lt"/>
-                <a:ea typeface="+mn-ea"/>
-                <a:cs typeface="+mn-cs"/>
-              </a:rPr>
-              <a:t>ogic</a:t>
-            </a:r>
-            <a:r>
-              <a:rPr lang="en-US" sz="1200" b="0" kern="1200" dirty="0">
-                <a:solidFill>
-                  <a:schemeClr val="tx1"/>
-                </a:solidFill>
-                <a:effectLst/>
-                <a:latin typeface="+mn-lt"/>
-                <a:ea typeface="+mn-ea"/>
-                <a:cs typeface="+mn-cs"/>
-              </a:rPr>
-              <a:t> you need. In this example, Alexandria is calling an </a:t>
-            </a:r>
-            <a:r>
-              <a:rPr lang="en-US" sz="1200" b="0" kern="1200" dirty="0" err="1">
-                <a:solidFill>
-                  <a:schemeClr val="tx1"/>
-                </a:solidFill>
-                <a:effectLst/>
-                <a:latin typeface="+mn-lt"/>
-                <a:ea typeface="+mn-ea"/>
-                <a:cs typeface="+mn-cs"/>
-              </a:rPr>
-              <a:t>ML.Net</a:t>
-            </a:r>
-            <a:r>
-              <a:rPr lang="en-US" sz="1200" b="0" kern="1200" dirty="0">
-                <a:solidFill>
-                  <a:schemeClr val="tx1"/>
-                </a:solidFill>
-                <a:effectLst/>
-                <a:latin typeface="+mn-lt"/>
-                <a:ea typeface="+mn-ea"/>
-                <a:cs typeface="+mn-cs"/>
-              </a:rPr>
-              <a:t> model to determine the sentiment of a string.</a:t>
+              <a:t>&gt; and must accept a cancellation token as your last param. Within the body of the method you can then do whatever normal async logic you need. In this example, Alexandria is calling some .NET logic to read a file line by line to search for a product name.</a:t>
             </a:r>
           </a:p>
         </p:txBody>
@@ -6576,7 +6338,7 @@
           <a:p>
             <a:fld id="{A3FADD39-AB8A-4278-99D9-40CD8D745BA1}" type="slidenum">
               <a:rPr lang="en-US" smtClean="0"/>
-              <a:t>18</a:t>
+              <a:t>16</a:t>
             </a:fld>
             <a:endParaRPr lang="en-US"/>
           </a:p>
@@ -6660,7 +6422,7 @@
           <a:p>
             <a:fld id="{CDDD3684-6E52-4019-8D61-A9B0BAC0DBD6}" type="slidenum">
               <a:rPr lang="en-US" smtClean="0"/>
-              <a:t>21</a:t>
+              <a:t>19</a:t>
             </a:fld>
             <a:endParaRPr lang="en-US"/>
           </a:p>
@@ -6744,7 +6506,7 @@
           <a:p>
             <a:fld id="{CDDD3684-6E52-4019-8D61-A9B0BAC0DBD6}" type="slidenum">
               <a:rPr lang="en-US" smtClean="0"/>
-              <a:t>22</a:t>
+              <a:t>20</a:t>
             </a:fld>
             <a:endParaRPr lang="en-US"/>
           </a:p>
@@ -7921,7 +7683,7 @@
           <a:p>
             <a:fld id="{5CDD294D-83BB-48C2-9EE9-4B0B0168A414}" type="datetimeFigureOut">
               <a:rPr lang="en-US" smtClean="0"/>
-              <a:t>4/10/2026</a:t>
+              <a:t>4/11/2026</a:t>
             </a:fld>
             <a:endParaRPr lang="en-US"/>
           </a:p>
@@ -8119,7 +7881,7 @@
           <a:p>
             <a:fld id="{5CDD294D-83BB-48C2-9EE9-4B0B0168A414}" type="datetimeFigureOut">
               <a:rPr lang="en-US" smtClean="0"/>
-              <a:t>4/10/2026</a:t>
+              <a:t>4/11/2026</a:t>
             </a:fld>
             <a:endParaRPr lang="en-US"/>
           </a:p>
@@ -8327,7 +8089,7 @@
           <a:p>
             <a:fld id="{5CDD294D-83BB-48C2-9EE9-4B0B0168A414}" type="datetimeFigureOut">
               <a:rPr lang="en-US" smtClean="0"/>
-              <a:t>4/10/2026</a:t>
+              <a:t>4/11/2026</a:t>
             </a:fld>
             <a:endParaRPr lang="en-US"/>
           </a:p>
@@ -8525,7 +8287,7 @@
           <a:p>
             <a:fld id="{5CDD294D-83BB-48C2-9EE9-4B0B0168A414}" type="datetimeFigureOut">
               <a:rPr lang="en-US" smtClean="0"/>
-              <a:t>4/10/2026</a:t>
+              <a:t>4/11/2026</a:t>
             </a:fld>
             <a:endParaRPr lang="en-US"/>
           </a:p>
@@ -8800,7 +8562,7 @@
           <a:p>
             <a:fld id="{5CDD294D-83BB-48C2-9EE9-4B0B0168A414}" type="datetimeFigureOut">
               <a:rPr lang="en-US" smtClean="0"/>
-              <a:t>4/10/2026</a:t>
+              <a:t>4/11/2026</a:t>
             </a:fld>
             <a:endParaRPr lang="en-US"/>
           </a:p>
@@ -9065,7 +8827,7 @@
           <a:p>
             <a:fld id="{5CDD294D-83BB-48C2-9EE9-4B0B0168A414}" type="datetimeFigureOut">
               <a:rPr lang="en-US" smtClean="0"/>
-              <a:t>4/10/2026</a:t>
+              <a:t>4/11/2026</a:t>
             </a:fld>
             <a:endParaRPr lang="en-US"/>
           </a:p>
@@ -9477,7 +9239,7 @@
           <a:p>
             <a:fld id="{5CDD294D-83BB-48C2-9EE9-4B0B0168A414}" type="datetimeFigureOut">
               <a:rPr lang="en-US" smtClean="0"/>
-              <a:t>4/10/2026</a:t>
+              <a:t>4/11/2026</a:t>
             </a:fld>
             <a:endParaRPr lang="en-US"/>
           </a:p>
@@ -9618,7 +9380,7 @@
           <a:p>
             <a:fld id="{5CDD294D-83BB-48C2-9EE9-4B0B0168A414}" type="datetimeFigureOut">
               <a:rPr lang="en-US" smtClean="0"/>
-              <a:t>4/10/2026</a:t>
+              <a:t>4/11/2026</a:t>
             </a:fld>
             <a:endParaRPr lang="en-US"/>
           </a:p>
@@ -9731,7 +9493,7 @@
           <a:p>
             <a:fld id="{5CDD294D-83BB-48C2-9EE9-4B0B0168A414}" type="datetimeFigureOut">
               <a:rPr lang="en-US" smtClean="0"/>
-              <a:t>4/10/2026</a:t>
+              <a:t>4/11/2026</a:t>
             </a:fld>
             <a:endParaRPr lang="en-US"/>
           </a:p>
@@ -10042,7 +9804,7 @@
           <a:p>
             <a:fld id="{5CDD294D-83BB-48C2-9EE9-4B0B0168A414}" type="datetimeFigureOut">
               <a:rPr lang="en-US" smtClean="0"/>
-              <a:t>4/10/2026</a:t>
+              <a:t>4/11/2026</a:t>
             </a:fld>
             <a:endParaRPr lang="en-US"/>
           </a:p>
@@ -10330,7 +10092,7 @@
           <a:p>
             <a:fld id="{5CDD294D-83BB-48C2-9EE9-4B0B0168A414}" type="datetimeFigureOut">
               <a:rPr lang="en-US" smtClean="0"/>
-              <a:t>4/10/2026</a:t>
+              <a:t>4/11/2026</a:t>
             </a:fld>
             <a:endParaRPr lang="en-US"/>
           </a:p>
@@ -10571,7 +10333,7 @@
           <a:p>
             <a:fld id="{5CDD294D-83BB-48C2-9EE9-4B0B0168A414}" type="datetimeFigureOut">
               <a:rPr lang="en-US" smtClean="0"/>
-              <a:t>4/10/2026</a:t>
+              <a:t>4/11/2026</a:t>
             </a:fld>
             <a:endParaRPr lang="en-US"/>
           </a:p>
@@ -12987,89 +12749,6 @@
 <file path=ppt/slides/slide12.xml><?xml version="1.0" encoding="utf-8"?>
 <p:sld xmlns:a="http://schemas.openxmlformats.org/drawingml/2006/main" xmlns:r="http://schemas.openxmlformats.org/officeDocument/2006/relationships" xmlns:p="http://schemas.openxmlformats.org/presentationml/2006/main">
   <p:cSld>
-    <p:spTree>
-      <p:nvGrpSpPr>
-        <p:cNvPr id="1" name=""/>
-        <p:cNvGrpSpPr/>
-        <p:nvPr/>
-      </p:nvGrpSpPr>
-      <p:grpSpPr>
-        <a:xfrm>
-          <a:off x="0" y="0"/>
-          <a:ext cx="0" cy="0"/>
-          <a:chOff x="0" y="0"/>
-          <a:chExt cx="0" cy="0"/>
-        </a:xfrm>
-      </p:grpSpPr>
-      <p:sp>
-        <p:nvSpPr>
-          <p:cNvPr id="4" name="Title 3">
-            <a:extLst>
-              <a:ext uri="{FF2B5EF4-FFF2-40B4-BE49-F238E27FC236}">
-                <a16:creationId xmlns:a16="http://schemas.microsoft.com/office/drawing/2014/main" id="{47C3B51B-CD1E-84E5-E7B2-ED12B12BB2EC}"/>
-              </a:ext>
-            </a:extLst>
-          </p:cNvPr>
-          <p:cNvSpPr>
-            <a:spLocks noGrp="1"/>
-          </p:cNvSpPr>
-          <p:nvPr>
-            <p:ph type="ctrTitle"/>
-          </p:nvPr>
-        </p:nvSpPr>
-        <p:spPr/>
-        <p:txBody>
-          <a:bodyPr/>
-          <a:lstStyle/>
-          <a:p>
-            <a:r>
-              <a:rPr lang="en-US" dirty="0"/>
-              <a:t>Demo</a:t>
-            </a:r>
-          </a:p>
-        </p:txBody>
-      </p:sp>
-      <p:sp>
-        <p:nvSpPr>
-          <p:cNvPr id="5" name="Subtitle 4">
-            <a:extLst>
-              <a:ext uri="{FF2B5EF4-FFF2-40B4-BE49-F238E27FC236}">
-                <a16:creationId xmlns:a16="http://schemas.microsoft.com/office/drawing/2014/main" id="{C3E3E2C1-3777-0AA9-FFD7-C0605B1B0494}"/>
-              </a:ext>
-            </a:extLst>
-          </p:cNvPr>
-          <p:cNvSpPr>
-            <a:spLocks noGrp="1"/>
-          </p:cNvSpPr>
-          <p:nvPr>
-            <p:ph type="subTitle" idx="1"/>
-          </p:nvPr>
-        </p:nvSpPr>
-        <p:spPr/>
-        <p:txBody>
-          <a:bodyPr/>
-          <a:lstStyle/>
-          <a:p>
-            <a:endParaRPr lang="en-US"/>
-          </a:p>
-        </p:txBody>
-      </p:sp>
-    </p:spTree>
-    <p:extLst>
-      <p:ext uri="{BB962C8B-B14F-4D97-AF65-F5344CB8AC3E}">
-        <p14:creationId xmlns:p14="http://schemas.microsoft.com/office/powerpoint/2010/main" val="2253528452"/>
-      </p:ext>
-    </p:extLst>
-  </p:cSld>
-  <p:clrMapOvr>
-    <a:masterClrMapping/>
-  </p:clrMapOvr>
-</p:sld>
-</file>
-
-<file path=ppt/slides/slide13.xml><?xml version="1.0" encoding="utf-8"?>
-<p:sld xmlns:a="http://schemas.openxmlformats.org/drawingml/2006/main" xmlns:r="http://schemas.openxmlformats.org/officeDocument/2006/relationships" xmlns:p="http://schemas.openxmlformats.org/presentationml/2006/main">
-  <p:cSld>
     <p:bg>
       <p:bgPr>
         <a:solidFill>
@@ -13911,96 +13590,7 @@
 </p:sld>
 </file>
 
-<file path=ppt/slides/slide14.xml><?xml version="1.0" encoding="utf-8"?>
-<p:sld xmlns:a="http://schemas.openxmlformats.org/drawingml/2006/main" xmlns:r="http://schemas.openxmlformats.org/officeDocument/2006/relationships" xmlns:p="http://schemas.openxmlformats.org/presentationml/2006/main">
-  <p:cSld>
-    <p:spTree>
-      <p:nvGrpSpPr>
-        <p:cNvPr id="1" name="">
-          <a:extLst>
-            <a:ext uri="{FF2B5EF4-FFF2-40B4-BE49-F238E27FC236}">
-              <a16:creationId xmlns:a16="http://schemas.microsoft.com/office/drawing/2014/main" id="{72ADEA4B-5943-9C48-48F5-5F88DA6978BD}"/>
-            </a:ext>
-          </a:extLst>
-        </p:cNvPr>
-        <p:cNvGrpSpPr/>
-        <p:nvPr/>
-      </p:nvGrpSpPr>
-      <p:grpSpPr>
-        <a:xfrm>
-          <a:off x="0" y="0"/>
-          <a:ext cx="0" cy="0"/>
-          <a:chOff x="0" y="0"/>
-          <a:chExt cx="0" cy="0"/>
-        </a:xfrm>
-      </p:grpSpPr>
-      <p:sp>
-        <p:nvSpPr>
-          <p:cNvPr id="4" name="Title 3">
-            <a:extLst>
-              <a:ext uri="{FF2B5EF4-FFF2-40B4-BE49-F238E27FC236}">
-                <a16:creationId xmlns:a16="http://schemas.microsoft.com/office/drawing/2014/main" id="{A22E6497-D99D-3CE6-FF95-F68AABCA940B}"/>
-              </a:ext>
-            </a:extLst>
-          </p:cNvPr>
-          <p:cNvSpPr>
-            <a:spLocks noGrp="1"/>
-          </p:cNvSpPr>
-          <p:nvPr>
-            <p:ph type="ctrTitle"/>
-          </p:nvPr>
-        </p:nvSpPr>
-        <p:spPr/>
-        <p:txBody>
-          <a:bodyPr/>
-          <a:lstStyle/>
-          <a:p>
-            <a:r>
-              <a:rPr lang="en-US" dirty="0"/>
-              <a:t>Demo</a:t>
-            </a:r>
-          </a:p>
-        </p:txBody>
-      </p:sp>
-      <p:sp>
-        <p:nvSpPr>
-          <p:cNvPr id="5" name="Subtitle 4">
-            <a:extLst>
-              <a:ext uri="{FF2B5EF4-FFF2-40B4-BE49-F238E27FC236}">
-                <a16:creationId xmlns:a16="http://schemas.microsoft.com/office/drawing/2014/main" id="{06A25E4E-1025-7E29-9C12-1A362EE35AC1}"/>
-              </a:ext>
-            </a:extLst>
-          </p:cNvPr>
-          <p:cNvSpPr>
-            <a:spLocks noGrp="1"/>
-          </p:cNvSpPr>
-          <p:nvPr>
-            <p:ph type="subTitle" idx="1"/>
-          </p:nvPr>
-        </p:nvSpPr>
-        <p:spPr/>
-        <p:txBody>
-          <a:bodyPr/>
-          <a:lstStyle/>
-          <a:p>
-            <a:endParaRPr lang="en-US"/>
-          </a:p>
-        </p:txBody>
-      </p:sp>
-    </p:spTree>
-    <p:extLst>
-      <p:ext uri="{BB962C8B-B14F-4D97-AF65-F5344CB8AC3E}">
-        <p14:creationId xmlns:p14="http://schemas.microsoft.com/office/powerpoint/2010/main" val="3591279662"/>
-      </p:ext>
-    </p:extLst>
-  </p:cSld>
-  <p:clrMapOvr>
-    <a:masterClrMapping/>
-  </p:clrMapOvr>
-</p:sld>
-</file>
-
-<file path=ppt/slides/slide15.xml><?xml version="1.0" encoding="utf-8"?>
+<file path=ppt/slides/slide13.xml><?xml version="1.0" encoding="utf-8"?>
 <p:sld xmlns:a="http://schemas.openxmlformats.org/drawingml/2006/main" xmlns:r="http://schemas.openxmlformats.org/officeDocument/2006/relationships" xmlns:p="http://schemas.openxmlformats.org/presentationml/2006/main">
   <p:cSld>
     <p:bg>
@@ -14854,7 +14444,7 @@
 </p:sld>
 </file>
 
-<file path=ppt/slides/slide16.xml><?xml version="1.0" encoding="utf-8"?>
+<file path=ppt/slides/slide14.xml><?xml version="1.0" encoding="utf-8"?>
 <p:sld xmlns:a="http://schemas.openxmlformats.org/drawingml/2006/main" xmlns:r="http://schemas.openxmlformats.org/officeDocument/2006/relationships" xmlns:p="http://schemas.openxmlformats.org/presentationml/2006/main">
   <p:cSld>
     <p:bg>
@@ -15721,7 +15311,7 @@
 </p:sld>
 </file>
 
-<file path=ppt/slides/slide17.xml><?xml version="1.0" encoding="utf-8"?>
+<file path=ppt/slides/slide15.xml><?xml version="1.0" encoding="utf-8"?>
 <p:sld xmlns:a="http://schemas.openxmlformats.org/drawingml/2006/main" xmlns:r="http://schemas.openxmlformats.org/officeDocument/2006/relationships" xmlns:p="http://schemas.openxmlformats.org/presentationml/2006/main">
   <p:cSld>
     <p:spTree>
@@ -15810,7 +15400,7 @@
 </p:sld>
 </file>
 
-<file path=ppt/slides/slide18.xml><?xml version="1.0" encoding="utf-8"?>
+<file path=ppt/slides/slide16.xml><?xml version="1.0" encoding="utf-8"?>
 <p:sld xmlns:a="http://schemas.openxmlformats.org/drawingml/2006/main" xmlns:r="http://schemas.openxmlformats.org/officeDocument/2006/relationships" xmlns:p="http://schemas.openxmlformats.org/presentationml/2006/main">
   <p:cSld>
     <p:bg>
@@ -16694,7 +16284,7 @@
 </p:sld>
 </file>
 
-<file path=ppt/slides/slide19.xml><?xml version="1.0" encoding="utf-8"?>
+<file path=ppt/slides/slide17.xml><?xml version="1.0" encoding="utf-8"?>
 <p:sld xmlns:a="http://schemas.openxmlformats.org/drawingml/2006/main" xmlns:r="http://schemas.openxmlformats.org/officeDocument/2006/relationships" xmlns:p="http://schemas.openxmlformats.org/presentationml/2006/main">
   <p:cSld>
     <p:spTree>
@@ -16783,391 +16373,7 @@
 </p:sld>
 </file>
 
-<file path=ppt/slides/slide2.xml><?xml version="1.0" encoding="utf-8"?>
-<p:sld xmlns:a="http://schemas.openxmlformats.org/drawingml/2006/main" xmlns:r="http://schemas.openxmlformats.org/officeDocument/2006/relationships" xmlns:p="http://schemas.openxmlformats.org/presentationml/2006/main">
-  <p:cSld>
-    <p:spTree>
-      <p:nvGrpSpPr>
-        <p:cNvPr id="1" name=""/>
-        <p:cNvGrpSpPr/>
-        <p:nvPr/>
-      </p:nvGrpSpPr>
-      <p:grpSpPr>
-        <a:xfrm>
-          <a:off x="0" y="0"/>
-          <a:ext cx="0" cy="0"/>
-          <a:chOff x="0" y="0"/>
-          <a:chExt cx="0" cy="0"/>
-        </a:xfrm>
-      </p:grpSpPr>
-      <p:sp>
-        <p:nvSpPr>
-          <p:cNvPr id="2" name="Title 1">
-            <a:extLst>
-              <a:ext uri="{FF2B5EF4-FFF2-40B4-BE49-F238E27FC236}">
-                <a16:creationId xmlns:a16="http://schemas.microsoft.com/office/drawing/2014/main" id="{B340EC05-4BE2-0827-7AA6-45C23C981DF4}"/>
-              </a:ext>
-            </a:extLst>
-          </p:cNvPr>
-          <p:cNvSpPr>
-            <a:spLocks noGrp="1"/>
-          </p:cNvSpPr>
-          <p:nvPr>
-            <p:ph type="title"/>
-          </p:nvPr>
-        </p:nvSpPr>
-        <p:spPr>
-          <a:xfrm>
-            <a:off x="640080" y="329184"/>
-            <a:ext cx="6894576" cy="1783080"/>
-          </a:xfrm>
-        </p:spPr>
-        <p:txBody>
-          <a:bodyPr anchor="b">
-            <a:normAutofit/>
-          </a:bodyPr>
-          <a:lstStyle/>
-          <a:p>
-            <a:r>
-              <a:rPr lang="en-US" sz="6600" dirty="0"/>
-              <a:t>Intro</a:t>
-            </a:r>
-          </a:p>
-        </p:txBody>
-      </p:sp>
-      <p:sp>
-        <p:nvSpPr>
-          <p:cNvPr id="3" name="Content Placeholder 2">
-            <a:extLst>
-              <a:ext uri="{FF2B5EF4-FFF2-40B4-BE49-F238E27FC236}">
-                <a16:creationId xmlns:a16="http://schemas.microsoft.com/office/drawing/2014/main" id="{9482E84A-BDAD-C72C-F004-13D054A6BB29}"/>
-              </a:ext>
-            </a:extLst>
-          </p:cNvPr>
-          <p:cNvSpPr>
-            <a:spLocks noGrp="1"/>
-          </p:cNvSpPr>
-          <p:nvPr>
-            <p:ph idx="1"/>
-          </p:nvPr>
-        </p:nvSpPr>
-        <p:spPr>
-          <a:xfrm>
-            <a:off x="640080" y="2706624"/>
-            <a:ext cx="6894576" cy="3483864"/>
-          </a:xfrm>
-        </p:spPr>
-        <p:txBody>
-          <a:bodyPr>
-            <a:normAutofit/>
-          </a:bodyPr>
-          <a:lstStyle/>
-          <a:p>
-            <a:r>
-              <a:rPr lang="en-US" sz="2200" dirty="0"/>
-              <a:t>Juan Pablo Tarquino </a:t>
-            </a:r>
-          </a:p>
-          <a:p>
-            <a:r>
-              <a:rPr lang="en-US" sz="2200" dirty="0"/>
-              <a:t>Software Developer with about 20 years of experience</a:t>
-            </a:r>
-          </a:p>
-          <a:p>
-            <a:pPr lvl="1"/>
-            <a:r>
-              <a:rPr lang="en-US" sz="2200" dirty="0"/>
-              <a:t>LinkedIn</a:t>
-            </a:r>
-          </a:p>
-          <a:p>
-            <a:pPr lvl="2"/>
-            <a:r>
-              <a:rPr lang="en-US" sz="2200" dirty="0">
-                <a:hlinkClick r:id="rId3"/>
-              </a:rPr>
-              <a:t>https://www.linkedin.com/in/juantarquino</a:t>
-            </a:r>
-            <a:r>
-              <a:rPr lang="en-US" sz="2200" dirty="0"/>
-              <a:t> </a:t>
-            </a:r>
-          </a:p>
-          <a:p>
-            <a:pPr lvl="1"/>
-            <a:r>
-              <a:rPr lang="en-US" sz="2200" dirty="0"/>
-              <a:t>Blog (not updated often </a:t>
-            </a:r>
-            <a:r>
-              <a:rPr lang="en-US" sz="2200" dirty="0">
-                <a:sym typeface="Wingdings" panose="05000000000000000000" pitchFamily="2" charset="2"/>
-              </a:rPr>
-              <a:t> </a:t>
-            </a:r>
-            <a:r>
-              <a:rPr lang="en-US" sz="2200" dirty="0"/>
-              <a:t>)</a:t>
-            </a:r>
-          </a:p>
-          <a:p>
-            <a:pPr lvl="2"/>
-            <a:r>
-              <a:rPr lang="en-US" sz="2200" dirty="0">
-                <a:hlinkClick r:id="rId4"/>
-              </a:rPr>
-              <a:t>https://jptarqu.blogspot.com</a:t>
-            </a:r>
-            <a:r>
-              <a:rPr lang="en-US" sz="2200" dirty="0"/>
-              <a:t>  </a:t>
-            </a:r>
-          </a:p>
-          <a:p>
-            <a:r>
-              <a:rPr lang="en-US" sz="2200" dirty="0"/>
-              <a:t>Sample repo and slides for this session: </a:t>
-            </a:r>
-          </a:p>
-          <a:p>
-            <a:pPr lvl="1"/>
-            <a:r>
-              <a:rPr lang="en-US" sz="2200" dirty="0">
-                <a:hlinkClick r:id="rId5"/>
-              </a:rPr>
-              <a:t>https://tinyurl.com/PowerFX-NET</a:t>
-            </a:r>
-            <a:r>
-              <a:rPr lang="en-US" sz="2200" dirty="0"/>
-              <a:t> </a:t>
-            </a:r>
-          </a:p>
-        </p:txBody>
-      </p:sp>
-      <p:pic>
-        <p:nvPicPr>
-          <p:cNvPr id="7" name="Picture 6">
-            <a:extLst>
-              <a:ext uri="{FF2B5EF4-FFF2-40B4-BE49-F238E27FC236}">
-                <a16:creationId xmlns:a16="http://schemas.microsoft.com/office/drawing/2014/main" id="{685DA20C-00C6-81E7-993F-496E86E2B133}"/>
-              </a:ext>
-            </a:extLst>
-          </p:cNvPr>
-          <p:cNvPicPr>
-            <a:picLocks noChangeAspect="1"/>
-          </p:cNvPicPr>
-          <p:nvPr/>
-        </p:nvPicPr>
-        <p:blipFill>
-          <a:blip r:embed="rId6"/>
-          <a:srcRect t="24668" r="-4" b="15002"/>
-          <a:stretch/>
-        </p:blipFill>
-        <p:spPr>
-          <a:xfrm>
-            <a:off x="8144356" y="4267201"/>
-            <a:ext cx="4047645" cy="2590808"/>
-          </a:xfrm>
-          <a:custGeom>
-            <a:avLst/>
-            <a:gdLst/>
-            <a:ahLst/>
-            <a:cxnLst/>
-            <a:rect l="l" t="t" r="r" b="b"/>
-            <a:pathLst>
-              <a:path w="4047645" h="2495811">
-                <a:moveTo>
-                  <a:pt x="2441891" y="4"/>
-                </a:moveTo>
-                <a:cubicBezTo>
-                  <a:pt x="2489381" y="-78"/>
-                  <a:pt x="2536882" y="1163"/>
-                  <a:pt x="2584383" y="4428"/>
-                </a:cubicBezTo>
-                <a:cubicBezTo>
-                  <a:pt x="2744314" y="17813"/>
-                  <a:pt x="2904989" y="21079"/>
-                  <a:pt x="3065367" y="14222"/>
-                </a:cubicBezTo>
-                <a:cubicBezTo>
-                  <a:pt x="3194244" y="5694"/>
-                  <a:pt x="3323514" y="4206"/>
-                  <a:pt x="3452568" y="9782"/>
-                </a:cubicBezTo>
-                <a:cubicBezTo>
-                  <a:pt x="3572813" y="16442"/>
-                  <a:pt x="3693059" y="23233"/>
-                  <a:pt x="3813712" y="19315"/>
-                </a:cubicBezTo>
-                <a:cubicBezTo>
-                  <a:pt x="3861755" y="17748"/>
-                  <a:pt x="3909121" y="15789"/>
-                  <a:pt x="3956758" y="13177"/>
-                </a:cubicBezTo>
-                <a:lnTo>
-                  <a:pt x="4047645" y="9696"/>
-                </a:lnTo>
-                <a:lnTo>
-                  <a:pt x="4047645" y="2495811"/>
-                </a:lnTo>
-                <a:lnTo>
-                  <a:pt x="28177" y="2495811"/>
-                </a:lnTo>
-                <a:lnTo>
-                  <a:pt x="28782" y="2485852"/>
-                </a:lnTo>
-                <a:cubicBezTo>
-                  <a:pt x="31911" y="2365446"/>
-                  <a:pt x="35027" y="2245002"/>
-                  <a:pt x="38157" y="2124521"/>
-                </a:cubicBezTo>
-                <a:cubicBezTo>
-                  <a:pt x="38284" y="2119444"/>
-                  <a:pt x="39171" y="2114494"/>
-                  <a:pt x="39171" y="2109417"/>
-                </a:cubicBezTo>
-                <a:cubicBezTo>
-                  <a:pt x="48166" y="1995573"/>
-                  <a:pt x="53107" y="1881729"/>
-                  <a:pt x="18899" y="1770550"/>
-                </a:cubicBezTo>
-                <a:cubicBezTo>
-                  <a:pt x="15871" y="1760104"/>
-                  <a:pt x="14262" y="1749304"/>
-                  <a:pt x="14084" y="1738440"/>
-                </a:cubicBezTo>
-                <a:cubicBezTo>
-                  <a:pt x="12413" y="1641514"/>
-                  <a:pt x="16644" y="1544587"/>
-                  <a:pt x="26754" y="1448181"/>
-                </a:cubicBezTo>
-                <a:cubicBezTo>
-                  <a:pt x="31949" y="1389038"/>
-                  <a:pt x="26754" y="1329006"/>
-                  <a:pt x="43478" y="1270498"/>
-                </a:cubicBezTo>
-                <a:cubicBezTo>
-                  <a:pt x="50864" y="1241421"/>
-                  <a:pt x="55109" y="1211634"/>
-                  <a:pt x="56147" y="1181656"/>
-                </a:cubicBezTo>
-                <a:cubicBezTo>
-                  <a:pt x="59948" y="1109060"/>
-                  <a:pt x="38537" y="1040779"/>
-                  <a:pt x="18139" y="972244"/>
-                </a:cubicBezTo>
-                <a:cubicBezTo>
-                  <a:pt x="7370" y="935945"/>
-                  <a:pt x="-5426" y="898886"/>
-                  <a:pt x="2429" y="860811"/>
-                </a:cubicBezTo>
-                <a:cubicBezTo>
-                  <a:pt x="16707" y="802251"/>
-                  <a:pt x="24854" y="742359"/>
-                  <a:pt x="26754" y="682112"/>
-                </a:cubicBezTo>
-                <a:cubicBezTo>
-                  <a:pt x="26754" y="639468"/>
-                  <a:pt x="16365" y="597712"/>
-                  <a:pt x="20039" y="555195"/>
-                </a:cubicBezTo>
-                <a:cubicBezTo>
-                  <a:pt x="28211" y="472712"/>
-                  <a:pt x="30238" y="389734"/>
-                  <a:pt x="26121" y="306946"/>
-                </a:cubicBezTo>
-                <a:cubicBezTo>
-                  <a:pt x="26095" y="273846"/>
-                  <a:pt x="29846" y="240848"/>
-                  <a:pt x="37270" y="208585"/>
-                </a:cubicBezTo>
-                <a:cubicBezTo>
-                  <a:pt x="46506" y="151651"/>
-                  <a:pt x="48419" y="93777"/>
-                  <a:pt x="42971" y="36360"/>
-                </a:cubicBezTo>
-                <a:lnTo>
-                  <a:pt x="38853" y="8429"/>
-                </a:lnTo>
-                <a:lnTo>
-                  <a:pt x="56649" y="7824"/>
-                </a:lnTo>
-                <a:cubicBezTo>
-                  <a:pt x="210497" y="-156"/>
-                  <a:pt x="364754" y="3162"/>
-                  <a:pt x="518087" y="17748"/>
-                </a:cubicBezTo>
-                <a:cubicBezTo>
-                  <a:pt x="626567" y="25440"/>
-                  <a:pt x="735534" y="24213"/>
-                  <a:pt x="843809" y="14092"/>
-                </a:cubicBezTo>
-                <a:cubicBezTo>
-                  <a:pt x="1042499" y="-1711"/>
-                  <a:pt x="1240782" y="10958"/>
-                  <a:pt x="1439065" y="21666"/>
-                </a:cubicBezTo>
-                <a:cubicBezTo>
-                  <a:pt x="1631105" y="32113"/>
-                  <a:pt x="1823010" y="24408"/>
-                  <a:pt x="2015050" y="17487"/>
-                </a:cubicBezTo>
-                <a:cubicBezTo>
-                  <a:pt x="2157045" y="12394"/>
-                  <a:pt x="2299420" y="249"/>
-                  <a:pt x="2441891" y="4"/>
-                </a:cubicBezTo>
-                <a:close/>
-              </a:path>
-            </a:pathLst>
-          </a:custGeom>
-        </p:spPr>
-      </p:pic>
-      <p:pic>
-        <p:nvPicPr>
-          <p:cNvPr id="5" name="Picture 4">
-            <a:extLst>
-              <a:ext uri="{FF2B5EF4-FFF2-40B4-BE49-F238E27FC236}">
-                <a16:creationId xmlns:a16="http://schemas.microsoft.com/office/drawing/2014/main" id="{14FE3455-90A4-7EA8-C301-229D17616FE0}"/>
-              </a:ext>
-            </a:extLst>
-          </p:cNvPr>
-          <p:cNvPicPr>
-            <a:picLocks noChangeAspect="1"/>
-          </p:cNvPicPr>
-          <p:nvPr/>
-        </p:nvPicPr>
-        <p:blipFill>
-          <a:blip r:embed="rId7"/>
-          <a:stretch>
-            <a:fillRect/>
-          </a:stretch>
-        </p:blipFill>
-        <p:spPr>
-          <a:xfrm>
-            <a:off x="8332950" y="502779"/>
-            <a:ext cx="3218970" cy="3218970"/>
-          </a:xfrm>
-          <a:prstGeom prst="rect">
-            <a:avLst/>
-          </a:prstGeom>
-        </p:spPr>
-      </p:pic>
-    </p:spTree>
-    <p:extLst>
-      <p:ext uri="{BB962C8B-B14F-4D97-AF65-F5344CB8AC3E}">
-        <p14:creationId xmlns:p14="http://schemas.microsoft.com/office/powerpoint/2010/main" val="1528468167"/>
-      </p:ext>
-    </p:extLst>
-  </p:cSld>
-  <p:clrMapOvr>
-    <a:masterClrMapping/>
-  </p:clrMapOvr>
-</p:sld>
-</file>
-
-<file path=ppt/slides/slide20.xml><?xml version="1.0" encoding="utf-8"?>
+<file path=ppt/slides/slide18.xml><?xml version="1.0" encoding="utf-8"?>
 <p:sld xmlns:a="http://schemas.openxmlformats.org/drawingml/2006/main" xmlns:r="http://schemas.openxmlformats.org/officeDocument/2006/relationships" xmlns:p="http://schemas.openxmlformats.org/presentationml/2006/main">
   <p:cSld>
     <p:bg>
@@ -17704,7 +16910,7 @@
 </p:sld>
 </file>
 
-<file path=ppt/slides/slide21.xml><?xml version="1.0" encoding="utf-8"?>
+<file path=ppt/slides/slide19.xml><?xml version="1.0" encoding="utf-8"?>
 <p:sld xmlns:a="http://schemas.openxmlformats.org/drawingml/2006/main" xmlns:r="http://schemas.openxmlformats.org/officeDocument/2006/relationships" xmlns:p="http://schemas.openxmlformats.org/presentationml/2006/main">
   <p:cSld>
     <p:spTree>
@@ -17797,6 +17003,49 @@
           </a:p>
           <a:p>
             <a:r>
+              <a:rPr lang="en-US" sz="2200" dirty="0" err="1">
+                <a:hlinkClick r:id="rId3"/>
+              </a:rPr>
+              <a:t>LinkedIN</a:t>
+            </a:r>
+            <a:r>
+              <a:rPr lang="en-US" sz="2200" dirty="0">
+                <a:hlinkClick r:id="rId3"/>
+              </a:rPr>
+              <a:t>: </a:t>
+            </a:r>
+            <a:r>
+              <a:rPr lang="en-US" sz="2200" dirty="0">
+                <a:hlinkClick r:id="rId3"/>
+              </a:rPr>
+              <a:t>https://www.linkedin.com/in/juantarquino</a:t>
+            </a:r>
+            <a:endParaRPr lang="en-US" sz="2200" dirty="0"/>
+          </a:p>
+          <a:p>
+            <a:r>
+              <a:rPr lang="en-US" sz="2200" dirty="0"/>
+              <a:t>Sample repo and slides for this session: </a:t>
+            </a:r>
+          </a:p>
+          <a:p>
+            <a:pPr lvl="1"/>
+            <a:r>
+              <a:rPr lang="en-US" sz="2200" dirty="0">
+                <a:hlinkClick r:id="rId4"/>
+              </a:rPr>
+              <a:t>https://tinyurl.com/PowerFX-NET</a:t>
+            </a:r>
+            <a:r>
+              <a:rPr lang="en-US" sz="2200" dirty="0"/>
+              <a:t>  </a:t>
+            </a:r>
+            <a:endParaRPr lang="en-US" sz="2200" dirty="0">
+              <a:sym typeface="Wingdings" panose="05000000000000000000" pitchFamily="2" charset="2"/>
+            </a:endParaRPr>
+          </a:p>
+          <a:p>
+            <a:r>
               <a:rPr lang="en-US" sz="2200" dirty="0">
                 <a:sym typeface="Wingdings" panose="05000000000000000000" pitchFamily="2" charset="2"/>
               </a:rPr>
@@ -17810,6 +17059,12 @@
             <a:endParaRPr lang="en-US" sz="2200" dirty="0">
               <a:sym typeface="Wingdings" panose="05000000000000000000" pitchFamily="2" charset="2"/>
             </a:endParaRPr>
+          </a:p>
+          <a:p>
+            <a:pPr marL="0" indent="0">
+              <a:buNone/>
+            </a:pPr>
+            <a:endParaRPr lang="en-US" sz="2200" dirty="0"/>
           </a:p>
           <a:p>
             <a:pPr marL="0" indent="0">
@@ -17834,7 +17089,7 @@
           <p:nvPr/>
         </p:nvPicPr>
         <p:blipFill>
-          <a:blip r:embed="rId3">
+          <a:blip r:embed="rId5">
             <a:extLst>
               <a:ext uri="{28A0092B-C50C-407E-A947-70E740481C1C}">
                 <a14:useLocalDpi xmlns:a14="http://schemas.microsoft.com/office/drawing/2010/main" val="0"/>
@@ -17847,7 +17102,7 @@
         </p:blipFill>
         <p:spPr>
           <a:xfrm>
-            <a:off x="1257300" y="2790825"/>
+            <a:off x="2381250" y="3819525"/>
             <a:ext cx="2209800" cy="2209800"/>
           </a:xfrm>
           <a:prstGeom prst="rect">
@@ -17868,7 +17123,391 @@
 </p:sld>
 </file>
 
-<file path=ppt/slides/slide22.xml><?xml version="1.0" encoding="utf-8"?>
+<file path=ppt/slides/slide2.xml><?xml version="1.0" encoding="utf-8"?>
+<p:sld xmlns:a="http://schemas.openxmlformats.org/drawingml/2006/main" xmlns:r="http://schemas.openxmlformats.org/officeDocument/2006/relationships" xmlns:p="http://schemas.openxmlformats.org/presentationml/2006/main">
+  <p:cSld>
+    <p:spTree>
+      <p:nvGrpSpPr>
+        <p:cNvPr id="1" name=""/>
+        <p:cNvGrpSpPr/>
+        <p:nvPr/>
+      </p:nvGrpSpPr>
+      <p:grpSpPr>
+        <a:xfrm>
+          <a:off x="0" y="0"/>
+          <a:ext cx="0" cy="0"/>
+          <a:chOff x="0" y="0"/>
+          <a:chExt cx="0" cy="0"/>
+        </a:xfrm>
+      </p:grpSpPr>
+      <p:sp>
+        <p:nvSpPr>
+          <p:cNvPr id="2" name="Title 1">
+            <a:extLst>
+              <a:ext uri="{FF2B5EF4-FFF2-40B4-BE49-F238E27FC236}">
+                <a16:creationId xmlns:a16="http://schemas.microsoft.com/office/drawing/2014/main" id="{B340EC05-4BE2-0827-7AA6-45C23C981DF4}"/>
+              </a:ext>
+            </a:extLst>
+          </p:cNvPr>
+          <p:cNvSpPr>
+            <a:spLocks noGrp="1"/>
+          </p:cNvSpPr>
+          <p:nvPr>
+            <p:ph type="title"/>
+          </p:nvPr>
+        </p:nvSpPr>
+        <p:spPr>
+          <a:xfrm>
+            <a:off x="640080" y="329184"/>
+            <a:ext cx="6894576" cy="1783080"/>
+          </a:xfrm>
+        </p:spPr>
+        <p:txBody>
+          <a:bodyPr anchor="b">
+            <a:normAutofit/>
+          </a:bodyPr>
+          <a:lstStyle/>
+          <a:p>
+            <a:r>
+              <a:rPr lang="en-US" sz="6600" dirty="0"/>
+              <a:t>Intro</a:t>
+            </a:r>
+          </a:p>
+        </p:txBody>
+      </p:sp>
+      <p:sp>
+        <p:nvSpPr>
+          <p:cNvPr id="3" name="Content Placeholder 2">
+            <a:extLst>
+              <a:ext uri="{FF2B5EF4-FFF2-40B4-BE49-F238E27FC236}">
+                <a16:creationId xmlns:a16="http://schemas.microsoft.com/office/drawing/2014/main" id="{9482E84A-BDAD-C72C-F004-13D054A6BB29}"/>
+              </a:ext>
+            </a:extLst>
+          </p:cNvPr>
+          <p:cNvSpPr>
+            <a:spLocks noGrp="1"/>
+          </p:cNvSpPr>
+          <p:nvPr>
+            <p:ph idx="1"/>
+          </p:nvPr>
+        </p:nvSpPr>
+        <p:spPr>
+          <a:xfrm>
+            <a:off x="640080" y="2706624"/>
+            <a:ext cx="6894576" cy="3483864"/>
+          </a:xfrm>
+        </p:spPr>
+        <p:txBody>
+          <a:bodyPr>
+            <a:normAutofit/>
+          </a:bodyPr>
+          <a:lstStyle/>
+          <a:p>
+            <a:r>
+              <a:rPr lang="en-US" sz="2200" dirty="0"/>
+              <a:t>Juan Pablo Tarquino </a:t>
+            </a:r>
+          </a:p>
+          <a:p>
+            <a:r>
+              <a:rPr lang="en-US" sz="2200" dirty="0"/>
+              <a:t>Software Developer with about 20 years of experience</a:t>
+            </a:r>
+          </a:p>
+          <a:p>
+            <a:pPr lvl="1"/>
+            <a:r>
+              <a:rPr lang="en-US" sz="2200" dirty="0"/>
+              <a:t>LinkedIn</a:t>
+            </a:r>
+          </a:p>
+          <a:p>
+            <a:pPr lvl="2"/>
+            <a:r>
+              <a:rPr lang="en-US" sz="2200" dirty="0">
+                <a:hlinkClick r:id="rId3"/>
+              </a:rPr>
+              <a:t>https://www.linkedin.com/in/juantarquino</a:t>
+            </a:r>
+            <a:r>
+              <a:rPr lang="en-US" sz="2200" dirty="0"/>
+              <a:t> </a:t>
+            </a:r>
+          </a:p>
+          <a:p>
+            <a:pPr lvl="1"/>
+            <a:r>
+              <a:rPr lang="en-US" sz="2200" dirty="0"/>
+              <a:t>Blog (not updated often </a:t>
+            </a:r>
+            <a:r>
+              <a:rPr lang="en-US" sz="2200" dirty="0">
+                <a:sym typeface="Wingdings" panose="05000000000000000000" pitchFamily="2" charset="2"/>
+              </a:rPr>
+              <a:t> </a:t>
+            </a:r>
+            <a:r>
+              <a:rPr lang="en-US" sz="2200" dirty="0"/>
+              <a:t>)</a:t>
+            </a:r>
+          </a:p>
+          <a:p>
+            <a:pPr lvl="2"/>
+            <a:r>
+              <a:rPr lang="en-US" sz="2200" dirty="0">
+                <a:hlinkClick r:id="rId4"/>
+              </a:rPr>
+              <a:t>https://jptarqu.blogspot.com</a:t>
+            </a:r>
+            <a:r>
+              <a:rPr lang="en-US" sz="2200" dirty="0"/>
+              <a:t>  </a:t>
+            </a:r>
+          </a:p>
+          <a:p>
+            <a:r>
+              <a:rPr lang="en-US" sz="2200" dirty="0"/>
+              <a:t>Sample repo and slides for this session: </a:t>
+            </a:r>
+          </a:p>
+          <a:p>
+            <a:pPr lvl="1"/>
+            <a:r>
+              <a:rPr lang="en-US" sz="2200" dirty="0">
+                <a:hlinkClick r:id="rId5"/>
+              </a:rPr>
+              <a:t>https://tinyurl.com/PowerFX-NET</a:t>
+            </a:r>
+            <a:r>
+              <a:rPr lang="en-US" sz="2200" dirty="0"/>
+              <a:t> </a:t>
+            </a:r>
+          </a:p>
+        </p:txBody>
+      </p:sp>
+      <p:pic>
+        <p:nvPicPr>
+          <p:cNvPr id="7" name="Picture 6">
+            <a:extLst>
+              <a:ext uri="{FF2B5EF4-FFF2-40B4-BE49-F238E27FC236}">
+                <a16:creationId xmlns:a16="http://schemas.microsoft.com/office/drawing/2014/main" id="{685DA20C-00C6-81E7-993F-496E86E2B133}"/>
+              </a:ext>
+            </a:extLst>
+          </p:cNvPr>
+          <p:cNvPicPr>
+            <a:picLocks noChangeAspect="1"/>
+          </p:cNvPicPr>
+          <p:nvPr/>
+        </p:nvPicPr>
+        <p:blipFill>
+          <a:blip r:embed="rId6"/>
+          <a:srcRect t="24668" r="-4" b="15002"/>
+          <a:stretch/>
+        </p:blipFill>
+        <p:spPr>
+          <a:xfrm>
+            <a:off x="8144356" y="4267201"/>
+            <a:ext cx="4047645" cy="2590808"/>
+          </a:xfrm>
+          <a:custGeom>
+            <a:avLst/>
+            <a:gdLst/>
+            <a:ahLst/>
+            <a:cxnLst/>
+            <a:rect l="l" t="t" r="r" b="b"/>
+            <a:pathLst>
+              <a:path w="4047645" h="2495811">
+                <a:moveTo>
+                  <a:pt x="2441891" y="4"/>
+                </a:moveTo>
+                <a:cubicBezTo>
+                  <a:pt x="2489381" y="-78"/>
+                  <a:pt x="2536882" y="1163"/>
+                  <a:pt x="2584383" y="4428"/>
+                </a:cubicBezTo>
+                <a:cubicBezTo>
+                  <a:pt x="2744314" y="17813"/>
+                  <a:pt x="2904989" y="21079"/>
+                  <a:pt x="3065367" y="14222"/>
+                </a:cubicBezTo>
+                <a:cubicBezTo>
+                  <a:pt x="3194244" y="5694"/>
+                  <a:pt x="3323514" y="4206"/>
+                  <a:pt x="3452568" y="9782"/>
+                </a:cubicBezTo>
+                <a:cubicBezTo>
+                  <a:pt x="3572813" y="16442"/>
+                  <a:pt x="3693059" y="23233"/>
+                  <a:pt x="3813712" y="19315"/>
+                </a:cubicBezTo>
+                <a:cubicBezTo>
+                  <a:pt x="3861755" y="17748"/>
+                  <a:pt x="3909121" y="15789"/>
+                  <a:pt x="3956758" y="13177"/>
+                </a:cubicBezTo>
+                <a:lnTo>
+                  <a:pt x="4047645" y="9696"/>
+                </a:lnTo>
+                <a:lnTo>
+                  <a:pt x="4047645" y="2495811"/>
+                </a:lnTo>
+                <a:lnTo>
+                  <a:pt x="28177" y="2495811"/>
+                </a:lnTo>
+                <a:lnTo>
+                  <a:pt x="28782" y="2485852"/>
+                </a:lnTo>
+                <a:cubicBezTo>
+                  <a:pt x="31911" y="2365446"/>
+                  <a:pt x="35027" y="2245002"/>
+                  <a:pt x="38157" y="2124521"/>
+                </a:cubicBezTo>
+                <a:cubicBezTo>
+                  <a:pt x="38284" y="2119444"/>
+                  <a:pt x="39171" y="2114494"/>
+                  <a:pt x="39171" y="2109417"/>
+                </a:cubicBezTo>
+                <a:cubicBezTo>
+                  <a:pt x="48166" y="1995573"/>
+                  <a:pt x="53107" y="1881729"/>
+                  <a:pt x="18899" y="1770550"/>
+                </a:cubicBezTo>
+                <a:cubicBezTo>
+                  <a:pt x="15871" y="1760104"/>
+                  <a:pt x="14262" y="1749304"/>
+                  <a:pt x="14084" y="1738440"/>
+                </a:cubicBezTo>
+                <a:cubicBezTo>
+                  <a:pt x="12413" y="1641514"/>
+                  <a:pt x="16644" y="1544587"/>
+                  <a:pt x="26754" y="1448181"/>
+                </a:cubicBezTo>
+                <a:cubicBezTo>
+                  <a:pt x="31949" y="1389038"/>
+                  <a:pt x="26754" y="1329006"/>
+                  <a:pt x="43478" y="1270498"/>
+                </a:cubicBezTo>
+                <a:cubicBezTo>
+                  <a:pt x="50864" y="1241421"/>
+                  <a:pt x="55109" y="1211634"/>
+                  <a:pt x="56147" y="1181656"/>
+                </a:cubicBezTo>
+                <a:cubicBezTo>
+                  <a:pt x="59948" y="1109060"/>
+                  <a:pt x="38537" y="1040779"/>
+                  <a:pt x="18139" y="972244"/>
+                </a:cubicBezTo>
+                <a:cubicBezTo>
+                  <a:pt x="7370" y="935945"/>
+                  <a:pt x="-5426" y="898886"/>
+                  <a:pt x="2429" y="860811"/>
+                </a:cubicBezTo>
+                <a:cubicBezTo>
+                  <a:pt x="16707" y="802251"/>
+                  <a:pt x="24854" y="742359"/>
+                  <a:pt x="26754" y="682112"/>
+                </a:cubicBezTo>
+                <a:cubicBezTo>
+                  <a:pt x="26754" y="639468"/>
+                  <a:pt x="16365" y="597712"/>
+                  <a:pt x="20039" y="555195"/>
+                </a:cubicBezTo>
+                <a:cubicBezTo>
+                  <a:pt x="28211" y="472712"/>
+                  <a:pt x="30238" y="389734"/>
+                  <a:pt x="26121" y="306946"/>
+                </a:cubicBezTo>
+                <a:cubicBezTo>
+                  <a:pt x="26095" y="273846"/>
+                  <a:pt x="29846" y="240848"/>
+                  <a:pt x="37270" y="208585"/>
+                </a:cubicBezTo>
+                <a:cubicBezTo>
+                  <a:pt x="46506" y="151651"/>
+                  <a:pt x="48419" y="93777"/>
+                  <a:pt x="42971" y="36360"/>
+                </a:cubicBezTo>
+                <a:lnTo>
+                  <a:pt x="38853" y="8429"/>
+                </a:lnTo>
+                <a:lnTo>
+                  <a:pt x="56649" y="7824"/>
+                </a:lnTo>
+                <a:cubicBezTo>
+                  <a:pt x="210497" y="-156"/>
+                  <a:pt x="364754" y="3162"/>
+                  <a:pt x="518087" y="17748"/>
+                </a:cubicBezTo>
+                <a:cubicBezTo>
+                  <a:pt x="626567" y="25440"/>
+                  <a:pt x="735534" y="24213"/>
+                  <a:pt x="843809" y="14092"/>
+                </a:cubicBezTo>
+                <a:cubicBezTo>
+                  <a:pt x="1042499" y="-1711"/>
+                  <a:pt x="1240782" y="10958"/>
+                  <a:pt x="1439065" y="21666"/>
+                </a:cubicBezTo>
+                <a:cubicBezTo>
+                  <a:pt x="1631105" y="32113"/>
+                  <a:pt x="1823010" y="24408"/>
+                  <a:pt x="2015050" y="17487"/>
+                </a:cubicBezTo>
+                <a:cubicBezTo>
+                  <a:pt x="2157045" y="12394"/>
+                  <a:pt x="2299420" y="249"/>
+                  <a:pt x="2441891" y="4"/>
+                </a:cubicBezTo>
+                <a:close/>
+              </a:path>
+            </a:pathLst>
+          </a:custGeom>
+        </p:spPr>
+      </p:pic>
+      <p:pic>
+        <p:nvPicPr>
+          <p:cNvPr id="5" name="Picture 4">
+            <a:extLst>
+              <a:ext uri="{FF2B5EF4-FFF2-40B4-BE49-F238E27FC236}">
+                <a16:creationId xmlns:a16="http://schemas.microsoft.com/office/drawing/2014/main" id="{14FE3455-90A4-7EA8-C301-229D17616FE0}"/>
+              </a:ext>
+            </a:extLst>
+          </p:cNvPr>
+          <p:cNvPicPr>
+            <a:picLocks noChangeAspect="1"/>
+          </p:cNvPicPr>
+          <p:nvPr/>
+        </p:nvPicPr>
+        <p:blipFill>
+          <a:blip r:embed="rId7"/>
+          <a:stretch>
+            <a:fillRect/>
+          </a:stretch>
+        </p:blipFill>
+        <p:spPr>
+          <a:xfrm>
+            <a:off x="8332950" y="502779"/>
+            <a:ext cx="3218970" cy="3218970"/>
+          </a:xfrm>
+          <a:prstGeom prst="rect">
+            <a:avLst/>
+          </a:prstGeom>
+        </p:spPr>
+      </p:pic>
+    </p:spTree>
+    <p:extLst>
+      <p:ext uri="{BB962C8B-B14F-4D97-AF65-F5344CB8AC3E}">
+        <p14:creationId xmlns:p14="http://schemas.microsoft.com/office/powerpoint/2010/main" val="1528468167"/>
+      </p:ext>
+    </p:extLst>
+  </p:cSld>
+  <p:clrMapOvr>
+    <a:masterClrMapping/>
+  </p:clrMapOvr>
+</p:sld>
+</file>
+
+<file path=ppt/slides/slide20.xml><?xml version="1.0" encoding="utf-8"?>
 <p:sld xmlns:a="http://schemas.openxmlformats.org/drawingml/2006/main" xmlns:r="http://schemas.openxmlformats.org/officeDocument/2006/relationships" xmlns:p="http://schemas.openxmlformats.org/presentationml/2006/main">
   <p:cSld>
     <p:spTree>
